--- a/ppt/Nithin_X25125338_data-center-environmental-monitoring.pptx
+++ b/ppt/Nithin_X25125338_data-center-environmental-monitoring.pptx
@@ -1144,14 +1144,34 @@
       </p:grpSpPr>
       <p:sp>
         <p:nvSpPr>
-          <p:cNvPr id="2" name="Text 0"/>
-          <p:cNvSpPr/>
-          <p:nvPr/>
-        </p:nvSpPr>
-        <p:spPr>
-          <a:xfrm>
-            <a:off x="640080" y="914400"/>
-            <a:ext cx="10972800" cy="1280160"/>
+          <p:cNvPr id="2" name="Shape 0"/>
+          <p:cNvSpPr/>
+          <p:nvPr/>
+        </p:nvSpPr>
+        <p:spPr>
+          <a:xfrm>
+            <a:off x="0" y="0"/>
+            <a:ext cx="4663440" cy="6858000"/>
+          </a:xfrm>
+          <a:prstGeom prst="rect">
+            <a:avLst/>
+          </a:prstGeom>
+          <a:solidFill>
+            <a:srgbClr val="2C3E55"/>
+          </a:solidFill>
+          <a:ln/>
+        </p:spPr>
+      </p:sp>
+      <p:sp>
+        <p:nvSpPr>
+          <p:cNvPr id="3" name="Text 1"/>
+          <p:cNvSpPr/>
+          <p:nvPr/>
+        </p:nvSpPr>
+        <p:spPr>
+          <a:xfrm>
+            <a:off x="502920" y="1280160"/>
+            <a:ext cx="3749040" cy="2377440"/>
           </a:xfrm>
           <a:prstGeom prst="rect">
             <a:avLst/>
@@ -1163,11 +1183,11 @@
           <a:bodyPr wrap="square" rtlCol="0" anchor="t"/>
           <a:lstStyle/>
           <a:p>
-            <a:pPr algn="l" indent="0" marL="0">
-              <a:buNone/>
-            </a:pPr>
-            <a:r>
-              <a:rPr lang="en-US" sz="3600" b="1" dirty="0">
+            <a:pPr indent="0" marL="0">
+              <a:buNone/>
+            </a:pPr>
+            <a:r>
+              <a:rPr lang="en-US" sz="3400" b="1" dirty="0">
                 <a:solidFill>
                   <a:srgbClr val="FFFFFF"/>
                 </a:solidFill>
@@ -1177,20 +1197,20 @@
               </a:rPr>
               <a:t>Data Center Environmental Monitoring</a:t>
             </a:r>
-            <a:endParaRPr lang="en-US" sz="3600" dirty="0"/>
-          </a:p>
-        </p:txBody>
-      </p:sp>
-      <p:sp>
-        <p:nvSpPr>
-          <p:cNvPr id="3" name="Text 1"/>
-          <p:cNvSpPr/>
-          <p:nvPr/>
-        </p:nvSpPr>
-        <p:spPr>
-          <a:xfrm>
-            <a:off x="658368" y="2148840"/>
-            <a:ext cx="10972800" cy="365760"/>
+            <a:endParaRPr lang="en-US" sz="3400" dirty="0"/>
+          </a:p>
+        </p:txBody>
+      </p:sp>
+      <p:sp>
+        <p:nvSpPr>
+          <p:cNvPr id="4" name="Text 2"/>
+          <p:cNvSpPr/>
+          <p:nvPr/>
+        </p:nvSpPr>
+        <p:spPr>
+          <a:xfrm>
+            <a:off x="521208" y="5394960"/>
+            <a:ext cx="3840480" cy="731520"/>
           </a:xfrm>
           <a:prstGeom prst="rect">
             <a:avLst/>
@@ -1206,9 +1226,9 @@
               <a:buNone/>
             </a:pPr>
             <a:r>
-              <a:rPr lang="en-US" sz="1600" dirty="0">
-                <a:solidFill>
-                  <a:srgbClr val="6A839C"/>
+              <a:rPr lang="en-US" sz="1500" dirty="0">
+                <a:solidFill>
+                  <a:srgbClr val="D2DCE6"/>
                 </a:solidFill>
                 <a:latin typeface="Calibri" pitchFamily="34" charset="0"/>
                 <a:ea typeface="Calibri" pitchFamily="34" charset="-122"/>
@@ -1216,20 +1236,20 @@
               </a:rPr>
               <a:t>Nithin   ·   X25125338</a:t>
             </a:r>
-            <a:endParaRPr lang="en-US" sz="1600" dirty="0"/>
-          </a:p>
-        </p:txBody>
-      </p:sp>
-      <p:sp>
-        <p:nvSpPr>
-          <p:cNvPr id="4" name="Text 2"/>
-          <p:cNvSpPr/>
-          <p:nvPr/>
-        </p:nvSpPr>
-        <p:spPr>
-          <a:xfrm>
-            <a:off x="658368" y="2697480"/>
-            <a:ext cx="10424160" cy="1371600"/>
+            <a:endParaRPr lang="en-US" sz="1500" dirty="0"/>
+          </a:p>
+        </p:txBody>
+      </p:sp>
+      <p:sp>
+        <p:nvSpPr>
+          <p:cNvPr id="5" name="Text 3"/>
+          <p:cNvSpPr/>
+          <p:nvPr/>
+        </p:nvSpPr>
+        <p:spPr>
+          <a:xfrm>
+            <a:off x="5120640" y="1371600"/>
+            <a:ext cx="6492240" cy="2011680"/>
           </a:xfrm>
           <a:prstGeom prst="rect">
             <a:avLst/>
@@ -1243,7 +1263,7 @@
           <a:p>
             <a:pPr indent="0" marL="0">
               <a:lnSpc>
-                <a:spcPct val="110000"/>
+                <a:spcPct val="112000"/>
               </a:lnSpc>
               <a:buNone/>
             </a:pPr>
@@ -1264,14 +1284,14 @@
       </p:sp>
       <p:sp>
         <p:nvSpPr>
-          <p:cNvPr id="5" name="Shape 3"/>
-          <p:cNvSpPr/>
-          <p:nvPr/>
-        </p:nvSpPr>
-        <p:spPr>
-          <a:xfrm>
-            <a:off x="658368" y="4206240"/>
-            <a:ext cx="2651760" cy="566928"/>
+          <p:cNvPr id="6" name="Shape 4"/>
+          <p:cNvSpPr/>
+          <p:nvPr/>
+        </p:nvSpPr>
+        <p:spPr>
+          <a:xfrm>
+            <a:off x="5120640" y="4023360"/>
+            <a:ext cx="2926080" cy="566928"/>
           </a:xfrm>
           <a:prstGeom prst="roundRect">
             <a:avLst>
@@ -1291,14 +1311,14 @@
       </p:sp>
       <p:sp>
         <p:nvSpPr>
-          <p:cNvPr id="6" name="Text 4"/>
-          <p:cNvSpPr/>
-          <p:nvPr/>
-        </p:nvSpPr>
-        <p:spPr>
-          <a:xfrm>
-            <a:off x="658368" y="4206240"/>
-            <a:ext cx="2651760" cy="566928"/>
+          <p:cNvPr id="7" name="Text 5"/>
+          <p:cNvSpPr/>
+          <p:nvPr/>
+        </p:nvSpPr>
+        <p:spPr>
+          <a:xfrm>
+            <a:off x="5120640" y="4023360"/>
+            <a:ext cx="2926080" cy="566928"/>
           </a:xfrm>
           <a:prstGeom prst="rect">
             <a:avLst/>
@@ -1314,7 +1334,7 @@
               <a:buNone/>
             </a:pPr>
             <a:r>
-              <a:rPr lang="en-US" sz="1400" b="1" dirty="0">
+              <a:rPr lang="en-US" sz="1350" b="1" dirty="0">
                 <a:solidFill>
                   <a:srgbClr val="E0A63C"/>
                 </a:solidFill>
@@ -1324,20 +1344,20 @@
               </a:rPr>
               <a:t>Hall temp &gt; 27 °C</a:t>
             </a:r>
-            <a:endParaRPr lang="en-US" sz="1400" dirty="0"/>
-          </a:p>
-        </p:txBody>
-      </p:sp>
-      <p:sp>
-        <p:nvSpPr>
-          <p:cNvPr id="7" name="Shape 5"/>
-          <p:cNvSpPr/>
-          <p:nvPr/>
-        </p:nvSpPr>
-        <p:spPr>
-          <a:xfrm>
-            <a:off x="3538728" y="4206240"/>
-            <a:ext cx="2651760" cy="566928"/>
+            <a:endParaRPr lang="en-US" sz="1350" dirty="0"/>
+          </a:p>
+        </p:txBody>
+      </p:sp>
+      <p:sp>
+        <p:nvSpPr>
+          <p:cNvPr id="8" name="Shape 6"/>
+          <p:cNvSpPr/>
+          <p:nvPr/>
+        </p:nvSpPr>
+        <p:spPr>
+          <a:xfrm>
+            <a:off x="5120640" y="4709160"/>
+            <a:ext cx="2926080" cy="566928"/>
           </a:xfrm>
           <a:prstGeom prst="roundRect">
             <a:avLst>
@@ -1357,14 +1377,14 @@
       </p:sp>
       <p:sp>
         <p:nvSpPr>
-          <p:cNvPr id="8" name="Text 6"/>
-          <p:cNvSpPr/>
-          <p:nvPr/>
-        </p:nvSpPr>
-        <p:spPr>
-          <a:xfrm>
-            <a:off x="3538728" y="4206240"/>
-            <a:ext cx="2651760" cy="566928"/>
+          <p:cNvPr id="9" name="Text 7"/>
+          <p:cNvSpPr/>
+          <p:nvPr/>
+        </p:nvSpPr>
+        <p:spPr>
+          <a:xfrm>
+            <a:off x="5120640" y="4709160"/>
+            <a:ext cx="2926080" cy="566928"/>
           </a:xfrm>
           <a:prstGeom prst="rect">
             <a:avLst/>
@@ -1380,7 +1400,7 @@
               <a:buNone/>
             </a:pPr>
             <a:r>
-              <a:rPr lang="en-US" sz="1400" b="1" dirty="0">
+              <a:rPr lang="en-US" sz="1350" b="1" dirty="0">
                 <a:solidFill>
                   <a:srgbClr val="E0A63C"/>
                 </a:solidFill>
@@ -1390,20 +1410,20 @@
               </a:rPr>
               <a:t>Humidity &gt; 60%</a:t>
             </a:r>
-            <a:endParaRPr lang="en-US" sz="1400" dirty="0"/>
-          </a:p>
-        </p:txBody>
-      </p:sp>
-      <p:sp>
-        <p:nvSpPr>
-          <p:cNvPr id="9" name="Shape 7"/>
-          <p:cNvSpPr/>
-          <p:nvPr/>
-        </p:nvSpPr>
-        <p:spPr>
-          <a:xfrm>
-            <a:off x="6419088" y="4206240"/>
-            <a:ext cx="2651760" cy="566928"/>
+            <a:endParaRPr lang="en-US" sz="1350" dirty="0"/>
+          </a:p>
+        </p:txBody>
+      </p:sp>
+      <p:sp>
+        <p:nvSpPr>
+          <p:cNvPr id="10" name="Shape 8"/>
+          <p:cNvSpPr/>
+          <p:nvPr/>
+        </p:nvSpPr>
+        <p:spPr>
+          <a:xfrm>
+            <a:off x="5120640" y="5394960"/>
+            <a:ext cx="2926080" cy="566928"/>
           </a:xfrm>
           <a:prstGeom prst="roundRect">
             <a:avLst>
@@ -1423,14 +1443,14 @@
       </p:sp>
       <p:sp>
         <p:nvSpPr>
-          <p:cNvPr id="10" name="Text 8"/>
-          <p:cNvSpPr/>
-          <p:nvPr/>
-        </p:nvSpPr>
-        <p:spPr>
-          <a:xfrm>
-            <a:off x="6419088" y="4206240"/>
-            <a:ext cx="2651760" cy="566928"/>
+          <p:cNvPr id="11" name="Text 9"/>
+          <p:cNvSpPr/>
+          <p:nvPr/>
+        </p:nvSpPr>
+        <p:spPr>
+          <a:xfrm>
+            <a:off x="5120640" y="5394960"/>
+            <a:ext cx="2926080" cy="566928"/>
           </a:xfrm>
           <a:prstGeom prst="rect">
             <a:avLst/>
@@ -1446,7 +1466,7 @@
               <a:buNone/>
             </a:pPr>
             <a:r>
-              <a:rPr lang="en-US" sz="1400" b="1" dirty="0">
+              <a:rPr lang="en-US" sz="1350" b="1" dirty="0">
                 <a:solidFill>
                   <a:srgbClr val="E0A63C"/>
                 </a:solidFill>
@@ -1456,20 +1476,20 @@
               </a:rPr>
               <a:t>Airflow &lt; 400 CFM</a:t>
             </a:r>
-            <a:endParaRPr lang="en-US" sz="1400" dirty="0"/>
-          </a:p>
-        </p:txBody>
-      </p:sp>
-      <p:sp>
-        <p:nvSpPr>
-          <p:cNvPr id="11" name="Text 9"/>
-          <p:cNvSpPr/>
-          <p:nvPr/>
-        </p:nvSpPr>
-        <p:spPr>
-          <a:xfrm>
-            <a:off x="658368" y="6126480"/>
-            <a:ext cx="10972800" cy="365760"/>
+            <a:endParaRPr lang="en-US" sz="1350" dirty="0"/>
+          </a:p>
+        </p:txBody>
+      </p:sp>
+      <p:sp>
+        <p:nvSpPr>
+          <p:cNvPr id="12" name="Text 10"/>
+          <p:cNvSpPr/>
+          <p:nvPr/>
+        </p:nvSpPr>
+        <p:spPr>
+          <a:xfrm>
+            <a:off x="5120640" y="6172200"/>
+            <a:ext cx="6400800" cy="365760"/>
           </a:xfrm>
           <a:prstGeom prst="rect">
             <a:avLst/>
@@ -1485,7 +1505,7 @@
               <a:buNone/>
             </a:pPr>
             <a:r>
-              <a:rPr lang="en-US" sz="1300" dirty="0">
+              <a:rPr lang="en-US" sz="1250" dirty="0">
                 <a:solidFill>
                   <a:srgbClr val="5F6B78"/>
                 </a:solidFill>
@@ -1495,7 +1515,7 @@
               </a:rPr>
               <a:t>Fog &amp; Edge Computing (H9FECC)   ·   deployed live on AWS</a:t>
             </a:r>
-            <a:endParaRPr lang="en-US" sz="1300" dirty="0"/>
+            <a:endParaRPr lang="en-US" sz="1250" dirty="0"/>
           </a:p>
         </p:txBody>
       </p:sp>
@@ -1578,12 +1598,12 @@
         </p:nvSpPr>
         <p:spPr>
           <a:xfrm>
-            <a:off x="640080" y="2468880"/>
-            <a:ext cx="1572768" cy="1371600"/>
+            <a:off x="640080" y="1554480"/>
+            <a:ext cx="3200400" cy="3383280"/>
           </a:xfrm>
           <a:prstGeom prst="roundRect">
             <a:avLst>
-              <a:gd name="adj" fmla="val 6667"/>
+              <a:gd name="adj" fmla="val 2857"/>
             </a:avLst>
           </a:prstGeom>
           <a:solidFill>
@@ -1599,146 +1619,63 @@
       </p:sp>
       <p:sp>
         <p:nvSpPr>
-          <p:cNvPr id="4" name="Shape 2"/>
-          <p:cNvSpPr/>
-          <p:nvPr/>
-        </p:nvSpPr>
-        <p:spPr>
-          <a:xfrm>
-            <a:off x="1325880" y="2670048"/>
-            <a:ext cx="201168" cy="201168"/>
-          </a:xfrm>
-          <a:prstGeom prst="ellipse">
-            <a:avLst/>
-          </a:prstGeom>
-          <a:solidFill>
-            <a:srgbClr val="6A839C"/>
-          </a:solidFill>
-          <a:ln/>
-        </p:spPr>
-      </p:sp>
-      <p:sp>
-        <p:nvSpPr>
-          <p:cNvPr id="5" name="Text 3"/>
-          <p:cNvSpPr/>
-          <p:nvPr/>
-        </p:nvSpPr>
-        <p:spPr>
-          <a:xfrm>
-            <a:off x="594360" y="2926080"/>
-            <a:ext cx="1664208" cy="411480"/>
-          </a:xfrm>
-          <a:prstGeom prst="rect">
-            <a:avLst/>
-          </a:prstGeom>
-          <a:noFill/>
-          <a:ln/>
-        </p:spPr>
-        <p:txBody>
-          <a:bodyPr wrap="square" lIns="0" tIns="0" rIns="0" bIns="0" rtlCol="0" anchor="ctr"/>
+          <p:cNvPr id="4" name="Text 2"/>
+          <p:cNvSpPr/>
+          <p:nvPr/>
+        </p:nvSpPr>
+        <p:spPr>
+          <a:xfrm>
+            <a:off x="640080" y="1691640"/>
+            <a:ext cx="3200400" cy="365760"/>
+          </a:xfrm>
+          <a:prstGeom prst="rect">
+            <a:avLst/>
+          </a:prstGeom>
+          <a:noFill/>
+          <a:ln/>
+        </p:spPr>
+        <p:txBody>
+          <a:bodyPr wrap="square" rtlCol="0" anchor="ctr"/>
           <a:lstStyle/>
           <a:p>
             <a:pPr algn="ctr" indent="0" marL="0">
               <a:buNone/>
             </a:pPr>
             <a:r>
-              <a:rPr lang="en-US" sz="1450" b="1" dirty="0">
-                <a:solidFill>
-                  <a:srgbClr val="19212C"/>
+              <a:rPr lang="en-US" sz="1200" b="1" spc="300" kern="0" dirty="0">
+                <a:solidFill>
+                  <a:srgbClr val="6A839C"/>
                 </a:solidFill>
                 <a:latin typeface="Calibri" pitchFamily="34" charset="0"/>
                 <a:ea typeface="Calibri" pitchFamily="34" charset="-122"/>
                 <a:cs typeface="Calibri" pitchFamily="34" charset="-120"/>
               </a:rPr>
-              <a:t>Hall sensors</a:t>
-            </a:r>
-            <a:endParaRPr lang="en-US" sz="1450" dirty="0"/>
-          </a:p>
-        </p:txBody>
-      </p:sp>
-      <p:sp>
-        <p:nvSpPr>
-          <p:cNvPr id="6" name="Text 4"/>
-          <p:cNvSpPr/>
-          <p:nvPr/>
-        </p:nvSpPr>
-        <p:spPr>
-          <a:xfrm>
-            <a:off x="621792" y="3310128"/>
-            <a:ext cx="1609344" cy="457200"/>
-          </a:xfrm>
-          <a:prstGeom prst="rect">
-            <a:avLst/>
-          </a:prstGeom>
-          <a:noFill/>
-          <a:ln/>
-        </p:spPr>
-        <p:txBody>
-          <a:bodyPr wrap="square" lIns="0" tIns="0" rIns="0" bIns="0" rtlCol="0" anchor="t"/>
-          <a:lstStyle/>
-          <a:p>
-            <a:pPr algn="ctr" indent="0" marL="0">
-              <a:buNone/>
-            </a:pPr>
-            <a:r>
-              <a:rPr lang="en-US" sz="1050" dirty="0">
-                <a:solidFill>
-                  <a:srgbClr val="5F6B78"/>
-                </a:solidFill>
-                <a:latin typeface="Calibri" pitchFamily="34" charset="0"/>
-                <a:ea typeface="Calibri" pitchFamily="34" charset="-122"/>
-                <a:cs typeface="Calibri" pitchFamily="34" charset="-120"/>
-              </a:rPr>
-              <a:t>10 · 2 halls · 5 metrics</a:t>
-            </a:r>
-            <a:endParaRPr lang="en-US" sz="1050" dirty="0"/>
-          </a:p>
-        </p:txBody>
-      </p:sp>
-      <p:sp>
-        <p:nvSpPr>
-          <p:cNvPr id="7" name="Shape 5"/>
-          <p:cNvSpPr/>
-          <p:nvPr/>
-        </p:nvSpPr>
-        <p:spPr>
-          <a:xfrm>
-            <a:off x="2231136" y="3154680"/>
-            <a:ext cx="258409" cy="0"/>
-          </a:xfrm>
-          <a:prstGeom prst="line">
-            <a:avLst/>
-          </a:prstGeom>
-          <a:noFill/>
-          <a:ln w="25400">
-            <a:solidFill>
-              <a:srgbClr val="6A839C"/>
-            </a:solidFill>
-            <a:prstDash val="solid"/>
-            <a:tailEnd type="triangle"/>
-          </a:ln>
-        </p:spPr>
-      </p:sp>
-      <p:sp>
-        <p:nvSpPr>
-          <p:cNvPr id="8" name="Shape 6"/>
-          <p:cNvSpPr/>
-          <p:nvPr/>
-        </p:nvSpPr>
-        <p:spPr>
-          <a:xfrm>
-            <a:off x="2507833" y="2468880"/>
-            <a:ext cx="1572768" cy="1371600"/>
+              <a:t>EDGE</a:t>
+            </a:r>
+            <a:endParaRPr lang="en-US" sz="1200" dirty="0"/>
+          </a:p>
+        </p:txBody>
+      </p:sp>
+      <p:sp>
+        <p:nvSpPr>
+          <p:cNvPr id="5" name="Shape 3"/>
+          <p:cNvSpPr/>
+          <p:nvPr/>
+        </p:nvSpPr>
+        <p:spPr>
+          <a:xfrm>
+            <a:off x="914400" y="2286000"/>
+            <a:ext cx="2651760" cy="1005840"/>
           </a:xfrm>
           <a:prstGeom prst="roundRect">
             <a:avLst>
-              <a:gd name="adj" fmla="val 6667"/>
+              <a:gd name="adj" fmla="val 7273"/>
             </a:avLst>
           </a:prstGeom>
           <a:solidFill>
-            <a:srgbClr val="EEF2F6"/>
+            <a:srgbClr val="FFFFFF"/>
           </a:solidFill>
-          <a:ln w="19050">
+          <a:ln w="15240">
             <a:solidFill>
               <a:srgbClr val="6A839C"/>
             </a:solidFill>
@@ -1748,34 +1685,14 @@
       </p:sp>
       <p:sp>
         <p:nvSpPr>
-          <p:cNvPr id="9" name="Shape 7"/>
-          <p:cNvSpPr/>
-          <p:nvPr/>
-        </p:nvSpPr>
-        <p:spPr>
-          <a:xfrm>
-            <a:off x="3193633" y="2670048"/>
-            <a:ext cx="201168" cy="201168"/>
-          </a:xfrm>
-          <a:prstGeom prst="ellipse">
-            <a:avLst/>
-          </a:prstGeom>
-          <a:solidFill>
-            <a:srgbClr val="6A839C"/>
-          </a:solidFill>
-          <a:ln/>
-        </p:spPr>
-      </p:sp>
-      <p:sp>
-        <p:nvSpPr>
-          <p:cNvPr id="10" name="Text 8"/>
-          <p:cNvSpPr/>
-          <p:nvPr/>
-        </p:nvSpPr>
-        <p:spPr>
-          <a:xfrm>
-            <a:off x="2462113" y="2926080"/>
-            <a:ext cx="1664208" cy="411480"/>
+          <p:cNvPr id="6" name="Text 4"/>
+          <p:cNvSpPr/>
+          <p:nvPr/>
+        </p:nvSpPr>
+        <p:spPr>
+          <a:xfrm>
+            <a:off x="914400" y="2432304"/>
+            <a:ext cx="2651760" cy="365760"/>
           </a:xfrm>
           <a:prstGeom prst="rect">
             <a:avLst/>
@@ -1791,7 +1708,7 @@
               <a:buNone/>
             </a:pPr>
             <a:r>
-              <a:rPr lang="en-US" sz="1450" b="1" dirty="0">
+              <a:rPr lang="en-US" sz="1400" b="1" dirty="0">
                 <a:solidFill>
                   <a:srgbClr val="19212C"/>
                 </a:solidFill>
@@ -1799,38 +1716,38 @@
                 <a:ea typeface="Calibri" pitchFamily="34" charset="-122"/>
                 <a:cs typeface="Calibri" pitchFamily="34" charset="-120"/>
               </a:rPr>
-              <a:t>Fog node</a:t>
-            </a:r>
-            <a:endParaRPr lang="en-US" sz="1450" dirty="0"/>
-          </a:p>
-        </p:txBody>
-      </p:sp>
-      <p:sp>
-        <p:nvSpPr>
-          <p:cNvPr id="11" name="Text 9"/>
-          <p:cNvSpPr/>
-          <p:nvPr/>
-        </p:nvSpPr>
-        <p:spPr>
-          <a:xfrm>
-            <a:off x="2489545" y="3310128"/>
-            <a:ext cx="1609344" cy="457200"/>
-          </a:xfrm>
-          <a:prstGeom prst="rect">
-            <a:avLst/>
-          </a:prstGeom>
-          <a:noFill/>
-          <a:ln/>
-        </p:spPr>
-        <p:txBody>
-          <a:bodyPr wrap="square" lIns="0" tIns="0" rIns="0" bIns="0" rtlCol="0" anchor="t"/>
+              <a:t>Hall sensors</a:t>
+            </a:r>
+            <a:endParaRPr lang="en-US" sz="1400" dirty="0"/>
+          </a:p>
+        </p:txBody>
+      </p:sp>
+      <p:sp>
+        <p:nvSpPr>
+          <p:cNvPr id="7" name="Text 5"/>
+          <p:cNvSpPr/>
+          <p:nvPr/>
+        </p:nvSpPr>
+        <p:spPr>
+          <a:xfrm>
+            <a:off x="914400" y="2816352"/>
+            <a:ext cx="2651760" cy="365760"/>
+          </a:xfrm>
+          <a:prstGeom prst="rect">
+            <a:avLst/>
+          </a:prstGeom>
+          <a:noFill/>
+          <a:ln/>
+        </p:spPr>
+        <p:txBody>
+          <a:bodyPr wrap="square" lIns="0" tIns="0" rIns="0" bIns="0" rtlCol="0" anchor="ctr"/>
           <a:lstStyle/>
           <a:p>
             <a:pPr algn="ctr" indent="0" marL="0">
               <a:buNone/>
             </a:pPr>
             <a:r>
-              <a:rPr lang="en-US" sz="1050" dirty="0">
+              <a:rPr lang="en-US" sz="1000" dirty="0">
                 <a:solidFill>
                   <a:srgbClr val="5F6B78"/>
                 </a:solidFill>
@@ -1838,50 +1755,155 @@
                 <a:ea typeface="Calibri" pitchFamily="34" charset="-122"/>
                 <a:cs typeface="Calibri" pitchFamily="34" charset="-120"/>
               </a:rPr>
-              <a:t>windows · edge alerts</a:t>
-            </a:r>
-            <a:endParaRPr lang="en-US" sz="1050" dirty="0"/>
-          </a:p>
-        </p:txBody>
-      </p:sp>
-      <p:sp>
-        <p:nvSpPr>
-          <p:cNvPr id="12" name="Shape 10"/>
-          <p:cNvSpPr/>
-          <p:nvPr/>
-        </p:nvSpPr>
-        <p:spPr>
-          <a:xfrm>
-            <a:off x="4098889" y="3154680"/>
-            <a:ext cx="258409" cy="0"/>
-          </a:xfrm>
-          <a:prstGeom prst="line">
-            <a:avLst/>
-          </a:prstGeom>
-          <a:noFill/>
-          <a:ln w="25400">
+              <a:t>10 · 2 halls · 5 metrics</a:t>
+            </a:r>
+            <a:endParaRPr lang="en-US" sz="1000" dirty="0"/>
+          </a:p>
+        </p:txBody>
+      </p:sp>
+      <p:sp>
+        <p:nvSpPr>
+          <p:cNvPr id="8" name="Shape 6"/>
+          <p:cNvSpPr/>
+          <p:nvPr/>
+        </p:nvSpPr>
+        <p:spPr>
+          <a:xfrm>
+            <a:off x="914400" y="3520440"/>
+            <a:ext cx="2651760" cy="1005840"/>
+          </a:xfrm>
+          <a:prstGeom prst="roundRect">
+            <a:avLst>
+              <a:gd name="adj" fmla="val 7273"/>
+            </a:avLst>
+          </a:prstGeom>
+          <a:solidFill>
+            <a:srgbClr val="FFFFFF"/>
+          </a:solidFill>
+          <a:ln w="15240">
             <a:solidFill>
               <a:srgbClr val="6A839C"/>
             </a:solidFill>
             <a:prstDash val="solid"/>
+          </a:ln>
+        </p:spPr>
+      </p:sp>
+      <p:sp>
+        <p:nvSpPr>
+          <p:cNvPr id="9" name="Text 7"/>
+          <p:cNvSpPr/>
+          <p:nvPr/>
+        </p:nvSpPr>
+        <p:spPr>
+          <a:xfrm>
+            <a:off x="914400" y="3666744"/>
+            <a:ext cx="2651760" cy="365760"/>
+          </a:xfrm>
+          <a:prstGeom prst="rect">
+            <a:avLst/>
+          </a:prstGeom>
+          <a:noFill/>
+          <a:ln/>
+        </p:spPr>
+        <p:txBody>
+          <a:bodyPr wrap="square" lIns="0" tIns="0" rIns="0" bIns="0" rtlCol="0" anchor="ctr"/>
+          <a:lstStyle/>
+          <a:p>
+            <a:pPr algn="ctr" indent="0" marL="0">
+              <a:buNone/>
+            </a:pPr>
+            <a:r>
+              <a:rPr lang="en-US" sz="1400" b="1" dirty="0">
+                <a:solidFill>
+                  <a:srgbClr val="19212C"/>
+                </a:solidFill>
+                <a:latin typeface="Calibri" pitchFamily="34" charset="0"/>
+                <a:ea typeface="Calibri" pitchFamily="34" charset="-122"/>
+                <a:cs typeface="Calibri" pitchFamily="34" charset="-120"/>
+              </a:rPr>
+              <a:t>Fog node</a:t>
+            </a:r>
+            <a:endParaRPr lang="en-US" sz="1400" dirty="0"/>
+          </a:p>
+        </p:txBody>
+      </p:sp>
+      <p:sp>
+        <p:nvSpPr>
+          <p:cNvPr id="10" name="Text 8"/>
+          <p:cNvSpPr/>
+          <p:nvPr/>
+        </p:nvSpPr>
+        <p:spPr>
+          <a:xfrm>
+            <a:off x="914400" y="4050792"/>
+            <a:ext cx="2651760" cy="365760"/>
+          </a:xfrm>
+          <a:prstGeom prst="rect">
+            <a:avLst/>
+          </a:prstGeom>
+          <a:noFill/>
+          <a:ln/>
+        </p:spPr>
+        <p:txBody>
+          <a:bodyPr wrap="square" lIns="0" tIns="0" rIns="0" bIns="0" rtlCol="0" anchor="ctr"/>
+          <a:lstStyle/>
+          <a:p>
+            <a:pPr algn="ctr" indent="0" marL="0">
+              <a:buNone/>
+            </a:pPr>
+            <a:r>
+              <a:rPr lang="en-US" sz="1000" dirty="0">
+                <a:solidFill>
+                  <a:srgbClr val="5F6B78"/>
+                </a:solidFill>
+                <a:latin typeface="Calibri" pitchFamily="34" charset="0"/>
+                <a:ea typeface="Calibri" pitchFamily="34" charset="-122"/>
+                <a:cs typeface="Calibri" pitchFamily="34" charset="-120"/>
+              </a:rPr>
+              <a:t>windows · edge alerts</a:t>
+            </a:r>
+            <a:endParaRPr lang="en-US" sz="1000" dirty="0"/>
+          </a:p>
+        </p:txBody>
+      </p:sp>
+      <p:sp>
+        <p:nvSpPr>
+          <p:cNvPr id="11" name="Shape 9"/>
+          <p:cNvSpPr/>
+          <p:nvPr/>
+        </p:nvSpPr>
+        <p:spPr>
+          <a:xfrm>
+            <a:off x="3886200" y="3246120"/>
+            <a:ext cx="502920" cy="0"/>
+          </a:xfrm>
+          <a:prstGeom prst="line">
+            <a:avLst/>
+          </a:prstGeom>
+          <a:noFill/>
+          <a:ln w="31750">
+            <a:solidFill>
+              <a:srgbClr val="2C3E55"/>
+            </a:solidFill>
+            <a:prstDash val="solid"/>
             <a:tailEnd type="triangle"/>
           </a:ln>
         </p:spPr>
       </p:sp>
       <p:sp>
         <p:nvSpPr>
-          <p:cNvPr id="13" name="Shape 11"/>
-          <p:cNvSpPr/>
-          <p:nvPr/>
-        </p:nvSpPr>
-        <p:spPr>
-          <a:xfrm>
-            <a:off x="4375587" y="2468880"/>
-            <a:ext cx="1572768" cy="1371600"/>
+          <p:cNvPr id="12" name="Shape 10"/>
+          <p:cNvSpPr/>
+          <p:nvPr/>
+        </p:nvSpPr>
+        <p:spPr>
+          <a:xfrm>
+            <a:off x="4572000" y="1554480"/>
+            <a:ext cx="6949440" cy="3383280"/>
           </a:xfrm>
           <a:prstGeom prst="roundRect">
             <a:avLst>
-              <a:gd name="adj" fmla="val 6667"/>
+              <a:gd name="adj" fmla="val 2703"/>
             </a:avLst>
           </a:prstGeom>
           <a:solidFill>
@@ -1897,99 +1919,145 @@
       </p:sp>
       <p:sp>
         <p:nvSpPr>
-          <p:cNvPr id="14" name="Shape 12"/>
-          <p:cNvSpPr/>
-          <p:nvPr/>
-        </p:nvSpPr>
-        <p:spPr>
-          <a:xfrm>
-            <a:off x="5061387" y="2670048"/>
-            <a:ext cx="201168" cy="201168"/>
-          </a:xfrm>
-          <a:prstGeom prst="ellipse">
-            <a:avLst/>
-          </a:prstGeom>
-          <a:solidFill>
-            <a:srgbClr val="2C3E55"/>
-          </a:solidFill>
-          <a:ln/>
-        </p:spPr>
-      </p:sp>
-      <p:sp>
-        <p:nvSpPr>
-          <p:cNvPr id="15" name="Text 13"/>
-          <p:cNvSpPr/>
-          <p:nvPr/>
-        </p:nvSpPr>
-        <p:spPr>
-          <a:xfrm>
-            <a:off x="4329867" y="2926080"/>
-            <a:ext cx="1664208" cy="411480"/>
-          </a:xfrm>
-          <a:prstGeom prst="rect">
-            <a:avLst/>
-          </a:prstGeom>
-          <a:noFill/>
-          <a:ln/>
-        </p:spPr>
-        <p:txBody>
-          <a:bodyPr wrap="square" lIns="0" tIns="0" rIns="0" bIns="0" rtlCol="0" anchor="ctr"/>
+          <p:cNvPr id="13" name="Text 11"/>
+          <p:cNvSpPr/>
+          <p:nvPr/>
+        </p:nvSpPr>
+        <p:spPr>
+          <a:xfrm>
+            <a:off x="4572000" y="1691640"/>
+            <a:ext cx="6949440" cy="365760"/>
+          </a:xfrm>
+          <a:prstGeom prst="rect">
+            <a:avLst/>
+          </a:prstGeom>
+          <a:noFill/>
+          <a:ln/>
+        </p:spPr>
+        <p:txBody>
+          <a:bodyPr wrap="square" rtlCol="0" anchor="ctr"/>
           <a:lstStyle/>
           <a:p>
             <a:pPr algn="ctr" indent="0" marL="0">
               <a:buNone/>
             </a:pPr>
             <a:r>
-              <a:rPr lang="en-US" sz="1450" b="1" dirty="0">
-                <a:solidFill>
-                  <a:srgbClr val="19212C"/>
+              <a:rPr lang="en-US" sz="1200" b="1" spc="200" kern="0" dirty="0">
+                <a:solidFill>
+                  <a:srgbClr val="2C3E55"/>
                 </a:solidFill>
                 <a:latin typeface="Calibri" pitchFamily="34" charset="0"/>
                 <a:ea typeface="Calibri" pitchFamily="34" charset="-122"/>
                 <a:cs typeface="Calibri" pitchFamily="34" charset="-120"/>
               </a:rPr>
-              <a:t>Amazon SQS</a:t>
-            </a:r>
-            <a:endParaRPr lang="en-US" sz="1450" dirty="0"/>
-          </a:p>
-        </p:txBody>
-      </p:sp>
-      <p:sp>
-        <p:nvSpPr>
-          <p:cNvPr id="16" name="Text 14"/>
-          <p:cNvSpPr/>
-          <p:nvPr/>
-        </p:nvSpPr>
-        <p:spPr>
-          <a:xfrm>
-            <a:off x="4357299" y="3310128"/>
-            <a:ext cx="1609344" cy="457200"/>
-          </a:xfrm>
-          <a:prstGeom prst="rect">
-            <a:avLst/>
-          </a:prstGeom>
-          <a:noFill/>
-          <a:ln/>
-        </p:spPr>
-        <p:txBody>
-          <a:bodyPr wrap="square" lIns="0" tIns="0" rIns="0" bIns="0" rtlCol="0" anchor="t"/>
+              <a:t>CLOUD (serverless)</a:t>
+            </a:r>
+            <a:endParaRPr lang="en-US" sz="1200" dirty="0"/>
+          </a:p>
+        </p:txBody>
+      </p:sp>
+      <p:sp>
+        <p:nvSpPr>
+          <p:cNvPr id="14" name="Shape 12"/>
+          <p:cNvSpPr/>
+          <p:nvPr/>
+        </p:nvSpPr>
+        <p:spPr>
+          <a:xfrm>
+            <a:off x="4846320" y="2651760"/>
+            <a:ext cx="1463040" cy="1371600"/>
+          </a:xfrm>
+          <a:prstGeom prst="roundRect">
+            <a:avLst>
+              <a:gd name="adj" fmla="val 5333"/>
+            </a:avLst>
+          </a:prstGeom>
+          <a:solidFill>
+            <a:srgbClr val="FFFFFF"/>
+          </a:solidFill>
+          <a:ln w="15240">
+            <a:solidFill>
+              <a:srgbClr val="2C3E55"/>
+            </a:solidFill>
+            <a:prstDash val="solid"/>
+          </a:ln>
+        </p:spPr>
+      </p:sp>
+      <p:sp>
+        <p:nvSpPr>
+          <p:cNvPr id="15" name="Text 13"/>
+          <p:cNvSpPr/>
+          <p:nvPr/>
+        </p:nvSpPr>
+        <p:spPr>
+          <a:xfrm>
+            <a:off x="4800600" y="2907792"/>
+            <a:ext cx="1554480" cy="457200"/>
+          </a:xfrm>
+          <a:prstGeom prst="rect">
+            <a:avLst/>
+          </a:prstGeom>
+          <a:noFill/>
+          <a:ln/>
+        </p:spPr>
+        <p:txBody>
+          <a:bodyPr wrap="square" lIns="0" tIns="0" rIns="0" bIns="0" rtlCol="0" anchor="ctr"/>
           <a:lstStyle/>
           <a:p>
             <a:pPr algn="ctr" indent="0" marL="0">
               <a:buNone/>
             </a:pPr>
             <a:r>
-              <a:rPr lang="en-US" sz="1050" dirty="0">
-                <a:solidFill>
-                  <a:srgbClr val="5F6B78"/>
+              <a:rPr lang="en-US" sz="1250" b="1" dirty="0">
+                <a:solidFill>
+                  <a:srgbClr val="19212C"/>
                 </a:solidFill>
                 <a:latin typeface="Calibri" pitchFamily="34" charset="0"/>
                 <a:ea typeface="Calibri" pitchFamily="34" charset="-122"/>
                 <a:cs typeface="Calibri" pitchFamily="34" charset="-120"/>
               </a:rPr>
+              <a:t>Amazon SQS</a:t>
+            </a:r>
+            <a:endParaRPr lang="en-US" sz="1250" dirty="0"/>
+          </a:p>
+        </p:txBody>
+      </p:sp>
+      <p:sp>
+        <p:nvSpPr>
+          <p:cNvPr id="16" name="Text 14"/>
+          <p:cNvSpPr/>
+          <p:nvPr/>
+        </p:nvSpPr>
+        <p:spPr>
+          <a:xfrm>
+            <a:off x="4828032" y="3401568"/>
+            <a:ext cx="1499616" cy="457200"/>
+          </a:xfrm>
+          <a:prstGeom prst="rect">
+            <a:avLst/>
+          </a:prstGeom>
+          <a:noFill/>
+          <a:ln/>
+        </p:spPr>
+        <p:txBody>
+          <a:bodyPr wrap="square" lIns="0" tIns="0" rIns="0" bIns="0" rtlCol="0" anchor="ctr"/>
+          <a:lstStyle/>
+          <a:p>
+            <a:pPr algn="ctr" indent="0" marL="0">
+              <a:buNone/>
+            </a:pPr>
+            <a:r>
+              <a:rPr lang="en-US" sz="900" dirty="0">
+                <a:solidFill>
+                  <a:srgbClr val="5F6B78"/>
+                </a:solidFill>
+                <a:latin typeface="Calibri" pitchFamily="34" charset="0"/>
+                <a:ea typeface="Calibri" pitchFamily="34" charset="-122"/>
+                <a:cs typeface="Calibri" pitchFamily="34" charset="-120"/>
+              </a:rPr>
               <a:t>window summaries</a:t>
             </a:r>
-            <a:endParaRPr lang="en-US" sz="1050" dirty="0"/>
+            <a:endParaRPr lang="en-US" sz="900" dirty="0"/>
           </a:p>
         </p:txBody>
       </p:sp>
@@ -2001,14 +2069,14 @@
         </p:nvSpPr>
         <p:spPr>
           <a:xfrm>
-            <a:off x="5966643" y="3154680"/>
-            <a:ext cx="258409" cy="0"/>
+            <a:off x="6318504" y="3337560"/>
+            <a:ext cx="164592" cy="0"/>
           </a:xfrm>
           <a:prstGeom prst="line">
             <a:avLst/>
           </a:prstGeom>
           <a:noFill/>
-          <a:ln w="25400">
+          <a:ln w="20320">
             <a:solidFill>
               <a:srgbClr val="6A839C"/>
             </a:solidFill>
@@ -2025,18 +2093,18 @@
         </p:nvSpPr>
         <p:spPr>
           <a:xfrm>
-            <a:off x="6243340" y="2468880"/>
-            <a:ext cx="1572768" cy="1371600"/>
+            <a:off x="6492240" y="2651760"/>
+            <a:ext cx="1463040" cy="1371600"/>
           </a:xfrm>
           <a:prstGeom prst="roundRect">
             <a:avLst>
-              <a:gd name="adj" fmla="val 6667"/>
+              <a:gd name="adj" fmla="val 5333"/>
             </a:avLst>
           </a:prstGeom>
           <a:solidFill>
-            <a:srgbClr val="EEF2F6"/>
+            <a:srgbClr val="FFFFFF"/>
           </a:solidFill>
-          <a:ln w="19050">
+          <a:ln w="15240">
             <a:solidFill>
               <a:srgbClr val="2C3E55"/>
             </a:solidFill>
@@ -2046,34 +2114,14 @@
       </p:sp>
       <p:sp>
         <p:nvSpPr>
-          <p:cNvPr id="19" name="Shape 17"/>
-          <p:cNvSpPr/>
-          <p:nvPr/>
-        </p:nvSpPr>
-        <p:spPr>
-          <a:xfrm>
-            <a:off x="6929140" y="2670048"/>
-            <a:ext cx="201168" cy="201168"/>
-          </a:xfrm>
-          <a:prstGeom prst="ellipse">
-            <a:avLst/>
-          </a:prstGeom>
-          <a:solidFill>
-            <a:srgbClr val="2C3E55"/>
-          </a:solidFill>
-          <a:ln/>
-        </p:spPr>
-      </p:sp>
-      <p:sp>
-        <p:nvSpPr>
-          <p:cNvPr id="20" name="Text 18"/>
-          <p:cNvSpPr/>
-          <p:nvPr/>
-        </p:nvSpPr>
-        <p:spPr>
-          <a:xfrm>
-            <a:off x="6197620" y="2926080"/>
-            <a:ext cx="1664208" cy="411480"/>
+          <p:cNvPr id="19" name="Text 17"/>
+          <p:cNvSpPr/>
+          <p:nvPr/>
+        </p:nvSpPr>
+        <p:spPr>
+          <a:xfrm>
+            <a:off x="6446520" y="2907792"/>
+            <a:ext cx="1554480" cy="457200"/>
           </a:xfrm>
           <a:prstGeom prst="rect">
             <a:avLst/>
@@ -2089,7 +2137,7 @@
               <a:buNone/>
             </a:pPr>
             <a:r>
-              <a:rPr lang="en-US" sz="1450" b="1" dirty="0">
+              <a:rPr lang="en-US" sz="1250" b="1" dirty="0">
                 <a:solidFill>
                   <a:srgbClr val="19212C"/>
                 </a:solidFill>
@@ -2099,36 +2147,36 @@
               </a:rPr>
               <a:t>AWS Lambda</a:t>
             </a:r>
-            <a:endParaRPr lang="en-US" sz="1450" dirty="0"/>
-          </a:p>
-        </p:txBody>
-      </p:sp>
-      <p:sp>
-        <p:nvSpPr>
-          <p:cNvPr id="21" name="Text 19"/>
-          <p:cNvSpPr/>
-          <p:nvPr/>
-        </p:nvSpPr>
-        <p:spPr>
-          <a:xfrm>
-            <a:off x="6225052" y="3310128"/>
-            <a:ext cx="1609344" cy="457200"/>
-          </a:xfrm>
-          <a:prstGeom prst="rect">
-            <a:avLst/>
-          </a:prstGeom>
-          <a:noFill/>
-          <a:ln/>
-        </p:spPr>
-        <p:txBody>
-          <a:bodyPr wrap="square" lIns="0" tIns="0" rIns="0" bIns="0" rtlCol="0" anchor="t"/>
+            <a:endParaRPr lang="en-US" sz="1250" dirty="0"/>
+          </a:p>
+        </p:txBody>
+      </p:sp>
+      <p:sp>
+        <p:nvSpPr>
+          <p:cNvPr id="20" name="Text 18"/>
+          <p:cNvSpPr/>
+          <p:nvPr/>
+        </p:nvSpPr>
+        <p:spPr>
+          <a:xfrm>
+            <a:off x="6473952" y="3401568"/>
+            <a:ext cx="1499616" cy="457200"/>
+          </a:xfrm>
+          <a:prstGeom prst="rect">
+            <a:avLst/>
+          </a:prstGeom>
+          <a:noFill/>
+          <a:ln/>
+        </p:spPr>
+        <p:txBody>
+          <a:bodyPr wrap="square" lIns="0" tIns="0" rIns="0" bIns="0" rtlCol="0" anchor="ctr"/>
           <a:lstStyle/>
           <a:p>
             <a:pPr algn="ctr" indent="0" marL="0">
               <a:buNone/>
             </a:pPr>
             <a:r>
-              <a:rPr lang="en-US" sz="1050" dirty="0">
+              <a:rPr lang="en-US" sz="900" dirty="0">
                 <a:solidFill>
                   <a:srgbClr val="5F6B78"/>
                 </a:solidFill>
@@ -2138,26 +2186,26 @@
               </a:rPr>
               <a:t>ingest function</a:t>
             </a:r>
-            <a:endParaRPr lang="en-US" sz="1050" dirty="0"/>
-          </a:p>
-        </p:txBody>
-      </p:sp>
-      <p:sp>
-        <p:nvSpPr>
-          <p:cNvPr id="22" name="Shape 20"/>
-          <p:cNvSpPr/>
-          <p:nvPr/>
-        </p:nvSpPr>
-        <p:spPr>
-          <a:xfrm>
-            <a:off x="7834396" y="3154680"/>
-            <a:ext cx="258409" cy="0"/>
+            <a:endParaRPr lang="en-US" sz="900" dirty="0"/>
+          </a:p>
+        </p:txBody>
+      </p:sp>
+      <p:sp>
+        <p:nvSpPr>
+          <p:cNvPr id="21" name="Shape 19"/>
+          <p:cNvSpPr/>
+          <p:nvPr/>
+        </p:nvSpPr>
+        <p:spPr>
+          <a:xfrm>
+            <a:off x="7964424" y="3337560"/>
+            <a:ext cx="164592" cy="0"/>
           </a:xfrm>
           <a:prstGeom prst="line">
             <a:avLst/>
           </a:prstGeom>
           <a:noFill/>
-          <a:ln w="25400">
+          <a:ln w="20320">
             <a:solidFill>
               <a:srgbClr val="6A839C"/>
             </a:solidFill>
@@ -2168,24 +2216,24 @@
       </p:sp>
       <p:sp>
         <p:nvSpPr>
-          <p:cNvPr id="23" name="Shape 21"/>
-          <p:cNvSpPr/>
-          <p:nvPr/>
-        </p:nvSpPr>
-        <p:spPr>
-          <a:xfrm>
-            <a:off x="8111094" y="2468880"/>
-            <a:ext cx="1572768" cy="1371600"/>
+          <p:cNvPr id="22" name="Shape 20"/>
+          <p:cNvSpPr/>
+          <p:nvPr/>
+        </p:nvSpPr>
+        <p:spPr>
+          <a:xfrm>
+            <a:off x="8138160" y="2651760"/>
+            <a:ext cx="1463040" cy="1371600"/>
           </a:xfrm>
           <a:prstGeom prst="roundRect">
             <a:avLst>
-              <a:gd name="adj" fmla="val 6667"/>
+              <a:gd name="adj" fmla="val 5333"/>
             </a:avLst>
           </a:prstGeom>
           <a:solidFill>
-            <a:srgbClr val="EEF2F6"/>
+            <a:srgbClr val="FFFFFF"/>
           </a:solidFill>
-          <a:ln w="19050">
+          <a:ln w="15240">
             <a:solidFill>
               <a:srgbClr val="2C3E55"/>
             </a:solidFill>
@@ -2195,34 +2243,14 @@
       </p:sp>
       <p:sp>
         <p:nvSpPr>
-          <p:cNvPr id="24" name="Shape 22"/>
-          <p:cNvSpPr/>
-          <p:nvPr/>
-        </p:nvSpPr>
-        <p:spPr>
-          <a:xfrm>
-            <a:off x="8796894" y="2670048"/>
-            <a:ext cx="201168" cy="201168"/>
-          </a:xfrm>
-          <a:prstGeom prst="ellipse">
-            <a:avLst/>
-          </a:prstGeom>
-          <a:solidFill>
-            <a:srgbClr val="2C3E55"/>
-          </a:solidFill>
-          <a:ln/>
-        </p:spPr>
-      </p:sp>
-      <p:sp>
-        <p:nvSpPr>
-          <p:cNvPr id="25" name="Text 23"/>
-          <p:cNvSpPr/>
-          <p:nvPr/>
-        </p:nvSpPr>
-        <p:spPr>
-          <a:xfrm>
-            <a:off x="8065374" y="2926080"/>
-            <a:ext cx="1664208" cy="411480"/>
+          <p:cNvPr id="23" name="Text 21"/>
+          <p:cNvSpPr/>
+          <p:nvPr/>
+        </p:nvSpPr>
+        <p:spPr>
+          <a:xfrm>
+            <a:off x="8092440" y="2907792"/>
+            <a:ext cx="1554480" cy="457200"/>
           </a:xfrm>
           <a:prstGeom prst="rect">
             <a:avLst/>
@@ -2238,7 +2266,7 @@
               <a:buNone/>
             </a:pPr>
             <a:r>
-              <a:rPr lang="en-US" sz="1450" b="1" dirty="0">
+              <a:rPr lang="en-US" sz="1250" b="1" dirty="0">
                 <a:solidFill>
                   <a:srgbClr val="19212C"/>
                 </a:solidFill>
@@ -2248,36 +2276,36 @@
               </a:rPr>
               <a:t>DynamoDB</a:t>
             </a:r>
-            <a:endParaRPr lang="en-US" sz="1450" dirty="0"/>
-          </a:p>
-        </p:txBody>
-      </p:sp>
-      <p:sp>
-        <p:nvSpPr>
-          <p:cNvPr id="26" name="Text 24"/>
-          <p:cNvSpPr/>
-          <p:nvPr/>
-        </p:nvSpPr>
-        <p:spPr>
-          <a:xfrm>
-            <a:off x="8092806" y="3310128"/>
-            <a:ext cx="1609344" cy="457200"/>
-          </a:xfrm>
-          <a:prstGeom prst="rect">
-            <a:avLst/>
-          </a:prstGeom>
-          <a:noFill/>
-          <a:ln/>
-        </p:spPr>
-        <p:txBody>
-          <a:bodyPr wrap="square" lIns="0" tIns="0" rIns="0" bIns="0" rtlCol="0" anchor="t"/>
+            <a:endParaRPr lang="en-US" sz="1250" dirty="0"/>
+          </a:p>
+        </p:txBody>
+      </p:sp>
+      <p:sp>
+        <p:nvSpPr>
+          <p:cNvPr id="24" name="Text 22"/>
+          <p:cNvSpPr/>
+          <p:nvPr/>
+        </p:nvSpPr>
+        <p:spPr>
+          <a:xfrm>
+            <a:off x="8119872" y="3401568"/>
+            <a:ext cx="1499616" cy="457200"/>
+          </a:xfrm>
+          <a:prstGeom prst="rect">
+            <a:avLst/>
+          </a:prstGeom>
+          <a:noFill/>
+          <a:ln/>
+        </p:spPr>
+        <p:txBody>
+          <a:bodyPr wrap="square" lIns="0" tIns="0" rIns="0" bIns="0" rtlCol="0" anchor="ctr"/>
           <a:lstStyle/>
           <a:p>
             <a:pPr algn="ctr" indent="0" marL="0">
               <a:buNone/>
             </a:pPr>
             <a:r>
-              <a:rPr lang="en-US" sz="1050" dirty="0">
+              <a:rPr lang="en-US" sz="900" dirty="0">
                 <a:solidFill>
                   <a:srgbClr val="5F6B78"/>
                 </a:solidFill>
@@ -2287,26 +2315,26 @@
               </a:rPr>
               <a:t>readings store</a:t>
             </a:r>
-            <a:endParaRPr lang="en-US" sz="1050" dirty="0"/>
-          </a:p>
-        </p:txBody>
-      </p:sp>
-      <p:sp>
-        <p:nvSpPr>
-          <p:cNvPr id="27" name="Shape 25"/>
-          <p:cNvSpPr/>
-          <p:nvPr/>
-        </p:nvSpPr>
-        <p:spPr>
-          <a:xfrm>
-            <a:off x="9702150" y="3154680"/>
-            <a:ext cx="258409" cy="0"/>
+            <a:endParaRPr lang="en-US" sz="900" dirty="0"/>
+          </a:p>
+        </p:txBody>
+      </p:sp>
+      <p:sp>
+        <p:nvSpPr>
+          <p:cNvPr id="25" name="Shape 23"/>
+          <p:cNvSpPr/>
+          <p:nvPr/>
+        </p:nvSpPr>
+        <p:spPr>
+          <a:xfrm>
+            <a:off x="9610344" y="3337560"/>
+            <a:ext cx="164592" cy="0"/>
           </a:xfrm>
           <a:prstGeom prst="line">
             <a:avLst/>
           </a:prstGeom>
           <a:noFill/>
-          <a:ln w="25400">
+          <a:ln w="20320">
             <a:solidFill>
               <a:srgbClr val="6A839C"/>
             </a:solidFill>
@@ -2317,24 +2345,24 @@
       </p:sp>
       <p:sp>
         <p:nvSpPr>
-          <p:cNvPr id="28" name="Shape 26"/>
-          <p:cNvSpPr/>
-          <p:nvPr/>
-        </p:nvSpPr>
-        <p:spPr>
-          <a:xfrm>
-            <a:off x="9978847" y="2468880"/>
-            <a:ext cx="1572768" cy="1371600"/>
+          <p:cNvPr id="26" name="Shape 24"/>
+          <p:cNvSpPr/>
+          <p:nvPr/>
+        </p:nvSpPr>
+        <p:spPr>
+          <a:xfrm>
+            <a:off x="9784080" y="2651760"/>
+            <a:ext cx="1463040" cy="1371600"/>
           </a:xfrm>
           <a:prstGeom prst="roundRect">
             <a:avLst>
-              <a:gd name="adj" fmla="val 6667"/>
+              <a:gd name="adj" fmla="val 5333"/>
             </a:avLst>
           </a:prstGeom>
           <a:solidFill>
-            <a:srgbClr val="EEF2F6"/>
+            <a:srgbClr val="FFFFFF"/>
           </a:solidFill>
-          <a:ln w="19050">
+          <a:ln w="15240">
             <a:solidFill>
               <a:srgbClr val="3E5A7C"/>
             </a:solidFill>
@@ -2344,34 +2372,14 @@
       </p:sp>
       <p:sp>
         <p:nvSpPr>
-          <p:cNvPr id="29" name="Shape 27"/>
-          <p:cNvSpPr/>
-          <p:nvPr/>
-        </p:nvSpPr>
-        <p:spPr>
-          <a:xfrm>
-            <a:off x="10664647" y="2670048"/>
-            <a:ext cx="201168" cy="201168"/>
-          </a:xfrm>
-          <a:prstGeom prst="ellipse">
-            <a:avLst/>
-          </a:prstGeom>
-          <a:solidFill>
-            <a:srgbClr val="3E5A7C"/>
-          </a:solidFill>
-          <a:ln/>
-        </p:spPr>
-      </p:sp>
-      <p:sp>
-        <p:nvSpPr>
-          <p:cNvPr id="30" name="Text 28"/>
-          <p:cNvSpPr/>
-          <p:nvPr/>
-        </p:nvSpPr>
-        <p:spPr>
-          <a:xfrm>
-            <a:off x="9933127" y="2926080"/>
-            <a:ext cx="1664208" cy="411480"/>
+          <p:cNvPr id="27" name="Text 25"/>
+          <p:cNvSpPr/>
+          <p:nvPr/>
+        </p:nvSpPr>
+        <p:spPr>
+          <a:xfrm>
+            <a:off x="9738360" y="2907792"/>
+            <a:ext cx="1554480" cy="457200"/>
           </a:xfrm>
           <a:prstGeom prst="rect">
             <a:avLst/>
@@ -2387,7 +2395,7 @@
               <a:buNone/>
             </a:pPr>
             <a:r>
-              <a:rPr lang="en-US" sz="1450" b="1" dirty="0">
+              <a:rPr lang="en-US" sz="1250" b="1" dirty="0">
                 <a:solidFill>
                   <a:srgbClr val="19212C"/>
                 </a:solidFill>
@@ -2397,36 +2405,36 @@
               </a:rPr>
               <a:t>API GW + S3</a:t>
             </a:r>
-            <a:endParaRPr lang="en-US" sz="1450" dirty="0"/>
-          </a:p>
-        </p:txBody>
-      </p:sp>
-      <p:sp>
-        <p:nvSpPr>
-          <p:cNvPr id="31" name="Text 29"/>
-          <p:cNvSpPr/>
-          <p:nvPr/>
-        </p:nvSpPr>
-        <p:spPr>
-          <a:xfrm>
-            <a:off x="9960559" y="3310128"/>
-            <a:ext cx="1609344" cy="457200"/>
-          </a:xfrm>
-          <a:prstGeom prst="rect">
-            <a:avLst/>
-          </a:prstGeom>
-          <a:noFill/>
-          <a:ln/>
-        </p:spPr>
-        <p:txBody>
-          <a:bodyPr wrap="square" lIns="0" tIns="0" rIns="0" bIns="0" rtlCol="0" anchor="t"/>
+            <a:endParaRPr lang="en-US" sz="1250" dirty="0"/>
+          </a:p>
+        </p:txBody>
+      </p:sp>
+      <p:sp>
+        <p:nvSpPr>
+          <p:cNvPr id="28" name="Text 26"/>
+          <p:cNvSpPr/>
+          <p:nvPr/>
+        </p:nvSpPr>
+        <p:spPr>
+          <a:xfrm>
+            <a:off x="9765792" y="3401568"/>
+            <a:ext cx="1499616" cy="457200"/>
+          </a:xfrm>
+          <a:prstGeom prst="rect">
+            <a:avLst/>
+          </a:prstGeom>
+          <a:noFill/>
+          <a:ln/>
+        </p:spPr>
+        <p:txBody>
+          <a:bodyPr wrap="square" lIns="0" tIns="0" rIns="0" bIns="0" rtlCol="0" anchor="ctr"/>
           <a:lstStyle/>
           <a:p>
             <a:pPr algn="ctr" indent="0" marL="0">
               <a:buNone/>
             </a:pPr>
             <a:r>
-              <a:rPr lang="en-US" sz="1050" dirty="0">
+              <a:rPr lang="en-US" sz="900" dirty="0">
                 <a:solidFill>
                   <a:srgbClr val="5F6B78"/>
                 </a:solidFill>
@@ -2436,98 +2444,20 @@
               </a:rPr>
               <a:t>live dashboard</a:t>
             </a:r>
-            <a:endParaRPr lang="en-US" sz="1050" dirty="0"/>
-          </a:p>
-        </p:txBody>
-      </p:sp>
-      <p:sp>
-        <p:nvSpPr>
-          <p:cNvPr id="32" name="Text 30"/>
-          <p:cNvSpPr/>
-          <p:nvPr/>
-        </p:nvSpPr>
-        <p:spPr>
-          <a:xfrm>
-            <a:off x="640080" y="3977640"/>
-            <a:ext cx="3440521" cy="274320"/>
-          </a:xfrm>
-          <a:prstGeom prst="rect">
-            <a:avLst/>
-          </a:prstGeom>
-          <a:noFill/>
-          <a:ln/>
-        </p:spPr>
-        <p:txBody>
-          <a:bodyPr wrap="square" rtlCol="0" anchor="ctr"/>
-          <a:lstStyle/>
-          <a:p>
-            <a:pPr algn="ctr" indent="0" marL="0">
-              <a:buNone/>
-            </a:pPr>
-            <a:r>
-              <a:rPr lang="en-US" sz="1100" b="1" spc="200" kern="0" dirty="0">
-                <a:solidFill>
-                  <a:srgbClr val="6A839C"/>
-                </a:solidFill>
-                <a:latin typeface="Calibri" pitchFamily="34" charset="0"/>
-                <a:ea typeface="Calibri" pitchFamily="34" charset="-122"/>
-                <a:cs typeface="Calibri" pitchFamily="34" charset="-120"/>
-              </a:rPr>
-              <a:t>EDGE</a:t>
-            </a:r>
-            <a:endParaRPr lang="en-US" sz="1100" dirty="0"/>
-          </a:p>
-        </p:txBody>
-      </p:sp>
-      <p:sp>
-        <p:nvSpPr>
-          <p:cNvPr id="33" name="Text 31"/>
-          <p:cNvSpPr/>
-          <p:nvPr/>
-        </p:nvSpPr>
-        <p:spPr>
-          <a:xfrm>
-            <a:off x="4375587" y="3977640"/>
-            <a:ext cx="7176028" cy="274320"/>
-          </a:xfrm>
-          <a:prstGeom prst="rect">
-            <a:avLst/>
-          </a:prstGeom>
-          <a:noFill/>
-          <a:ln/>
-        </p:spPr>
-        <p:txBody>
-          <a:bodyPr wrap="square" rtlCol="0" anchor="ctr"/>
-          <a:lstStyle/>
-          <a:p>
-            <a:pPr algn="ctr" indent="0" marL="0">
-              <a:buNone/>
-            </a:pPr>
-            <a:r>
-              <a:rPr lang="en-US" sz="1100" b="1" spc="200" kern="0" dirty="0">
-                <a:solidFill>
-                  <a:srgbClr val="2C3E55"/>
-                </a:solidFill>
-                <a:latin typeface="Calibri" pitchFamily="34" charset="0"/>
-                <a:ea typeface="Calibri" pitchFamily="34" charset="-122"/>
-                <a:cs typeface="Calibri" pitchFamily="34" charset="-120"/>
-              </a:rPr>
-              <a:t>CLOUD</a:t>
-            </a:r>
-            <a:endParaRPr lang="en-US" sz="1100" dirty="0"/>
-          </a:p>
-        </p:txBody>
-      </p:sp>
-      <p:sp>
-        <p:nvSpPr>
-          <p:cNvPr id="34" name="Text 32"/>
-          <p:cNvSpPr/>
-          <p:nvPr/>
-        </p:nvSpPr>
-        <p:spPr>
-          <a:xfrm>
-            <a:off x="640080" y="5212080"/>
-            <a:ext cx="10972800" cy="640080"/>
+            <a:endParaRPr lang="en-US" sz="900" dirty="0"/>
+          </a:p>
+        </p:txBody>
+      </p:sp>
+      <p:sp>
+        <p:nvSpPr>
+          <p:cNvPr id="29" name="Text 27"/>
+          <p:cNvSpPr/>
+          <p:nvPr/>
+        </p:nvSpPr>
+        <p:spPr>
+          <a:xfrm>
+            <a:off x="640080" y="5257800"/>
+            <a:ext cx="10972800" cy="731520"/>
           </a:xfrm>
           <a:prstGeom prst="rect">
             <a:avLst/>
@@ -2669,34 +2599,14 @@
       </p:sp>
       <p:sp>
         <p:nvSpPr>
-          <p:cNvPr id="4" name="Shape 2"/>
-          <p:cNvSpPr/>
-          <p:nvPr/>
-        </p:nvSpPr>
-        <p:spPr>
-          <a:xfrm>
-            <a:off x="731520" y="1965960"/>
-            <a:ext cx="685800" cy="685800"/>
-          </a:xfrm>
-          <a:prstGeom prst="ellipse">
-            <a:avLst/>
-          </a:prstGeom>
-          <a:solidFill>
-            <a:srgbClr val="2C3E55"/>
-          </a:solidFill>
-          <a:ln/>
-        </p:spPr>
-      </p:sp>
-      <p:sp>
-        <p:nvSpPr>
-          <p:cNvPr id="5" name="Text 3"/>
-          <p:cNvSpPr/>
-          <p:nvPr/>
-        </p:nvSpPr>
-        <p:spPr>
-          <a:xfrm>
-            <a:off x="731520" y="1965960"/>
-            <a:ext cx="685800" cy="685800"/>
+          <p:cNvPr id="4" name="Text 2"/>
+          <p:cNvSpPr/>
+          <p:nvPr/>
+        </p:nvSpPr>
+        <p:spPr>
+          <a:xfrm>
+            <a:off x="640080" y="1737360"/>
+            <a:ext cx="1097280" cy="1097280"/>
           </a:xfrm>
           <a:prstGeom prst="rect">
             <a:avLst/>
@@ -2708,13 +2618,13 @@
           <a:bodyPr wrap="square" lIns="0" tIns="0" rIns="0" bIns="0" rtlCol="0" anchor="ctr"/>
           <a:lstStyle/>
           <a:p>
-            <a:pPr algn="ctr" indent="0" marL="0">
-              <a:buNone/>
-            </a:pPr>
-            <a:r>
-              <a:rPr lang="en-US" sz="2600" b="1" dirty="0">
-                <a:solidFill>
-                  <a:srgbClr val="FFFFFF"/>
+            <a:pPr indent="0" marL="0">
+              <a:buNone/>
+            </a:pPr>
+            <a:r>
+              <a:rPr lang="en-US" sz="5400" b="1" dirty="0">
+                <a:solidFill>
+                  <a:srgbClr val="EEF2F6"/>
                 </a:solidFill>
                 <a:latin typeface="Bookman Old Style" pitchFamily="34" charset="0"/>
                 <a:ea typeface="Bookman Old Style" pitchFamily="34" charset="-122"/>
@@ -2722,9 +2632,32 @@
               </a:rPr>
               <a:t>1</a:t>
             </a:r>
-            <a:endParaRPr lang="en-US" sz="2600" dirty="0"/>
-          </a:p>
-        </p:txBody>
+            <a:endParaRPr lang="en-US" sz="5400" dirty="0"/>
+          </a:p>
+        </p:txBody>
+      </p:sp>
+      <p:sp>
+        <p:nvSpPr>
+          <p:cNvPr id="5" name="Shape 3"/>
+          <p:cNvSpPr/>
+          <p:nvPr/>
+        </p:nvSpPr>
+        <p:spPr>
+          <a:xfrm>
+            <a:off x="1828800" y="1920240"/>
+            <a:ext cx="0" cy="1051560"/>
+          </a:xfrm>
+          <a:prstGeom prst="line">
+            <a:avLst/>
+          </a:prstGeom>
+          <a:noFill/>
+          <a:ln w="25400">
+            <a:solidFill>
+              <a:srgbClr val="3E5A7C"/>
+            </a:solidFill>
+            <a:prstDash val="solid"/>
+          </a:ln>
+        </p:spPr>
       </p:sp>
       <p:sp>
         <p:nvSpPr>
@@ -2734,8 +2667,8 @@
         </p:nvSpPr>
         <p:spPr>
           <a:xfrm>
-            <a:off x="1691640" y="1920240"/>
-            <a:ext cx="9875520" cy="411480"/>
+            <a:off x="2057400" y="1874520"/>
+            <a:ext cx="9509760" cy="411480"/>
           </a:xfrm>
           <a:prstGeom prst="rect">
             <a:avLst/>
@@ -2759,7 +2692,7 @@
                 <a:ea typeface="Calibri" pitchFamily="34" charset="-122"/>
                 <a:cs typeface="Calibri" pitchFamily="34" charset="-120"/>
               </a:rPr>
-              <a:t>Pipeline health, all green</a:t>
+              <a:t>Two halls, five environment metrics</a:t>
             </a:r>
             <a:endParaRPr lang="en-US" sz="1800" dirty="0"/>
           </a:p>
@@ -2773,8 +2706,8 @@
         </p:nvSpPr>
         <p:spPr>
           <a:xfrm>
-            <a:off x="1691640" y="2340864"/>
-            <a:ext cx="9875520" cy="640080"/>
+            <a:off x="2057400" y="2313432"/>
+            <a:ext cx="9509760" cy="822960"/>
           </a:xfrm>
           <a:prstGeom prst="rect">
             <a:avLst/>
@@ -2798,7 +2731,7 @@
                 <a:ea typeface="Calibri" pitchFamily="34" charset="-122"/>
                 <a:cs typeface="Calibri" pitchFamily="34" charset="-120"/>
               </a:rPr>
-              <a:t>Four of four checks green on the live deployment: gateway, queue, Lambda and pipeline.</a:t>
+              <a:t>Temperature, humidity, airflow, and rack conditions live for both server halls, each window checked as it closes.</a:t>
             </a:r>
             <a:endParaRPr lang="en-US" sz="1350" dirty="0"/>
           </a:p>
@@ -2806,34 +2739,14 @@
       </p:sp>
       <p:sp>
         <p:nvSpPr>
-          <p:cNvPr id="8" name="Shape 6"/>
-          <p:cNvSpPr/>
-          <p:nvPr/>
-        </p:nvSpPr>
-        <p:spPr>
-          <a:xfrm>
-            <a:off x="731520" y="3383280"/>
-            <a:ext cx="685800" cy="685800"/>
-          </a:xfrm>
-          <a:prstGeom prst="ellipse">
-            <a:avLst/>
-          </a:prstGeom>
-          <a:solidFill>
-            <a:srgbClr val="2C3E55"/>
-          </a:solidFill>
-          <a:ln/>
-        </p:spPr>
-      </p:sp>
-      <p:sp>
-        <p:nvSpPr>
-          <p:cNvPr id="9" name="Text 7"/>
-          <p:cNvSpPr/>
-          <p:nvPr/>
-        </p:nvSpPr>
-        <p:spPr>
-          <a:xfrm>
-            <a:off x="731520" y="3383280"/>
-            <a:ext cx="685800" cy="685800"/>
+          <p:cNvPr id="8" name="Text 6"/>
+          <p:cNvSpPr/>
+          <p:nvPr/>
+        </p:nvSpPr>
+        <p:spPr>
+          <a:xfrm>
+            <a:off x="640080" y="3200400"/>
+            <a:ext cx="1097280" cy="1097280"/>
           </a:xfrm>
           <a:prstGeom prst="rect">
             <a:avLst/>
@@ -2845,13 +2758,13 @@
           <a:bodyPr wrap="square" lIns="0" tIns="0" rIns="0" bIns="0" rtlCol="0" anchor="ctr"/>
           <a:lstStyle/>
           <a:p>
-            <a:pPr algn="ctr" indent="0" marL="0">
-              <a:buNone/>
-            </a:pPr>
-            <a:r>
-              <a:rPr lang="en-US" sz="2600" b="1" dirty="0">
-                <a:solidFill>
-                  <a:srgbClr val="FFFFFF"/>
+            <a:pPr indent="0" marL="0">
+              <a:buNone/>
+            </a:pPr>
+            <a:r>
+              <a:rPr lang="en-US" sz="5400" b="1" dirty="0">
+                <a:solidFill>
+                  <a:srgbClr val="EEF2F6"/>
                 </a:solidFill>
                 <a:latin typeface="Bookman Old Style" pitchFamily="34" charset="0"/>
                 <a:ea typeface="Bookman Old Style" pitchFamily="34" charset="-122"/>
@@ -2859,9 +2772,32 @@
               </a:rPr>
               <a:t>2</a:t>
             </a:r>
-            <a:endParaRPr lang="en-US" sz="2600" dirty="0"/>
-          </a:p>
-        </p:txBody>
+            <a:endParaRPr lang="en-US" sz="5400" dirty="0"/>
+          </a:p>
+        </p:txBody>
+      </p:sp>
+      <p:sp>
+        <p:nvSpPr>
+          <p:cNvPr id="9" name="Shape 7"/>
+          <p:cNvSpPr/>
+          <p:nvPr/>
+        </p:nvSpPr>
+        <p:spPr>
+          <a:xfrm>
+            <a:off x="1828800" y="3383280"/>
+            <a:ext cx="0" cy="1051560"/>
+          </a:xfrm>
+          <a:prstGeom prst="line">
+            <a:avLst/>
+          </a:prstGeom>
+          <a:noFill/>
+          <a:ln w="25400">
+            <a:solidFill>
+              <a:srgbClr val="3E5A7C"/>
+            </a:solidFill>
+            <a:prstDash val="solid"/>
+          </a:ln>
+        </p:spPr>
       </p:sp>
       <p:sp>
         <p:nvSpPr>
@@ -2871,8 +2807,8 @@
         </p:nvSpPr>
         <p:spPr>
           <a:xfrm>
-            <a:off x="1691640" y="3337560"/>
-            <a:ext cx="9875520" cy="411480"/>
+            <a:off x="2057400" y="3337560"/>
+            <a:ext cx="9509760" cy="411480"/>
           </a:xfrm>
           <a:prstGeom prst="rect">
             <a:avLst/>
@@ -2896,7 +2832,7 @@
                 <a:ea typeface="Calibri" pitchFamily="34" charset="-122"/>
                 <a:cs typeface="Calibri" pitchFamily="34" charset="-120"/>
               </a:rPr>
-              <a:t>Two halls, five metrics</a:t>
+              <a:t>Threshold rules on every closed window</a:t>
             </a:r>
             <a:endParaRPr lang="en-US" sz="1800" dirty="0"/>
           </a:p>
@@ -2910,8 +2846,8 @@
         </p:nvSpPr>
         <p:spPr>
           <a:xfrm>
-            <a:off x="1691640" y="3758184"/>
-            <a:ext cx="9875520" cy="640080"/>
+            <a:off x="2057400" y="3776472"/>
+            <a:ext cx="9509760" cy="822960"/>
           </a:xfrm>
           <a:prstGeom prst="rect">
             <a:avLst/>
@@ -2935,7 +2871,7 @@
                 <a:ea typeface="Calibri" pitchFamily="34" charset="-122"/>
                 <a:cs typeface="Calibri" pitchFamily="34" charset="-120"/>
               </a:rPr>
-              <a:t>Live per-hall readings against explicit threshold rules, evaluated the moment each window closes.</a:t>
+              <a:t>An overheat above 27 C, condensation-risk humidity above 60%, or airflow below 400 CFM raises the instant that window closes.</a:t>
             </a:r>
             <a:endParaRPr lang="en-US" sz="1350" dirty="0"/>
           </a:p>
@@ -2943,34 +2879,14 @@
       </p:sp>
       <p:sp>
         <p:nvSpPr>
-          <p:cNvPr id="12" name="Shape 10"/>
-          <p:cNvSpPr/>
-          <p:nvPr/>
-        </p:nvSpPr>
-        <p:spPr>
-          <a:xfrm>
-            <a:off x="731520" y="4800600"/>
-            <a:ext cx="685800" cy="685800"/>
-          </a:xfrm>
-          <a:prstGeom prst="ellipse">
-            <a:avLst/>
-          </a:prstGeom>
-          <a:solidFill>
-            <a:srgbClr val="2C3E55"/>
-          </a:solidFill>
-          <a:ln/>
-        </p:spPr>
-      </p:sp>
-      <p:sp>
-        <p:nvSpPr>
-          <p:cNvPr id="13" name="Text 11"/>
-          <p:cNvSpPr/>
-          <p:nvPr/>
-        </p:nvSpPr>
-        <p:spPr>
-          <a:xfrm>
-            <a:off x="731520" y="4800600"/>
-            <a:ext cx="685800" cy="685800"/>
+          <p:cNvPr id="12" name="Text 10"/>
+          <p:cNvSpPr/>
+          <p:nvPr/>
+        </p:nvSpPr>
+        <p:spPr>
+          <a:xfrm>
+            <a:off x="640080" y="4663440"/>
+            <a:ext cx="1097280" cy="1097280"/>
           </a:xfrm>
           <a:prstGeom prst="rect">
             <a:avLst/>
@@ -2982,13 +2898,13 @@
           <a:bodyPr wrap="square" lIns="0" tIns="0" rIns="0" bIns="0" rtlCol="0" anchor="ctr"/>
           <a:lstStyle/>
           <a:p>
-            <a:pPr algn="ctr" indent="0" marL="0">
-              <a:buNone/>
-            </a:pPr>
-            <a:r>
-              <a:rPr lang="en-US" sz="2600" b="1" dirty="0">
-                <a:solidFill>
-                  <a:srgbClr val="FFFFFF"/>
+            <a:pPr indent="0" marL="0">
+              <a:buNone/>
+            </a:pPr>
+            <a:r>
+              <a:rPr lang="en-US" sz="5400" b="1" dirty="0">
+                <a:solidFill>
+                  <a:srgbClr val="EEF2F6"/>
                 </a:solidFill>
                 <a:latin typeface="Bookman Old Style" pitchFamily="34" charset="0"/>
                 <a:ea typeface="Bookman Old Style" pitchFamily="34" charset="-122"/>
@@ -2996,9 +2912,32 @@
               </a:rPr>
               <a:t>3</a:t>
             </a:r>
-            <a:endParaRPr lang="en-US" sz="2600" dirty="0"/>
-          </a:p>
-        </p:txBody>
+            <a:endParaRPr lang="en-US" sz="5400" dirty="0"/>
+          </a:p>
+        </p:txBody>
+      </p:sp>
+      <p:sp>
+        <p:nvSpPr>
+          <p:cNvPr id="13" name="Shape 11"/>
+          <p:cNvSpPr/>
+          <p:nvPr/>
+        </p:nvSpPr>
+        <p:spPr>
+          <a:xfrm>
+            <a:off x="1828800" y="4846320"/>
+            <a:ext cx="0" cy="1051560"/>
+          </a:xfrm>
+          <a:prstGeom prst="line">
+            <a:avLst/>
+          </a:prstGeom>
+          <a:noFill/>
+          <a:ln w="25400">
+            <a:solidFill>
+              <a:srgbClr val="3E5A7C"/>
+            </a:solidFill>
+            <a:prstDash val="solid"/>
+          </a:ln>
+        </p:spPr>
       </p:sp>
       <p:sp>
         <p:nvSpPr>
@@ -3008,8 +2947,8 @@
         </p:nvSpPr>
         <p:spPr>
           <a:xfrm>
-            <a:off x="1691640" y="4754880"/>
-            <a:ext cx="9875520" cy="411480"/>
+            <a:off x="2057400" y="4800600"/>
+            <a:ext cx="9509760" cy="411480"/>
           </a:xfrm>
           <a:prstGeom prst="rect">
             <a:avLst/>
@@ -3033,7 +2972,7 @@
                 <a:ea typeface="Calibri" pitchFamily="34" charset="-122"/>
                 <a:cs typeface="Calibri" pitchFamily="34" charset="-120"/>
               </a:rPr>
-              <a:t>Tested and scales</a:t>
+              <a:t>Live per-hall readings</a:t>
             </a:r>
             <a:endParaRPr lang="en-US" sz="1800" dirty="0"/>
           </a:p>
@@ -3047,8 +2986,8 @@
         </p:nvSpPr>
         <p:spPr>
           <a:xfrm>
-            <a:off x="1691640" y="5175504"/>
-            <a:ext cx="9875520" cy="640080"/>
+            <a:off x="2057400" y="5239512"/>
+            <a:ext cx="9509760" cy="822960"/>
           </a:xfrm>
           <a:prstGeom prst="rect">
             <a:avLst/>
@@ -3072,7 +3011,7 @@
                 <a:ea typeface="Calibri" pitchFamily="34" charset="-122"/>
                 <a:cs typeface="Calibri" pitchFamily="34" charset="-120"/>
               </a:rPr>
-              <a:t>114 automated tests pass across all five modules; a 300-message burst sent to the real queue in 5.5 s, every one confirmed stored.</a:t>
+              <a:t>Both halls report side by side, so an overheating rack or a humidity swing is caught in seconds, not at the next round.</a:t>
             </a:r>
             <a:endParaRPr lang="en-US" sz="1350" dirty="0"/>
           </a:p>
@@ -3086,7 +3025,7 @@
         </p:nvSpPr>
         <p:spPr>
           <a:xfrm>
-            <a:off x="640080" y="6263640"/>
+            <a:off x="640080" y="6309360"/>
             <a:ext cx="10972800" cy="365760"/>
           </a:xfrm>
           <a:prstGeom prst="rect">
@@ -3157,24 +3096,24 @@
         </p:nvSpPr>
         <p:spPr>
           <a:xfrm>
-            <a:off x="640080" y="640080"/>
-            <a:ext cx="10972800" cy="640080"/>
-          </a:xfrm>
-          <a:prstGeom prst="rect">
-            <a:avLst/>
-          </a:prstGeom>
-          <a:noFill/>
-          <a:ln/>
-        </p:spPr>
-        <p:txBody>
-          <a:bodyPr wrap="square" rtlCol="0" anchor="ctr"/>
+            <a:off x="640080" y="594360"/>
+            <a:ext cx="10972800" cy="822960"/>
+          </a:xfrm>
+          <a:prstGeom prst="rect">
+            <a:avLst/>
+          </a:prstGeom>
+          <a:noFill/>
+          <a:ln/>
+        </p:spPr>
+        <p:txBody>
+          <a:bodyPr wrap="square" rtlCol="0" anchor="t"/>
           <a:lstStyle/>
           <a:p>
             <a:pPr indent="0" marL="0">
               <a:buNone/>
             </a:pPr>
             <a:r>
-              <a:rPr lang="en-US" sz="3000" b="1" dirty="0">
+              <a:rPr lang="en-US" sz="2800" b="1" dirty="0">
                 <a:solidFill>
                   <a:srgbClr val="FFFFFF"/>
                 </a:solidFill>
@@ -3184,30 +3123,65 @@
               </a:rPr>
               <a:t>Hardest Part — a fault only real AWS revealed</a:t>
             </a:r>
-            <a:endParaRPr lang="en-US" sz="3000" dirty="0"/>
-          </a:p>
-        </p:txBody>
-      </p:sp>
-      <p:sp>
-        <p:nvSpPr>
-          <p:cNvPr id="3" name="Shape 1"/>
-          <p:cNvSpPr/>
-          <p:nvPr/>
-        </p:nvSpPr>
-        <p:spPr>
-          <a:xfrm>
-            <a:off x="731520" y="1920240"/>
-            <a:ext cx="10698480" cy="1965960"/>
-          </a:xfrm>
-          <a:prstGeom prst="roundRect">
-            <a:avLst>
-              <a:gd name="adj" fmla="val 4651"/>
-            </a:avLst>
-          </a:prstGeom>
-          <a:solidFill>
-            <a:srgbClr val="233040"/>
-          </a:solidFill>
-          <a:ln w="15875">
+            <a:endParaRPr lang="en-US" sz="2800" dirty="0"/>
+          </a:p>
+        </p:txBody>
+      </p:sp>
+      <p:sp>
+        <p:nvSpPr>
+          <p:cNvPr id="3" name="Text 1"/>
+          <p:cNvSpPr/>
+          <p:nvPr/>
+        </p:nvSpPr>
+        <p:spPr>
+          <a:xfrm>
+            <a:off x="731520" y="1965960"/>
+            <a:ext cx="2377440" cy="548640"/>
+          </a:xfrm>
+          <a:prstGeom prst="rect">
+            <a:avLst/>
+          </a:prstGeom>
+          <a:noFill/>
+          <a:ln/>
+        </p:spPr>
+        <p:txBody>
+          <a:bodyPr wrap="square" lIns="0" tIns="0" rIns="0" bIns="0" rtlCol="0" anchor="ctr"/>
+          <a:lstStyle/>
+          <a:p>
+            <a:pPr indent="0" marL="0">
+              <a:buNone/>
+            </a:pPr>
+            <a:r>
+              <a:rPr lang="en-US" sz="2200" b="1" dirty="0">
+                <a:solidFill>
+                  <a:srgbClr val="E0A63C"/>
+                </a:solidFill>
+                <a:latin typeface="Bookman Old Style" pitchFamily="34" charset="0"/>
+                <a:ea typeface="Bookman Old Style" pitchFamily="34" charset="-122"/>
+                <a:cs typeface="Bookman Old Style" pitchFamily="34" charset="-120"/>
+              </a:rPr>
+              <a:t>Problem</a:t>
+            </a:r>
+            <a:endParaRPr lang="en-US" sz="2200" dirty="0"/>
+          </a:p>
+        </p:txBody>
+      </p:sp>
+      <p:sp>
+        <p:nvSpPr>
+          <p:cNvPr id="4" name="Shape 2"/>
+          <p:cNvSpPr/>
+          <p:nvPr/>
+        </p:nvSpPr>
+        <p:spPr>
+          <a:xfrm>
+            <a:off x="3200400" y="1920240"/>
+            <a:ext cx="0" cy="1737360"/>
+          </a:xfrm>
+          <a:prstGeom prst="line">
+            <a:avLst/>
+          </a:prstGeom>
+          <a:noFill/>
+          <a:ln w="25400">
             <a:solidFill>
               <a:srgbClr val="E0A63C"/>
             </a:solidFill>
@@ -3217,14 +3191,14 @@
       </p:sp>
       <p:sp>
         <p:nvSpPr>
-          <p:cNvPr id="4" name="Text 2"/>
-          <p:cNvSpPr/>
-          <p:nvPr/>
-        </p:nvSpPr>
-        <p:spPr>
-          <a:xfrm>
-            <a:off x="1005840" y="2103120"/>
-            <a:ext cx="3657600" cy="457200"/>
+          <p:cNvPr id="5" name="Text 3"/>
+          <p:cNvSpPr/>
+          <p:nvPr/>
+        </p:nvSpPr>
+        <p:spPr>
+          <a:xfrm>
+            <a:off x="3474720" y="1920240"/>
+            <a:ext cx="7955280" cy="1874520"/>
           </a:xfrm>
           <a:prstGeom prst="rect">
             <a:avLst/>
@@ -3237,85 +3211,81 @@
           <a:lstStyle/>
           <a:p>
             <a:pPr indent="0" marL="0">
-              <a:buNone/>
-            </a:pPr>
-            <a:r>
-              <a:rPr lang="en-US" sz="1900" b="1" dirty="0">
-                <a:solidFill>
-                  <a:srgbClr val="E0A63C"/>
+              <a:lnSpc>
+                <a:spcPct val="110000"/>
+              </a:lnSpc>
+              <a:buNone/>
+            </a:pPr>
+            <a:r>
+              <a:rPr lang="en-US" sz="1450" dirty="0">
+                <a:solidFill>
+                  <a:srgbClr val="D2DCE6"/>
+                </a:solidFill>
+                <a:latin typeface="Calibri" pitchFamily="34" charset="0"/>
+                <a:ea typeface="Calibri" pitchFamily="34" charset="-122"/>
+                <a:cs typeface="Calibri" pitchFamily="34" charset="-120"/>
+              </a:rPr>
+              <a:t>Whenever the AWS access-key environment variable existed, three files swapped in hardcoded emulator credentials — and real Lambda and EC2 inject that exact variable automatically. So genuine session credentials were thrown away and every DynamoDB and SQS call would have failed authentication. Locally the condition happened to be correct, so all 114 tests and the LocalStack run passed; the emulator cannot reproduce the trigger at all.</a:t>
+            </a:r>
+            <a:endParaRPr lang="en-US" sz="1450" dirty="0"/>
+          </a:p>
+        </p:txBody>
+      </p:sp>
+      <p:sp>
+        <p:nvSpPr>
+          <p:cNvPr id="6" name="Text 4"/>
+          <p:cNvSpPr/>
+          <p:nvPr/>
+        </p:nvSpPr>
+        <p:spPr>
+          <a:xfrm>
+            <a:off x="731520" y="4114800"/>
+            <a:ext cx="2377440" cy="548640"/>
+          </a:xfrm>
+          <a:prstGeom prst="rect">
+            <a:avLst/>
+          </a:prstGeom>
+          <a:noFill/>
+          <a:ln/>
+        </p:spPr>
+        <p:txBody>
+          <a:bodyPr wrap="square" lIns="0" tIns="0" rIns="0" bIns="0" rtlCol="0" anchor="ctr"/>
+          <a:lstStyle/>
+          <a:p>
+            <a:pPr indent="0" marL="0">
+              <a:buNone/>
+            </a:pPr>
+            <a:r>
+              <a:rPr lang="en-US" sz="2200" b="1" dirty="0">
+                <a:solidFill>
+                  <a:srgbClr val="6A839C"/>
                 </a:solidFill>
                 <a:latin typeface="Bookman Old Style" pitchFamily="34" charset="0"/>
                 <a:ea typeface="Bookman Old Style" pitchFamily="34" charset="-122"/>
                 <a:cs typeface="Bookman Old Style" pitchFamily="34" charset="-120"/>
               </a:rPr>
-              <a:t>Problem</a:t>
-            </a:r>
-            <a:endParaRPr lang="en-US" sz="1900" dirty="0"/>
-          </a:p>
-        </p:txBody>
-      </p:sp>
-      <p:sp>
-        <p:nvSpPr>
-          <p:cNvPr id="5" name="Text 3"/>
-          <p:cNvSpPr/>
-          <p:nvPr/>
-        </p:nvSpPr>
-        <p:spPr>
-          <a:xfrm>
-            <a:off x="1005840" y="2578608"/>
-            <a:ext cx="9966960" cy="1188720"/>
-          </a:xfrm>
-          <a:prstGeom prst="rect">
-            <a:avLst/>
-          </a:prstGeom>
-          <a:noFill/>
-          <a:ln/>
-        </p:spPr>
-        <p:txBody>
-          <a:bodyPr wrap="square" lIns="0" tIns="0" rIns="0" bIns="0" rtlCol="0" anchor="ctr"/>
-          <a:lstStyle/>
-          <a:p>
-            <a:pPr indent="0" marL="0">
-              <a:lnSpc>
-                <a:spcPct val="105000"/>
-              </a:lnSpc>
-              <a:buNone/>
-            </a:pPr>
-            <a:r>
-              <a:rPr lang="en-US" sz="1300" dirty="0">
-                <a:solidFill>
-                  <a:srgbClr val="D2DCE6"/>
-                </a:solidFill>
-                <a:latin typeface="Calibri" pitchFamily="34" charset="0"/>
-                <a:ea typeface="Calibri" pitchFamily="34" charset="-122"/>
-                <a:cs typeface="Calibri" pitchFamily="34" charset="-120"/>
-              </a:rPr>
-              <a:t>Whenever the AWS access-key environment variable existed, three files swapped in hardcoded emulator credentials — and real Lambda and EC2 inject that exact variable automatically. So genuine session credentials were thrown away and every DynamoDB and SQS call would have failed authentication. Locally the condition happened to be correct, so all 114 tests and the LocalStack run passed; the emulator cannot reproduce the trigger at all.</a:t>
-            </a:r>
-            <a:endParaRPr lang="en-US" sz="1300" dirty="0"/>
-          </a:p>
-        </p:txBody>
-      </p:sp>
-      <p:sp>
-        <p:nvSpPr>
-          <p:cNvPr id="6" name="Shape 4"/>
-          <p:cNvSpPr/>
-          <p:nvPr/>
-        </p:nvSpPr>
-        <p:spPr>
-          <a:xfrm>
-            <a:off x="731520" y="4041648"/>
-            <a:ext cx="10698480" cy="1965960"/>
-          </a:xfrm>
-          <a:prstGeom prst="roundRect">
-            <a:avLst>
-              <a:gd name="adj" fmla="val 4651"/>
-            </a:avLst>
-          </a:prstGeom>
-          <a:solidFill>
-            <a:srgbClr val="233040"/>
-          </a:solidFill>
-          <a:ln w="15875">
+              <a:t>Solution</a:t>
+            </a:r>
+            <a:endParaRPr lang="en-US" sz="2200" dirty="0"/>
+          </a:p>
+        </p:txBody>
+      </p:sp>
+      <p:sp>
+        <p:nvSpPr>
+          <p:cNvPr id="7" name="Shape 5"/>
+          <p:cNvSpPr/>
+          <p:nvPr/>
+        </p:nvSpPr>
+        <p:spPr>
+          <a:xfrm>
+            <a:off x="3200400" y="4069080"/>
+            <a:ext cx="0" cy="1737360"/>
+          </a:xfrm>
+          <a:prstGeom prst="line">
+            <a:avLst/>
+          </a:prstGeom>
+          <a:noFill/>
+          <a:ln w="25400">
             <a:solidFill>
               <a:srgbClr val="6A839C"/>
             </a:solidFill>
@@ -3325,53 +3295,14 @@
       </p:sp>
       <p:sp>
         <p:nvSpPr>
-          <p:cNvPr id="7" name="Text 5"/>
-          <p:cNvSpPr/>
-          <p:nvPr/>
-        </p:nvSpPr>
-        <p:spPr>
-          <a:xfrm>
-            <a:off x="1005840" y="4224528"/>
-            <a:ext cx="3657600" cy="457200"/>
-          </a:xfrm>
-          <a:prstGeom prst="rect">
-            <a:avLst/>
-          </a:prstGeom>
-          <a:noFill/>
-          <a:ln/>
-        </p:spPr>
-        <p:txBody>
-          <a:bodyPr wrap="square" lIns="0" tIns="0" rIns="0" bIns="0" rtlCol="0" anchor="ctr"/>
-          <a:lstStyle/>
-          <a:p>
-            <a:pPr indent="0" marL="0">
-              <a:buNone/>
-            </a:pPr>
-            <a:r>
-              <a:rPr lang="en-US" sz="1900" b="1" dirty="0">
-                <a:solidFill>
-                  <a:srgbClr val="6A839C"/>
-                </a:solidFill>
-                <a:latin typeface="Bookman Old Style" pitchFamily="34" charset="0"/>
-                <a:ea typeface="Bookman Old Style" pitchFamily="34" charset="-122"/>
-                <a:cs typeface="Bookman Old Style" pitchFamily="34" charset="-120"/>
-              </a:rPr>
-              <a:t>Solution</a:t>
-            </a:r>
-            <a:endParaRPr lang="en-US" sz="1900" dirty="0"/>
-          </a:p>
-        </p:txBody>
-      </p:sp>
-      <p:sp>
-        <p:nvSpPr>
           <p:cNvPr id="8" name="Text 6"/>
           <p:cNvSpPr/>
           <p:nvPr/>
         </p:nvSpPr>
         <p:spPr>
           <a:xfrm>
-            <a:off x="1005840" y="4700016"/>
-            <a:ext cx="9966960" cy="1188720"/>
+            <a:off x="3474720" y="4069080"/>
+            <a:ext cx="7955280" cy="1874520"/>
           </a:xfrm>
           <a:prstGeom prst="rect">
             <a:avLst/>
@@ -3385,12 +3316,12 @@
           <a:p>
             <a:pPr indent="0" marL="0">
               <a:lnSpc>
-                <a:spcPct val="105000"/>
+                <a:spcPct val="110000"/>
               </a:lnSpc>
               <a:buNone/>
             </a:pPr>
             <a:r>
-              <a:rPr lang="en-US" sz="1300" dirty="0">
+              <a:rPr lang="en-US" sz="1450" dirty="0">
                 <a:solidFill>
                   <a:srgbClr val="D2DCE6"/>
                 </a:solidFill>
@@ -3400,7 +3331,7 @@
               </a:rPr>
               <a:t>Gate the emulator credentials on a signal unique to local development — the explicit LocalStack endpoint override — applied across all three files, each with its own code shape, then redeployed and verified live with an end-to-end DynamoDB write and SQS receive. The same real-cloud testing also caught a pagination undercount, fixed with two new tests.</a:t>
             </a:r>
-            <a:endParaRPr lang="en-US" sz="1300" dirty="0"/>
+            <a:endParaRPr lang="en-US" sz="1450" dirty="0"/>
           </a:p>
         </p:txBody>
       </p:sp>

--- a/ppt/Nithin_X25125338_data-center-environmental-monitoring.pptx
+++ b/ppt/Nithin_X25125338_data-center-environmental-monitoring.pptx
@@ -3070,7 +3070,7 @@
     <p:bg>
       <p:bgPr>
         <a:solidFill>
-          <a:srgbClr val="18202B"/>
+          <a:srgbClr val="FFFFFF"/>
         </a:solidFill>
       </p:bgPr>
     </p:bg>
@@ -3096,7 +3096,7 @@
         </p:nvSpPr>
         <p:spPr>
           <a:xfrm>
-            <a:off x="640080" y="594360"/>
+            <a:off x="640080" y="502920"/>
             <a:ext cx="10972800" cy="822960"/>
           </a:xfrm>
           <a:prstGeom prst="rect">
@@ -3115,7 +3115,7 @@
             <a:r>
               <a:rPr lang="en-US" sz="2800" b="1" dirty="0">
                 <a:solidFill>
-                  <a:srgbClr val="FFFFFF"/>
+                  <a:srgbClr val="19212C"/>
                 </a:solidFill>
                 <a:latin typeface="Bookman Old Style" pitchFamily="34" charset="0"/>
                 <a:ea typeface="Bookman Old Style" pitchFamily="34" charset="-122"/>
@@ -3152,7 +3152,7 @@
               <a:buNone/>
             </a:pPr>
             <a:r>
-              <a:rPr lang="en-US" sz="2200" b="1" dirty="0">
+              <a:rPr lang="en-US" sz="2300" b="1" dirty="0">
                 <a:solidFill>
                   <a:srgbClr val="E0A63C"/>
                 </a:solidFill>
@@ -3162,7 +3162,7 @@
               </a:rPr>
               <a:t>Problem</a:t>
             </a:r>
-            <a:endParaRPr lang="en-US" sz="2200" dirty="0"/>
+            <a:endParaRPr lang="en-US" sz="2300" dirty="0"/>
           </a:p>
         </p:txBody>
       </p:sp>
@@ -3175,13 +3175,13 @@
         <p:spPr>
           <a:xfrm>
             <a:off x="3200400" y="1920240"/>
-            <a:ext cx="0" cy="1737360"/>
+            <a:ext cx="0" cy="1783080"/>
           </a:xfrm>
           <a:prstGeom prst="line">
             <a:avLst/>
           </a:prstGeom>
           <a:noFill/>
-          <a:ln w="25400">
+          <a:ln w="31750">
             <a:solidFill>
               <a:srgbClr val="E0A63C"/>
             </a:solidFill>
@@ -3198,7 +3198,7 @@
         <p:spPr>
           <a:xfrm>
             <a:off x="3474720" y="1920240"/>
-            <a:ext cx="7955280" cy="1874520"/>
+            <a:ext cx="7955280" cy="1920240"/>
           </a:xfrm>
           <a:prstGeom prst="rect">
             <a:avLst/>
@@ -3212,14 +3212,14 @@
           <a:p>
             <a:pPr indent="0" marL="0">
               <a:lnSpc>
-                <a:spcPct val="110000"/>
+                <a:spcPct val="112000"/>
               </a:lnSpc>
               <a:buNone/>
             </a:pPr>
             <a:r>
               <a:rPr lang="en-US" sz="1450" dirty="0">
                 <a:solidFill>
-                  <a:srgbClr val="D2DCE6"/>
+                  <a:srgbClr val="19212C"/>
                 </a:solidFill>
                 <a:latin typeface="Calibri" pitchFamily="34" charset="0"/>
                 <a:ea typeface="Calibri" pitchFamily="34" charset="-122"/>
@@ -3256,9 +3256,9 @@
               <a:buNone/>
             </a:pPr>
             <a:r>
-              <a:rPr lang="en-US" sz="2200" b="1" dirty="0">
-                <a:solidFill>
-                  <a:srgbClr val="6A839C"/>
+              <a:rPr lang="en-US" sz="2300" b="1" dirty="0">
+                <a:solidFill>
+                  <a:srgbClr val="3E5A7C"/>
                 </a:solidFill>
                 <a:latin typeface="Bookman Old Style" pitchFamily="34" charset="0"/>
                 <a:ea typeface="Bookman Old Style" pitchFamily="34" charset="-122"/>
@@ -3266,7 +3266,7 @@
               </a:rPr>
               <a:t>Solution</a:t>
             </a:r>
-            <a:endParaRPr lang="en-US" sz="2200" dirty="0"/>
+            <a:endParaRPr lang="en-US" sz="2300" dirty="0"/>
           </a:p>
         </p:txBody>
       </p:sp>
@@ -3279,15 +3279,15 @@
         <p:spPr>
           <a:xfrm>
             <a:off x="3200400" y="4069080"/>
-            <a:ext cx="0" cy="1737360"/>
+            <a:ext cx="0" cy="1783080"/>
           </a:xfrm>
           <a:prstGeom prst="line">
             <a:avLst/>
           </a:prstGeom>
           <a:noFill/>
-          <a:ln w="25400">
+          <a:ln w="31750">
             <a:solidFill>
-              <a:srgbClr val="6A839C"/>
+              <a:srgbClr val="3E5A7C"/>
             </a:solidFill>
             <a:prstDash val="solid"/>
           </a:ln>
@@ -3302,7 +3302,7 @@
         <p:spPr>
           <a:xfrm>
             <a:off x="3474720" y="4069080"/>
-            <a:ext cx="7955280" cy="1874520"/>
+            <a:ext cx="7955280" cy="1920240"/>
           </a:xfrm>
           <a:prstGeom prst="rect">
             <a:avLst/>
@@ -3316,14 +3316,14 @@
           <a:p>
             <a:pPr indent="0" marL="0">
               <a:lnSpc>
-                <a:spcPct val="110000"/>
+                <a:spcPct val="112000"/>
               </a:lnSpc>
               <a:buNone/>
             </a:pPr>
             <a:r>
               <a:rPr lang="en-US" sz="1450" dirty="0">
                 <a:solidFill>
-                  <a:srgbClr val="D2DCE6"/>
+                  <a:srgbClr val="19212C"/>
                 </a:solidFill>
                 <a:latin typeface="Calibri" pitchFamily="34" charset="0"/>
                 <a:ea typeface="Calibri" pitchFamily="34" charset="-122"/>

--- a/ppt/Nithin_X25125338_data-center-environmental-monitoring.pptx
+++ b/ppt/Nithin_X25125338_data-center-environmental-monitoring.pptx
@@ -1144,34 +1144,83 @@
       </p:grpSpPr>
       <p:sp>
         <p:nvSpPr>
-          <p:cNvPr id="2" name="Shape 0"/>
-          <p:cNvSpPr/>
-          <p:nvPr/>
-        </p:nvSpPr>
-        <p:spPr>
-          <a:xfrm>
-            <a:off x="0" y="0"/>
-            <a:ext cx="4663440" cy="6858000"/>
-          </a:xfrm>
-          <a:prstGeom prst="rect">
-            <a:avLst/>
-          </a:prstGeom>
-          <a:solidFill>
-            <a:srgbClr val="2C3E55"/>
-          </a:solidFill>
-          <a:ln/>
-        </p:spPr>
-      </p:sp>
-      <p:sp>
-        <p:nvSpPr>
-          <p:cNvPr id="3" name="Text 1"/>
-          <p:cNvSpPr/>
-          <p:nvPr/>
-        </p:nvSpPr>
-        <p:spPr>
-          <a:xfrm>
-            <a:off x="502920" y="1280160"/>
-            <a:ext cx="3749040" cy="2377440"/>
+          <p:cNvPr id="2" name="Text 0"/>
+          <p:cNvSpPr/>
+          <p:nvPr/>
+        </p:nvSpPr>
+        <p:spPr>
+          <a:xfrm>
+            <a:off x="658368" y="777240"/>
+            <a:ext cx="10607040" cy="1280160"/>
+          </a:xfrm>
+          <a:prstGeom prst="rect">
+            <a:avLst/>
+          </a:prstGeom>
+          <a:noFill/>
+          <a:ln/>
+        </p:spPr>
+        <p:txBody>
+          <a:bodyPr wrap="square" rtlCol="0" anchor="ctr"/>
+          <a:lstStyle/>
+          <a:p>
+            <a:pPr indent="0" marL="0">
+              <a:lnSpc>
+                <a:spcPct val="108000"/>
+              </a:lnSpc>
+              <a:buNone/>
+            </a:pPr>
+            <a:r>
+              <a:rPr lang="en-US" sz="1800" dirty="0">
+                <a:solidFill>
+                  <a:srgbClr val="D2DCE6"/>
+                </a:solidFill>
+                <a:latin typeface="Calibri" pitchFamily="34" charset="0"/>
+                <a:ea typeface="Calibri" pitchFamily="34" charset="-122"/>
+                <a:cs typeface="Calibri" pitchFamily="34" charset="-120"/>
+              </a:rPr>
+              <a:t>An overheating server, a humidity swing toward condensation, or restricted airflow around a rack can each trigger a costly unplanned outage — and fixed rounds see them only after the fact.</a:t>
+            </a:r>
+            <a:endParaRPr lang="en-US" sz="1800" dirty="0"/>
+          </a:p>
+        </p:txBody>
+      </p:sp>
+      <p:sp>
+        <p:nvSpPr>
+          <p:cNvPr id="3" name="Shape 1"/>
+          <p:cNvSpPr/>
+          <p:nvPr/>
+        </p:nvSpPr>
+        <p:spPr>
+          <a:xfrm>
+            <a:off x="1097280" y="2377440"/>
+            <a:ext cx="9966960" cy="2011680"/>
+          </a:xfrm>
+          <a:prstGeom prst="roundRect">
+            <a:avLst>
+              <a:gd name="adj" fmla="val 5455"/>
+            </a:avLst>
+          </a:prstGeom>
+          <a:solidFill>
+            <a:srgbClr val="1F2A38"/>
+          </a:solidFill>
+          <a:ln w="15875">
+            <a:solidFill>
+              <a:srgbClr val="E0A63C"/>
+            </a:solidFill>
+            <a:prstDash val="solid"/>
+          </a:ln>
+        </p:spPr>
+      </p:sp>
+      <p:sp>
+        <p:nvSpPr>
+          <p:cNvPr id="4" name="Text 2"/>
+          <p:cNvSpPr/>
+          <p:nvPr/>
+        </p:nvSpPr>
+        <p:spPr>
+          <a:xfrm>
+            <a:off x="1463040" y="2651760"/>
+            <a:ext cx="9235440" cy="1005840"/>
           </a:xfrm>
           <a:prstGeom prst="rect">
             <a:avLst/>
@@ -1187,7 +1236,7 @@
               <a:buNone/>
             </a:pPr>
             <a:r>
-              <a:rPr lang="en-US" sz="3400" b="1" dirty="0">
+              <a:rPr lang="en-US" sz="3600" b="1" dirty="0">
                 <a:solidFill>
                   <a:srgbClr val="FFFFFF"/>
                 </a:solidFill>
@@ -1197,20 +1246,20 @@
               </a:rPr>
               <a:t>Data Center Environmental Monitoring</a:t>
             </a:r>
-            <a:endParaRPr lang="en-US" sz="3400" dirty="0"/>
-          </a:p>
-        </p:txBody>
-      </p:sp>
-      <p:sp>
-        <p:nvSpPr>
-          <p:cNvPr id="4" name="Text 2"/>
-          <p:cNvSpPr/>
-          <p:nvPr/>
-        </p:nvSpPr>
-        <p:spPr>
-          <a:xfrm>
-            <a:off x="521208" y="5394960"/>
-            <a:ext cx="3840480" cy="731520"/>
+            <a:endParaRPr lang="en-US" sz="3600" dirty="0"/>
+          </a:p>
+        </p:txBody>
+      </p:sp>
+      <p:sp>
+        <p:nvSpPr>
+          <p:cNvPr id="5" name="Text 3"/>
+          <p:cNvSpPr/>
+          <p:nvPr/>
+        </p:nvSpPr>
+        <p:spPr>
+          <a:xfrm>
+            <a:off x="1481328" y="3703320"/>
+            <a:ext cx="9144000" cy="457200"/>
           </a:xfrm>
           <a:prstGeom prst="rect">
             <a:avLst/>
@@ -1228,7 +1277,7 @@
             <a:r>
               <a:rPr lang="en-US" sz="1500" dirty="0">
                 <a:solidFill>
-                  <a:srgbClr val="D2DCE6"/>
+                  <a:srgbClr val="6A839C"/>
                 </a:solidFill>
                 <a:latin typeface="Calibri" pitchFamily="34" charset="0"/>
                 <a:ea typeface="Calibri" pitchFamily="34" charset="-122"/>
@@ -1242,56 +1291,14 @@
       </p:sp>
       <p:sp>
         <p:nvSpPr>
-          <p:cNvPr id="5" name="Text 3"/>
-          <p:cNvSpPr/>
-          <p:nvPr/>
-        </p:nvSpPr>
-        <p:spPr>
-          <a:xfrm>
-            <a:off x="5120640" y="1371600"/>
-            <a:ext cx="6492240" cy="2011680"/>
-          </a:xfrm>
-          <a:prstGeom prst="rect">
-            <a:avLst/>
-          </a:prstGeom>
-          <a:noFill/>
-          <a:ln/>
-        </p:spPr>
-        <p:txBody>
-          <a:bodyPr wrap="square" rtlCol="0" anchor="ctr"/>
-          <a:lstStyle/>
-          <a:p>
-            <a:pPr indent="0" marL="0">
-              <a:lnSpc>
-                <a:spcPct val="112000"/>
-              </a:lnSpc>
-              <a:buNone/>
-            </a:pPr>
-            <a:r>
-              <a:rPr lang="en-US" sz="2000" dirty="0">
-                <a:solidFill>
-                  <a:srgbClr val="D2DCE6"/>
-                </a:solidFill>
-                <a:latin typeface="Calibri" pitchFamily="34" charset="0"/>
-                <a:ea typeface="Calibri" pitchFamily="34" charset="-122"/>
-                <a:cs typeface="Calibri" pitchFamily="34" charset="-120"/>
-              </a:rPr>
-              <a:t>An overheating server, a humidity swing toward condensation, or restricted airflow around a rack can each trigger a costly unplanned outage — and fixed rounds see them only after the fact.</a:t>
-            </a:r>
-            <a:endParaRPr lang="en-US" sz="2000" dirty="0"/>
-          </a:p>
-        </p:txBody>
-      </p:sp>
-      <p:sp>
-        <p:nvSpPr>
           <p:cNvPr id="6" name="Shape 4"/>
           <p:cNvSpPr/>
           <p:nvPr/>
         </p:nvSpPr>
         <p:spPr>
           <a:xfrm>
-            <a:off x="5120640" y="4023360"/>
-            <a:ext cx="2926080" cy="566928"/>
+            <a:off x="1097280" y="4709160"/>
+            <a:ext cx="2651760" cy="566928"/>
           </a:xfrm>
           <a:prstGeom prst="roundRect">
             <a:avLst>
@@ -1317,8 +1324,8 @@
         </p:nvSpPr>
         <p:spPr>
           <a:xfrm>
-            <a:off x="5120640" y="4023360"/>
-            <a:ext cx="2926080" cy="566928"/>
+            <a:off x="1097280" y="4709160"/>
+            <a:ext cx="2651760" cy="566928"/>
           </a:xfrm>
           <a:prstGeom prst="rect">
             <a:avLst/>
@@ -1356,8 +1363,8 @@
         </p:nvSpPr>
         <p:spPr>
           <a:xfrm>
-            <a:off x="5120640" y="4709160"/>
-            <a:ext cx="2926080" cy="566928"/>
+            <a:off x="3977640" y="4709160"/>
+            <a:ext cx="2651760" cy="566928"/>
           </a:xfrm>
           <a:prstGeom prst="roundRect">
             <a:avLst>
@@ -1383,8 +1390,8 @@
         </p:nvSpPr>
         <p:spPr>
           <a:xfrm>
-            <a:off x="5120640" y="4709160"/>
-            <a:ext cx="2926080" cy="566928"/>
+            <a:off x="3977640" y="4709160"/>
+            <a:ext cx="2651760" cy="566928"/>
           </a:xfrm>
           <a:prstGeom prst="rect">
             <a:avLst/>
@@ -1422,8 +1429,8 @@
         </p:nvSpPr>
         <p:spPr>
           <a:xfrm>
-            <a:off x="5120640" y="5394960"/>
-            <a:ext cx="2926080" cy="566928"/>
+            <a:off x="6858000" y="4709160"/>
+            <a:ext cx="2651760" cy="566928"/>
           </a:xfrm>
           <a:prstGeom prst="roundRect">
             <a:avLst>
@@ -1449,8 +1456,8 @@
         </p:nvSpPr>
         <p:spPr>
           <a:xfrm>
-            <a:off x="5120640" y="5394960"/>
-            <a:ext cx="2926080" cy="566928"/>
+            <a:off x="6858000" y="4709160"/>
+            <a:ext cx="2651760" cy="566928"/>
           </a:xfrm>
           <a:prstGeom prst="rect">
             <a:avLst/>
@@ -1488,8 +1495,8 @@
         </p:nvSpPr>
         <p:spPr>
           <a:xfrm>
-            <a:off x="5120640" y="6172200"/>
-            <a:ext cx="6400800" cy="365760"/>
+            <a:off x="658368" y="6355080"/>
+            <a:ext cx="10972800" cy="320040"/>
           </a:xfrm>
           <a:prstGeom prst="rect">
             <a:avLst/>
@@ -1598,12 +1605,12 @@
         </p:nvSpPr>
         <p:spPr>
           <a:xfrm>
-            <a:off x="640080" y="1554480"/>
-            <a:ext cx="3200400" cy="3383280"/>
+            <a:off x="640080" y="1874520"/>
+            <a:ext cx="2286000" cy="1280160"/>
           </a:xfrm>
           <a:prstGeom prst="roundRect">
             <a:avLst>
-              <a:gd name="adj" fmla="val 2857"/>
+              <a:gd name="adj" fmla="val 7143"/>
             </a:avLst>
           </a:prstGeom>
           <a:solidFill>
@@ -1619,63 +1626,147 @@
       </p:sp>
       <p:sp>
         <p:nvSpPr>
-          <p:cNvPr id="4" name="Text 2"/>
-          <p:cNvSpPr/>
-          <p:nvPr/>
-        </p:nvSpPr>
-        <p:spPr>
-          <a:xfrm>
-            <a:off x="640080" y="1691640"/>
-            <a:ext cx="3200400" cy="365760"/>
-          </a:xfrm>
-          <a:prstGeom prst="rect">
-            <a:avLst/>
-          </a:prstGeom>
-          <a:noFill/>
-          <a:ln/>
-        </p:spPr>
-        <p:txBody>
-          <a:bodyPr wrap="square" rtlCol="0" anchor="ctr"/>
+          <p:cNvPr id="4" name="Shape 2"/>
+          <p:cNvSpPr/>
+          <p:nvPr/>
+        </p:nvSpPr>
+        <p:spPr>
+          <a:xfrm>
+            <a:off x="1691640" y="2039112"/>
+            <a:ext cx="182880" cy="182880"/>
+          </a:xfrm>
+          <a:prstGeom prst="ellipse">
+            <a:avLst/>
+          </a:prstGeom>
+          <a:solidFill>
+            <a:srgbClr val="6A839C"/>
+          </a:solidFill>
+          <a:ln/>
+        </p:spPr>
+      </p:sp>
+      <p:sp>
+        <p:nvSpPr>
+          <p:cNvPr id="5" name="Text 3"/>
+          <p:cNvSpPr/>
+          <p:nvPr/>
+        </p:nvSpPr>
+        <p:spPr>
+          <a:xfrm>
+            <a:off x="612648" y="2258568"/>
+            <a:ext cx="2340864" cy="365760"/>
+          </a:xfrm>
+          <a:prstGeom prst="rect">
+            <a:avLst/>
+          </a:prstGeom>
+          <a:noFill/>
+          <a:ln/>
+        </p:spPr>
+        <p:txBody>
+          <a:bodyPr wrap="square" lIns="0" tIns="0" rIns="0" bIns="0" rtlCol="0" anchor="ctr"/>
           <a:lstStyle/>
           <a:p>
             <a:pPr algn="ctr" indent="0" marL="0">
               <a:buNone/>
             </a:pPr>
             <a:r>
-              <a:rPr lang="en-US" sz="1200" b="1" spc="300" kern="0" dirty="0">
-                <a:solidFill>
-                  <a:srgbClr val="6A839C"/>
+              <a:rPr lang="en-US" sz="1450" b="1" dirty="0">
+                <a:solidFill>
+                  <a:srgbClr val="19212C"/>
                 </a:solidFill>
                 <a:latin typeface="Calibri" pitchFamily="34" charset="0"/>
                 <a:ea typeface="Calibri" pitchFamily="34" charset="-122"/>
                 <a:cs typeface="Calibri" pitchFamily="34" charset="-120"/>
               </a:rPr>
-              <a:t>EDGE</a:t>
-            </a:r>
-            <a:endParaRPr lang="en-US" sz="1200" dirty="0"/>
-          </a:p>
-        </p:txBody>
-      </p:sp>
-      <p:sp>
-        <p:nvSpPr>
-          <p:cNvPr id="5" name="Shape 3"/>
-          <p:cNvSpPr/>
-          <p:nvPr/>
-        </p:nvSpPr>
-        <p:spPr>
-          <a:xfrm>
-            <a:off x="914400" y="2286000"/>
-            <a:ext cx="2651760" cy="1005840"/>
+              <a:t>Hall sensors</a:t>
+            </a:r>
+            <a:endParaRPr lang="en-US" sz="1450" dirty="0"/>
+          </a:p>
+        </p:txBody>
+      </p:sp>
+      <p:sp>
+        <p:nvSpPr>
+          <p:cNvPr id="6" name="Text 4"/>
+          <p:cNvSpPr/>
+          <p:nvPr/>
+        </p:nvSpPr>
+        <p:spPr>
+          <a:xfrm>
+            <a:off x="640080" y="2606040"/>
+            <a:ext cx="2286000" cy="411480"/>
+          </a:xfrm>
+          <a:prstGeom prst="rect">
+            <a:avLst/>
+          </a:prstGeom>
+          <a:noFill/>
+          <a:ln/>
+        </p:spPr>
+        <p:txBody>
+          <a:bodyPr wrap="square" lIns="0" tIns="0" rIns="0" bIns="0" rtlCol="0" anchor="t"/>
+          <a:lstStyle/>
+          <a:p>
+            <a:pPr algn="ctr" indent="0" marL="0">
+              <a:buNone/>
+            </a:pPr>
+            <a:r>
+              <a:rPr lang="en-US" sz="1050" dirty="0">
+                <a:solidFill>
+                  <a:srgbClr val="5F6B78"/>
+                </a:solidFill>
+                <a:latin typeface="Calibri" pitchFamily="34" charset="0"/>
+                <a:ea typeface="Calibri" pitchFamily="34" charset="-122"/>
+                <a:cs typeface="Calibri" pitchFamily="34" charset="-120"/>
+              </a:rPr>
+              <a:t>10 · 2 halls · 5 metrics</a:t>
+            </a:r>
+            <a:endParaRPr lang="en-US" sz="1050" dirty="0"/>
+          </a:p>
+        </p:txBody>
+      </p:sp>
+      <p:sp>
+        <p:nvSpPr>
+          <p:cNvPr id="7" name="Shape 5"/>
+          <p:cNvSpPr/>
+          <p:nvPr/>
+        </p:nvSpPr>
+        <p:spPr>
+          <a:xfrm>
+            <a:off x="2944368" y="2514600"/>
+            <a:ext cx="1975104" cy="0"/>
+          </a:xfrm>
+          <a:prstGeom prst="line">
+            <a:avLst/>
+          </a:prstGeom>
+          <a:noFill/>
+          <a:ln w="25400">
+            <a:solidFill>
+              <a:srgbClr val="6A839C"/>
+            </a:solidFill>
+            <a:prstDash val="solid"/>
+            <a:headEnd type="none"/>
+            <a:tailEnd type="triangle"/>
+          </a:ln>
+        </p:spPr>
+      </p:sp>
+      <p:sp>
+        <p:nvSpPr>
+          <p:cNvPr id="8" name="Shape 6"/>
+          <p:cNvSpPr/>
+          <p:nvPr/>
+        </p:nvSpPr>
+        <p:spPr>
+          <a:xfrm>
+            <a:off x="4937760" y="1874520"/>
+            <a:ext cx="2286000" cy="1280160"/>
           </a:xfrm>
           <a:prstGeom prst="roundRect">
             <a:avLst>
-              <a:gd name="adj" fmla="val 7273"/>
+              <a:gd name="adj" fmla="val 7143"/>
             </a:avLst>
           </a:prstGeom>
           <a:solidFill>
-            <a:srgbClr val="FFFFFF"/>
-          </a:solidFill>
-          <a:ln w="15240">
+            <a:srgbClr val="EEF2F6"/>
+          </a:solidFill>
+          <a:ln w="19050">
             <a:solidFill>
               <a:srgbClr val="6A839C"/>
             </a:solidFill>
@@ -1685,14 +1776,34 @@
       </p:sp>
       <p:sp>
         <p:nvSpPr>
-          <p:cNvPr id="6" name="Text 4"/>
-          <p:cNvSpPr/>
-          <p:nvPr/>
-        </p:nvSpPr>
-        <p:spPr>
-          <a:xfrm>
-            <a:off x="914400" y="2432304"/>
-            <a:ext cx="2651760" cy="365760"/>
+          <p:cNvPr id="9" name="Shape 7"/>
+          <p:cNvSpPr/>
+          <p:nvPr/>
+        </p:nvSpPr>
+        <p:spPr>
+          <a:xfrm>
+            <a:off x="5989320" y="2039112"/>
+            <a:ext cx="182880" cy="182880"/>
+          </a:xfrm>
+          <a:prstGeom prst="ellipse">
+            <a:avLst/>
+          </a:prstGeom>
+          <a:solidFill>
+            <a:srgbClr val="6A839C"/>
+          </a:solidFill>
+          <a:ln/>
+        </p:spPr>
+      </p:sp>
+      <p:sp>
+        <p:nvSpPr>
+          <p:cNvPr id="10" name="Text 8"/>
+          <p:cNvSpPr/>
+          <p:nvPr/>
+        </p:nvSpPr>
+        <p:spPr>
+          <a:xfrm>
+            <a:off x="4910328" y="2258568"/>
+            <a:ext cx="2340864" cy="365760"/>
           </a:xfrm>
           <a:prstGeom prst="rect">
             <a:avLst/>
@@ -1708,7 +1819,7 @@
               <a:buNone/>
             </a:pPr>
             <a:r>
-              <a:rPr lang="en-US" sz="1400" b="1" dirty="0">
+              <a:rPr lang="en-US" sz="1450" b="1" dirty="0">
                 <a:solidFill>
                   <a:srgbClr val="19212C"/>
                 </a:solidFill>
@@ -1716,38 +1827,38 @@
                 <a:ea typeface="Calibri" pitchFamily="34" charset="-122"/>
                 <a:cs typeface="Calibri" pitchFamily="34" charset="-120"/>
               </a:rPr>
-              <a:t>Hall sensors</a:t>
-            </a:r>
-            <a:endParaRPr lang="en-US" sz="1400" dirty="0"/>
-          </a:p>
-        </p:txBody>
-      </p:sp>
-      <p:sp>
-        <p:nvSpPr>
-          <p:cNvPr id="7" name="Text 5"/>
-          <p:cNvSpPr/>
-          <p:nvPr/>
-        </p:nvSpPr>
-        <p:spPr>
-          <a:xfrm>
-            <a:off x="914400" y="2816352"/>
-            <a:ext cx="2651760" cy="365760"/>
-          </a:xfrm>
-          <a:prstGeom prst="rect">
-            <a:avLst/>
-          </a:prstGeom>
-          <a:noFill/>
-          <a:ln/>
-        </p:spPr>
-        <p:txBody>
-          <a:bodyPr wrap="square" lIns="0" tIns="0" rIns="0" bIns="0" rtlCol="0" anchor="ctr"/>
+              <a:t>Fog node</a:t>
+            </a:r>
+            <a:endParaRPr lang="en-US" sz="1450" dirty="0"/>
+          </a:p>
+        </p:txBody>
+      </p:sp>
+      <p:sp>
+        <p:nvSpPr>
+          <p:cNvPr id="11" name="Text 9"/>
+          <p:cNvSpPr/>
+          <p:nvPr/>
+        </p:nvSpPr>
+        <p:spPr>
+          <a:xfrm>
+            <a:off x="4937760" y="2606040"/>
+            <a:ext cx="2286000" cy="411480"/>
+          </a:xfrm>
+          <a:prstGeom prst="rect">
+            <a:avLst/>
+          </a:prstGeom>
+          <a:noFill/>
+          <a:ln/>
+        </p:spPr>
+        <p:txBody>
+          <a:bodyPr wrap="square" lIns="0" tIns="0" rIns="0" bIns="0" rtlCol="0" anchor="t"/>
           <a:lstStyle/>
           <a:p>
             <a:pPr algn="ctr" indent="0" marL="0">
               <a:buNone/>
             </a:pPr>
             <a:r>
-              <a:rPr lang="en-US" sz="1000" dirty="0">
+              <a:rPr lang="en-US" sz="1050" dirty="0">
                 <a:solidFill>
                   <a:srgbClr val="5F6B78"/>
                 </a:solidFill>
@@ -1755,155 +1866,51 @@
                 <a:ea typeface="Calibri" pitchFamily="34" charset="-122"/>
                 <a:cs typeface="Calibri" pitchFamily="34" charset="-120"/>
               </a:rPr>
-              <a:t>10 · 2 halls · 5 metrics</a:t>
-            </a:r>
-            <a:endParaRPr lang="en-US" sz="1000" dirty="0"/>
-          </a:p>
-        </p:txBody>
-      </p:sp>
-      <p:sp>
-        <p:nvSpPr>
-          <p:cNvPr id="8" name="Shape 6"/>
-          <p:cNvSpPr/>
-          <p:nvPr/>
-        </p:nvSpPr>
-        <p:spPr>
-          <a:xfrm>
-            <a:off x="914400" y="3520440"/>
-            <a:ext cx="2651760" cy="1005840"/>
-          </a:xfrm>
-          <a:prstGeom prst="roundRect">
-            <a:avLst>
-              <a:gd name="adj" fmla="val 7273"/>
-            </a:avLst>
-          </a:prstGeom>
-          <a:solidFill>
-            <a:srgbClr val="FFFFFF"/>
-          </a:solidFill>
-          <a:ln w="15240">
+              <a:t>windows · edge alerts</a:t>
+            </a:r>
+            <a:endParaRPr lang="en-US" sz="1050" dirty="0"/>
+          </a:p>
+        </p:txBody>
+      </p:sp>
+      <p:sp>
+        <p:nvSpPr>
+          <p:cNvPr id="12" name="Shape 10"/>
+          <p:cNvSpPr/>
+          <p:nvPr/>
+        </p:nvSpPr>
+        <p:spPr>
+          <a:xfrm>
+            <a:off x="7242048" y="2514600"/>
+            <a:ext cx="1975104" cy="0"/>
+          </a:xfrm>
+          <a:prstGeom prst="line">
+            <a:avLst/>
+          </a:prstGeom>
+          <a:noFill/>
+          <a:ln w="25400">
             <a:solidFill>
               <a:srgbClr val="6A839C"/>
             </a:solidFill>
             <a:prstDash val="solid"/>
-          </a:ln>
-        </p:spPr>
-      </p:sp>
-      <p:sp>
-        <p:nvSpPr>
-          <p:cNvPr id="9" name="Text 7"/>
-          <p:cNvSpPr/>
-          <p:nvPr/>
-        </p:nvSpPr>
-        <p:spPr>
-          <a:xfrm>
-            <a:off x="914400" y="3666744"/>
-            <a:ext cx="2651760" cy="365760"/>
-          </a:xfrm>
-          <a:prstGeom prst="rect">
-            <a:avLst/>
-          </a:prstGeom>
-          <a:noFill/>
-          <a:ln/>
-        </p:spPr>
-        <p:txBody>
-          <a:bodyPr wrap="square" lIns="0" tIns="0" rIns="0" bIns="0" rtlCol="0" anchor="ctr"/>
-          <a:lstStyle/>
-          <a:p>
-            <a:pPr algn="ctr" indent="0" marL="0">
-              <a:buNone/>
-            </a:pPr>
-            <a:r>
-              <a:rPr lang="en-US" sz="1400" b="1" dirty="0">
-                <a:solidFill>
-                  <a:srgbClr val="19212C"/>
-                </a:solidFill>
-                <a:latin typeface="Calibri" pitchFamily="34" charset="0"/>
-                <a:ea typeface="Calibri" pitchFamily="34" charset="-122"/>
-                <a:cs typeface="Calibri" pitchFamily="34" charset="-120"/>
-              </a:rPr>
-              <a:t>Fog node</a:t>
-            </a:r>
-            <a:endParaRPr lang="en-US" sz="1400" dirty="0"/>
-          </a:p>
-        </p:txBody>
-      </p:sp>
-      <p:sp>
-        <p:nvSpPr>
-          <p:cNvPr id="10" name="Text 8"/>
-          <p:cNvSpPr/>
-          <p:nvPr/>
-        </p:nvSpPr>
-        <p:spPr>
-          <a:xfrm>
-            <a:off x="914400" y="4050792"/>
-            <a:ext cx="2651760" cy="365760"/>
-          </a:xfrm>
-          <a:prstGeom prst="rect">
-            <a:avLst/>
-          </a:prstGeom>
-          <a:noFill/>
-          <a:ln/>
-        </p:spPr>
-        <p:txBody>
-          <a:bodyPr wrap="square" lIns="0" tIns="0" rIns="0" bIns="0" rtlCol="0" anchor="ctr"/>
-          <a:lstStyle/>
-          <a:p>
-            <a:pPr algn="ctr" indent="0" marL="0">
-              <a:buNone/>
-            </a:pPr>
-            <a:r>
-              <a:rPr lang="en-US" sz="1000" dirty="0">
-                <a:solidFill>
-                  <a:srgbClr val="5F6B78"/>
-                </a:solidFill>
-                <a:latin typeface="Calibri" pitchFamily="34" charset="0"/>
-                <a:ea typeface="Calibri" pitchFamily="34" charset="-122"/>
-                <a:cs typeface="Calibri" pitchFamily="34" charset="-120"/>
-              </a:rPr>
-              <a:t>windows · edge alerts</a:t>
-            </a:r>
-            <a:endParaRPr lang="en-US" sz="1000" dirty="0"/>
-          </a:p>
-        </p:txBody>
-      </p:sp>
-      <p:sp>
-        <p:nvSpPr>
-          <p:cNvPr id="11" name="Shape 9"/>
-          <p:cNvSpPr/>
-          <p:nvPr/>
-        </p:nvSpPr>
-        <p:spPr>
-          <a:xfrm>
-            <a:off x="3886200" y="3246120"/>
-            <a:ext cx="502920" cy="0"/>
-          </a:xfrm>
-          <a:prstGeom prst="line">
-            <a:avLst/>
-          </a:prstGeom>
-          <a:noFill/>
-          <a:ln w="31750">
-            <a:solidFill>
-              <a:srgbClr val="2C3E55"/>
-            </a:solidFill>
-            <a:prstDash val="solid"/>
+            <a:headEnd type="none"/>
             <a:tailEnd type="triangle"/>
           </a:ln>
         </p:spPr>
       </p:sp>
       <p:sp>
         <p:nvSpPr>
-          <p:cNvPr id="12" name="Shape 10"/>
-          <p:cNvSpPr/>
-          <p:nvPr/>
-        </p:nvSpPr>
-        <p:spPr>
-          <a:xfrm>
-            <a:off x="4572000" y="1554480"/>
-            <a:ext cx="6949440" cy="3383280"/>
+          <p:cNvPr id="13" name="Shape 11"/>
+          <p:cNvSpPr/>
+          <p:nvPr/>
+        </p:nvSpPr>
+        <p:spPr>
+          <a:xfrm>
+            <a:off x="9235440" y="1874520"/>
+            <a:ext cx="2286000" cy="1280160"/>
           </a:xfrm>
           <a:prstGeom prst="roundRect">
             <a:avLst>
-              <a:gd name="adj" fmla="val 2703"/>
+              <a:gd name="adj" fmla="val 7143"/>
             </a:avLst>
           </a:prstGeom>
           <a:solidFill>
@@ -1919,63 +1926,122 @@
       </p:sp>
       <p:sp>
         <p:nvSpPr>
-          <p:cNvPr id="13" name="Text 11"/>
-          <p:cNvSpPr/>
-          <p:nvPr/>
-        </p:nvSpPr>
-        <p:spPr>
-          <a:xfrm>
-            <a:off x="4572000" y="1691640"/>
-            <a:ext cx="6949440" cy="365760"/>
-          </a:xfrm>
-          <a:prstGeom prst="rect">
-            <a:avLst/>
-          </a:prstGeom>
-          <a:noFill/>
-          <a:ln/>
-        </p:spPr>
-        <p:txBody>
-          <a:bodyPr wrap="square" rtlCol="0" anchor="ctr"/>
+          <p:cNvPr id="14" name="Shape 12"/>
+          <p:cNvSpPr/>
+          <p:nvPr/>
+        </p:nvSpPr>
+        <p:spPr>
+          <a:xfrm>
+            <a:off x="10287000" y="2039112"/>
+            <a:ext cx="182880" cy="182880"/>
+          </a:xfrm>
+          <a:prstGeom prst="ellipse">
+            <a:avLst/>
+          </a:prstGeom>
+          <a:solidFill>
+            <a:srgbClr val="2C3E55"/>
+          </a:solidFill>
+          <a:ln/>
+        </p:spPr>
+      </p:sp>
+      <p:sp>
+        <p:nvSpPr>
+          <p:cNvPr id="15" name="Text 13"/>
+          <p:cNvSpPr/>
+          <p:nvPr/>
+        </p:nvSpPr>
+        <p:spPr>
+          <a:xfrm>
+            <a:off x="9208008" y="2258568"/>
+            <a:ext cx="2340864" cy="365760"/>
+          </a:xfrm>
+          <a:prstGeom prst="rect">
+            <a:avLst/>
+          </a:prstGeom>
+          <a:noFill/>
+          <a:ln/>
+        </p:spPr>
+        <p:txBody>
+          <a:bodyPr wrap="square" lIns="0" tIns="0" rIns="0" bIns="0" rtlCol="0" anchor="ctr"/>
           <a:lstStyle/>
           <a:p>
             <a:pPr algn="ctr" indent="0" marL="0">
               <a:buNone/>
             </a:pPr>
             <a:r>
-              <a:rPr lang="en-US" sz="1200" b="1" spc="200" kern="0" dirty="0">
-                <a:solidFill>
-                  <a:srgbClr val="2C3E55"/>
+              <a:rPr lang="en-US" sz="1450" b="1" dirty="0">
+                <a:solidFill>
+                  <a:srgbClr val="19212C"/>
                 </a:solidFill>
                 <a:latin typeface="Calibri" pitchFamily="34" charset="0"/>
                 <a:ea typeface="Calibri" pitchFamily="34" charset="-122"/>
                 <a:cs typeface="Calibri" pitchFamily="34" charset="-120"/>
               </a:rPr>
-              <a:t>CLOUD (serverless)</a:t>
-            </a:r>
-            <a:endParaRPr lang="en-US" sz="1200" dirty="0"/>
-          </a:p>
-        </p:txBody>
-      </p:sp>
-      <p:sp>
-        <p:nvSpPr>
-          <p:cNvPr id="14" name="Shape 12"/>
-          <p:cNvSpPr/>
-          <p:nvPr/>
-        </p:nvSpPr>
-        <p:spPr>
-          <a:xfrm>
-            <a:off x="4846320" y="2651760"/>
-            <a:ext cx="1463040" cy="1371600"/>
+              <a:t>Amazon SQS</a:t>
+            </a:r>
+            <a:endParaRPr lang="en-US" sz="1450" dirty="0"/>
+          </a:p>
+        </p:txBody>
+      </p:sp>
+      <p:sp>
+        <p:nvSpPr>
+          <p:cNvPr id="16" name="Text 14"/>
+          <p:cNvSpPr/>
+          <p:nvPr/>
+        </p:nvSpPr>
+        <p:spPr>
+          <a:xfrm>
+            <a:off x="9235440" y="2606040"/>
+            <a:ext cx="2286000" cy="411480"/>
+          </a:xfrm>
+          <a:prstGeom prst="rect">
+            <a:avLst/>
+          </a:prstGeom>
+          <a:noFill/>
+          <a:ln/>
+        </p:spPr>
+        <p:txBody>
+          <a:bodyPr wrap="square" lIns="0" tIns="0" rIns="0" bIns="0" rtlCol="0" anchor="t"/>
+          <a:lstStyle/>
+          <a:p>
+            <a:pPr algn="ctr" indent="0" marL="0">
+              <a:buNone/>
+            </a:pPr>
+            <a:r>
+              <a:rPr lang="en-US" sz="1050" dirty="0">
+                <a:solidFill>
+                  <a:srgbClr val="5F6B78"/>
+                </a:solidFill>
+                <a:latin typeface="Calibri" pitchFamily="34" charset="0"/>
+                <a:ea typeface="Calibri" pitchFamily="34" charset="-122"/>
+                <a:cs typeface="Calibri" pitchFamily="34" charset="-120"/>
+              </a:rPr>
+              <a:t>window summaries</a:t>
+            </a:r>
+            <a:endParaRPr lang="en-US" sz="1050" dirty="0"/>
+          </a:p>
+        </p:txBody>
+      </p:sp>
+      <p:sp>
+        <p:nvSpPr>
+          <p:cNvPr id="17" name="Shape 15"/>
+          <p:cNvSpPr/>
+          <p:nvPr/>
+        </p:nvSpPr>
+        <p:spPr>
+          <a:xfrm>
+            <a:off x="9235440" y="3520440"/>
+            <a:ext cx="2286000" cy="1280160"/>
           </a:xfrm>
           <a:prstGeom prst="roundRect">
             <a:avLst>
-              <a:gd name="adj" fmla="val 5333"/>
+              <a:gd name="adj" fmla="val 7143"/>
             </a:avLst>
           </a:prstGeom>
           <a:solidFill>
-            <a:srgbClr val="FFFFFF"/>
-          </a:solidFill>
-          <a:ln w="15240">
+            <a:srgbClr val="EEF2F6"/>
+          </a:solidFill>
+          <a:ln w="19050">
             <a:solidFill>
               <a:srgbClr val="2C3E55"/>
             </a:solidFill>
@@ -1985,14 +2051,34 @@
       </p:sp>
       <p:sp>
         <p:nvSpPr>
-          <p:cNvPr id="15" name="Text 13"/>
-          <p:cNvSpPr/>
-          <p:nvPr/>
-        </p:nvSpPr>
-        <p:spPr>
-          <a:xfrm>
-            <a:off x="4800600" y="2907792"/>
-            <a:ext cx="1554480" cy="457200"/>
+          <p:cNvPr id="18" name="Shape 16"/>
+          <p:cNvSpPr/>
+          <p:nvPr/>
+        </p:nvSpPr>
+        <p:spPr>
+          <a:xfrm>
+            <a:off x="10287000" y="3685032"/>
+            <a:ext cx="182880" cy="182880"/>
+          </a:xfrm>
+          <a:prstGeom prst="ellipse">
+            <a:avLst/>
+          </a:prstGeom>
+          <a:solidFill>
+            <a:srgbClr val="2C3E55"/>
+          </a:solidFill>
+          <a:ln/>
+        </p:spPr>
+      </p:sp>
+      <p:sp>
+        <p:nvSpPr>
+          <p:cNvPr id="19" name="Text 17"/>
+          <p:cNvSpPr/>
+          <p:nvPr/>
+        </p:nvSpPr>
+        <p:spPr>
+          <a:xfrm>
+            <a:off x="9208008" y="3904488"/>
+            <a:ext cx="2340864" cy="365760"/>
           </a:xfrm>
           <a:prstGeom prst="rect">
             <a:avLst/>
@@ -2008,7 +2094,7 @@
               <a:buNone/>
             </a:pPr>
             <a:r>
-              <a:rPr lang="en-US" sz="1250" b="1" dirty="0">
+              <a:rPr lang="en-US" sz="1450" b="1" dirty="0">
                 <a:solidFill>
                   <a:srgbClr val="19212C"/>
                 </a:solidFill>
@@ -2016,38 +2102,38 @@
                 <a:ea typeface="Calibri" pitchFamily="34" charset="-122"/>
                 <a:cs typeface="Calibri" pitchFamily="34" charset="-120"/>
               </a:rPr>
-              <a:t>Amazon SQS</a:t>
-            </a:r>
-            <a:endParaRPr lang="en-US" sz="1250" dirty="0"/>
-          </a:p>
-        </p:txBody>
-      </p:sp>
-      <p:sp>
-        <p:nvSpPr>
-          <p:cNvPr id="16" name="Text 14"/>
-          <p:cNvSpPr/>
-          <p:nvPr/>
-        </p:nvSpPr>
-        <p:spPr>
-          <a:xfrm>
-            <a:off x="4828032" y="3401568"/>
-            <a:ext cx="1499616" cy="457200"/>
-          </a:xfrm>
-          <a:prstGeom prst="rect">
-            <a:avLst/>
-          </a:prstGeom>
-          <a:noFill/>
-          <a:ln/>
-        </p:spPr>
-        <p:txBody>
-          <a:bodyPr wrap="square" lIns="0" tIns="0" rIns="0" bIns="0" rtlCol="0" anchor="ctr"/>
+              <a:t>AWS Lambda</a:t>
+            </a:r>
+            <a:endParaRPr lang="en-US" sz="1450" dirty="0"/>
+          </a:p>
+        </p:txBody>
+      </p:sp>
+      <p:sp>
+        <p:nvSpPr>
+          <p:cNvPr id="20" name="Text 18"/>
+          <p:cNvSpPr/>
+          <p:nvPr/>
+        </p:nvSpPr>
+        <p:spPr>
+          <a:xfrm>
+            <a:off x="9235440" y="4251960"/>
+            <a:ext cx="2286000" cy="411480"/>
+          </a:xfrm>
+          <a:prstGeom prst="rect">
+            <a:avLst/>
+          </a:prstGeom>
+          <a:noFill/>
+          <a:ln/>
+        </p:spPr>
+        <p:txBody>
+          <a:bodyPr wrap="square" lIns="0" tIns="0" rIns="0" bIns="0" rtlCol="0" anchor="t"/>
           <a:lstStyle/>
           <a:p>
             <a:pPr algn="ctr" indent="0" marL="0">
               <a:buNone/>
             </a:pPr>
             <a:r>
-              <a:rPr lang="en-US" sz="900" dirty="0">
+              <a:rPr lang="en-US" sz="1050" dirty="0">
                 <a:solidFill>
                   <a:srgbClr val="5F6B78"/>
                 </a:solidFill>
@@ -2055,28 +2141,328 @@
                 <a:ea typeface="Calibri" pitchFamily="34" charset="-122"/>
                 <a:cs typeface="Calibri" pitchFamily="34" charset="-120"/>
               </a:rPr>
-              <a:t>window summaries</a:t>
-            </a:r>
-            <a:endParaRPr lang="en-US" sz="900" dirty="0"/>
-          </a:p>
-        </p:txBody>
-      </p:sp>
-      <p:sp>
-        <p:nvSpPr>
-          <p:cNvPr id="17" name="Shape 15"/>
-          <p:cNvSpPr/>
-          <p:nvPr/>
-        </p:nvSpPr>
-        <p:spPr>
-          <a:xfrm>
-            <a:off x="6318504" y="3337560"/>
-            <a:ext cx="164592" cy="0"/>
+              <a:t>ingest function</a:t>
+            </a:r>
+            <a:endParaRPr lang="en-US" sz="1050" dirty="0"/>
+          </a:p>
+        </p:txBody>
+      </p:sp>
+      <p:sp>
+        <p:nvSpPr>
+          <p:cNvPr id="21" name="Shape 19"/>
+          <p:cNvSpPr/>
+          <p:nvPr/>
+        </p:nvSpPr>
+        <p:spPr>
+          <a:xfrm>
+            <a:off x="7242048" y="4160520"/>
+            <a:ext cx="1975104" cy="0"/>
           </a:xfrm>
           <a:prstGeom prst="line">
             <a:avLst/>
           </a:prstGeom>
           <a:noFill/>
-          <a:ln w="20320">
+          <a:ln w="25400">
+            <a:solidFill>
+              <a:srgbClr val="6A839C"/>
+            </a:solidFill>
+            <a:prstDash val="solid"/>
+            <a:headEnd type="triangle"/>
+            <a:tailEnd type="oval"/>
+          </a:ln>
+        </p:spPr>
+      </p:sp>
+      <p:sp>
+        <p:nvSpPr>
+          <p:cNvPr id="22" name="Shape 20"/>
+          <p:cNvSpPr/>
+          <p:nvPr/>
+        </p:nvSpPr>
+        <p:spPr>
+          <a:xfrm>
+            <a:off x="4937760" y="3520440"/>
+            <a:ext cx="2286000" cy="1280160"/>
+          </a:xfrm>
+          <a:prstGeom prst="roundRect">
+            <a:avLst>
+              <a:gd name="adj" fmla="val 7143"/>
+            </a:avLst>
+          </a:prstGeom>
+          <a:solidFill>
+            <a:srgbClr val="EEF2F6"/>
+          </a:solidFill>
+          <a:ln w="19050">
+            <a:solidFill>
+              <a:srgbClr val="2C3E55"/>
+            </a:solidFill>
+            <a:prstDash val="solid"/>
+          </a:ln>
+        </p:spPr>
+      </p:sp>
+      <p:sp>
+        <p:nvSpPr>
+          <p:cNvPr id="23" name="Shape 21"/>
+          <p:cNvSpPr/>
+          <p:nvPr/>
+        </p:nvSpPr>
+        <p:spPr>
+          <a:xfrm>
+            <a:off x="5989320" y="3685032"/>
+            <a:ext cx="182880" cy="182880"/>
+          </a:xfrm>
+          <a:prstGeom prst="ellipse">
+            <a:avLst/>
+          </a:prstGeom>
+          <a:solidFill>
+            <a:srgbClr val="2C3E55"/>
+          </a:solidFill>
+          <a:ln/>
+        </p:spPr>
+      </p:sp>
+      <p:sp>
+        <p:nvSpPr>
+          <p:cNvPr id="24" name="Text 22"/>
+          <p:cNvSpPr/>
+          <p:nvPr/>
+        </p:nvSpPr>
+        <p:spPr>
+          <a:xfrm>
+            <a:off x="4910328" y="3904488"/>
+            <a:ext cx="2340864" cy="365760"/>
+          </a:xfrm>
+          <a:prstGeom prst="rect">
+            <a:avLst/>
+          </a:prstGeom>
+          <a:noFill/>
+          <a:ln/>
+        </p:spPr>
+        <p:txBody>
+          <a:bodyPr wrap="square" lIns="0" tIns="0" rIns="0" bIns="0" rtlCol="0" anchor="ctr"/>
+          <a:lstStyle/>
+          <a:p>
+            <a:pPr algn="ctr" indent="0" marL="0">
+              <a:buNone/>
+            </a:pPr>
+            <a:r>
+              <a:rPr lang="en-US" sz="1450" b="1" dirty="0">
+                <a:solidFill>
+                  <a:srgbClr val="19212C"/>
+                </a:solidFill>
+                <a:latin typeface="Calibri" pitchFamily="34" charset="0"/>
+                <a:ea typeface="Calibri" pitchFamily="34" charset="-122"/>
+                <a:cs typeface="Calibri" pitchFamily="34" charset="-120"/>
+              </a:rPr>
+              <a:t>DynamoDB</a:t>
+            </a:r>
+            <a:endParaRPr lang="en-US" sz="1450" dirty="0"/>
+          </a:p>
+        </p:txBody>
+      </p:sp>
+      <p:sp>
+        <p:nvSpPr>
+          <p:cNvPr id="25" name="Text 23"/>
+          <p:cNvSpPr/>
+          <p:nvPr/>
+        </p:nvSpPr>
+        <p:spPr>
+          <a:xfrm>
+            <a:off x="4937760" y="4251960"/>
+            <a:ext cx="2286000" cy="411480"/>
+          </a:xfrm>
+          <a:prstGeom prst="rect">
+            <a:avLst/>
+          </a:prstGeom>
+          <a:noFill/>
+          <a:ln/>
+        </p:spPr>
+        <p:txBody>
+          <a:bodyPr wrap="square" lIns="0" tIns="0" rIns="0" bIns="0" rtlCol="0" anchor="t"/>
+          <a:lstStyle/>
+          <a:p>
+            <a:pPr algn="ctr" indent="0" marL="0">
+              <a:buNone/>
+            </a:pPr>
+            <a:r>
+              <a:rPr lang="en-US" sz="1050" dirty="0">
+                <a:solidFill>
+                  <a:srgbClr val="5F6B78"/>
+                </a:solidFill>
+                <a:latin typeface="Calibri" pitchFamily="34" charset="0"/>
+                <a:ea typeface="Calibri" pitchFamily="34" charset="-122"/>
+                <a:cs typeface="Calibri" pitchFamily="34" charset="-120"/>
+              </a:rPr>
+              <a:t>readings store</a:t>
+            </a:r>
+            <a:endParaRPr lang="en-US" sz="1050" dirty="0"/>
+          </a:p>
+        </p:txBody>
+      </p:sp>
+      <p:sp>
+        <p:nvSpPr>
+          <p:cNvPr id="26" name="Shape 24"/>
+          <p:cNvSpPr/>
+          <p:nvPr/>
+        </p:nvSpPr>
+        <p:spPr>
+          <a:xfrm>
+            <a:off x="2944368" y="4160520"/>
+            <a:ext cx="1975104" cy="0"/>
+          </a:xfrm>
+          <a:prstGeom prst="line">
+            <a:avLst/>
+          </a:prstGeom>
+          <a:noFill/>
+          <a:ln w="25400">
+            <a:solidFill>
+              <a:srgbClr val="6A839C"/>
+            </a:solidFill>
+            <a:prstDash val="solid"/>
+            <a:headEnd type="triangle"/>
+            <a:tailEnd type="oval"/>
+          </a:ln>
+        </p:spPr>
+      </p:sp>
+      <p:sp>
+        <p:nvSpPr>
+          <p:cNvPr id="27" name="Shape 25"/>
+          <p:cNvSpPr/>
+          <p:nvPr/>
+        </p:nvSpPr>
+        <p:spPr>
+          <a:xfrm>
+            <a:off x="640080" y="3520440"/>
+            <a:ext cx="2286000" cy="1280160"/>
+          </a:xfrm>
+          <a:prstGeom prst="roundRect">
+            <a:avLst>
+              <a:gd name="adj" fmla="val 7143"/>
+            </a:avLst>
+          </a:prstGeom>
+          <a:solidFill>
+            <a:srgbClr val="EEF2F6"/>
+          </a:solidFill>
+          <a:ln w="19050">
+            <a:solidFill>
+              <a:srgbClr val="3E5A7C"/>
+            </a:solidFill>
+            <a:prstDash val="solid"/>
+          </a:ln>
+        </p:spPr>
+      </p:sp>
+      <p:sp>
+        <p:nvSpPr>
+          <p:cNvPr id="28" name="Shape 26"/>
+          <p:cNvSpPr/>
+          <p:nvPr/>
+        </p:nvSpPr>
+        <p:spPr>
+          <a:xfrm>
+            <a:off x="1691640" y="3685032"/>
+            <a:ext cx="182880" cy="182880"/>
+          </a:xfrm>
+          <a:prstGeom prst="ellipse">
+            <a:avLst/>
+          </a:prstGeom>
+          <a:solidFill>
+            <a:srgbClr val="3E5A7C"/>
+          </a:solidFill>
+          <a:ln/>
+        </p:spPr>
+      </p:sp>
+      <p:sp>
+        <p:nvSpPr>
+          <p:cNvPr id="29" name="Text 27"/>
+          <p:cNvSpPr/>
+          <p:nvPr/>
+        </p:nvSpPr>
+        <p:spPr>
+          <a:xfrm>
+            <a:off x="612648" y="3904488"/>
+            <a:ext cx="2340864" cy="365760"/>
+          </a:xfrm>
+          <a:prstGeom prst="rect">
+            <a:avLst/>
+          </a:prstGeom>
+          <a:noFill/>
+          <a:ln/>
+        </p:spPr>
+        <p:txBody>
+          <a:bodyPr wrap="square" lIns="0" tIns="0" rIns="0" bIns="0" rtlCol="0" anchor="ctr"/>
+          <a:lstStyle/>
+          <a:p>
+            <a:pPr algn="ctr" indent="0" marL="0">
+              <a:buNone/>
+            </a:pPr>
+            <a:r>
+              <a:rPr lang="en-US" sz="1450" b="1" dirty="0">
+                <a:solidFill>
+                  <a:srgbClr val="19212C"/>
+                </a:solidFill>
+                <a:latin typeface="Calibri" pitchFamily="34" charset="0"/>
+                <a:ea typeface="Calibri" pitchFamily="34" charset="-122"/>
+                <a:cs typeface="Calibri" pitchFamily="34" charset="-120"/>
+              </a:rPr>
+              <a:t>API GW + S3</a:t>
+            </a:r>
+            <a:endParaRPr lang="en-US" sz="1450" dirty="0"/>
+          </a:p>
+        </p:txBody>
+      </p:sp>
+      <p:sp>
+        <p:nvSpPr>
+          <p:cNvPr id="30" name="Text 28"/>
+          <p:cNvSpPr/>
+          <p:nvPr/>
+        </p:nvSpPr>
+        <p:spPr>
+          <a:xfrm>
+            <a:off x="640080" y="4251960"/>
+            <a:ext cx="2286000" cy="411480"/>
+          </a:xfrm>
+          <a:prstGeom prst="rect">
+            <a:avLst/>
+          </a:prstGeom>
+          <a:noFill/>
+          <a:ln/>
+        </p:spPr>
+        <p:txBody>
+          <a:bodyPr wrap="square" lIns="0" tIns="0" rIns="0" bIns="0" rtlCol="0" anchor="t"/>
+          <a:lstStyle/>
+          <a:p>
+            <a:pPr algn="ctr" indent="0" marL="0">
+              <a:buNone/>
+            </a:pPr>
+            <a:r>
+              <a:rPr lang="en-US" sz="1050" dirty="0">
+                <a:solidFill>
+                  <a:srgbClr val="5F6B78"/>
+                </a:solidFill>
+                <a:latin typeface="Calibri" pitchFamily="34" charset="0"/>
+                <a:ea typeface="Calibri" pitchFamily="34" charset="-122"/>
+                <a:cs typeface="Calibri" pitchFamily="34" charset="-120"/>
+              </a:rPr>
+              <a:t>live dashboard</a:t>
+            </a:r>
+            <a:endParaRPr lang="en-US" sz="1050" dirty="0"/>
+          </a:p>
+        </p:txBody>
+      </p:sp>
+      <p:sp>
+        <p:nvSpPr>
+          <p:cNvPr id="31" name="Shape 29"/>
+          <p:cNvSpPr/>
+          <p:nvPr/>
+        </p:nvSpPr>
+        <p:spPr>
+          <a:xfrm>
+            <a:off x="10378440" y="3154680"/>
+            <a:ext cx="0" cy="365760"/>
+          </a:xfrm>
+          <a:prstGeom prst="line">
+            <a:avLst/>
+          </a:prstGeom>
+          <a:noFill/>
+          <a:ln w="25400">
             <a:solidFill>
               <a:srgbClr val="6A839C"/>
             </a:solidFill>
@@ -2087,370 +2473,7 @@
       </p:sp>
       <p:sp>
         <p:nvSpPr>
-          <p:cNvPr id="18" name="Shape 16"/>
-          <p:cNvSpPr/>
-          <p:nvPr/>
-        </p:nvSpPr>
-        <p:spPr>
-          <a:xfrm>
-            <a:off x="6492240" y="2651760"/>
-            <a:ext cx="1463040" cy="1371600"/>
-          </a:xfrm>
-          <a:prstGeom prst="roundRect">
-            <a:avLst>
-              <a:gd name="adj" fmla="val 5333"/>
-            </a:avLst>
-          </a:prstGeom>
-          <a:solidFill>
-            <a:srgbClr val="FFFFFF"/>
-          </a:solidFill>
-          <a:ln w="15240">
-            <a:solidFill>
-              <a:srgbClr val="2C3E55"/>
-            </a:solidFill>
-            <a:prstDash val="solid"/>
-          </a:ln>
-        </p:spPr>
-      </p:sp>
-      <p:sp>
-        <p:nvSpPr>
-          <p:cNvPr id="19" name="Text 17"/>
-          <p:cNvSpPr/>
-          <p:nvPr/>
-        </p:nvSpPr>
-        <p:spPr>
-          <a:xfrm>
-            <a:off x="6446520" y="2907792"/>
-            <a:ext cx="1554480" cy="457200"/>
-          </a:xfrm>
-          <a:prstGeom prst="rect">
-            <a:avLst/>
-          </a:prstGeom>
-          <a:noFill/>
-          <a:ln/>
-        </p:spPr>
-        <p:txBody>
-          <a:bodyPr wrap="square" lIns="0" tIns="0" rIns="0" bIns="0" rtlCol="0" anchor="ctr"/>
-          <a:lstStyle/>
-          <a:p>
-            <a:pPr algn="ctr" indent="0" marL="0">
-              <a:buNone/>
-            </a:pPr>
-            <a:r>
-              <a:rPr lang="en-US" sz="1250" b="1" dirty="0">
-                <a:solidFill>
-                  <a:srgbClr val="19212C"/>
-                </a:solidFill>
-                <a:latin typeface="Calibri" pitchFamily="34" charset="0"/>
-                <a:ea typeface="Calibri" pitchFamily="34" charset="-122"/>
-                <a:cs typeface="Calibri" pitchFamily="34" charset="-120"/>
-              </a:rPr>
-              <a:t>AWS Lambda</a:t>
-            </a:r>
-            <a:endParaRPr lang="en-US" sz="1250" dirty="0"/>
-          </a:p>
-        </p:txBody>
-      </p:sp>
-      <p:sp>
-        <p:nvSpPr>
-          <p:cNvPr id="20" name="Text 18"/>
-          <p:cNvSpPr/>
-          <p:nvPr/>
-        </p:nvSpPr>
-        <p:spPr>
-          <a:xfrm>
-            <a:off x="6473952" y="3401568"/>
-            <a:ext cx="1499616" cy="457200"/>
-          </a:xfrm>
-          <a:prstGeom prst="rect">
-            <a:avLst/>
-          </a:prstGeom>
-          <a:noFill/>
-          <a:ln/>
-        </p:spPr>
-        <p:txBody>
-          <a:bodyPr wrap="square" lIns="0" tIns="0" rIns="0" bIns="0" rtlCol="0" anchor="ctr"/>
-          <a:lstStyle/>
-          <a:p>
-            <a:pPr algn="ctr" indent="0" marL="0">
-              <a:buNone/>
-            </a:pPr>
-            <a:r>
-              <a:rPr lang="en-US" sz="900" dirty="0">
-                <a:solidFill>
-                  <a:srgbClr val="5F6B78"/>
-                </a:solidFill>
-                <a:latin typeface="Calibri" pitchFamily="34" charset="0"/>
-                <a:ea typeface="Calibri" pitchFamily="34" charset="-122"/>
-                <a:cs typeface="Calibri" pitchFamily="34" charset="-120"/>
-              </a:rPr>
-              <a:t>ingest function</a:t>
-            </a:r>
-            <a:endParaRPr lang="en-US" sz="900" dirty="0"/>
-          </a:p>
-        </p:txBody>
-      </p:sp>
-      <p:sp>
-        <p:nvSpPr>
-          <p:cNvPr id="21" name="Shape 19"/>
-          <p:cNvSpPr/>
-          <p:nvPr/>
-        </p:nvSpPr>
-        <p:spPr>
-          <a:xfrm>
-            <a:off x="7964424" y="3337560"/>
-            <a:ext cx="164592" cy="0"/>
-          </a:xfrm>
-          <a:prstGeom prst="line">
-            <a:avLst/>
-          </a:prstGeom>
-          <a:noFill/>
-          <a:ln w="20320">
-            <a:solidFill>
-              <a:srgbClr val="6A839C"/>
-            </a:solidFill>
-            <a:prstDash val="solid"/>
-            <a:tailEnd type="triangle"/>
-          </a:ln>
-        </p:spPr>
-      </p:sp>
-      <p:sp>
-        <p:nvSpPr>
-          <p:cNvPr id="22" name="Shape 20"/>
-          <p:cNvSpPr/>
-          <p:nvPr/>
-        </p:nvSpPr>
-        <p:spPr>
-          <a:xfrm>
-            <a:off x="8138160" y="2651760"/>
-            <a:ext cx="1463040" cy="1371600"/>
-          </a:xfrm>
-          <a:prstGeom prst="roundRect">
-            <a:avLst>
-              <a:gd name="adj" fmla="val 5333"/>
-            </a:avLst>
-          </a:prstGeom>
-          <a:solidFill>
-            <a:srgbClr val="FFFFFF"/>
-          </a:solidFill>
-          <a:ln w="15240">
-            <a:solidFill>
-              <a:srgbClr val="2C3E55"/>
-            </a:solidFill>
-            <a:prstDash val="solid"/>
-          </a:ln>
-        </p:spPr>
-      </p:sp>
-      <p:sp>
-        <p:nvSpPr>
-          <p:cNvPr id="23" name="Text 21"/>
-          <p:cNvSpPr/>
-          <p:nvPr/>
-        </p:nvSpPr>
-        <p:spPr>
-          <a:xfrm>
-            <a:off x="8092440" y="2907792"/>
-            <a:ext cx="1554480" cy="457200"/>
-          </a:xfrm>
-          <a:prstGeom prst="rect">
-            <a:avLst/>
-          </a:prstGeom>
-          <a:noFill/>
-          <a:ln/>
-        </p:spPr>
-        <p:txBody>
-          <a:bodyPr wrap="square" lIns="0" tIns="0" rIns="0" bIns="0" rtlCol="0" anchor="ctr"/>
-          <a:lstStyle/>
-          <a:p>
-            <a:pPr algn="ctr" indent="0" marL="0">
-              <a:buNone/>
-            </a:pPr>
-            <a:r>
-              <a:rPr lang="en-US" sz="1250" b="1" dirty="0">
-                <a:solidFill>
-                  <a:srgbClr val="19212C"/>
-                </a:solidFill>
-                <a:latin typeface="Calibri" pitchFamily="34" charset="0"/>
-                <a:ea typeface="Calibri" pitchFamily="34" charset="-122"/>
-                <a:cs typeface="Calibri" pitchFamily="34" charset="-120"/>
-              </a:rPr>
-              <a:t>DynamoDB</a:t>
-            </a:r>
-            <a:endParaRPr lang="en-US" sz="1250" dirty="0"/>
-          </a:p>
-        </p:txBody>
-      </p:sp>
-      <p:sp>
-        <p:nvSpPr>
-          <p:cNvPr id="24" name="Text 22"/>
-          <p:cNvSpPr/>
-          <p:nvPr/>
-        </p:nvSpPr>
-        <p:spPr>
-          <a:xfrm>
-            <a:off x="8119872" y="3401568"/>
-            <a:ext cx="1499616" cy="457200"/>
-          </a:xfrm>
-          <a:prstGeom prst="rect">
-            <a:avLst/>
-          </a:prstGeom>
-          <a:noFill/>
-          <a:ln/>
-        </p:spPr>
-        <p:txBody>
-          <a:bodyPr wrap="square" lIns="0" tIns="0" rIns="0" bIns="0" rtlCol="0" anchor="ctr"/>
-          <a:lstStyle/>
-          <a:p>
-            <a:pPr algn="ctr" indent="0" marL="0">
-              <a:buNone/>
-            </a:pPr>
-            <a:r>
-              <a:rPr lang="en-US" sz="900" dirty="0">
-                <a:solidFill>
-                  <a:srgbClr val="5F6B78"/>
-                </a:solidFill>
-                <a:latin typeface="Calibri" pitchFamily="34" charset="0"/>
-                <a:ea typeface="Calibri" pitchFamily="34" charset="-122"/>
-                <a:cs typeface="Calibri" pitchFamily="34" charset="-120"/>
-              </a:rPr>
-              <a:t>readings store</a:t>
-            </a:r>
-            <a:endParaRPr lang="en-US" sz="900" dirty="0"/>
-          </a:p>
-        </p:txBody>
-      </p:sp>
-      <p:sp>
-        <p:nvSpPr>
-          <p:cNvPr id="25" name="Shape 23"/>
-          <p:cNvSpPr/>
-          <p:nvPr/>
-        </p:nvSpPr>
-        <p:spPr>
-          <a:xfrm>
-            <a:off x="9610344" y="3337560"/>
-            <a:ext cx="164592" cy="0"/>
-          </a:xfrm>
-          <a:prstGeom prst="line">
-            <a:avLst/>
-          </a:prstGeom>
-          <a:noFill/>
-          <a:ln w="20320">
-            <a:solidFill>
-              <a:srgbClr val="6A839C"/>
-            </a:solidFill>
-            <a:prstDash val="solid"/>
-            <a:tailEnd type="triangle"/>
-          </a:ln>
-        </p:spPr>
-      </p:sp>
-      <p:sp>
-        <p:nvSpPr>
-          <p:cNvPr id="26" name="Shape 24"/>
-          <p:cNvSpPr/>
-          <p:nvPr/>
-        </p:nvSpPr>
-        <p:spPr>
-          <a:xfrm>
-            <a:off x="9784080" y="2651760"/>
-            <a:ext cx="1463040" cy="1371600"/>
-          </a:xfrm>
-          <a:prstGeom prst="roundRect">
-            <a:avLst>
-              <a:gd name="adj" fmla="val 5333"/>
-            </a:avLst>
-          </a:prstGeom>
-          <a:solidFill>
-            <a:srgbClr val="FFFFFF"/>
-          </a:solidFill>
-          <a:ln w="15240">
-            <a:solidFill>
-              <a:srgbClr val="3E5A7C"/>
-            </a:solidFill>
-            <a:prstDash val="solid"/>
-          </a:ln>
-        </p:spPr>
-      </p:sp>
-      <p:sp>
-        <p:nvSpPr>
-          <p:cNvPr id="27" name="Text 25"/>
-          <p:cNvSpPr/>
-          <p:nvPr/>
-        </p:nvSpPr>
-        <p:spPr>
-          <a:xfrm>
-            <a:off x="9738360" y="2907792"/>
-            <a:ext cx="1554480" cy="457200"/>
-          </a:xfrm>
-          <a:prstGeom prst="rect">
-            <a:avLst/>
-          </a:prstGeom>
-          <a:noFill/>
-          <a:ln/>
-        </p:spPr>
-        <p:txBody>
-          <a:bodyPr wrap="square" lIns="0" tIns="0" rIns="0" bIns="0" rtlCol="0" anchor="ctr"/>
-          <a:lstStyle/>
-          <a:p>
-            <a:pPr algn="ctr" indent="0" marL="0">
-              <a:buNone/>
-            </a:pPr>
-            <a:r>
-              <a:rPr lang="en-US" sz="1250" b="1" dirty="0">
-                <a:solidFill>
-                  <a:srgbClr val="19212C"/>
-                </a:solidFill>
-                <a:latin typeface="Calibri" pitchFamily="34" charset="0"/>
-                <a:ea typeface="Calibri" pitchFamily="34" charset="-122"/>
-                <a:cs typeface="Calibri" pitchFamily="34" charset="-120"/>
-              </a:rPr>
-              <a:t>API GW + S3</a:t>
-            </a:r>
-            <a:endParaRPr lang="en-US" sz="1250" dirty="0"/>
-          </a:p>
-        </p:txBody>
-      </p:sp>
-      <p:sp>
-        <p:nvSpPr>
-          <p:cNvPr id="28" name="Text 26"/>
-          <p:cNvSpPr/>
-          <p:nvPr/>
-        </p:nvSpPr>
-        <p:spPr>
-          <a:xfrm>
-            <a:off x="9765792" y="3401568"/>
-            <a:ext cx="1499616" cy="457200"/>
-          </a:xfrm>
-          <a:prstGeom prst="rect">
-            <a:avLst/>
-          </a:prstGeom>
-          <a:noFill/>
-          <a:ln/>
-        </p:spPr>
-        <p:txBody>
-          <a:bodyPr wrap="square" lIns="0" tIns="0" rIns="0" bIns="0" rtlCol="0" anchor="ctr"/>
-          <a:lstStyle/>
-          <a:p>
-            <a:pPr algn="ctr" indent="0" marL="0">
-              <a:buNone/>
-            </a:pPr>
-            <a:r>
-              <a:rPr lang="en-US" sz="900" dirty="0">
-                <a:solidFill>
-                  <a:srgbClr val="5F6B78"/>
-                </a:solidFill>
-                <a:latin typeface="Calibri" pitchFamily="34" charset="0"/>
-                <a:ea typeface="Calibri" pitchFamily="34" charset="-122"/>
-                <a:cs typeface="Calibri" pitchFamily="34" charset="-120"/>
-              </a:rPr>
-              <a:t>live dashboard</a:t>
-            </a:r>
-            <a:endParaRPr lang="en-US" sz="900" dirty="0"/>
-          </a:p>
-        </p:txBody>
-      </p:sp>
-      <p:sp>
-        <p:nvSpPr>
-          <p:cNvPr id="29" name="Text 27"/>
+          <p:cNvPr id="32" name="Text 30"/>
           <p:cNvSpPr/>
           <p:nvPr/>
         </p:nvSpPr>
@@ -3129,59 +3152,24 @@
       </p:sp>
       <p:sp>
         <p:nvSpPr>
-          <p:cNvPr id="3" name="Text 1"/>
-          <p:cNvSpPr/>
-          <p:nvPr/>
-        </p:nvSpPr>
-        <p:spPr>
-          <a:xfrm>
-            <a:off x="731520" y="1965960"/>
-            <a:ext cx="2377440" cy="548640"/>
-          </a:xfrm>
-          <a:prstGeom prst="rect">
-            <a:avLst/>
-          </a:prstGeom>
-          <a:noFill/>
-          <a:ln/>
-        </p:spPr>
-        <p:txBody>
-          <a:bodyPr wrap="square" lIns="0" tIns="0" rIns="0" bIns="0" rtlCol="0" anchor="ctr"/>
-          <a:lstStyle/>
-          <a:p>
-            <a:pPr indent="0" marL="0">
-              <a:buNone/>
-            </a:pPr>
-            <a:r>
-              <a:rPr lang="en-US" sz="2300" b="1" dirty="0">
-                <a:solidFill>
-                  <a:srgbClr val="E0A63C"/>
-                </a:solidFill>
-                <a:latin typeface="Bookman Old Style" pitchFamily="34" charset="0"/>
-                <a:ea typeface="Bookman Old Style" pitchFamily="34" charset="-122"/>
-                <a:cs typeface="Bookman Old Style" pitchFamily="34" charset="-120"/>
-              </a:rPr>
-              <a:t>Problem</a:t>
-            </a:r>
-            <a:endParaRPr lang="en-US" sz="2300" dirty="0"/>
-          </a:p>
-        </p:txBody>
-      </p:sp>
-      <p:sp>
-        <p:nvSpPr>
-          <p:cNvPr id="4" name="Shape 2"/>
-          <p:cNvSpPr/>
-          <p:nvPr/>
-        </p:nvSpPr>
-        <p:spPr>
-          <a:xfrm>
-            <a:off x="3200400" y="1920240"/>
-            <a:ext cx="0" cy="1783080"/>
-          </a:xfrm>
-          <a:prstGeom prst="line">
-            <a:avLst/>
-          </a:prstGeom>
-          <a:noFill/>
-          <a:ln w="31750">
+          <p:cNvPr id="3" name="Shape 1"/>
+          <p:cNvSpPr/>
+          <p:nvPr/>
+        </p:nvSpPr>
+        <p:spPr>
+          <a:xfrm>
+            <a:off x="640080" y="1874520"/>
+            <a:ext cx="4937760" cy="4160520"/>
+          </a:xfrm>
+          <a:prstGeom prst="roundRect">
+            <a:avLst>
+              <a:gd name="adj" fmla="val 2198"/>
+            </a:avLst>
+          </a:prstGeom>
+          <a:solidFill>
+            <a:srgbClr val="EEF2F6"/>
+          </a:solidFill>
+          <a:ln w="19050">
             <a:solidFill>
               <a:srgbClr val="E0A63C"/>
             </a:solidFill>
@@ -3191,14 +3179,53 @@
       </p:sp>
       <p:sp>
         <p:nvSpPr>
+          <p:cNvPr id="4" name="Text 2"/>
+          <p:cNvSpPr/>
+          <p:nvPr/>
+        </p:nvSpPr>
+        <p:spPr>
+          <a:xfrm>
+            <a:off x="960120" y="2103120"/>
+            <a:ext cx="3657600" cy="457200"/>
+          </a:xfrm>
+          <a:prstGeom prst="rect">
+            <a:avLst/>
+          </a:prstGeom>
+          <a:noFill/>
+          <a:ln/>
+        </p:spPr>
+        <p:txBody>
+          <a:bodyPr wrap="square" lIns="0" tIns="0" rIns="0" bIns="0" rtlCol="0" anchor="ctr"/>
+          <a:lstStyle/>
+          <a:p>
+            <a:pPr indent="0" marL="0">
+              <a:buNone/>
+            </a:pPr>
+            <a:r>
+              <a:rPr lang="en-US" sz="1900" b="1" dirty="0">
+                <a:solidFill>
+                  <a:srgbClr val="E0A63C"/>
+                </a:solidFill>
+                <a:latin typeface="Bookman Old Style" pitchFamily="34" charset="0"/>
+                <a:ea typeface="Bookman Old Style" pitchFamily="34" charset="-122"/>
+                <a:cs typeface="Bookman Old Style" pitchFamily="34" charset="-120"/>
+              </a:rPr>
+              <a:t>Problem</a:t>
+            </a:r>
+            <a:endParaRPr lang="en-US" sz="1900" dirty="0"/>
+          </a:p>
+        </p:txBody>
+      </p:sp>
+      <p:sp>
+        <p:nvSpPr>
           <p:cNvPr id="5" name="Text 3"/>
           <p:cNvSpPr/>
           <p:nvPr/>
         </p:nvSpPr>
         <p:spPr>
           <a:xfrm>
-            <a:off x="3474720" y="1920240"/>
-            <a:ext cx="7955280" cy="1920240"/>
+            <a:off x="960120" y="2651760"/>
+            <a:ext cx="4343400" cy="3200400"/>
           </a:xfrm>
           <a:prstGeom prst="rect">
             <a:avLst/>
@@ -3217,7 +3244,7 @@
               <a:buNone/>
             </a:pPr>
             <a:r>
-              <a:rPr lang="en-US" sz="1450" dirty="0">
+              <a:rPr lang="en-US" sz="1350" dirty="0">
                 <a:solidFill>
                   <a:srgbClr val="19212C"/>
                 </a:solidFill>
@@ -3227,65 +3254,30 @@
               </a:rPr>
               <a:t>Whenever the AWS access-key environment variable existed, three files swapped in hardcoded emulator credentials — and real Lambda and EC2 inject that exact variable automatically. So genuine session credentials were thrown away and every DynamoDB and SQS call would have failed authentication. Locally the condition happened to be correct, so all 114 tests and the LocalStack run passed; the emulator cannot reproduce the trigger at all.</a:t>
             </a:r>
-            <a:endParaRPr lang="en-US" sz="1450" dirty="0"/>
-          </a:p>
-        </p:txBody>
-      </p:sp>
-      <p:sp>
-        <p:nvSpPr>
-          <p:cNvPr id="6" name="Text 4"/>
-          <p:cNvSpPr/>
-          <p:nvPr/>
-        </p:nvSpPr>
-        <p:spPr>
-          <a:xfrm>
-            <a:off x="731520" y="4114800"/>
-            <a:ext cx="2377440" cy="548640"/>
-          </a:xfrm>
-          <a:prstGeom prst="rect">
-            <a:avLst/>
-          </a:prstGeom>
-          <a:noFill/>
-          <a:ln/>
-        </p:spPr>
-        <p:txBody>
-          <a:bodyPr wrap="square" lIns="0" tIns="0" rIns="0" bIns="0" rtlCol="0" anchor="ctr"/>
-          <a:lstStyle/>
-          <a:p>
-            <a:pPr indent="0" marL="0">
-              <a:buNone/>
-            </a:pPr>
-            <a:r>
-              <a:rPr lang="en-US" sz="2300" b="1" dirty="0">
-                <a:solidFill>
-                  <a:srgbClr val="3E5A7C"/>
-                </a:solidFill>
-                <a:latin typeface="Bookman Old Style" pitchFamily="34" charset="0"/>
-                <a:ea typeface="Bookman Old Style" pitchFamily="34" charset="-122"/>
-                <a:cs typeface="Bookman Old Style" pitchFamily="34" charset="-120"/>
-              </a:rPr>
-              <a:t>Solution</a:t>
-            </a:r>
-            <a:endParaRPr lang="en-US" sz="2300" dirty="0"/>
-          </a:p>
-        </p:txBody>
-      </p:sp>
-      <p:sp>
-        <p:nvSpPr>
-          <p:cNvPr id="7" name="Shape 5"/>
-          <p:cNvSpPr/>
-          <p:nvPr/>
-        </p:nvSpPr>
-        <p:spPr>
-          <a:xfrm>
-            <a:off x="3200400" y="4069080"/>
-            <a:ext cx="0" cy="1783080"/>
-          </a:xfrm>
-          <a:prstGeom prst="line">
-            <a:avLst/>
-          </a:prstGeom>
-          <a:noFill/>
-          <a:ln w="31750">
+            <a:endParaRPr lang="en-US" sz="1350" dirty="0"/>
+          </a:p>
+        </p:txBody>
+      </p:sp>
+      <p:sp>
+        <p:nvSpPr>
+          <p:cNvPr id="6" name="Shape 4"/>
+          <p:cNvSpPr/>
+          <p:nvPr/>
+        </p:nvSpPr>
+        <p:spPr>
+          <a:xfrm>
+            <a:off x="6611112" y="1874520"/>
+            <a:ext cx="4937760" cy="4160520"/>
+          </a:xfrm>
+          <a:prstGeom prst="roundRect">
+            <a:avLst>
+              <a:gd name="adj" fmla="val 2198"/>
+            </a:avLst>
+          </a:prstGeom>
+          <a:solidFill>
+            <a:srgbClr val="EEF2F6"/>
+          </a:solidFill>
+          <a:ln w="19050">
             <a:solidFill>
               <a:srgbClr val="3E5A7C"/>
             </a:solidFill>
@@ -3295,14 +3287,53 @@
       </p:sp>
       <p:sp>
         <p:nvSpPr>
+          <p:cNvPr id="7" name="Text 5"/>
+          <p:cNvSpPr/>
+          <p:nvPr/>
+        </p:nvSpPr>
+        <p:spPr>
+          <a:xfrm>
+            <a:off x="6931152" y="2103120"/>
+            <a:ext cx="3657600" cy="457200"/>
+          </a:xfrm>
+          <a:prstGeom prst="rect">
+            <a:avLst/>
+          </a:prstGeom>
+          <a:noFill/>
+          <a:ln/>
+        </p:spPr>
+        <p:txBody>
+          <a:bodyPr wrap="square" lIns="0" tIns="0" rIns="0" bIns="0" rtlCol="0" anchor="ctr"/>
+          <a:lstStyle/>
+          <a:p>
+            <a:pPr indent="0" marL="0">
+              <a:buNone/>
+            </a:pPr>
+            <a:r>
+              <a:rPr lang="en-US" sz="1900" b="1" dirty="0">
+                <a:solidFill>
+                  <a:srgbClr val="3E5A7C"/>
+                </a:solidFill>
+                <a:latin typeface="Bookman Old Style" pitchFamily="34" charset="0"/>
+                <a:ea typeface="Bookman Old Style" pitchFamily="34" charset="-122"/>
+                <a:cs typeface="Bookman Old Style" pitchFamily="34" charset="-120"/>
+              </a:rPr>
+              <a:t>Solution</a:t>
+            </a:r>
+            <a:endParaRPr lang="en-US" sz="1900" dirty="0"/>
+          </a:p>
+        </p:txBody>
+      </p:sp>
+      <p:sp>
+        <p:nvSpPr>
           <p:cNvPr id="8" name="Text 6"/>
           <p:cNvSpPr/>
           <p:nvPr/>
         </p:nvSpPr>
         <p:spPr>
           <a:xfrm>
-            <a:off x="3474720" y="4069080"/>
-            <a:ext cx="7955280" cy="1920240"/>
+            <a:off x="6931152" y="2651760"/>
+            <a:ext cx="4343400" cy="3200400"/>
           </a:xfrm>
           <a:prstGeom prst="rect">
             <a:avLst/>
@@ -3321,7 +3352,7 @@
               <a:buNone/>
             </a:pPr>
             <a:r>
-              <a:rPr lang="en-US" sz="1450" dirty="0">
+              <a:rPr lang="en-US" sz="1350" dirty="0">
                 <a:solidFill>
                   <a:srgbClr val="19212C"/>
                 </a:solidFill>
@@ -3331,9 +3362,29 @@
               </a:rPr>
               <a:t>Gate the emulator credentials on a signal unique to local development — the explicit LocalStack endpoint override — applied across all three files, each with its own code shape, then redeployed and verified live with an end-to-end DynamoDB write and SQS receive. The same real-cloud testing also caught a pagination undercount, fixed with two new tests.</a:t>
             </a:r>
-            <a:endParaRPr lang="en-US" sz="1450" dirty="0"/>
-          </a:p>
-        </p:txBody>
+            <a:endParaRPr lang="en-US" sz="1350" dirty="0"/>
+          </a:p>
+        </p:txBody>
+      </p:sp>
+      <p:sp>
+        <p:nvSpPr>
+          <p:cNvPr id="9" name="Shape 7"/>
+          <p:cNvSpPr/>
+          <p:nvPr/>
+        </p:nvSpPr>
+        <p:spPr>
+          <a:xfrm>
+            <a:off x="5669280" y="3703320"/>
+            <a:ext cx="841248" cy="512064"/>
+          </a:xfrm>
+          <a:prstGeom prst="rightArrow">
+            <a:avLst/>
+          </a:prstGeom>
+          <a:solidFill>
+            <a:srgbClr val="2C3E55"/>
+          </a:solidFill>
+          <a:ln/>
+        </p:spPr>
       </p:sp>
     </p:spTree>
   </p:cSld>

--- a/ppt/Nithin_X25125338_data-center-environmental-monitoring.pptx
+++ b/ppt/Nithin_X25125338_data-center-environmental-monitoring.pptx
@@ -2622,14 +2622,61 @@
       </p:sp>
       <p:sp>
         <p:nvSpPr>
-          <p:cNvPr id="4" name="Text 2"/>
-          <p:cNvSpPr/>
-          <p:nvPr/>
-        </p:nvSpPr>
-        <p:spPr>
-          <a:xfrm>
-            <a:off x="640080" y="1737360"/>
-            <a:ext cx="1097280" cy="1097280"/>
+          <p:cNvPr id="4" name="Shape 2"/>
+          <p:cNvSpPr/>
+          <p:nvPr/>
+        </p:nvSpPr>
+        <p:spPr>
+          <a:xfrm>
+            <a:off x="640080" y="1828800"/>
+            <a:ext cx="10881360" cy="1371600"/>
+          </a:xfrm>
+          <a:prstGeom prst="roundRect">
+            <a:avLst>
+              <a:gd name="adj" fmla="val 6667"/>
+            </a:avLst>
+          </a:prstGeom>
+          <a:solidFill>
+            <a:srgbClr val="EEF2F6"/>
+          </a:solidFill>
+          <a:ln w="15240">
+            <a:solidFill>
+              <a:srgbClr val="3E5A7C"/>
+            </a:solidFill>
+            <a:prstDash val="solid"/>
+          </a:ln>
+        </p:spPr>
+      </p:sp>
+      <p:sp>
+        <p:nvSpPr>
+          <p:cNvPr id="5" name="Shape 3"/>
+          <p:cNvSpPr/>
+          <p:nvPr/>
+        </p:nvSpPr>
+        <p:spPr>
+          <a:xfrm>
+            <a:off x="960120" y="2203704"/>
+            <a:ext cx="621792" cy="621792"/>
+          </a:xfrm>
+          <a:prstGeom prst="ellipse">
+            <a:avLst/>
+          </a:prstGeom>
+          <a:solidFill>
+            <a:srgbClr val="2C3E55"/>
+          </a:solidFill>
+          <a:ln/>
+        </p:spPr>
+      </p:sp>
+      <p:sp>
+        <p:nvSpPr>
+          <p:cNvPr id="6" name="Text 4"/>
+          <p:cNvSpPr/>
+          <p:nvPr/>
+        </p:nvSpPr>
+        <p:spPr>
+          <a:xfrm>
+            <a:off x="960120" y="2203704"/>
+            <a:ext cx="621792" cy="621792"/>
           </a:xfrm>
           <a:prstGeom prst="rect">
             <a:avLst/>
@@ -2641,13 +2688,13 @@
           <a:bodyPr wrap="square" lIns="0" tIns="0" rIns="0" bIns="0" rtlCol="0" anchor="ctr"/>
           <a:lstStyle/>
           <a:p>
-            <a:pPr indent="0" marL="0">
+            <a:pPr algn="ctr" indent="0" marL="0">
               <a:buNone/>
             </a:pPr>
             <a:r>
-              <a:rPr lang="en-US" sz="5400" b="1" dirty="0">
+              <a:rPr lang="en-US" sz="2200" b="1" dirty="0">
                 <a:solidFill>
-                  <a:srgbClr val="EEF2F6"/>
+                  <a:srgbClr val="FFFFFF"/>
                 </a:solidFill>
                 <a:latin typeface="Bookman Old Style" pitchFamily="34" charset="0"/>
                 <a:ea typeface="Bookman Old Style" pitchFamily="34" charset="-122"/>
@@ -2655,43 +2702,20 @@
               </a:rPr>
               <a:t>1</a:t>
             </a:r>
-            <a:endParaRPr lang="en-US" sz="5400" dirty="0"/>
-          </a:p>
-        </p:txBody>
-      </p:sp>
-      <p:sp>
-        <p:nvSpPr>
-          <p:cNvPr id="5" name="Shape 3"/>
-          <p:cNvSpPr/>
-          <p:nvPr/>
-        </p:nvSpPr>
-        <p:spPr>
-          <a:xfrm>
-            <a:off x="1828800" y="1920240"/>
-            <a:ext cx="0" cy="1051560"/>
-          </a:xfrm>
-          <a:prstGeom prst="line">
-            <a:avLst/>
-          </a:prstGeom>
-          <a:noFill/>
-          <a:ln w="25400">
-            <a:solidFill>
-              <a:srgbClr val="3E5A7C"/>
-            </a:solidFill>
-            <a:prstDash val="solid"/>
-          </a:ln>
-        </p:spPr>
-      </p:sp>
-      <p:sp>
-        <p:nvSpPr>
-          <p:cNvPr id="6" name="Text 4"/>
-          <p:cNvSpPr/>
-          <p:nvPr/>
-        </p:nvSpPr>
-        <p:spPr>
-          <a:xfrm>
-            <a:off x="2057400" y="1874520"/>
-            <a:ext cx="9509760" cy="411480"/>
+            <a:endParaRPr lang="en-US" sz="2200" dirty="0"/>
+          </a:p>
+        </p:txBody>
+      </p:sp>
+      <p:sp>
+        <p:nvSpPr>
+          <p:cNvPr id="7" name="Text 5"/>
+          <p:cNvSpPr/>
+          <p:nvPr/>
+        </p:nvSpPr>
+        <p:spPr>
+          <a:xfrm>
+            <a:off x="1828800" y="2029968"/>
+            <a:ext cx="9418320" cy="411480"/>
           </a:xfrm>
           <a:prstGeom prst="rect">
             <a:avLst/>
@@ -2707,7 +2731,7 @@
               <a:buNone/>
             </a:pPr>
             <a:r>
-              <a:rPr lang="en-US" sz="1800" b="1" dirty="0">
+              <a:rPr lang="en-US" sz="1700" b="1" dirty="0">
                 <a:solidFill>
                   <a:srgbClr val="19212C"/>
                 </a:solidFill>
@@ -2717,20 +2741,20 @@
               </a:rPr>
               <a:t>Two halls, five environment metrics</a:t>
             </a:r>
-            <a:endParaRPr lang="en-US" sz="1800" dirty="0"/>
-          </a:p>
-        </p:txBody>
-      </p:sp>
-      <p:sp>
-        <p:nvSpPr>
-          <p:cNvPr id="7" name="Text 5"/>
-          <p:cNvSpPr/>
-          <p:nvPr/>
-        </p:nvSpPr>
-        <p:spPr>
-          <a:xfrm>
-            <a:off x="2057400" y="2313432"/>
-            <a:ext cx="9509760" cy="822960"/>
+            <a:endParaRPr lang="en-US" sz="1700" dirty="0"/>
+          </a:p>
+        </p:txBody>
+      </p:sp>
+      <p:sp>
+        <p:nvSpPr>
+          <p:cNvPr id="8" name="Text 6"/>
+          <p:cNvSpPr/>
+          <p:nvPr/>
+        </p:nvSpPr>
+        <p:spPr>
+          <a:xfrm>
+            <a:off x="1828800" y="2450592"/>
+            <a:ext cx="9418320" cy="594360"/>
           </a:xfrm>
           <a:prstGeom prst="rect">
             <a:avLst/>
@@ -2743,10 +2767,13 @@
           <a:lstStyle/>
           <a:p>
             <a:pPr indent="0" marL="0">
+              <a:lnSpc>
+                <a:spcPct val="105000"/>
+              </a:lnSpc>
               <a:buNone/>
             </a:pPr>
             <a:r>
-              <a:rPr lang="en-US" sz="1350" dirty="0">
+              <a:rPr lang="en-US" sz="1300" dirty="0">
                 <a:solidFill>
                   <a:srgbClr val="5F6B78"/>
                 </a:solidFill>
@@ -2756,20 +2783,67 @@
               </a:rPr>
               <a:t>Temperature, humidity, airflow, and rack conditions live for both server halls, each window checked as it closes.</a:t>
             </a:r>
-            <a:endParaRPr lang="en-US" sz="1350" dirty="0"/>
-          </a:p>
-        </p:txBody>
-      </p:sp>
-      <p:sp>
-        <p:nvSpPr>
-          <p:cNvPr id="8" name="Text 6"/>
-          <p:cNvSpPr/>
-          <p:nvPr/>
-        </p:nvSpPr>
-        <p:spPr>
-          <a:xfrm>
-            <a:off x="640080" y="3200400"/>
-            <a:ext cx="1097280" cy="1097280"/>
+            <a:endParaRPr lang="en-US" sz="1300" dirty="0"/>
+          </a:p>
+        </p:txBody>
+      </p:sp>
+      <p:sp>
+        <p:nvSpPr>
+          <p:cNvPr id="9" name="Shape 7"/>
+          <p:cNvSpPr/>
+          <p:nvPr/>
+        </p:nvSpPr>
+        <p:spPr>
+          <a:xfrm>
+            <a:off x="640080" y="3401568"/>
+            <a:ext cx="5303520" cy="2606040"/>
+          </a:xfrm>
+          <a:prstGeom prst="roundRect">
+            <a:avLst>
+              <a:gd name="adj" fmla="val 3509"/>
+            </a:avLst>
+          </a:prstGeom>
+          <a:solidFill>
+            <a:srgbClr val="EEF2F6"/>
+          </a:solidFill>
+          <a:ln w="15240">
+            <a:solidFill>
+              <a:srgbClr val="3E5A7C"/>
+            </a:solidFill>
+            <a:prstDash val="solid"/>
+          </a:ln>
+        </p:spPr>
+      </p:sp>
+      <p:sp>
+        <p:nvSpPr>
+          <p:cNvPr id="10" name="Shape 8"/>
+          <p:cNvSpPr/>
+          <p:nvPr/>
+        </p:nvSpPr>
+        <p:spPr>
+          <a:xfrm>
+            <a:off x="914400" y="3675888"/>
+            <a:ext cx="603504" cy="603504"/>
+          </a:xfrm>
+          <a:prstGeom prst="ellipse">
+            <a:avLst/>
+          </a:prstGeom>
+          <a:solidFill>
+            <a:srgbClr val="2C3E55"/>
+          </a:solidFill>
+          <a:ln/>
+        </p:spPr>
+      </p:sp>
+      <p:sp>
+        <p:nvSpPr>
+          <p:cNvPr id="11" name="Text 9"/>
+          <p:cNvSpPr/>
+          <p:nvPr/>
+        </p:nvSpPr>
+        <p:spPr>
+          <a:xfrm>
+            <a:off x="914400" y="3675888"/>
+            <a:ext cx="603504" cy="603504"/>
           </a:xfrm>
           <a:prstGeom prst="rect">
             <a:avLst/>
@@ -2781,13 +2855,13 @@
           <a:bodyPr wrap="square" lIns="0" tIns="0" rIns="0" bIns="0" rtlCol="0" anchor="ctr"/>
           <a:lstStyle/>
           <a:p>
-            <a:pPr indent="0" marL="0">
+            <a:pPr algn="ctr" indent="0" marL="0">
               <a:buNone/>
             </a:pPr>
             <a:r>
-              <a:rPr lang="en-US" sz="5400" b="1" dirty="0">
+              <a:rPr lang="en-US" sz="2200" b="1" dirty="0">
                 <a:solidFill>
-                  <a:srgbClr val="EEF2F6"/>
+                  <a:srgbClr val="FFFFFF"/>
                 </a:solidFill>
                 <a:latin typeface="Bookman Old Style" pitchFamily="34" charset="0"/>
                 <a:ea typeface="Bookman Old Style" pitchFamily="34" charset="-122"/>
@@ -2795,43 +2869,20 @@
               </a:rPr>
               <a:t>2</a:t>
             </a:r>
-            <a:endParaRPr lang="en-US" sz="5400" dirty="0"/>
-          </a:p>
-        </p:txBody>
-      </p:sp>
-      <p:sp>
-        <p:nvSpPr>
-          <p:cNvPr id="9" name="Shape 7"/>
-          <p:cNvSpPr/>
-          <p:nvPr/>
-        </p:nvSpPr>
-        <p:spPr>
-          <a:xfrm>
-            <a:off x="1828800" y="3383280"/>
-            <a:ext cx="0" cy="1051560"/>
-          </a:xfrm>
-          <a:prstGeom prst="line">
-            <a:avLst/>
-          </a:prstGeom>
-          <a:noFill/>
-          <a:ln w="25400">
-            <a:solidFill>
-              <a:srgbClr val="3E5A7C"/>
-            </a:solidFill>
-            <a:prstDash val="solid"/>
-          </a:ln>
-        </p:spPr>
-      </p:sp>
-      <p:sp>
-        <p:nvSpPr>
-          <p:cNvPr id="10" name="Text 8"/>
-          <p:cNvSpPr/>
-          <p:nvPr/>
-        </p:nvSpPr>
-        <p:spPr>
-          <a:xfrm>
-            <a:off x="2057400" y="3337560"/>
-            <a:ext cx="9509760" cy="411480"/>
+            <a:endParaRPr lang="en-US" sz="2200" dirty="0"/>
+          </a:p>
+        </p:txBody>
+      </p:sp>
+      <p:sp>
+        <p:nvSpPr>
+          <p:cNvPr id="12" name="Text 10"/>
+          <p:cNvSpPr/>
+          <p:nvPr/>
+        </p:nvSpPr>
+        <p:spPr>
+          <a:xfrm>
+            <a:off x="914400" y="4425696"/>
+            <a:ext cx="4754880" cy="777240"/>
           </a:xfrm>
           <a:prstGeom prst="rect">
             <a:avLst/>
@@ -2847,7 +2898,7 @@
               <a:buNone/>
             </a:pPr>
             <a:r>
-              <a:rPr lang="en-US" sz="1800" b="1" dirty="0">
+              <a:rPr lang="en-US" sz="1600" b="1" dirty="0">
                 <a:solidFill>
                   <a:srgbClr val="19212C"/>
                 </a:solidFill>
@@ -2857,20 +2908,20 @@
               </a:rPr>
               <a:t>Threshold rules on every closed window</a:t>
             </a:r>
-            <a:endParaRPr lang="en-US" sz="1800" dirty="0"/>
-          </a:p>
-        </p:txBody>
-      </p:sp>
-      <p:sp>
-        <p:nvSpPr>
-          <p:cNvPr id="11" name="Text 9"/>
-          <p:cNvSpPr/>
-          <p:nvPr/>
-        </p:nvSpPr>
-        <p:spPr>
-          <a:xfrm>
-            <a:off x="2057400" y="3776472"/>
-            <a:ext cx="9509760" cy="822960"/>
+            <a:endParaRPr lang="en-US" sz="1600" dirty="0"/>
+          </a:p>
+        </p:txBody>
+      </p:sp>
+      <p:sp>
+        <p:nvSpPr>
+          <p:cNvPr id="13" name="Text 11"/>
+          <p:cNvSpPr/>
+          <p:nvPr/>
+        </p:nvSpPr>
+        <p:spPr>
+          <a:xfrm>
+            <a:off x="914400" y="5184648"/>
+            <a:ext cx="4754880" cy="640080"/>
           </a:xfrm>
           <a:prstGeom prst="rect">
             <a:avLst/>
@@ -2883,10 +2934,13 @@
           <a:lstStyle/>
           <a:p>
             <a:pPr indent="0" marL="0">
+              <a:lnSpc>
+                <a:spcPct val="106000"/>
+              </a:lnSpc>
               <a:buNone/>
             </a:pPr>
             <a:r>
-              <a:rPr lang="en-US" sz="1350" dirty="0">
+              <a:rPr lang="en-US" sz="1250" dirty="0">
                 <a:solidFill>
                   <a:srgbClr val="5F6B78"/>
                 </a:solidFill>
@@ -2896,20 +2950,67 @@
               </a:rPr>
               <a:t>An overheat above 27 C, condensation-risk humidity above 60%, or airflow below 400 CFM raises the instant that window closes.</a:t>
             </a:r>
-            <a:endParaRPr lang="en-US" sz="1350" dirty="0"/>
-          </a:p>
-        </p:txBody>
-      </p:sp>
-      <p:sp>
-        <p:nvSpPr>
-          <p:cNvPr id="12" name="Text 10"/>
-          <p:cNvSpPr/>
-          <p:nvPr/>
-        </p:nvSpPr>
-        <p:spPr>
-          <a:xfrm>
-            <a:off x="640080" y="4663440"/>
-            <a:ext cx="1097280" cy="1097280"/>
+            <a:endParaRPr lang="en-US" sz="1250" dirty="0"/>
+          </a:p>
+        </p:txBody>
+      </p:sp>
+      <p:sp>
+        <p:nvSpPr>
+          <p:cNvPr id="14" name="Shape 12"/>
+          <p:cNvSpPr/>
+          <p:nvPr/>
+        </p:nvSpPr>
+        <p:spPr>
+          <a:xfrm>
+            <a:off x="6217920" y="3401568"/>
+            <a:ext cx="5303520" cy="2606040"/>
+          </a:xfrm>
+          <a:prstGeom prst="roundRect">
+            <a:avLst>
+              <a:gd name="adj" fmla="val 3509"/>
+            </a:avLst>
+          </a:prstGeom>
+          <a:solidFill>
+            <a:srgbClr val="EEF2F6"/>
+          </a:solidFill>
+          <a:ln w="15240">
+            <a:solidFill>
+              <a:srgbClr val="3E5A7C"/>
+            </a:solidFill>
+            <a:prstDash val="solid"/>
+          </a:ln>
+        </p:spPr>
+      </p:sp>
+      <p:sp>
+        <p:nvSpPr>
+          <p:cNvPr id="15" name="Shape 13"/>
+          <p:cNvSpPr/>
+          <p:nvPr/>
+        </p:nvSpPr>
+        <p:spPr>
+          <a:xfrm>
+            <a:off x="6492240" y="3675888"/>
+            <a:ext cx="603504" cy="603504"/>
+          </a:xfrm>
+          <a:prstGeom prst="ellipse">
+            <a:avLst/>
+          </a:prstGeom>
+          <a:solidFill>
+            <a:srgbClr val="2C3E55"/>
+          </a:solidFill>
+          <a:ln/>
+        </p:spPr>
+      </p:sp>
+      <p:sp>
+        <p:nvSpPr>
+          <p:cNvPr id="16" name="Text 14"/>
+          <p:cNvSpPr/>
+          <p:nvPr/>
+        </p:nvSpPr>
+        <p:spPr>
+          <a:xfrm>
+            <a:off x="6492240" y="3675888"/>
+            <a:ext cx="603504" cy="603504"/>
           </a:xfrm>
           <a:prstGeom prst="rect">
             <a:avLst/>
@@ -2921,13 +3022,13 @@
           <a:bodyPr wrap="square" lIns="0" tIns="0" rIns="0" bIns="0" rtlCol="0" anchor="ctr"/>
           <a:lstStyle/>
           <a:p>
-            <a:pPr indent="0" marL="0">
+            <a:pPr algn="ctr" indent="0" marL="0">
               <a:buNone/>
             </a:pPr>
             <a:r>
-              <a:rPr lang="en-US" sz="5400" b="1" dirty="0">
+              <a:rPr lang="en-US" sz="2200" b="1" dirty="0">
                 <a:solidFill>
-                  <a:srgbClr val="EEF2F6"/>
+                  <a:srgbClr val="FFFFFF"/>
                 </a:solidFill>
                 <a:latin typeface="Bookman Old Style" pitchFamily="34" charset="0"/>
                 <a:ea typeface="Bookman Old Style" pitchFamily="34" charset="-122"/>
@@ -2935,43 +3036,20 @@
               </a:rPr>
               <a:t>3</a:t>
             </a:r>
-            <a:endParaRPr lang="en-US" sz="5400" dirty="0"/>
-          </a:p>
-        </p:txBody>
-      </p:sp>
-      <p:sp>
-        <p:nvSpPr>
-          <p:cNvPr id="13" name="Shape 11"/>
-          <p:cNvSpPr/>
-          <p:nvPr/>
-        </p:nvSpPr>
-        <p:spPr>
-          <a:xfrm>
-            <a:off x="1828800" y="4846320"/>
-            <a:ext cx="0" cy="1051560"/>
-          </a:xfrm>
-          <a:prstGeom prst="line">
-            <a:avLst/>
-          </a:prstGeom>
-          <a:noFill/>
-          <a:ln w="25400">
-            <a:solidFill>
-              <a:srgbClr val="3E5A7C"/>
-            </a:solidFill>
-            <a:prstDash val="solid"/>
-          </a:ln>
-        </p:spPr>
-      </p:sp>
-      <p:sp>
-        <p:nvSpPr>
-          <p:cNvPr id="14" name="Text 12"/>
-          <p:cNvSpPr/>
-          <p:nvPr/>
-        </p:nvSpPr>
-        <p:spPr>
-          <a:xfrm>
-            <a:off x="2057400" y="4800600"/>
-            <a:ext cx="9509760" cy="411480"/>
+            <a:endParaRPr lang="en-US" sz="2200" dirty="0"/>
+          </a:p>
+        </p:txBody>
+      </p:sp>
+      <p:sp>
+        <p:nvSpPr>
+          <p:cNvPr id="17" name="Text 15"/>
+          <p:cNvSpPr/>
+          <p:nvPr/>
+        </p:nvSpPr>
+        <p:spPr>
+          <a:xfrm>
+            <a:off x="6492240" y="4425696"/>
+            <a:ext cx="4754880" cy="777240"/>
           </a:xfrm>
           <a:prstGeom prst="rect">
             <a:avLst/>
@@ -2987,7 +3065,7 @@
               <a:buNone/>
             </a:pPr>
             <a:r>
-              <a:rPr lang="en-US" sz="1800" b="1" dirty="0">
+              <a:rPr lang="en-US" sz="1600" b="1" dirty="0">
                 <a:solidFill>
                   <a:srgbClr val="19212C"/>
                 </a:solidFill>
@@ -2997,20 +3075,20 @@
               </a:rPr>
               <a:t>Live per-hall readings</a:t>
             </a:r>
-            <a:endParaRPr lang="en-US" sz="1800" dirty="0"/>
-          </a:p>
-        </p:txBody>
-      </p:sp>
-      <p:sp>
-        <p:nvSpPr>
-          <p:cNvPr id="15" name="Text 13"/>
-          <p:cNvSpPr/>
-          <p:nvPr/>
-        </p:nvSpPr>
-        <p:spPr>
-          <a:xfrm>
-            <a:off x="2057400" y="5239512"/>
-            <a:ext cx="9509760" cy="822960"/>
+            <a:endParaRPr lang="en-US" sz="1600" dirty="0"/>
+          </a:p>
+        </p:txBody>
+      </p:sp>
+      <p:sp>
+        <p:nvSpPr>
+          <p:cNvPr id="18" name="Text 16"/>
+          <p:cNvSpPr/>
+          <p:nvPr/>
+        </p:nvSpPr>
+        <p:spPr>
+          <a:xfrm>
+            <a:off x="6492240" y="5184648"/>
+            <a:ext cx="4754880" cy="640080"/>
           </a:xfrm>
           <a:prstGeom prst="rect">
             <a:avLst/>
@@ -3023,10 +3101,13 @@
           <a:lstStyle/>
           <a:p>
             <a:pPr indent="0" marL="0">
+              <a:lnSpc>
+                <a:spcPct val="106000"/>
+              </a:lnSpc>
               <a:buNone/>
             </a:pPr>
             <a:r>
-              <a:rPr lang="en-US" sz="1350" dirty="0">
+              <a:rPr lang="en-US" sz="1250" dirty="0">
                 <a:solidFill>
                   <a:srgbClr val="5F6B78"/>
                 </a:solidFill>
@@ -3036,46 +3117,7 @@
               </a:rPr>
               <a:t>Both halls report side by side, so an overheating rack or a humidity swing is caught in seconds, not at the next round.</a:t>
             </a:r>
-            <a:endParaRPr lang="en-US" sz="1350" dirty="0"/>
-          </a:p>
-        </p:txBody>
-      </p:sp>
-      <p:sp>
-        <p:nvSpPr>
-          <p:cNvPr id="16" name="Text 14"/>
-          <p:cNvSpPr/>
-          <p:nvPr/>
-        </p:nvSpPr>
-        <p:spPr>
-          <a:xfrm>
-            <a:off x="640080" y="6309360"/>
-            <a:ext cx="10972800" cy="365760"/>
-          </a:xfrm>
-          <a:prstGeom prst="rect">
-            <a:avLst/>
-          </a:prstGeom>
-          <a:noFill/>
-          <a:ln/>
-        </p:spPr>
-        <p:txBody>
-          <a:bodyPr wrap="square" rtlCol="0" anchor="ctr"/>
-          <a:lstStyle/>
-          <a:p>
-            <a:pPr indent="0" marL="0">
-              <a:buNone/>
-            </a:pPr>
-            <a:r>
-              <a:rPr lang="en-US" sz="1300" i="1" dirty="0">
-                <a:solidFill>
-                  <a:srgbClr val="6A839C"/>
-                </a:solidFill>
-                <a:latin typeface="Calibri" pitchFamily="34" charset="0"/>
-                <a:ea typeface="Calibri" pitchFamily="34" charset="-122"/>
-                <a:cs typeface="Calibri" pitchFamily="34" charset="-120"/>
-              </a:rPr>
-              <a:t>Switch to the live dashboard here — backup video ready.</a:t>
-            </a:r>
-            <a:endParaRPr lang="en-US" sz="1300" dirty="0"/>
+            <a:endParaRPr lang="en-US" sz="1250" dirty="0"/>
           </a:p>
         </p:txBody>
       </p:sp>
@@ -3158,12 +3200,12 @@
         </p:nvSpPr>
         <p:spPr>
           <a:xfrm>
-            <a:off x="640080" y="1874520"/>
-            <a:ext cx="4937760" cy="4160520"/>
+            <a:off x="731520" y="1920240"/>
+            <a:ext cx="10698480" cy="1965960"/>
           </a:xfrm>
           <a:prstGeom prst="roundRect">
             <a:avLst>
-              <a:gd name="adj" fmla="val 2198"/>
+              <a:gd name="adj" fmla="val 4651"/>
             </a:avLst>
           </a:prstGeom>
           <a:solidFill>
@@ -3185,7 +3227,7 @@
         </p:nvSpPr>
         <p:spPr>
           <a:xfrm>
-            <a:off x="960120" y="2103120"/>
+            <a:off x="1005840" y="2103120"/>
             <a:ext cx="3657600" cy="457200"/>
           </a:xfrm>
           <a:prstGeom prst="rect">
@@ -3224,8 +3266,8 @@
         </p:nvSpPr>
         <p:spPr>
           <a:xfrm>
-            <a:off x="960120" y="2651760"/>
-            <a:ext cx="4343400" cy="3200400"/>
+            <a:off x="1005840" y="2578608"/>
+            <a:ext cx="9966960" cy="1188720"/>
           </a:xfrm>
           <a:prstGeom prst="rect">
             <a:avLst/>
@@ -3239,12 +3281,12 @@
           <a:p>
             <a:pPr indent="0" marL="0">
               <a:lnSpc>
-                <a:spcPct val="112000"/>
+                <a:spcPct val="105000"/>
               </a:lnSpc>
               <a:buNone/>
             </a:pPr>
             <a:r>
-              <a:rPr lang="en-US" sz="1350" dirty="0">
+              <a:rPr lang="en-US" sz="1300" dirty="0">
                 <a:solidFill>
                   <a:srgbClr val="19212C"/>
                 </a:solidFill>
@@ -3254,7 +3296,7 @@
               </a:rPr>
               <a:t>Whenever the AWS access-key environment variable existed, three files swapped in hardcoded emulator credentials — and real Lambda and EC2 inject that exact variable automatically. So genuine session credentials were thrown away and every DynamoDB and SQS call would have failed authentication. Locally the condition happened to be correct, so all 114 tests and the LocalStack run passed; the emulator cannot reproduce the trigger at all.</a:t>
             </a:r>
-            <a:endParaRPr lang="en-US" sz="1350" dirty="0"/>
+            <a:endParaRPr lang="en-US" sz="1300" dirty="0"/>
           </a:p>
         </p:txBody>
       </p:sp>
@@ -3266,12 +3308,12 @@
         </p:nvSpPr>
         <p:spPr>
           <a:xfrm>
-            <a:off x="6611112" y="1874520"/>
-            <a:ext cx="4937760" cy="4160520"/>
+            <a:off x="731520" y="4041648"/>
+            <a:ext cx="10698480" cy="1965960"/>
           </a:xfrm>
           <a:prstGeom prst="roundRect">
             <a:avLst>
-              <a:gd name="adj" fmla="val 2198"/>
+              <a:gd name="adj" fmla="val 4651"/>
             </a:avLst>
           </a:prstGeom>
           <a:solidFill>
@@ -3293,7 +3335,7 @@
         </p:nvSpPr>
         <p:spPr>
           <a:xfrm>
-            <a:off x="6931152" y="2103120"/>
+            <a:off x="1005840" y="4224528"/>
             <a:ext cx="3657600" cy="457200"/>
           </a:xfrm>
           <a:prstGeom prst="rect">
@@ -3332,8 +3374,8 @@
         </p:nvSpPr>
         <p:spPr>
           <a:xfrm>
-            <a:off x="6931152" y="2651760"/>
-            <a:ext cx="4343400" cy="3200400"/>
+            <a:off x="1005840" y="4700016"/>
+            <a:ext cx="9966960" cy="1188720"/>
           </a:xfrm>
           <a:prstGeom prst="rect">
             <a:avLst/>
@@ -3347,12 +3389,12 @@
           <a:p>
             <a:pPr indent="0" marL="0">
               <a:lnSpc>
-                <a:spcPct val="112000"/>
+                <a:spcPct val="105000"/>
               </a:lnSpc>
               <a:buNone/>
             </a:pPr>
             <a:r>
-              <a:rPr lang="en-US" sz="1350" dirty="0">
+              <a:rPr lang="en-US" sz="1300" dirty="0">
                 <a:solidFill>
                   <a:srgbClr val="19212C"/>
                 </a:solidFill>
@@ -3362,29 +3404,9 @@
               </a:rPr>
               <a:t>Gate the emulator credentials on a signal unique to local development — the explicit LocalStack endpoint override — applied across all three files, each with its own code shape, then redeployed and verified live with an end-to-end DynamoDB write and SQS receive. The same real-cloud testing also caught a pagination undercount, fixed with two new tests.</a:t>
             </a:r>
-            <a:endParaRPr lang="en-US" sz="1350" dirty="0"/>
-          </a:p>
-        </p:txBody>
-      </p:sp>
-      <p:sp>
-        <p:nvSpPr>
-          <p:cNvPr id="9" name="Shape 7"/>
-          <p:cNvSpPr/>
-          <p:nvPr/>
-        </p:nvSpPr>
-        <p:spPr>
-          <a:xfrm>
-            <a:off x="5669280" y="3703320"/>
-            <a:ext cx="841248" cy="512064"/>
-          </a:xfrm>
-          <a:prstGeom prst="rightArrow">
-            <a:avLst/>
-          </a:prstGeom>
-          <a:solidFill>
-            <a:srgbClr val="2C3E55"/>
-          </a:solidFill>
-          <a:ln/>
-        </p:spPr>
+            <a:endParaRPr lang="en-US" sz="1300" dirty="0"/>
+          </a:p>
+        </p:txBody>
       </p:sp>
     </p:spTree>
   </p:cSld>

--- a/ppt/Nithin_X25125338_data-center-environmental-monitoring.pptx
+++ b/ppt/Nithin_X25125338_data-center-environmental-monitoring.pptx
@@ -1124,7 +1124,7 @@
     <p:bg>
       <p:bgPr>
         <a:solidFill>
-          <a:srgbClr val="18202B"/>
+          <a:srgbClr val="FFFFFF"/>
         </a:solidFill>
       </p:bgPr>
     </p:bg>
@@ -1172,7 +1172,7 @@
             <a:r>
               <a:rPr lang="en-US" sz="1800" dirty="0">
                 <a:solidFill>
-                  <a:srgbClr val="D2DCE6"/>
+                  <a:srgbClr val="19212C"/>
                 </a:solidFill>
                 <a:latin typeface="Calibri" pitchFamily="34" charset="0"/>
                 <a:ea typeface="Calibri" pitchFamily="34" charset="-122"/>
@@ -1201,14 +1201,9 @@
             </a:avLst>
           </a:prstGeom>
           <a:solidFill>
-            <a:srgbClr val="1F2A38"/>
-          </a:solidFill>
-          <a:ln w="15875">
-            <a:solidFill>
-              <a:srgbClr val="E0A63C"/>
-            </a:solidFill>
-            <a:prstDash val="solid"/>
-          </a:ln>
+            <a:srgbClr val="2C3E55"/>
+          </a:solidFill>
+          <a:ln/>
         </p:spPr>
       </p:sp>
       <p:sp>
@@ -1277,7 +1272,7 @@
             <a:r>
               <a:rPr lang="en-US" sz="1500" dirty="0">
                 <a:solidFill>
-                  <a:srgbClr val="6A839C"/>
+                  <a:srgbClr val="D2DCE6"/>
                 </a:solidFill>
                 <a:latin typeface="Calibri" pitchFamily="34" charset="0"/>
                 <a:ea typeface="Calibri" pitchFamily="34" charset="-122"/>
@@ -1291,41 +1286,14 @@
       </p:sp>
       <p:sp>
         <p:nvSpPr>
-          <p:cNvPr id="6" name="Shape 4"/>
+          <p:cNvPr id="6" name="Text 4"/>
           <p:cNvSpPr/>
           <p:nvPr/>
         </p:nvSpPr>
         <p:spPr>
           <a:xfrm>
             <a:off x="1097280" y="4709160"/>
-            <a:ext cx="2651760" cy="566928"/>
-          </a:xfrm>
-          <a:prstGeom prst="roundRect">
-            <a:avLst>
-              <a:gd name="adj" fmla="val 50000"/>
-            </a:avLst>
-          </a:prstGeom>
-          <a:solidFill>
-            <a:srgbClr val="1F2A38"/>
-          </a:solidFill>
-          <a:ln w="12700">
-            <a:solidFill>
-              <a:srgbClr val="E0A63C"/>
-            </a:solidFill>
-            <a:prstDash val="solid"/>
-          </a:ln>
-        </p:spPr>
-      </p:sp>
-      <p:sp>
-        <p:nvSpPr>
-          <p:cNvPr id="7" name="Text 5"/>
-          <p:cNvSpPr/>
-          <p:nvPr/>
-        </p:nvSpPr>
-        <p:spPr>
-          <a:xfrm>
-            <a:off x="1097280" y="4709160"/>
-            <a:ext cx="2651760" cy="566928"/>
+            <a:ext cx="10972800" cy="457200"/>
           </a:xfrm>
           <a:prstGeom prst="rect">
             <a:avLst/>
@@ -1337,159 +1305,27 @@
           <a:bodyPr wrap="square" lIns="0" tIns="0" rIns="0" bIns="0" rtlCol="0" anchor="ctr"/>
           <a:lstStyle/>
           <a:p>
-            <a:pPr algn="ctr" indent="0" marL="0">
+            <a:pPr indent="0" marL="0">
               <a:buNone/>
             </a:pPr>
             <a:r>
-              <a:rPr lang="en-US" sz="1350" b="1" dirty="0">
+              <a:rPr lang="en-US" sz="1550" b="1" dirty="0">
                 <a:solidFill>
-                  <a:srgbClr val="E0A63C"/>
+                  <a:srgbClr val="2C3E55"/>
                 </a:solidFill>
                 <a:latin typeface="Calibri" pitchFamily="34" charset="0"/>
                 <a:ea typeface="Calibri" pitchFamily="34" charset="-122"/>
                 <a:cs typeface="Calibri" pitchFamily="34" charset="-120"/>
               </a:rPr>
-              <a:t>Hall temp &gt; 27 °C</a:t>
-            </a:r>
-            <a:endParaRPr lang="en-US" sz="1350" dirty="0"/>
-          </a:p>
-        </p:txBody>
-      </p:sp>
-      <p:sp>
-        <p:nvSpPr>
-          <p:cNvPr id="8" name="Shape 6"/>
-          <p:cNvSpPr/>
-          <p:nvPr/>
-        </p:nvSpPr>
-        <p:spPr>
-          <a:xfrm>
-            <a:off x="3977640" y="4709160"/>
-            <a:ext cx="2651760" cy="566928"/>
-          </a:xfrm>
-          <a:prstGeom prst="roundRect">
-            <a:avLst>
-              <a:gd name="adj" fmla="val 50000"/>
-            </a:avLst>
-          </a:prstGeom>
-          <a:solidFill>
-            <a:srgbClr val="1F2A38"/>
-          </a:solidFill>
-          <a:ln w="12700">
-            <a:solidFill>
-              <a:srgbClr val="E0A63C"/>
-            </a:solidFill>
-            <a:prstDash val="solid"/>
-          </a:ln>
-        </p:spPr>
-      </p:sp>
-      <p:sp>
-        <p:nvSpPr>
-          <p:cNvPr id="9" name="Text 7"/>
-          <p:cNvSpPr/>
-          <p:nvPr/>
-        </p:nvSpPr>
-        <p:spPr>
-          <a:xfrm>
-            <a:off x="3977640" y="4709160"/>
-            <a:ext cx="2651760" cy="566928"/>
-          </a:xfrm>
-          <a:prstGeom prst="rect">
-            <a:avLst/>
-          </a:prstGeom>
-          <a:noFill/>
-          <a:ln/>
-        </p:spPr>
-        <p:txBody>
-          <a:bodyPr wrap="square" lIns="0" tIns="0" rIns="0" bIns="0" rtlCol="0" anchor="ctr"/>
-          <a:lstStyle/>
-          <a:p>
-            <a:pPr algn="ctr" indent="0" marL="0">
-              <a:buNone/>
-            </a:pPr>
-            <a:r>
-              <a:rPr lang="en-US" sz="1350" b="1" dirty="0">
-                <a:solidFill>
-                  <a:srgbClr val="E0A63C"/>
-                </a:solidFill>
-                <a:latin typeface="Calibri" pitchFamily="34" charset="0"/>
-                <a:ea typeface="Calibri" pitchFamily="34" charset="-122"/>
-                <a:cs typeface="Calibri" pitchFamily="34" charset="-120"/>
-              </a:rPr>
-              <a:t>Humidity &gt; 60%</a:t>
-            </a:r>
-            <a:endParaRPr lang="en-US" sz="1350" dirty="0"/>
-          </a:p>
-        </p:txBody>
-      </p:sp>
-      <p:sp>
-        <p:nvSpPr>
-          <p:cNvPr id="10" name="Shape 8"/>
-          <p:cNvSpPr/>
-          <p:nvPr/>
-        </p:nvSpPr>
-        <p:spPr>
-          <a:xfrm>
-            <a:off x="6858000" y="4709160"/>
-            <a:ext cx="2651760" cy="566928"/>
-          </a:xfrm>
-          <a:prstGeom prst="roundRect">
-            <a:avLst>
-              <a:gd name="adj" fmla="val 50000"/>
-            </a:avLst>
-          </a:prstGeom>
-          <a:solidFill>
-            <a:srgbClr val="1F2A38"/>
-          </a:solidFill>
-          <a:ln w="12700">
-            <a:solidFill>
-              <a:srgbClr val="E0A63C"/>
-            </a:solidFill>
-            <a:prstDash val="solid"/>
-          </a:ln>
-        </p:spPr>
-      </p:sp>
-      <p:sp>
-        <p:nvSpPr>
-          <p:cNvPr id="11" name="Text 9"/>
-          <p:cNvSpPr/>
-          <p:nvPr/>
-        </p:nvSpPr>
-        <p:spPr>
-          <a:xfrm>
-            <a:off x="6858000" y="4709160"/>
-            <a:ext cx="2651760" cy="566928"/>
-          </a:xfrm>
-          <a:prstGeom prst="rect">
-            <a:avLst/>
-          </a:prstGeom>
-          <a:noFill/>
-          <a:ln/>
-        </p:spPr>
-        <p:txBody>
-          <a:bodyPr wrap="square" lIns="0" tIns="0" rIns="0" bIns="0" rtlCol="0" anchor="ctr"/>
-          <a:lstStyle/>
-          <a:p>
-            <a:pPr algn="ctr" indent="0" marL="0">
-              <a:buNone/>
-            </a:pPr>
-            <a:r>
-              <a:rPr lang="en-US" sz="1350" b="1" dirty="0">
-                <a:solidFill>
-                  <a:srgbClr val="E0A63C"/>
-                </a:solidFill>
-                <a:latin typeface="Calibri" pitchFamily="34" charset="0"/>
-                <a:ea typeface="Calibri" pitchFamily="34" charset="-122"/>
-                <a:cs typeface="Calibri" pitchFamily="34" charset="-120"/>
-              </a:rPr>
-              <a:t>Airflow &lt; 400 CFM</a:t>
-            </a:r>
-            <a:endParaRPr lang="en-US" sz="1350" dirty="0"/>
-          </a:p>
-        </p:txBody>
-      </p:sp>
-      <p:sp>
-        <p:nvSpPr>
-          <p:cNvPr id="12" name="Text 10"/>
+              <a:t>Hall temp &gt; 27 °C      ·      Humidity &gt; 60%      ·      Airflow &lt; 400 CFM</a:t>
+            </a:r>
+            <a:endParaRPr lang="en-US" sz="1550" dirty="0"/>
+          </a:p>
+        </p:txBody>
+      </p:sp>
+      <p:sp>
+        <p:nvSpPr>
+          <p:cNvPr id="7" name="Text 5"/>
           <p:cNvSpPr/>
           <p:nvPr/>
         </p:nvSpPr>
@@ -1511,17 +1347,6 @@
             <a:pPr indent="0" marL="0">
               <a:buNone/>
             </a:pPr>
-            <a:r>
-              <a:rPr lang="en-US" sz="1250" dirty="0">
-                <a:solidFill>
-                  <a:srgbClr val="5F6B78"/>
-                </a:solidFill>
-                <a:latin typeface="Calibri" pitchFamily="34" charset="0"/>
-                <a:ea typeface="Calibri" pitchFamily="34" charset="-122"/>
-                <a:cs typeface="Calibri" pitchFamily="34" charset="-120"/>
-              </a:rPr>
-              <a:t>Fog &amp; Edge Computing (H9FECC)   ·   deployed live on AWS</a:t>
-            </a:r>
             <a:endParaRPr lang="en-US" sz="1250" dirty="0"/>
           </a:p>
         </p:txBody>

--- a/ppt/Nithin_X25125338_data-center-environmental-monitoring.pptx
+++ b/ppt/Nithin_X25125338_data-center-environmental-monitoring.pptx
@@ -1124,7 +1124,7 @@
     <p:bg>
       <p:bgPr>
         <a:solidFill>
-          <a:srgbClr val="FFFFFF"/>
+          <a:srgbClr val="0D1B22"/>
         </a:solidFill>
       </p:bgPr>
     </p:bg>
@@ -1144,14 +1144,714 @@
       </p:grpSpPr>
       <p:sp>
         <p:nvSpPr>
-          <p:cNvPr id="2" name="Text 0"/>
-          <p:cNvSpPr/>
-          <p:nvPr/>
-        </p:nvSpPr>
-        <p:spPr>
-          <a:xfrm>
-            <a:off x="658368" y="777240"/>
-            <a:ext cx="10607040" cy="1280160"/>
+          <p:cNvPr id="2" name="Shape 0"/>
+          <p:cNvSpPr/>
+          <p:nvPr/>
+        </p:nvSpPr>
+        <p:spPr>
+          <a:xfrm>
+            <a:off x="685800" y="0"/>
+            <a:ext cx="0" cy="6858000"/>
+          </a:xfrm>
+          <a:prstGeom prst="line">
+            <a:avLst/>
+          </a:prstGeom>
+          <a:noFill/>
+          <a:ln w="6350">
+            <a:solidFill>
+              <a:srgbClr val="3FB8C4">
+                <a:alpha val="18000"/>
+              </a:srgbClr>
+            </a:solidFill>
+            <a:prstDash val="solid"/>
+          </a:ln>
+        </p:spPr>
+      </p:sp>
+      <p:sp>
+        <p:nvSpPr>
+          <p:cNvPr id="3" name="Shape 1"/>
+          <p:cNvSpPr/>
+          <p:nvPr/>
+        </p:nvSpPr>
+        <p:spPr>
+          <a:xfrm>
+            <a:off x="1325880" y="0"/>
+            <a:ext cx="0" cy="6858000"/>
+          </a:xfrm>
+          <a:prstGeom prst="line">
+            <a:avLst/>
+          </a:prstGeom>
+          <a:noFill/>
+          <a:ln w="6350">
+            <a:solidFill>
+              <a:srgbClr val="3FB8C4">
+                <a:alpha val="18000"/>
+              </a:srgbClr>
+            </a:solidFill>
+            <a:prstDash val="solid"/>
+          </a:ln>
+        </p:spPr>
+      </p:sp>
+      <p:sp>
+        <p:nvSpPr>
+          <p:cNvPr id="4" name="Shape 2"/>
+          <p:cNvSpPr/>
+          <p:nvPr/>
+        </p:nvSpPr>
+        <p:spPr>
+          <a:xfrm>
+            <a:off x="1965960" y="0"/>
+            <a:ext cx="0" cy="6858000"/>
+          </a:xfrm>
+          <a:prstGeom prst="line">
+            <a:avLst/>
+          </a:prstGeom>
+          <a:noFill/>
+          <a:ln w="6350">
+            <a:solidFill>
+              <a:srgbClr val="3FB8C4">
+                <a:alpha val="18000"/>
+              </a:srgbClr>
+            </a:solidFill>
+            <a:prstDash val="solid"/>
+          </a:ln>
+        </p:spPr>
+      </p:sp>
+      <p:sp>
+        <p:nvSpPr>
+          <p:cNvPr id="5" name="Shape 3"/>
+          <p:cNvSpPr/>
+          <p:nvPr/>
+        </p:nvSpPr>
+        <p:spPr>
+          <a:xfrm>
+            <a:off x="2606040" y="0"/>
+            <a:ext cx="0" cy="6858000"/>
+          </a:xfrm>
+          <a:prstGeom prst="line">
+            <a:avLst/>
+          </a:prstGeom>
+          <a:noFill/>
+          <a:ln w="6350">
+            <a:solidFill>
+              <a:srgbClr val="3FB8C4">
+                <a:alpha val="18000"/>
+              </a:srgbClr>
+            </a:solidFill>
+            <a:prstDash val="solid"/>
+          </a:ln>
+        </p:spPr>
+      </p:sp>
+      <p:sp>
+        <p:nvSpPr>
+          <p:cNvPr id="6" name="Shape 4"/>
+          <p:cNvSpPr/>
+          <p:nvPr/>
+        </p:nvSpPr>
+        <p:spPr>
+          <a:xfrm>
+            <a:off x="3246120" y="0"/>
+            <a:ext cx="0" cy="6858000"/>
+          </a:xfrm>
+          <a:prstGeom prst="line">
+            <a:avLst/>
+          </a:prstGeom>
+          <a:noFill/>
+          <a:ln w="6350">
+            <a:solidFill>
+              <a:srgbClr val="3FB8C4">
+                <a:alpha val="18000"/>
+              </a:srgbClr>
+            </a:solidFill>
+            <a:prstDash val="solid"/>
+          </a:ln>
+        </p:spPr>
+      </p:sp>
+      <p:sp>
+        <p:nvSpPr>
+          <p:cNvPr id="7" name="Shape 5"/>
+          <p:cNvSpPr/>
+          <p:nvPr/>
+        </p:nvSpPr>
+        <p:spPr>
+          <a:xfrm>
+            <a:off x="3886200" y="0"/>
+            <a:ext cx="0" cy="6858000"/>
+          </a:xfrm>
+          <a:prstGeom prst="line">
+            <a:avLst/>
+          </a:prstGeom>
+          <a:noFill/>
+          <a:ln w="6350">
+            <a:solidFill>
+              <a:srgbClr val="3FB8C4">
+                <a:alpha val="18000"/>
+              </a:srgbClr>
+            </a:solidFill>
+            <a:prstDash val="solid"/>
+          </a:ln>
+        </p:spPr>
+      </p:sp>
+      <p:sp>
+        <p:nvSpPr>
+          <p:cNvPr id="8" name="Shape 6"/>
+          <p:cNvSpPr/>
+          <p:nvPr/>
+        </p:nvSpPr>
+        <p:spPr>
+          <a:xfrm>
+            <a:off x="4526280" y="0"/>
+            <a:ext cx="0" cy="6858000"/>
+          </a:xfrm>
+          <a:prstGeom prst="line">
+            <a:avLst/>
+          </a:prstGeom>
+          <a:noFill/>
+          <a:ln w="6350">
+            <a:solidFill>
+              <a:srgbClr val="3FB8C4">
+                <a:alpha val="18000"/>
+              </a:srgbClr>
+            </a:solidFill>
+            <a:prstDash val="solid"/>
+          </a:ln>
+        </p:spPr>
+      </p:sp>
+      <p:sp>
+        <p:nvSpPr>
+          <p:cNvPr id="9" name="Shape 7"/>
+          <p:cNvSpPr/>
+          <p:nvPr/>
+        </p:nvSpPr>
+        <p:spPr>
+          <a:xfrm>
+            <a:off x="5166360" y="0"/>
+            <a:ext cx="0" cy="6858000"/>
+          </a:xfrm>
+          <a:prstGeom prst="line">
+            <a:avLst/>
+          </a:prstGeom>
+          <a:noFill/>
+          <a:ln w="6350">
+            <a:solidFill>
+              <a:srgbClr val="3FB8C4">
+                <a:alpha val="18000"/>
+              </a:srgbClr>
+            </a:solidFill>
+            <a:prstDash val="solid"/>
+          </a:ln>
+        </p:spPr>
+      </p:sp>
+      <p:sp>
+        <p:nvSpPr>
+          <p:cNvPr id="10" name="Shape 8"/>
+          <p:cNvSpPr/>
+          <p:nvPr/>
+        </p:nvSpPr>
+        <p:spPr>
+          <a:xfrm>
+            <a:off x="5806440" y="0"/>
+            <a:ext cx="0" cy="6858000"/>
+          </a:xfrm>
+          <a:prstGeom prst="line">
+            <a:avLst/>
+          </a:prstGeom>
+          <a:noFill/>
+          <a:ln w="6350">
+            <a:solidFill>
+              <a:srgbClr val="3FB8C4">
+                <a:alpha val="18000"/>
+              </a:srgbClr>
+            </a:solidFill>
+            <a:prstDash val="solid"/>
+          </a:ln>
+        </p:spPr>
+      </p:sp>
+      <p:sp>
+        <p:nvSpPr>
+          <p:cNvPr id="11" name="Shape 9"/>
+          <p:cNvSpPr/>
+          <p:nvPr/>
+        </p:nvSpPr>
+        <p:spPr>
+          <a:xfrm>
+            <a:off x="6446520" y="0"/>
+            <a:ext cx="0" cy="6858000"/>
+          </a:xfrm>
+          <a:prstGeom prst="line">
+            <a:avLst/>
+          </a:prstGeom>
+          <a:noFill/>
+          <a:ln w="6350">
+            <a:solidFill>
+              <a:srgbClr val="3FB8C4">
+                <a:alpha val="18000"/>
+              </a:srgbClr>
+            </a:solidFill>
+            <a:prstDash val="solid"/>
+          </a:ln>
+        </p:spPr>
+      </p:sp>
+      <p:sp>
+        <p:nvSpPr>
+          <p:cNvPr id="12" name="Shape 10"/>
+          <p:cNvSpPr/>
+          <p:nvPr/>
+        </p:nvSpPr>
+        <p:spPr>
+          <a:xfrm>
+            <a:off x="7086600" y="0"/>
+            <a:ext cx="0" cy="6858000"/>
+          </a:xfrm>
+          <a:prstGeom prst="line">
+            <a:avLst/>
+          </a:prstGeom>
+          <a:noFill/>
+          <a:ln w="6350">
+            <a:solidFill>
+              <a:srgbClr val="3FB8C4">
+                <a:alpha val="18000"/>
+              </a:srgbClr>
+            </a:solidFill>
+            <a:prstDash val="solid"/>
+          </a:ln>
+        </p:spPr>
+      </p:sp>
+      <p:sp>
+        <p:nvSpPr>
+          <p:cNvPr id="13" name="Shape 11"/>
+          <p:cNvSpPr/>
+          <p:nvPr/>
+        </p:nvSpPr>
+        <p:spPr>
+          <a:xfrm>
+            <a:off x="7726680" y="0"/>
+            <a:ext cx="0" cy="6858000"/>
+          </a:xfrm>
+          <a:prstGeom prst="line">
+            <a:avLst/>
+          </a:prstGeom>
+          <a:noFill/>
+          <a:ln w="6350">
+            <a:solidFill>
+              <a:srgbClr val="3FB8C4">
+                <a:alpha val="18000"/>
+              </a:srgbClr>
+            </a:solidFill>
+            <a:prstDash val="solid"/>
+          </a:ln>
+        </p:spPr>
+      </p:sp>
+      <p:sp>
+        <p:nvSpPr>
+          <p:cNvPr id="14" name="Shape 12"/>
+          <p:cNvSpPr/>
+          <p:nvPr/>
+        </p:nvSpPr>
+        <p:spPr>
+          <a:xfrm>
+            <a:off x="8366760" y="0"/>
+            <a:ext cx="0" cy="6858000"/>
+          </a:xfrm>
+          <a:prstGeom prst="line">
+            <a:avLst/>
+          </a:prstGeom>
+          <a:noFill/>
+          <a:ln w="6350">
+            <a:solidFill>
+              <a:srgbClr val="3FB8C4">
+                <a:alpha val="18000"/>
+              </a:srgbClr>
+            </a:solidFill>
+            <a:prstDash val="solid"/>
+          </a:ln>
+        </p:spPr>
+      </p:sp>
+      <p:sp>
+        <p:nvSpPr>
+          <p:cNvPr id="15" name="Shape 13"/>
+          <p:cNvSpPr/>
+          <p:nvPr/>
+        </p:nvSpPr>
+        <p:spPr>
+          <a:xfrm>
+            <a:off x="9006840" y="0"/>
+            <a:ext cx="0" cy="6858000"/>
+          </a:xfrm>
+          <a:prstGeom prst="line">
+            <a:avLst/>
+          </a:prstGeom>
+          <a:noFill/>
+          <a:ln w="6350">
+            <a:solidFill>
+              <a:srgbClr val="3FB8C4">
+                <a:alpha val="18000"/>
+              </a:srgbClr>
+            </a:solidFill>
+            <a:prstDash val="solid"/>
+          </a:ln>
+        </p:spPr>
+      </p:sp>
+      <p:sp>
+        <p:nvSpPr>
+          <p:cNvPr id="16" name="Shape 14"/>
+          <p:cNvSpPr/>
+          <p:nvPr/>
+        </p:nvSpPr>
+        <p:spPr>
+          <a:xfrm>
+            <a:off x="9646920" y="0"/>
+            <a:ext cx="0" cy="6858000"/>
+          </a:xfrm>
+          <a:prstGeom prst="line">
+            <a:avLst/>
+          </a:prstGeom>
+          <a:noFill/>
+          <a:ln w="6350">
+            <a:solidFill>
+              <a:srgbClr val="3FB8C4">
+                <a:alpha val="18000"/>
+              </a:srgbClr>
+            </a:solidFill>
+            <a:prstDash val="solid"/>
+          </a:ln>
+        </p:spPr>
+      </p:sp>
+      <p:sp>
+        <p:nvSpPr>
+          <p:cNvPr id="17" name="Shape 15"/>
+          <p:cNvSpPr/>
+          <p:nvPr/>
+        </p:nvSpPr>
+        <p:spPr>
+          <a:xfrm>
+            <a:off x="10287000" y="0"/>
+            <a:ext cx="0" cy="6858000"/>
+          </a:xfrm>
+          <a:prstGeom prst="line">
+            <a:avLst/>
+          </a:prstGeom>
+          <a:noFill/>
+          <a:ln w="6350">
+            <a:solidFill>
+              <a:srgbClr val="3FB8C4">
+                <a:alpha val="18000"/>
+              </a:srgbClr>
+            </a:solidFill>
+            <a:prstDash val="solid"/>
+          </a:ln>
+        </p:spPr>
+      </p:sp>
+      <p:sp>
+        <p:nvSpPr>
+          <p:cNvPr id="18" name="Shape 16"/>
+          <p:cNvSpPr/>
+          <p:nvPr/>
+        </p:nvSpPr>
+        <p:spPr>
+          <a:xfrm>
+            <a:off x="10927080" y="0"/>
+            <a:ext cx="0" cy="6858000"/>
+          </a:xfrm>
+          <a:prstGeom prst="line">
+            <a:avLst/>
+          </a:prstGeom>
+          <a:noFill/>
+          <a:ln w="6350">
+            <a:solidFill>
+              <a:srgbClr val="3FB8C4">
+                <a:alpha val="18000"/>
+              </a:srgbClr>
+            </a:solidFill>
+            <a:prstDash val="solid"/>
+          </a:ln>
+        </p:spPr>
+      </p:sp>
+      <p:sp>
+        <p:nvSpPr>
+          <p:cNvPr id="19" name="Shape 17"/>
+          <p:cNvSpPr/>
+          <p:nvPr/>
+        </p:nvSpPr>
+        <p:spPr>
+          <a:xfrm>
+            <a:off x="11567160" y="0"/>
+            <a:ext cx="0" cy="6858000"/>
+          </a:xfrm>
+          <a:prstGeom prst="line">
+            <a:avLst/>
+          </a:prstGeom>
+          <a:noFill/>
+          <a:ln w="6350">
+            <a:solidFill>
+              <a:srgbClr val="3FB8C4">
+                <a:alpha val="18000"/>
+              </a:srgbClr>
+            </a:solidFill>
+            <a:prstDash val="solid"/>
+          </a:ln>
+        </p:spPr>
+      </p:sp>
+      <p:sp>
+        <p:nvSpPr>
+          <p:cNvPr id="20" name="Shape 18"/>
+          <p:cNvSpPr/>
+          <p:nvPr/>
+        </p:nvSpPr>
+        <p:spPr>
+          <a:xfrm>
+            <a:off x="0" y="640080"/>
+            <a:ext cx="12191695" cy="0"/>
+          </a:xfrm>
+          <a:prstGeom prst="line">
+            <a:avLst/>
+          </a:prstGeom>
+          <a:noFill/>
+          <a:ln w="6350">
+            <a:solidFill>
+              <a:srgbClr val="3FB8C4">
+                <a:alpha val="18000"/>
+              </a:srgbClr>
+            </a:solidFill>
+            <a:prstDash val="solid"/>
+          </a:ln>
+        </p:spPr>
+      </p:sp>
+      <p:sp>
+        <p:nvSpPr>
+          <p:cNvPr id="21" name="Shape 19"/>
+          <p:cNvSpPr/>
+          <p:nvPr/>
+        </p:nvSpPr>
+        <p:spPr>
+          <a:xfrm>
+            <a:off x="0" y="1280160"/>
+            <a:ext cx="12191695" cy="0"/>
+          </a:xfrm>
+          <a:prstGeom prst="line">
+            <a:avLst/>
+          </a:prstGeom>
+          <a:noFill/>
+          <a:ln w="6350">
+            <a:solidFill>
+              <a:srgbClr val="3FB8C4">
+                <a:alpha val="18000"/>
+              </a:srgbClr>
+            </a:solidFill>
+            <a:prstDash val="solid"/>
+          </a:ln>
+        </p:spPr>
+      </p:sp>
+      <p:sp>
+        <p:nvSpPr>
+          <p:cNvPr id="22" name="Shape 20"/>
+          <p:cNvSpPr/>
+          <p:nvPr/>
+        </p:nvSpPr>
+        <p:spPr>
+          <a:xfrm>
+            <a:off x="0" y="1920240"/>
+            <a:ext cx="12191695" cy="0"/>
+          </a:xfrm>
+          <a:prstGeom prst="line">
+            <a:avLst/>
+          </a:prstGeom>
+          <a:noFill/>
+          <a:ln w="6350">
+            <a:solidFill>
+              <a:srgbClr val="3FB8C4">
+                <a:alpha val="18000"/>
+              </a:srgbClr>
+            </a:solidFill>
+            <a:prstDash val="solid"/>
+          </a:ln>
+        </p:spPr>
+      </p:sp>
+      <p:sp>
+        <p:nvSpPr>
+          <p:cNvPr id="23" name="Shape 21"/>
+          <p:cNvSpPr/>
+          <p:nvPr/>
+        </p:nvSpPr>
+        <p:spPr>
+          <a:xfrm>
+            <a:off x="0" y="2560320"/>
+            <a:ext cx="12191695" cy="0"/>
+          </a:xfrm>
+          <a:prstGeom prst="line">
+            <a:avLst/>
+          </a:prstGeom>
+          <a:noFill/>
+          <a:ln w="6350">
+            <a:solidFill>
+              <a:srgbClr val="3FB8C4">
+                <a:alpha val="18000"/>
+              </a:srgbClr>
+            </a:solidFill>
+            <a:prstDash val="solid"/>
+          </a:ln>
+        </p:spPr>
+      </p:sp>
+      <p:sp>
+        <p:nvSpPr>
+          <p:cNvPr id="24" name="Shape 22"/>
+          <p:cNvSpPr/>
+          <p:nvPr/>
+        </p:nvSpPr>
+        <p:spPr>
+          <a:xfrm>
+            <a:off x="0" y="3200400"/>
+            <a:ext cx="12191695" cy="0"/>
+          </a:xfrm>
+          <a:prstGeom prst="line">
+            <a:avLst/>
+          </a:prstGeom>
+          <a:noFill/>
+          <a:ln w="6350">
+            <a:solidFill>
+              <a:srgbClr val="3FB8C4">
+                <a:alpha val="18000"/>
+              </a:srgbClr>
+            </a:solidFill>
+            <a:prstDash val="solid"/>
+          </a:ln>
+        </p:spPr>
+      </p:sp>
+      <p:sp>
+        <p:nvSpPr>
+          <p:cNvPr id="25" name="Shape 23"/>
+          <p:cNvSpPr/>
+          <p:nvPr/>
+        </p:nvSpPr>
+        <p:spPr>
+          <a:xfrm>
+            <a:off x="0" y="3840480"/>
+            <a:ext cx="12191695" cy="0"/>
+          </a:xfrm>
+          <a:prstGeom prst="line">
+            <a:avLst/>
+          </a:prstGeom>
+          <a:noFill/>
+          <a:ln w="6350">
+            <a:solidFill>
+              <a:srgbClr val="3FB8C4">
+                <a:alpha val="18000"/>
+              </a:srgbClr>
+            </a:solidFill>
+            <a:prstDash val="solid"/>
+          </a:ln>
+        </p:spPr>
+      </p:sp>
+      <p:sp>
+        <p:nvSpPr>
+          <p:cNvPr id="26" name="Shape 24"/>
+          <p:cNvSpPr/>
+          <p:nvPr/>
+        </p:nvSpPr>
+        <p:spPr>
+          <a:xfrm>
+            <a:off x="0" y="4480560"/>
+            <a:ext cx="12191695" cy="0"/>
+          </a:xfrm>
+          <a:prstGeom prst="line">
+            <a:avLst/>
+          </a:prstGeom>
+          <a:noFill/>
+          <a:ln w="6350">
+            <a:solidFill>
+              <a:srgbClr val="3FB8C4">
+                <a:alpha val="18000"/>
+              </a:srgbClr>
+            </a:solidFill>
+            <a:prstDash val="solid"/>
+          </a:ln>
+        </p:spPr>
+      </p:sp>
+      <p:sp>
+        <p:nvSpPr>
+          <p:cNvPr id="27" name="Shape 25"/>
+          <p:cNvSpPr/>
+          <p:nvPr/>
+        </p:nvSpPr>
+        <p:spPr>
+          <a:xfrm>
+            <a:off x="0" y="5120640"/>
+            <a:ext cx="12191695" cy="0"/>
+          </a:xfrm>
+          <a:prstGeom prst="line">
+            <a:avLst/>
+          </a:prstGeom>
+          <a:noFill/>
+          <a:ln w="6350">
+            <a:solidFill>
+              <a:srgbClr val="3FB8C4">
+                <a:alpha val="18000"/>
+              </a:srgbClr>
+            </a:solidFill>
+            <a:prstDash val="solid"/>
+          </a:ln>
+        </p:spPr>
+      </p:sp>
+      <p:sp>
+        <p:nvSpPr>
+          <p:cNvPr id="28" name="Shape 26"/>
+          <p:cNvSpPr/>
+          <p:nvPr/>
+        </p:nvSpPr>
+        <p:spPr>
+          <a:xfrm>
+            <a:off x="0" y="5760720"/>
+            <a:ext cx="12191695" cy="0"/>
+          </a:xfrm>
+          <a:prstGeom prst="line">
+            <a:avLst/>
+          </a:prstGeom>
+          <a:noFill/>
+          <a:ln w="6350">
+            <a:solidFill>
+              <a:srgbClr val="3FB8C4">
+                <a:alpha val="18000"/>
+              </a:srgbClr>
+            </a:solidFill>
+            <a:prstDash val="solid"/>
+          </a:ln>
+        </p:spPr>
+      </p:sp>
+      <p:sp>
+        <p:nvSpPr>
+          <p:cNvPr id="29" name="Shape 27"/>
+          <p:cNvSpPr/>
+          <p:nvPr/>
+        </p:nvSpPr>
+        <p:spPr>
+          <a:xfrm>
+            <a:off x="0" y="6400800"/>
+            <a:ext cx="12191695" cy="0"/>
+          </a:xfrm>
+          <a:prstGeom prst="line">
+            <a:avLst/>
+          </a:prstGeom>
+          <a:noFill/>
+          <a:ln w="6350">
+            <a:solidFill>
+              <a:srgbClr val="3FB8C4">
+                <a:alpha val="18000"/>
+              </a:srgbClr>
+            </a:solidFill>
+            <a:prstDash val="solid"/>
+          </a:ln>
+        </p:spPr>
+      </p:sp>
+      <p:sp>
+        <p:nvSpPr>
+          <p:cNvPr id="30" name="Text 28"/>
+          <p:cNvSpPr/>
+          <p:nvPr/>
+        </p:nvSpPr>
+        <p:spPr>
+          <a:xfrm>
+            <a:off x="758952" y="1645920"/>
+            <a:ext cx="10637215" cy="1645920"/>
           </a:xfrm>
           <a:prstGeom prst="rect">
             <a:avLst/>
@@ -1160,101 +1860,40 @@
           <a:ln/>
         </p:spPr>
         <p:txBody>
-          <a:bodyPr wrap="square" rtlCol="0" anchor="ctr"/>
+          <a:bodyPr wrap="square" rtlCol="0" anchor="t"/>
           <a:lstStyle/>
           <a:p>
             <a:pPr indent="0" marL="0">
               <a:lnSpc>
-                <a:spcPct val="108000"/>
+                <a:spcPct val="98000"/>
               </a:lnSpc>
               <a:buNone/>
             </a:pPr>
             <a:r>
-              <a:rPr lang="en-US" sz="1800" dirty="0">
+              <a:rPr lang="en-US" sz="3800" b="1" dirty="0">
                 <a:solidFill>
-                  <a:srgbClr val="19212C"/>
+                  <a:srgbClr val="E7F1F4"/>
                 </a:solidFill>
                 <a:latin typeface="Calibri" pitchFamily="34" charset="0"/>
                 <a:ea typeface="Calibri" pitchFamily="34" charset="-122"/>
                 <a:cs typeface="Calibri" pitchFamily="34" charset="-120"/>
               </a:rPr>
-              <a:t>An overheating server, a humidity swing toward condensation, or restricted airflow around a rack can each trigger a costly unplanned outage — and fixed rounds see them only after the fact.</a:t>
+              <a:t>Data Center Environmental Monitoring</a:t>
             </a:r>
-            <a:endParaRPr lang="en-US" sz="1800" dirty="0"/>
+            <a:endParaRPr lang="en-US" sz="3800" dirty="0"/>
           </a:p>
         </p:txBody>
       </p:sp>
       <p:sp>
         <p:nvSpPr>
-          <p:cNvPr id="3" name="Shape 1"/>
-          <p:cNvSpPr/>
-          <p:nvPr/>
-        </p:nvSpPr>
-        <p:spPr>
-          <a:xfrm>
-            <a:off x="1097280" y="2377440"/>
-            <a:ext cx="9966960" cy="2011680"/>
-          </a:xfrm>
-          <a:prstGeom prst="roundRect">
-            <a:avLst>
-              <a:gd name="adj" fmla="val 5455"/>
-            </a:avLst>
-          </a:prstGeom>
-          <a:solidFill>
-            <a:srgbClr val="2C3E55"/>
-          </a:solidFill>
-          <a:ln/>
-        </p:spPr>
-      </p:sp>
-      <p:sp>
-        <p:nvSpPr>
-          <p:cNvPr id="4" name="Text 2"/>
-          <p:cNvSpPr/>
-          <p:nvPr/>
-        </p:nvSpPr>
-        <p:spPr>
-          <a:xfrm>
-            <a:off x="1463040" y="2651760"/>
-            <a:ext cx="9235440" cy="1005840"/>
-          </a:xfrm>
-          <a:prstGeom prst="rect">
-            <a:avLst/>
-          </a:prstGeom>
-          <a:noFill/>
-          <a:ln/>
-        </p:spPr>
-        <p:txBody>
-          <a:bodyPr wrap="square" rtlCol="0" anchor="t"/>
-          <a:lstStyle/>
-          <a:p>
-            <a:pPr indent="0" marL="0">
-              <a:buNone/>
-            </a:pPr>
-            <a:r>
-              <a:rPr lang="en-US" sz="3600" b="1" dirty="0">
-                <a:solidFill>
-                  <a:srgbClr val="FFFFFF"/>
-                </a:solidFill>
-                <a:latin typeface="Bookman Old Style" pitchFamily="34" charset="0"/>
-                <a:ea typeface="Bookman Old Style" pitchFamily="34" charset="-122"/>
-                <a:cs typeface="Bookman Old Style" pitchFamily="34" charset="-120"/>
-              </a:rPr>
-              <a:t>Data Center Environmental Monitoring</a:t>
-            </a:r>
-            <a:endParaRPr lang="en-US" sz="3600" dirty="0"/>
-          </a:p>
-        </p:txBody>
-      </p:sp>
-      <p:sp>
-        <p:nvSpPr>
-          <p:cNvPr id="5" name="Text 3"/>
-          <p:cNvSpPr/>
-          <p:nvPr/>
-        </p:nvSpPr>
-        <p:spPr>
-          <a:xfrm>
-            <a:off x="1481328" y="3703320"/>
-            <a:ext cx="9144000" cy="457200"/>
+          <p:cNvPr id="31" name="Text 29"/>
+          <p:cNvSpPr/>
+          <p:nvPr/>
+        </p:nvSpPr>
+        <p:spPr>
+          <a:xfrm>
+            <a:off x="777240" y="3337560"/>
+            <a:ext cx="10637215" cy="365760"/>
           </a:xfrm>
           <a:prstGeom prst="rect">
             <a:avLst/>
@@ -1270,9 +1909,9 @@
               <a:buNone/>
             </a:pPr>
             <a:r>
-              <a:rPr lang="en-US" sz="1500" dirty="0">
+              <a:rPr lang="en-US" sz="1450" dirty="0">
                 <a:solidFill>
-                  <a:srgbClr val="D2DCE6"/>
+                  <a:srgbClr val="8B98A6"/>
                 </a:solidFill>
                 <a:latin typeface="Calibri" pitchFamily="34" charset="0"/>
                 <a:ea typeface="Calibri" pitchFamily="34" charset="-122"/>
@@ -1280,20 +1919,20 @@
               </a:rPr>
               <a:t>Nithin   ·   X25125338</a:t>
             </a:r>
-            <a:endParaRPr lang="en-US" sz="1500" dirty="0"/>
+            <a:endParaRPr lang="en-US" sz="1450" dirty="0"/>
           </a:p>
         </p:txBody>
       </p:sp>
       <p:sp>
         <p:nvSpPr>
-          <p:cNvPr id="6" name="Text 4"/>
-          <p:cNvSpPr/>
-          <p:nvPr/>
-        </p:nvSpPr>
-        <p:spPr>
-          <a:xfrm>
-            <a:off x="1097280" y="4709160"/>
-            <a:ext cx="10972800" cy="457200"/>
+          <p:cNvPr id="32" name="Text 30"/>
+          <p:cNvSpPr/>
+          <p:nvPr/>
+        </p:nvSpPr>
+        <p:spPr>
+          <a:xfrm>
+            <a:off x="777240" y="3931920"/>
+            <a:ext cx="8138160" cy="1325880"/>
           </a:xfrm>
           <a:prstGeom prst="rect">
             <a:avLst/>
@@ -1302,52 +1941,27 @@
           <a:ln/>
         </p:spPr>
         <p:txBody>
-          <a:bodyPr wrap="square" lIns="0" tIns="0" rIns="0" bIns="0" rtlCol="0" anchor="ctr"/>
+          <a:bodyPr wrap="square" rtlCol="0" anchor="t"/>
           <a:lstStyle/>
           <a:p>
             <a:pPr indent="0" marL="0">
+              <a:lnSpc>
+                <a:spcPct val="130000"/>
+              </a:lnSpc>
               <a:buNone/>
             </a:pPr>
             <a:r>
-              <a:rPr lang="en-US" sz="1550" b="1" dirty="0">
+              <a:rPr lang="en-US" sz="1400" dirty="0">
                 <a:solidFill>
-                  <a:srgbClr val="2C3E55"/>
+                  <a:srgbClr val="E7F1F4"/>
                 </a:solidFill>
                 <a:latin typeface="Calibri" pitchFamily="34" charset="0"/>
                 <a:ea typeface="Calibri" pitchFamily="34" charset="-122"/>
                 <a:cs typeface="Calibri" pitchFamily="34" charset="-120"/>
               </a:rPr>
-              <a:t>Hall temp &gt; 27 °C      ·      Humidity &gt; 60%      ·      Airflow &lt; 400 CFM</a:t>
+              <a:t>An overheating server, a humidity swing toward condensation, or restricted airflow around a rack can each trigger a costly unplanned outage — and fixed rounds see them only after the fact.</a:t>
             </a:r>
-            <a:endParaRPr lang="en-US" sz="1550" dirty="0"/>
-          </a:p>
-        </p:txBody>
-      </p:sp>
-      <p:sp>
-        <p:nvSpPr>
-          <p:cNvPr id="7" name="Text 5"/>
-          <p:cNvSpPr/>
-          <p:nvPr/>
-        </p:nvSpPr>
-        <p:spPr>
-          <a:xfrm>
-            <a:off x="658368" y="6355080"/>
-            <a:ext cx="10972800" cy="320040"/>
-          </a:xfrm>
-          <a:prstGeom prst="rect">
-            <a:avLst/>
-          </a:prstGeom>
-          <a:noFill/>
-          <a:ln/>
-        </p:spPr>
-        <p:txBody>
-          <a:bodyPr wrap="square" rtlCol="0" anchor="ctr"/>
-          <a:lstStyle/>
-          <a:p>
-            <a:pPr indent="0" marL="0">
-              <a:buNone/>
-            </a:pPr>
-            <a:endParaRPr lang="en-US" sz="1250" dirty="0"/>
+            <a:endParaRPr lang="en-US" sz="1400" dirty="0"/>
           </a:p>
         </p:txBody>
       </p:sp>
@@ -1365,7 +1979,7 @@
     <p:bg>
       <p:bgPr>
         <a:solidFill>
-          <a:srgbClr val="FFFFFF"/>
+          <a:srgbClr val="0D1B22"/>
         </a:solidFill>
       </p:bgPr>
     </p:bg>
@@ -1385,14 +1999,714 @@
       </p:grpSpPr>
       <p:sp>
         <p:nvSpPr>
-          <p:cNvPr id="2" name="Text 0"/>
-          <p:cNvSpPr/>
-          <p:nvPr/>
-        </p:nvSpPr>
-        <p:spPr>
-          <a:xfrm>
-            <a:off x="640080" y="457200"/>
-            <a:ext cx="10972800" cy="640080"/>
+          <p:cNvPr id="2" name="Shape 0"/>
+          <p:cNvSpPr/>
+          <p:nvPr/>
+        </p:nvSpPr>
+        <p:spPr>
+          <a:xfrm>
+            <a:off x="685800" y="0"/>
+            <a:ext cx="0" cy="6858000"/>
+          </a:xfrm>
+          <a:prstGeom prst="line">
+            <a:avLst/>
+          </a:prstGeom>
+          <a:noFill/>
+          <a:ln w="6350">
+            <a:solidFill>
+              <a:srgbClr val="3FB8C4">
+                <a:alpha val="18000"/>
+              </a:srgbClr>
+            </a:solidFill>
+            <a:prstDash val="solid"/>
+          </a:ln>
+        </p:spPr>
+      </p:sp>
+      <p:sp>
+        <p:nvSpPr>
+          <p:cNvPr id="3" name="Shape 1"/>
+          <p:cNvSpPr/>
+          <p:nvPr/>
+        </p:nvSpPr>
+        <p:spPr>
+          <a:xfrm>
+            <a:off x="1325880" y="0"/>
+            <a:ext cx="0" cy="6858000"/>
+          </a:xfrm>
+          <a:prstGeom prst="line">
+            <a:avLst/>
+          </a:prstGeom>
+          <a:noFill/>
+          <a:ln w="6350">
+            <a:solidFill>
+              <a:srgbClr val="3FB8C4">
+                <a:alpha val="18000"/>
+              </a:srgbClr>
+            </a:solidFill>
+            <a:prstDash val="solid"/>
+          </a:ln>
+        </p:spPr>
+      </p:sp>
+      <p:sp>
+        <p:nvSpPr>
+          <p:cNvPr id="4" name="Shape 2"/>
+          <p:cNvSpPr/>
+          <p:nvPr/>
+        </p:nvSpPr>
+        <p:spPr>
+          <a:xfrm>
+            <a:off x="1965960" y="0"/>
+            <a:ext cx="0" cy="6858000"/>
+          </a:xfrm>
+          <a:prstGeom prst="line">
+            <a:avLst/>
+          </a:prstGeom>
+          <a:noFill/>
+          <a:ln w="6350">
+            <a:solidFill>
+              <a:srgbClr val="3FB8C4">
+                <a:alpha val="18000"/>
+              </a:srgbClr>
+            </a:solidFill>
+            <a:prstDash val="solid"/>
+          </a:ln>
+        </p:spPr>
+      </p:sp>
+      <p:sp>
+        <p:nvSpPr>
+          <p:cNvPr id="5" name="Shape 3"/>
+          <p:cNvSpPr/>
+          <p:nvPr/>
+        </p:nvSpPr>
+        <p:spPr>
+          <a:xfrm>
+            <a:off x="2606040" y="0"/>
+            <a:ext cx="0" cy="6858000"/>
+          </a:xfrm>
+          <a:prstGeom prst="line">
+            <a:avLst/>
+          </a:prstGeom>
+          <a:noFill/>
+          <a:ln w="6350">
+            <a:solidFill>
+              <a:srgbClr val="3FB8C4">
+                <a:alpha val="18000"/>
+              </a:srgbClr>
+            </a:solidFill>
+            <a:prstDash val="solid"/>
+          </a:ln>
+        </p:spPr>
+      </p:sp>
+      <p:sp>
+        <p:nvSpPr>
+          <p:cNvPr id="6" name="Shape 4"/>
+          <p:cNvSpPr/>
+          <p:nvPr/>
+        </p:nvSpPr>
+        <p:spPr>
+          <a:xfrm>
+            <a:off x="3246120" y="0"/>
+            <a:ext cx="0" cy="6858000"/>
+          </a:xfrm>
+          <a:prstGeom prst="line">
+            <a:avLst/>
+          </a:prstGeom>
+          <a:noFill/>
+          <a:ln w="6350">
+            <a:solidFill>
+              <a:srgbClr val="3FB8C4">
+                <a:alpha val="18000"/>
+              </a:srgbClr>
+            </a:solidFill>
+            <a:prstDash val="solid"/>
+          </a:ln>
+        </p:spPr>
+      </p:sp>
+      <p:sp>
+        <p:nvSpPr>
+          <p:cNvPr id="7" name="Shape 5"/>
+          <p:cNvSpPr/>
+          <p:nvPr/>
+        </p:nvSpPr>
+        <p:spPr>
+          <a:xfrm>
+            <a:off x="3886200" y="0"/>
+            <a:ext cx="0" cy="6858000"/>
+          </a:xfrm>
+          <a:prstGeom prst="line">
+            <a:avLst/>
+          </a:prstGeom>
+          <a:noFill/>
+          <a:ln w="6350">
+            <a:solidFill>
+              <a:srgbClr val="3FB8C4">
+                <a:alpha val="18000"/>
+              </a:srgbClr>
+            </a:solidFill>
+            <a:prstDash val="solid"/>
+          </a:ln>
+        </p:spPr>
+      </p:sp>
+      <p:sp>
+        <p:nvSpPr>
+          <p:cNvPr id="8" name="Shape 6"/>
+          <p:cNvSpPr/>
+          <p:nvPr/>
+        </p:nvSpPr>
+        <p:spPr>
+          <a:xfrm>
+            <a:off x="4526280" y="0"/>
+            <a:ext cx="0" cy="6858000"/>
+          </a:xfrm>
+          <a:prstGeom prst="line">
+            <a:avLst/>
+          </a:prstGeom>
+          <a:noFill/>
+          <a:ln w="6350">
+            <a:solidFill>
+              <a:srgbClr val="3FB8C4">
+                <a:alpha val="18000"/>
+              </a:srgbClr>
+            </a:solidFill>
+            <a:prstDash val="solid"/>
+          </a:ln>
+        </p:spPr>
+      </p:sp>
+      <p:sp>
+        <p:nvSpPr>
+          <p:cNvPr id="9" name="Shape 7"/>
+          <p:cNvSpPr/>
+          <p:nvPr/>
+        </p:nvSpPr>
+        <p:spPr>
+          <a:xfrm>
+            <a:off x="5166360" y="0"/>
+            <a:ext cx="0" cy="6858000"/>
+          </a:xfrm>
+          <a:prstGeom prst="line">
+            <a:avLst/>
+          </a:prstGeom>
+          <a:noFill/>
+          <a:ln w="6350">
+            <a:solidFill>
+              <a:srgbClr val="3FB8C4">
+                <a:alpha val="18000"/>
+              </a:srgbClr>
+            </a:solidFill>
+            <a:prstDash val="solid"/>
+          </a:ln>
+        </p:spPr>
+      </p:sp>
+      <p:sp>
+        <p:nvSpPr>
+          <p:cNvPr id="10" name="Shape 8"/>
+          <p:cNvSpPr/>
+          <p:nvPr/>
+        </p:nvSpPr>
+        <p:spPr>
+          <a:xfrm>
+            <a:off x="5806440" y="0"/>
+            <a:ext cx="0" cy="6858000"/>
+          </a:xfrm>
+          <a:prstGeom prst="line">
+            <a:avLst/>
+          </a:prstGeom>
+          <a:noFill/>
+          <a:ln w="6350">
+            <a:solidFill>
+              <a:srgbClr val="3FB8C4">
+                <a:alpha val="18000"/>
+              </a:srgbClr>
+            </a:solidFill>
+            <a:prstDash val="solid"/>
+          </a:ln>
+        </p:spPr>
+      </p:sp>
+      <p:sp>
+        <p:nvSpPr>
+          <p:cNvPr id="11" name="Shape 9"/>
+          <p:cNvSpPr/>
+          <p:nvPr/>
+        </p:nvSpPr>
+        <p:spPr>
+          <a:xfrm>
+            <a:off x="6446520" y="0"/>
+            <a:ext cx="0" cy="6858000"/>
+          </a:xfrm>
+          <a:prstGeom prst="line">
+            <a:avLst/>
+          </a:prstGeom>
+          <a:noFill/>
+          <a:ln w="6350">
+            <a:solidFill>
+              <a:srgbClr val="3FB8C4">
+                <a:alpha val="18000"/>
+              </a:srgbClr>
+            </a:solidFill>
+            <a:prstDash val="solid"/>
+          </a:ln>
+        </p:spPr>
+      </p:sp>
+      <p:sp>
+        <p:nvSpPr>
+          <p:cNvPr id="12" name="Shape 10"/>
+          <p:cNvSpPr/>
+          <p:nvPr/>
+        </p:nvSpPr>
+        <p:spPr>
+          <a:xfrm>
+            <a:off x="7086600" y="0"/>
+            <a:ext cx="0" cy="6858000"/>
+          </a:xfrm>
+          <a:prstGeom prst="line">
+            <a:avLst/>
+          </a:prstGeom>
+          <a:noFill/>
+          <a:ln w="6350">
+            <a:solidFill>
+              <a:srgbClr val="3FB8C4">
+                <a:alpha val="18000"/>
+              </a:srgbClr>
+            </a:solidFill>
+            <a:prstDash val="solid"/>
+          </a:ln>
+        </p:spPr>
+      </p:sp>
+      <p:sp>
+        <p:nvSpPr>
+          <p:cNvPr id="13" name="Shape 11"/>
+          <p:cNvSpPr/>
+          <p:nvPr/>
+        </p:nvSpPr>
+        <p:spPr>
+          <a:xfrm>
+            <a:off x="7726680" y="0"/>
+            <a:ext cx="0" cy="6858000"/>
+          </a:xfrm>
+          <a:prstGeom prst="line">
+            <a:avLst/>
+          </a:prstGeom>
+          <a:noFill/>
+          <a:ln w="6350">
+            <a:solidFill>
+              <a:srgbClr val="3FB8C4">
+                <a:alpha val="18000"/>
+              </a:srgbClr>
+            </a:solidFill>
+            <a:prstDash val="solid"/>
+          </a:ln>
+        </p:spPr>
+      </p:sp>
+      <p:sp>
+        <p:nvSpPr>
+          <p:cNvPr id="14" name="Shape 12"/>
+          <p:cNvSpPr/>
+          <p:nvPr/>
+        </p:nvSpPr>
+        <p:spPr>
+          <a:xfrm>
+            <a:off x="8366760" y="0"/>
+            <a:ext cx="0" cy="6858000"/>
+          </a:xfrm>
+          <a:prstGeom prst="line">
+            <a:avLst/>
+          </a:prstGeom>
+          <a:noFill/>
+          <a:ln w="6350">
+            <a:solidFill>
+              <a:srgbClr val="3FB8C4">
+                <a:alpha val="18000"/>
+              </a:srgbClr>
+            </a:solidFill>
+            <a:prstDash val="solid"/>
+          </a:ln>
+        </p:spPr>
+      </p:sp>
+      <p:sp>
+        <p:nvSpPr>
+          <p:cNvPr id="15" name="Shape 13"/>
+          <p:cNvSpPr/>
+          <p:nvPr/>
+        </p:nvSpPr>
+        <p:spPr>
+          <a:xfrm>
+            <a:off x="9006840" y="0"/>
+            <a:ext cx="0" cy="6858000"/>
+          </a:xfrm>
+          <a:prstGeom prst="line">
+            <a:avLst/>
+          </a:prstGeom>
+          <a:noFill/>
+          <a:ln w="6350">
+            <a:solidFill>
+              <a:srgbClr val="3FB8C4">
+                <a:alpha val="18000"/>
+              </a:srgbClr>
+            </a:solidFill>
+            <a:prstDash val="solid"/>
+          </a:ln>
+        </p:spPr>
+      </p:sp>
+      <p:sp>
+        <p:nvSpPr>
+          <p:cNvPr id="16" name="Shape 14"/>
+          <p:cNvSpPr/>
+          <p:nvPr/>
+        </p:nvSpPr>
+        <p:spPr>
+          <a:xfrm>
+            <a:off x="9646920" y="0"/>
+            <a:ext cx="0" cy="6858000"/>
+          </a:xfrm>
+          <a:prstGeom prst="line">
+            <a:avLst/>
+          </a:prstGeom>
+          <a:noFill/>
+          <a:ln w="6350">
+            <a:solidFill>
+              <a:srgbClr val="3FB8C4">
+                <a:alpha val="18000"/>
+              </a:srgbClr>
+            </a:solidFill>
+            <a:prstDash val="solid"/>
+          </a:ln>
+        </p:spPr>
+      </p:sp>
+      <p:sp>
+        <p:nvSpPr>
+          <p:cNvPr id="17" name="Shape 15"/>
+          <p:cNvSpPr/>
+          <p:nvPr/>
+        </p:nvSpPr>
+        <p:spPr>
+          <a:xfrm>
+            <a:off x="10287000" y="0"/>
+            <a:ext cx="0" cy="6858000"/>
+          </a:xfrm>
+          <a:prstGeom prst="line">
+            <a:avLst/>
+          </a:prstGeom>
+          <a:noFill/>
+          <a:ln w="6350">
+            <a:solidFill>
+              <a:srgbClr val="3FB8C4">
+                <a:alpha val="18000"/>
+              </a:srgbClr>
+            </a:solidFill>
+            <a:prstDash val="solid"/>
+          </a:ln>
+        </p:spPr>
+      </p:sp>
+      <p:sp>
+        <p:nvSpPr>
+          <p:cNvPr id="18" name="Shape 16"/>
+          <p:cNvSpPr/>
+          <p:nvPr/>
+        </p:nvSpPr>
+        <p:spPr>
+          <a:xfrm>
+            <a:off x="10927080" y="0"/>
+            <a:ext cx="0" cy="6858000"/>
+          </a:xfrm>
+          <a:prstGeom prst="line">
+            <a:avLst/>
+          </a:prstGeom>
+          <a:noFill/>
+          <a:ln w="6350">
+            <a:solidFill>
+              <a:srgbClr val="3FB8C4">
+                <a:alpha val="18000"/>
+              </a:srgbClr>
+            </a:solidFill>
+            <a:prstDash val="solid"/>
+          </a:ln>
+        </p:spPr>
+      </p:sp>
+      <p:sp>
+        <p:nvSpPr>
+          <p:cNvPr id="19" name="Shape 17"/>
+          <p:cNvSpPr/>
+          <p:nvPr/>
+        </p:nvSpPr>
+        <p:spPr>
+          <a:xfrm>
+            <a:off x="11567160" y="0"/>
+            <a:ext cx="0" cy="6858000"/>
+          </a:xfrm>
+          <a:prstGeom prst="line">
+            <a:avLst/>
+          </a:prstGeom>
+          <a:noFill/>
+          <a:ln w="6350">
+            <a:solidFill>
+              <a:srgbClr val="3FB8C4">
+                <a:alpha val="18000"/>
+              </a:srgbClr>
+            </a:solidFill>
+            <a:prstDash val="solid"/>
+          </a:ln>
+        </p:spPr>
+      </p:sp>
+      <p:sp>
+        <p:nvSpPr>
+          <p:cNvPr id="20" name="Shape 18"/>
+          <p:cNvSpPr/>
+          <p:nvPr/>
+        </p:nvSpPr>
+        <p:spPr>
+          <a:xfrm>
+            <a:off x="0" y="640080"/>
+            <a:ext cx="12191695" cy="0"/>
+          </a:xfrm>
+          <a:prstGeom prst="line">
+            <a:avLst/>
+          </a:prstGeom>
+          <a:noFill/>
+          <a:ln w="6350">
+            <a:solidFill>
+              <a:srgbClr val="3FB8C4">
+                <a:alpha val="18000"/>
+              </a:srgbClr>
+            </a:solidFill>
+            <a:prstDash val="solid"/>
+          </a:ln>
+        </p:spPr>
+      </p:sp>
+      <p:sp>
+        <p:nvSpPr>
+          <p:cNvPr id="21" name="Shape 19"/>
+          <p:cNvSpPr/>
+          <p:nvPr/>
+        </p:nvSpPr>
+        <p:spPr>
+          <a:xfrm>
+            <a:off x="0" y="1280160"/>
+            <a:ext cx="12191695" cy="0"/>
+          </a:xfrm>
+          <a:prstGeom prst="line">
+            <a:avLst/>
+          </a:prstGeom>
+          <a:noFill/>
+          <a:ln w="6350">
+            <a:solidFill>
+              <a:srgbClr val="3FB8C4">
+                <a:alpha val="18000"/>
+              </a:srgbClr>
+            </a:solidFill>
+            <a:prstDash val="solid"/>
+          </a:ln>
+        </p:spPr>
+      </p:sp>
+      <p:sp>
+        <p:nvSpPr>
+          <p:cNvPr id="22" name="Shape 20"/>
+          <p:cNvSpPr/>
+          <p:nvPr/>
+        </p:nvSpPr>
+        <p:spPr>
+          <a:xfrm>
+            <a:off x="0" y="1920240"/>
+            <a:ext cx="12191695" cy="0"/>
+          </a:xfrm>
+          <a:prstGeom prst="line">
+            <a:avLst/>
+          </a:prstGeom>
+          <a:noFill/>
+          <a:ln w="6350">
+            <a:solidFill>
+              <a:srgbClr val="3FB8C4">
+                <a:alpha val="18000"/>
+              </a:srgbClr>
+            </a:solidFill>
+            <a:prstDash val="solid"/>
+          </a:ln>
+        </p:spPr>
+      </p:sp>
+      <p:sp>
+        <p:nvSpPr>
+          <p:cNvPr id="23" name="Shape 21"/>
+          <p:cNvSpPr/>
+          <p:nvPr/>
+        </p:nvSpPr>
+        <p:spPr>
+          <a:xfrm>
+            <a:off x="0" y="2560320"/>
+            <a:ext cx="12191695" cy="0"/>
+          </a:xfrm>
+          <a:prstGeom prst="line">
+            <a:avLst/>
+          </a:prstGeom>
+          <a:noFill/>
+          <a:ln w="6350">
+            <a:solidFill>
+              <a:srgbClr val="3FB8C4">
+                <a:alpha val="18000"/>
+              </a:srgbClr>
+            </a:solidFill>
+            <a:prstDash val="solid"/>
+          </a:ln>
+        </p:spPr>
+      </p:sp>
+      <p:sp>
+        <p:nvSpPr>
+          <p:cNvPr id="24" name="Shape 22"/>
+          <p:cNvSpPr/>
+          <p:nvPr/>
+        </p:nvSpPr>
+        <p:spPr>
+          <a:xfrm>
+            <a:off x="0" y="3200400"/>
+            <a:ext cx="12191695" cy="0"/>
+          </a:xfrm>
+          <a:prstGeom prst="line">
+            <a:avLst/>
+          </a:prstGeom>
+          <a:noFill/>
+          <a:ln w="6350">
+            <a:solidFill>
+              <a:srgbClr val="3FB8C4">
+                <a:alpha val="18000"/>
+              </a:srgbClr>
+            </a:solidFill>
+            <a:prstDash val="solid"/>
+          </a:ln>
+        </p:spPr>
+      </p:sp>
+      <p:sp>
+        <p:nvSpPr>
+          <p:cNvPr id="25" name="Shape 23"/>
+          <p:cNvSpPr/>
+          <p:nvPr/>
+        </p:nvSpPr>
+        <p:spPr>
+          <a:xfrm>
+            <a:off x="0" y="3840480"/>
+            <a:ext cx="12191695" cy="0"/>
+          </a:xfrm>
+          <a:prstGeom prst="line">
+            <a:avLst/>
+          </a:prstGeom>
+          <a:noFill/>
+          <a:ln w="6350">
+            <a:solidFill>
+              <a:srgbClr val="3FB8C4">
+                <a:alpha val="18000"/>
+              </a:srgbClr>
+            </a:solidFill>
+            <a:prstDash val="solid"/>
+          </a:ln>
+        </p:spPr>
+      </p:sp>
+      <p:sp>
+        <p:nvSpPr>
+          <p:cNvPr id="26" name="Shape 24"/>
+          <p:cNvSpPr/>
+          <p:nvPr/>
+        </p:nvSpPr>
+        <p:spPr>
+          <a:xfrm>
+            <a:off x="0" y="4480560"/>
+            <a:ext cx="12191695" cy="0"/>
+          </a:xfrm>
+          <a:prstGeom prst="line">
+            <a:avLst/>
+          </a:prstGeom>
+          <a:noFill/>
+          <a:ln w="6350">
+            <a:solidFill>
+              <a:srgbClr val="3FB8C4">
+                <a:alpha val="18000"/>
+              </a:srgbClr>
+            </a:solidFill>
+            <a:prstDash val="solid"/>
+          </a:ln>
+        </p:spPr>
+      </p:sp>
+      <p:sp>
+        <p:nvSpPr>
+          <p:cNvPr id="27" name="Shape 25"/>
+          <p:cNvSpPr/>
+          <p:nvPr/>
+        </p:nvSpPr>
+        <p:spPr>
+          <a:xfrm>
+            <a:off x="0" y="5120640"/>
+            <a:ext cx="12191695" cy="0"/>
+          </a:xfrm>
+          <a:prstGeom prst="line">
+            <a:avLst/>
+          </a:prstGeom>
+          <a:noFill/>
+          <a:ln w="6350">
+            <a:solidFill>
+              <a:srgbClr val="3FB8C4">
+                <a:alpha val="18000"/>
+              </a:srgbClr>
+            </a:solidFill>
+            <a:prstDash val="solid"/>
+          </a:ln>
+        </p:spPr>
+      </p:sp>
+      <p:sp>
+        <p:nvSpPr>
+          <p:cNvPr id="28" name="Shape 26"/>
+          <p:cNvSpPr/>
+          <p:nvPr/>
+        </p:nvSpPr>
+        <p:spPr>
+          <a:xfrm>
+            <a:off x="0" y="5760720"/>
+            <a:ext cx="12191695" cy="0"/>
+          </a:xfrm>
+          <a:prstGeom prst="line">
+            <a:avLst/>
+          </a:prstGeom>
+          <a:noFill/>
+          <a:ln w="6350">
+            <a:solidFill>
+              <a:srgbClr val="3FB8C4">
+                <a:alpha val="18000"/>
+              </a:srgbClr>
+            </a:solidFill>
+            <a:prstDash val="solid"/>
+          </a:ln>
+        </p:spPr>
+      </p:sp>
+      <p:sp>
+        <p:nvSpPr>
+          <p:cNvPr id="29" name="Shape 27"/>
+          <p:cNvSpPr/>
+          <p:nvPr/>
+        </p:nvSpPr>
+        <p:spPr>
+          <a:xfrm>
+            <a:off x="0" y="6400800"/>
+            <a:ext cx="12191695" cy="0"/>
+          </a:xfrm>
+          <a:prstGeom prst="line">
+            <a:avLst/>
+          </a:prstGeom>
+          <a:noFill/>
+          <a:ln w="6350">
+            <a:solidFill>
+              <a:srgbClr val="3FB8C4">
+                <a:alpha val="18000"/>
+              </a:srgbClr>
+            </a:solidFill>
+            <a:prstDash val="solid"/>
+          </a:ln>
+        </p:spPr>
+      </p:sp>
+      <p:sp>
+        <p:nvSpPr>
+          <p:cNvPr id="30" name="Text 28"/>
+          <p:cNvSpPr/>
+          <p:nvPr/>
+        </p:nvSpPr>
+        <p:spPr>
+          <a:xfrm>
+            <a:off x="777240" y="731520"/>
+            <a:ext cx="914400" cy="640080"/>
           </a:xfrm>
           <a:prstGeom prst="rect">
             <a:avLst/>
@@ -1401,7 +2715,7 @@
           <a:ln/>
         </p:spPr>
         <p:txBody>
-          <a:bodyPr wrap="square" rtlCol="0" anchor="ctr"/>
+          <a:bodyPr wrap="square" lIns="0" tIns="0" rIns="0" bIns="0" rtlCol="0" anchor="ctr"/>
           <a:lstStyle/>
           <a:p>
             <a:pPr indent="0" marL="0">
@@ -1410,13 +2724,13 @@
             <a:r>
               <a:rPr lang="en-US" sz="3000" b="1" dirty="0">
                 <a:solidFill>
-                  <a:srgbClr val="19212C"/>
+                  <a:srgbClr val="3FB8C4"/>
                 </a:solidFill>
-                <a:latin typeface="Bookman Old Style" pitchFamily="34" charset="0"/>
-                <a:ea typeface="Bookman Old Style" pitchFamily="34" charset="-122"/>
-                <a:cs typeface="Bookman Old Style" pitchFamily="34" charset="-120"/>
+                <a:latin typeface="Calibri" pitchFamily="34" charset="0"/>
+                <a:ea typeface="Calibri" pitchFamily="34" charset="-122"/>
+                <a:cs typeface="Calibri" pitchFamily="34" charset="-120"/>
               </a:rPr>
-              <a:t>What I Built — Halls to Cloud</a:t>
+              <a:t>01</a:t>
             </a:r>
             <a:endParaRPr lang="en-US" sz="3000" dirty="0"/>
           </a:p>
@@ -1424,61 +2738,14 @@
       </p:sp>
       <p:sp>
         <p:nvSpPr>
-          <p:cNvPr id="3" name="Shape 1"/>
-          <p:cNvSpPr/>
-          <p:nvPr/>
-        </p:nvSpPr>
-        <p:spPr>
-          <a:xfrm>
-            <a:off x="640080" y="1874520"/>
-            <a:ext cx="2286000" cy="1280160"/>
-          </a:xfrm>
-          <a:prstGeom prst="roundRect">
-            <a:avLst>
-              <a:gd name="adj" fmla="val 7143"/>
-            </a:avLst>
-          </a:prstGeom>
-          <a:solidFill>
-            <a:srgbClr val="EEF2F6"/>
-          </a:solidFill>
-          <a:ln w="19050">
-            <a:solidFill>
-              <a:srgbClr val="6A839C"/>
-            </a:solidFill>
-            <a:prstDash val="solid"/>
-          </a:ln>
-        </p:spPr>
-      </p:sp>
-      <p:sp>
-        <p:nvSpPr>
-          <p:cNvPr id="4" name="Shape 2"/>
-          <p:cNvSpPr/>
-          <p:nvPr/>
-        </p:nvSpPr>
-        <p:spPr>
-          <a:xfrm>
-            <a:off x="1691640" y="2039112"/>
-            <a:ext cx="182880" cy="182880"/>
-          </a:xfrm>
-          <a:prstGeom prst="ellipse">
-            <a:avLst/>
-          </a:prstGeom>
-          <a:solidFill>
-            <a:srgbClr val="6A839C"/>
-          </a:solidFill>
-          <a:ln/>
-        </p:spPr>
-      </p:sp>
-      <p:sp>
-        <p:nvSpPr>
-          <p:cNvPr id="5" name="Text 3"/>
-          <p:cNvSpPr/>
-          <p:nvPr/>
-        </p:nvSpPr>
-        <p:spPr>
-          <a:xfrm>
-            <a:off x="612648" y="2258568"/>
-            <a:ext cx="2340864" cy="365760"/>
+          <p:cNvPr id="31" name="Text 29"/>
+          <p:cNvSpPr/>
+          <p:nvPr/>
+        </p:nvSpPr>
+        <p:spPr>
+          <a:xfrm>
+            <a:off x="1645920" y="905256"/>
+            <a:ext cx="9768535" cy="274320"/>
           </a:xfrm>
           <a:prstGeom prst="rect">
             <a:avLst/>
@@ -1490,13 +2757,160 @@
           <a:bodyPr wrap="square" lIns="0" tIns="0" rIns="0" bIns="0" rtlCol="0" anchor="ctr"/>
           <a:lstStyle/>
           <a:p>
-            <a:pPr algn="ctr" indent="0" marL="0">
+            <a:pPr indent="0" marL="0">
               <a:buNone/>
             </a:pPr>
             <a:r>
-              <a:rPr lang="en-US" sz="1450" b="1" dirty="0">
+              <a:rPr lang="en-US" sz="1100" b="1" spc="200" kern="0" dirty="0">
                 <a:solidFill>
-                  <a:srgbClr val="19212C"/>
+                  <a:srgbClr val="8B98A6"/>
+                </a:solidFill>
+                <a:latin typeface="Calibri" pitchFamily="34" charset="0"/>
+                <a:ea typeface="Calibri" pitchFamily="34" charset="-122"/>
+                <a:cs typeface="Calibri" pitchFamily="34" charset="-120"/>
+              </a:rPr>
+              <a:t>ARCHITECTURE</a:t>
+            </a:r>
+            <a:endParaRPr lang="en-US" sz="1100" dirty="0"/>
+          </a:p>
+        </p:txBody>
+      </p:sp>
+      <p:sp>
+        <p:nvSpPr>
+          <p:cNvPr id="32" name="Text 30"/>
+          <p:cNvSpPr/>
+          <p:nvPr/>
+        </p:nvSpPr>
+        <p:spPr>
+          <a:xfrm>
+            <a:off x="777240" y="1380744"/>
+            <a:ext cx="10637215" cy="640080"/>
+          </a:xfrm>
+          <a:prstGeom prst="rect">
+            <a:avLst/>
+          </a:prstGeom>
+          <a:noFill/>
+          <a:ln/>
+        </p:spPr>
+        <p:txBody>
+          <a:bodyPr wrap="square" lIns="0" tIns="0" rIns="0" bIns="0" rtlCol="0" anchor="ctr"/>
+          <a:lstStyle/>
+          <a:p>
+            <a:pPr indent="0" marL="0">
+              <a:buNone/>
+            </a:pPr>
+            <a:r>
+              <a:rPr lang="en-US" sz="2300" b="1" dirty="0">
+                <a:solidFill>
+                  <a:srgbClr val="E7F1F4"/>
+                </a:solidFill>
+                <a:latin typeface="Calibri" pitchFamily="34" charset="0"/>
+                <a:ea typeface="Calibri" pitchFamily="34" charset="-122"/>
+                <a:cs typeface="Calibri" pitchFamily="34" charset="-120"/>
+              </a:rPr>
+              <a:t>What I Built — Halls to Cloud</a:t>
+            </a:r>
+            <a:endParaRPr lang="en-US" sz="2300" dirty="0"/>
+          </a:p>
+        </p:txBody>
+      </p:sp>
+      <p:sp>
+        <p:nvSpPr>
+          <p:cNvPr id="33" name="Shape 31"/>
+          <p:cNvSpPr/>
+          <p:nvPr/>
+        </p:nvSpPr>
+        <p:spPr>
+          <a:xfrm>
+            <a:off x="777240" y="2971800"/>
+            <a:ext cx="1391869" cy="1965960"/>
+          </a:xfrm>
+          <a:prstGeom prst="roundRect">
+            <a:avLst>
+              <a:gd name="adj" fmla="val 2628"/>
+            </a:avLst>
+          </a:prstGeom>
+          <a:solidFill>
+            <a:srgbClr val="3FB8C4"/>
+          </a:solidFill>
+          <a:ln w="12700">
+            <a:solidFill>
+              <a:srgbClr val="3FB8C4"/>
+            </a:solidFill>
+            <a:prstDash val="solid"/>
+          </a:ln>
+        </p:spPr>
+      </p:sp>
+      <p:sp>
+        <p:nvSpPr>
+          <p:cNvPr id="34" name="Text 32"/>
+          <p:cNvSpPr/>
+          <p:nvPr/>
+        </p:nvSpPr>
+        <p:spPr>
+          <a:xfrm>
+            <a:off x="923544" y="3154680"/>
+            <a:ext cx="1099261" cy="320040"/>
+          </a:xfrm>
+          <a:prstGeom prst="rect">
+            <a:avLst/>
+          </a:prstGeom>
+          <a:noFill/>
+          <a:ln/>
+        </p:spPr>
+        <p:txBody>
+          <a:bodyPr wrap="square" lIns="0" tIns="0" rIns="0" bIns="0" rtlCol="0" anchor="ctr"/>
+          <a:lstStyle/>
+          <a:p>
+            <a:pPr indent="0" marL="0">
+              <a:buNone/>
+            </a:pPr>
+            <a:r>
+              <a:rPr lang="en-US" sz="1100" dirty="0">
+                <a:solidFill>
+                  <a:srgbClr val="FFFFFF"/>
+                </a:solidFill>
+                <a:latin typeface="Consolas" pitchFamily="34" charset="0"/>
+                <a:ea typeface="Consolas" pitchFamily="34" charset="-122"/>
+                <a:cs typeface="Consolas" pitchFamily="34" charset="-120"/>
+              </a:rPr>
+              <a:t>01</a:t>
+            </a:r>
+            <a:endParaRPr lang="en-US" sz="1100" dirty="0"/>
+          </a:p>
+        </p:txBody>
+      </p:sp>
+      <p:sp>
+        <p:nvSpPr>
+          <p:cNvPr id="35" name="Text 33"/>
+          <p:cNvSpPr/>
+          <p:nvPr/>
+        </p:nvSpPr>
+        <p:spPr>
+          <a:xfrm>
+            <a:off x="923544" y="3593592"/>
+            <a:ext cx="1099261" cy="868680"/>
+          </a:xfrm>
+          <a:prstGeom prst="rect">
+            <a:avLst/>
+          </a:prstGeom>
+          <a:noFill/>
+          <a:ln/>
+        </p:spPr>
+        <p:txBody>
+          <a:bodyPr wrap="square" lIns="0" tIns="0" rIns="0" bIns="0" rtlCol="0" anchor="t"/>
+          <a:lstStyle/>
+          <a:p>
+            <a:pPr indent="0" marL="0">
+              <a:lnSpc>
+                <a:spcPct val="96000"/>
+              </a:lnSpc>
+              <a:buNone/>
+            </a:pPr>
+            <a:r>
+              <a:rPr lang="en-US" sz="1300" b="1" dirty="0">
+                <a:solidFill>
+                  <a:srgbClr val="FFFFFF"/>
                 </a:solidFill>
                 <a:latin typeface="Calibri" pitchFamily="34" charset="0"/>
                 <a:ea typeface="Calibri" pitchFamily="34" charset="-122"/>
@@ -1504,20 +2918,20 @@
               </a:rPr>
               <a:t>Hall sensors</a:t>
             </a:r>
-            <a:endParaRPr lang="en-US" sz="1450" dirty="0"/>
+            <a:endParaRPr lang="en-US" sz="1300" dirty="0"/>
           </a:p>
         </p:txBody>
       </p:sp>
       <p:sp>
         <p:nvSpPr>
-          <p:cNvPr id="6" name="Text 4"/>
-          <p:cNvSpPr/>
-          <p:nvPr/>
-        </p:nvSpPr>
-        <p:spPr>
-          <a:xfrm>
-            <a:off x="640080" y="2606040"/>
-            <a:ext cx="2286000" cy="411480"/>
+          <p:cNvPr id="36" name="Text 34"/>
+          <p:cNvSpPr/>
+          <p:nvPr/>
+        </p:nvSpPr>
+        <p:spPr>
+          <a:xfrm>
+            <a:off x="923544" y="4453128"/>
+            <a:ext cx="1099261" cy="365760"/>
           </a:xfrm>
           <a:prstGeom prst="rect">
             <a:avLst/>
@@ -1526,16 +2940,16 @@
           <a:ln/>
         </p:spPr>
         <p:txBody>
-          <a:bodyPr wrap="square" lIns="0" tIns="0" rIns="0" bIns="0" rtlCol="0" anchor="t"/>
+          <a:bodyPr wrap="square" lIns="0" tIns="0" rIns="0" bIns="0" rtlCol="0" anchor="ctr"/>
           <a:lstStyle/>
           <a:p>
-            <a:pPr algn="ctr" indent="0" marL="0">
+            <a:pPr indent="0" marL="0">
               <a:buNone/>
             </a:pPr>
             <a:r>
-              <a:rPr lang="en-US" sz="1050" dirty="0">
+              <a:rPr lang="en-US" sz="900" dirty="0">
                 <a:solidFill>
-                  <a:srgbClr val="5F6B78"/>
+                  <a:srgbClr val="FFFFFF"/>
                 </a:solidFill>
                 <a:latin typeface="Calibri" pitchFamily="34" charset="0"/>
                 <a:ea typeface="Calibri" pitchFamily="34" charset="-122"/>
@@ -1543,92 +2957,67 @@
               </a:rPr>
               <a:t>10 · 2 halls · 5 metrics</a:t>
             </a:r>
-            <a:endParaRPr lang="en-US" sz="1050" dirty="0"/>
+            <a:endParaRPr lang="en-US" sz="900" dirty="0"/>
           </a:p>
         </p:txBody>
       </p:sp>
       <p:sp>
         <p:nvSpPr>
-          <p:cNvPr id="7" name="Shape 5"/>
-          <p:cNvSpPr/>
-          <p:nvPr/>
-        </p:nvSpPr>
-        <p:spPr>
-          <a:xfrm>
-            <a:off x="2944368" y="2514600"/>
-            <a:ext cx="1975104" cy="0"/>
-          </a:xfrm>
-          <a:prstGeom prst="line">
-            <a:avLst/>
-          </a:prstGeom>
-          <a:noFill/>
-          <a:ln w="25400">
-            <a:solidFill>
-              <a:srgbClr val="6A839C"/>
-            </a:solidFill>
-            <a:prstDash val="solid"/>
-            <a:headEnd type="none"/>
-            <a:tailEnd type="triangle"/>
-          </a:ln>
-        </p:spPr>
-      </p:sp>
-      <p:sp>
-        <p:nvSpPr>
-          <p:cNvPr id="8" name="Shape 6"/>
-          <p:cNvSpPr/>
-          <p:nvPr/>
-        </p:nvSpPr>
-        <p:spPr>
-          <a:xfrm>
-            <a:off x="4937760" y="1874520"/>
-            <a:ext cx="2286000" cy="1280160"/>
+          <p:cNvPr id="37" name="Shape 35"/>
+          <p:cNvSpPr/>
+          <p:nvPr/>
+        </p:nvSpPr>
+        <p:spPr>
+          <a:xfrm>
+            <a:off x="2242261" y="3845052"/>
+            <a:ext cx="310896" cy="219456"/>
+          </a:xfrm>
+          <a:prstGeom prst="rightArrow">
+            <a:avLst/>
+          </a:prstGeom>
+          <a:solidFill>
+            <a:srgbClr val="8B98A6"/>
+          </a:solidFill>
+          <a:ln/>
+        </p:spPr>
+      </p:sp>
+      <p:sp>
+        <p:nvSpPr>
+          <p:cNvPr id="38" name="Shape 36"/>
+          <p:cNvSpPr/>
+          <p:nvPr/>
+        </p:nvSpPr>
+        <p:spPr>
+          <a:xfrm>
+            <a:off x="2626309" y="2971800"/>
+            <a:ext cx="1391869" cy="1965960"/>
           </a:xfrm>
           <a:prstGeom prst="roundRect">
             <a:avLst>
-              <a:gd name="adj" fmla="val 7143"/>
+              <a:gd name="adj" fmla="val 2628"/>
             </a:avLst>
           </a:prstGeom>
           <a:solidFill>
-            <a:srgbClr val="EEF2F6"/>
+            <a:srgbClr val="3FB8C4"/>
           </a:solidFill>
-          <a:ln w="19050">
-            <a:solidFill>
-              <a:srgbClr val="6A839C"/>
-            </a:solidFill>
-            <a:prstDash val="solid"/>
-          </a:ln>
-        </p:spPr>
-      </p:sp>
-      <p:sp>
-        <p:nvSpPr>
-          <p:cNvPr id="9" name="Shape 7"/>
-          <p:cNvSpPr/>
-          <p:nvPr/>
-        </p:nvSpPr>
-        <p:spPr>
-          <a:xfrm>
-            <a:off x="5989320" y="2039112"/>
-            <a:ext cx="182880" cy="182880"/>
-          </a:xfrm>
-          <a:prstGeom prst="ellipse">
-            <a:avLst/>
-          </a:prstGeom>
-          <a:solidFill>
-            <a:srgbClr val="6A839C"/>
-          </a:solidFill>
-          <a:ln/>
-        </p:spPr>
-      </p:sp>
-      <p:sp>
-        <p:nvSpPr>
-          <p:cNvPr id="10" name="Text 8"/>
-          <p:cNvSpPr/>
-          <p:nvPr/>
-        </p:nvSpPr>
-        <p:spPr>
-          <a:xfrm>
-            <a:off x="4910328" y="2258568"/>
-            <a:ext cx="2340864" cy="365760"/>
+          <a:ln w="12700">
+            <a:solidFill>
+              <a:srgbClr val="3FB8C4"/>
+            </a:solidFill>
+            <a:prstDash val="solid"/>
+          </a:ln>
+        </p:spPr>
+      </p:sp>
+      <p:sp>
+        <p:nvSpPr>
+          <p:cNvPr id="39" name="Text 37"/>
+          <p:cNvSpPr/>
+          <p:nvPr/>
+        </p:nvSpPr>
+        <p:spPr>
+          <a:xfrm>
+            <a:off x="2772613" y="3154680"/>
+            <a:ext cx="1099261" cy="320040"/>
           </a:xfrm>
           <a:prstGeom prst="rect">
             <a:avLst/>
@@ -1640,13 +3029,55 @@
           <a:bodyPr wrap="square" lIns="0" tIns="0" rIns="0" bIns="0" rtlCol="0" anchor="ctr"/>
           <a:lstStyle/>
           <a:p>
-            <a:pPr algn="ctr" indent="0" marL="0">
+            <a:pPr indent="0" marL="0">
               <a:buNone/>
             </a:pPr>
             <a:r>
-              <a:rPr lang="en-US" sz="1450" b="1" dirty="0">
+              <a:rPr lang="en-US" sz="1100" dirty="0">
                 <a:solidFill>
-                  <a:srgbClr val="19212C"/>
+                  <a:srgbClr val="FFFFFF"/>
+                </a:solidFill>
+                <a:latin typeface="Consolas" pitchFamily="34" charset="0"/>
+                <a:ea typeface="Consolas" pitchFamily="34" charset="-122"/>
+                <a:cs typeface="Consolas" pitchFamily="34" charset="-120"/>
+              </a:rPr>
+              <a:t>02</a:t>
+            </a:r>
+            <a:endParaRPr lang="en-US" sz="1100" dirty="0"/>
+          </a:p>
+        </p:txBody>
+      </p:sp>
+      <p:sp>
+        <p:nvSpPr>
+          <p:cNvPr id="40" name="Text 38"/>
+          <p:cNvSpPr/>
+          <p:nvPr/>
+        </p:nvSpPr>
+        <p:spPr>
+          <a:xfrm>
+            <a:off x="2772613" y="3593592"/>
+            <a:ext cx="1099261" cy="868680"/>
+          </a:xfrm>
+          <a:prstGeom prst="rect">
+            <a:avLst/>
+          </a:prstGeom>
+          <a:noFill/>
+          <a:ln/>
+        </p:spPr>
+        <p:txBody>
+          <a:bodyPr wrap="square" lIns="0" tIns="0" rIns="0" bIns="0" rtlCol="0" anchor="t"/>
+          <a:lstStyle/>
+          <a:p>
+            <a:pPr indent="0" marL="0">
+              <a:lnSpc>
+                <a:spcPct val="96000"/>
+              </a:lnSpc>
+              <a:buNone/>
+            </a:pPr>
+            <a:r>
+              <a:rPr lang="en-US" sz="1300" b="1" dirty="0">
+                <a:solidFill>
+                  <a:srgbClr val="FFFFFF"/>
                 </a:solidFill>
                 <a:latin typeface="Calibri" pitchFamily="34" charset="0"/>
                 <a:ea typeface="Calibri" pitchFamily="34" charset="-122"/>
@@ -1654,20 +3085,20 @@
               </a:rPr>
               <a:t>Fog node</a:t>
             </a:r>
-            <a:endParaRPr lang="en-US" sz="1450" dirty="0"/>
+            <a:endParaRPr lang="en-US" sz="1300" dirty="0"/>
           </a:p>
         </p:txBody>
       </p:sp>
       <p:sp>
         <p:nvSpPr>
-          <p:cNvPr id="11" name="Text 9"/>
-          <p:cNvSpPr/>
-          <p:nvPr/>
-        </p:nvSpPr>
-        <p:spPr>
-          <a:xfrm>
-            <a:off x="4937760" y="2606040"/>
-            <a:ext cx="2286000" cy="411480"/>
+          <p:cNvPr id="41" name="Text 39"/>
+          <p:cNvSpPr/>
+          <p:nvPr/>
+        </p:nvSpPr>
+        <p:spPr>
+          <a:xfrm>
+            <a:off x="2772613" y="4453128"/>
+            <a:ext cx="1099261" cy="365760"/>
           </a:xfrm>
           <a:prstGeom prst="rect">
             <a:avLst/>
@@ -1676,16 +3107,16 @@
           <a:ln/>
         </p:spPr>
         <p:txBody>
-          <a:bodyPr wrap="square" lIns="0" tIns="0" rIns="0" bIns="0" rtlCol="0" anchor="t"/>
+          <a:bodyPr wrap="square" lIns="0" tIns="0" rIns="0" bIns="0" rtlCol="0" anchor="ctr"/>
           <a:lstStyle/>
           <a:p>
-            <a:pPr algn="ctr" indent="0" marL="0">
+            <a:pPr indent="0" marL="0">
               <a:buNone/>
             </a:pPr>
             <a:r>
-              <a:rPr lang="en-US" sz="1050" dirty="0">
+              <a:rPr lang="en-US" sz="900" dirty="0">
                 <a:solidFill>
-                  <a:srgbClr val="5F6B78"/>
+                  <a:srgbClr val="FFFFFF"/>
                 </a:solidFill>
                 <a:latin typeface="Calibri" pitchFamily="34" charset="0"/>
                 <a:ea typeface="Calibri" pitchFamily="34" charset="-122"/>
@@ -1693,92 +3124,67 @@
               </a:rPr>
               <a:t>windows · edge alerts</a:t>
             </a:r>
-            <a:endParaRPr lang="en-US" sz="1050" dirty="0"/>
+            <a:endParaRPr lang="en-US" sz="900" dirty="0"/>
           </a:p>
         </p:txBody>
       </p:sp>
       <p:sp>
         <p:nvSpPr>
-          <p:cNvPr id="12" name="Shape 10"/>
-          <p:cNvSpPr/>
-          <p:nvPr/>
-        </p:nvSpPr>
-        <p:spPr>
-          <a:xfrm>
-            <a:off x="7242048" y="2514600"/>
-            <a:ext cx="1975104" cy="0"/>
-          </a:xfrm>
-          <a:prstGeom prst="line">
-            <a:avLst/>
-          </a:prstGeom>
-          <a:noFill/>
-          <a:ln w="25400">
-            <a:solidFill>
-              <a:srgbClr val="6A839C"/>
-            </a:solidFill>
-            <a:prstDash val="solid"/>
-            <a:headEnd type="none"/>
-            <a:tailEnd type="triangle"/>
-          </a:ln>
-        </p:spPr>
-      </p:sp>
-      <p:sp>
-        <p:nvSpPr>
-          <p:cNvPr id="13" name="Shape 11"/>
-          <p:cNvSpPr/>
-          <p:nvPr/>
-        </p:nvSpPr>
-        <p:spPr>
-          <a:xfrm>
-            <a:off x="9235440" y="1874520"/>
-            <a:ext cx="2286000" cy="1280160"/>
+          <p:cNvPr id="42" name="Shape 40"/>
+          <p:cNvSpPr/>
+          <p:nvPr/>
+        </p:nvSpPr>
+        <p:spPr>
+          <a:xfrm>
+            <a:off x="4091330" y="3845052"/>
+            <a:ext cx="310896" cy="219456"/>
+          </a:xfrm>
+          <a:prstGeom prst="rightArrow">
+            <a:avLst/>
+          </a:prstGeom>
+          <a:solidFill>
+            <a:srgbClr val="8B98A6"/>
+          </a:solidFill>
+          <a:ln/>
+        </p:spPr>
+      </p:sp>
+      <p:sp>
+        <p:nvSpPr>
+          <p:cNvPr id="43" name="Shape 41"/>
+          <p:cNvSpPr/>
+          <p:nvPr/>
+        </p:nvSpPr>
+        <p:spPr>
+          <a:xfrm>
+            <a:off x="4475378" y="2971800"/>
+            <a:ext cx="1391869" cy="1965960"/>
           </a:xfrm>
           <a:prstGeom prst="roundRect">
             <a:avLst>
-              <a:gd name="adj" fmla="val 7143"/>
+              <a:gd name="adj" fmla="val 2628"/>
             </a:avLst>
           </a:prstGeom>
           <a:solidFill>
-            <a:srgbClr val="EEF2F6"/>
+            <a:srgbClr val="12242C"/>
           </a:solidFill>
-          <a:ln w="19050">
-            <a:solidFill>
-              <a:srgbClr val="2C3E55"/>
-            </a:solidFill>
-            <a:prstDash val="solid"/>
-          </a:ln>
-        </p:spPr>
-      </p:sp>
-      <p:sp>
-        <p:nvSpPr>
-          <p:cNvPr id="14" name="Shape 12"/>
-          <p:cNvSpPr/>
-          <p:nvPr/>
-        </p:nvSpPr>
-        <p:spPr>
-          <a:xfrm>
-            <a:off x="10287000" y="2039112"/>
-            <a:ext cx="182880" cy="182880"/>
-          </a:xfrm>
-          <a:prstGeom prst="ellipse">
-            <a:avLst/>
-          </a:prstGeom>
-          <a:solidFill>
-            <a:srgbClr val="2C3E55"/>
-          </a:solidFill>
-          <a:ln/>
-        </p:spPr>
-      </p:sp>
-      <p:sp>
-        <p:nvSpPr>
-          <p:cNvPr id="15" name="Text 13"/>
-          <p:cNvSpPr/>
-          <p:nvPr/>
-        </p:nvSpPr>
-        <p:spPr>
-          <a:xfrm>
-            <a:off x="9208008" y="2258568"/>
-            <a:ext cx="2340864" cy="365760"/>
+          <a:ln w="12700">
+            <a:solidFill>
+              <a:srgbClr val="263840"/>
+            </a:solidFill>
+            <a:prstDash val="solid"/>
+          </a:ln>
+        </p:spPr>
+      </p:sp>
+      <p:sp>
+        <p:nvSpPr>
+          <p:cNvPr id="44" name="Text 42"/>
+          <p:cNvSpPr/>
+          <p:nvPr/>
+        </p:nvSpPr>
+        <p:spPr>
+          <a:xfrm>
+            <a:off x="4621682" y="3154680"/>
+            <a:ext cx="1099261" cy="320040"/>
           </a:xfrm>
           <a:prstGeom prst="rect">
             <a:avLst/>
@@ -1790,13 +3196,55 @@
           <a:bodyPr wrap="square" lIns="0" tIns="0" rIns="0" bIns="0" rtlCol="0" anchor="ctr"/>
           <a:lstStyle/>
           <a:p>
-            <a:pPr algn="ctr" indent="0" marL="0">
+            <a:pPr indent="0" marL="0">
               <a:buNone/>
             </a:pPr>
             <a:r>
-              <a:rPr lang="en-US" sz="1450" b="1" dirty="0">
+              <a:rPr lang="en-US" sz="1100" dirty="0">
                 <a:solidFill>
-                  <a:srgbClr val="19212C"/>
+                  <a:srgbClr val="3FB8C4"/>
+                </a:solidFill>
+                <a:latin typeface="Consolas" pitchFamily="34" charset="0"/>
+                <a:ea typeface="Consolas" pitchFamily="34" charset="-122"/>
+                <a:cs typeface="Consolas" pitchFamily="34" charset="-120"/>
+              </a:rPr>
+              <a:t>03</a:t>
+            </a:r>
+            <a:endParaRPr lang="en-US" sz="1100" dirty="0"/>
+          </a:p>
+        </p:txBody>
+      </p:sp>
+      <p:sp>
+        <p:nvSpPr>
+          <p:cNvPr id="45" name="Text 43"/>
+          <p:cNvSpPr/>
+          <p:nvPr/>
+        </p:nvSpPr>
+        <p:spPr>
+          <a:xfrm>
+            <a:off x="4621682" y="3593592"/>
+            <a:ext cx="1099261" cy="868680"/>
+          </a:xfrm>
+          <a:prstGeom prst="rect">
+            <a:avLst/>
+          </a:prstGeom>
+          <a:noFill/>
+          <a:ln/>
+        </p:spPr>
+        <p:txBody>
+          <a:bodyPr wrap="square" lIns="0" tIns="0" rIns="0" bIns="0" rtlCol="0" anchor="t"/>
+          <a:lstStyle/>
+          <a:p>
+            <a:pPr indent="0" marL="0">
+              <a:lnSpc>
+                <a:spcPct val="96000"/>
+              </a:lnSpc>
+              <a:buNone/>
+            </a:pPr>
+            <a:r>
+              <a:rPr lang="en-US" sz="1300" b="1" dirty="0">
+                <a:solidFill>
+                  <a:srgbClr val="E7F1F4"/>
                 </a:solidFill>
                 <a:latin typeface="Calibri" pitchFamily="34" charset="0"/>
                 <a:ea typeface="Calibri" pitchFamily="34" charset="-122"/>
@@ -1804,20 +3252,20 @@
               </a:rPr>
               <a:t>Amazon SQS</a:t>
             </a:r>
-            <a:endParaRPr lang="en-US" sz="1450" dirty="0"/>
+            <a:endParaRPr lang="en-US" sz="1300" dirty="0"/>
           </a:p>
         </p:txBody>
       </p:sp>
       <p:sp>
         <p:nvSpPr>
-          <p:cNvPr id="16" name="Text 14"/>
-          <p:cNvSpPr/>
-          <p:nvPr/>
-        </p:nvSpPr>
-        <p:spPr>
-          <a:xfrm>
-            <a:off x="9235440" y="2606040"/>
-            <a:ext cx="2286000" cy="411480"/>
+          <p:cNvPr id="46" name="Text 44"/>
+          <p:cNvSpPr/>
+          <p:nvPr/>
+        </p:nvSpPr>
+        <p:spPr>
+          <a:xfrm>
+            <a:off x="4621682" y="4453128"/>
+            <a:ext cx="1099261" cy="365760"/>
           </a:xfrm>
           <a:prstGeom prst="rect">
             <a:avLst/>
@@ -1826,16 +3274,16 @@
           <a:ln/>
         </p:spPr>
         <p:txBody>
-          <a:bodyPr wrap="square" lIns="0" tIns="0" rIns="0" bIns="0" rtlCol="0" anchor="t"/>
+          <a:bodyPr wrap="square" lIns="0" tIns="0" rIns="0" bIns="0" rtlCol="0" anchor="ctr"/>
           <a:lstStyle/>
           <a:p>
-            <a:pPr algn="ctr" indent="0" marL="0">
+            <a:pPr indent="0" marL="0">
               <a:buNone/>
             </a:pPr>
             <a:r>
-              <a:rPr lang="en-US" sz="1050" dirty="0">
+              <a:rPr lang="en-US" sz="900" dirty="0">
                 <a:solidFill>
-                  <a:srgbClr val="5F6B78"/>
+                  <a:srgbClr val="8B98A6"/>
                 </a:solidFill>
                 <a:latin typeface="Calibri" pitchFamily="34" charset="0"/>
                 <a:ea typeface="Calibri" pitchFamily="34" charset="-122"/>
@@ -1843,67 +3291,67 @@
               </a:rPr>
               <a:t>window summaries</a:t>
             </a:r>
-            <a:endParaRPr lang="en-US" sz="1050" dirty="0"/>
+            <a:endParaRPr lang="en-US" sz="900" dirty="0"/>
           </a:p>
         </p:txBody>
       </p:sp>
       <p:sp>
         <p:nvSpPr>
-          <p:cNvPr id="17" name="Shape 15"/>
-          <p:cNvSpPr/>
-          <p:nvPr/>
-        </p:nvSpPr>
-        <p:spPr>
-          <a:xfrm>
-            <a:off x="9235440" y="3520440"/>
-            <a:ext cx="2286000" cy="1280160"/>
+          <p:cNvPr id="47" name="Shape 45"/>
+          <p:cNvSpPr/>
+          <p:nvPr/>
+        </p:nvSpPr>
+        <p:spPr>
+          <a:xfrm>
+            <a:off x="5940400" y="3845052"/>
+            <a:ext cx="310896" cy="219456"/>
+          </a:xfrm>
+          <a:prstGeom prst="rightArrow">
+            <a:avLst/>
+          </a:prstGeom>
+          <a:solidFill>
+            <a:srgbClr val="8B98A6"/>
+          </a:solidFill>
+          <a:ln/>
+        </p:spPr>
+      </p:sp>
+      <p:sp>
+        <p:nvSpPr>
+          <p:cNvPr id="48" name="Shape 46"/>
+          <p:cNvSpPr/>
+          <p:nvPr/>
+        </p:nvSpPr>
+        <p:spPr>
+          <a:xfrm>
+            <a:off x="6324448" y="2971800"/>
+            <a:ext cx="1391869" cy="1965960"/>
           </a:xfrm>
           <a:prstGeom prst="roundRect">
             <a:avLst>
-              <a:gd name="adj" fmla="val 7143"/>
+              <a:gd name="adj" fmla="val 2628"/>
             </a:avLst>
           </a:prstGeom>
           <a:solidFill>
-            <a:srgbClr val="EEF2F6"/>
+            <a:srgbClr val="12242C"/>
           </a:solidFill>
-          <a:ln w="19050">
-            <a:solidFill>
-              <a:srgbClr val="2C3E55"/>
-            </a:solidFill>
-            <a:prstDash val="solid"/>
-          </a:ln>
-        </p:spPr>
-      </p:sp>
-      <p:sp>
-        <p:nvSpPr>
-          <p:cNvPr id="18" name="Shape 16"/>
-          <p:cNvSpPr/>
-          <p:nvPr/>
-        </p:nvSpPr>
-        <p:spPr>
-          <a:xfrm>
-            <a:off x="10287000" y="3685032"/>
-            <a:ext cx="182880" cy="182880"/>
-          </a:xfrm>
-          <a:prstGeom prst="ellipse">
-            <a:avLst/>
-          </a:prstGeom>
-          <a:solidFill>
-            <a:srgbClr val="2C3E55"/>
-          </a:solidFill>
-          <a:ln/>
-        </p:spPr>
-      </p:sp>
-      <p:sp>
-        <p:nvSpPr>
-          <p:cNvPr id="19" name="Text 17"/>
-          <p:cNvSpPr/>
-          <p:nvPr/>
-        </p:nvSpPr>
-        <p:spPr>
-          <a:xfrm>
-            <a:off x="9208008" y="3904488"/>
-            <a:ext cx="2340864" cy="365760"/>
+          <a:ln w="12700">
+            <a:solidFill>
+              <a:srgbClr val="263840"/>
+            </a:solidFill>
+            <a:prstDash val="solid"/>
+          </a:ln>
+        </p:spPr>
+      </p:sp>
+      <p:sp>
+        <p:nvSpPr>
+          <p:cNvPr id="49" name="Text 47"/>
+          <p:cNvSpPr/>
+          <p:nvPr/>
+        </p:nvSpPr>
+        <p:spPr>
+          <a:xfrm>
+            <a:off x="6470752" y="3154680"/>
+            <a:ext cx="1099261" cy="320040"/>
           </a:xfrm>
           <a:prstGeom prst="rect">
             <a:avLst/>
@@ -1915,13 +3363,55 @@
           <a:bodyPr wrap="square" lIns="0" tIns="0" rIns="0" bIns="0" rtlCol="0" anchor="ctr"/>
           <a:lstStyle/>
           <a:p>
-            <a:pPr algn="ctr" indent="0" marL="0">
+            <a:pPr indent="0" marL="0">
               <a:buNone/>
             </a:pPr>
             <a:r>
-              <a:rPr lang="en-US" sz="1450" b="1" dirty="0">
+              <a:rPr lang="en-US" sz="1100" dirty="0">
                 <a:solidFill>
-                  <a:srgbClr val="19212C"/>
+                  <a:srgbClr val="3FB8C4"/>
+                </a:solidFill>
+                <a:latin typeface="Consolas" pitchFamily="34" charset="0"/>
+                <a:ea typeface="Consolas" pitchFamily="34" charset="-122"/>
+                <a:cs typeface="Consolas" pitchFamily="34" charset="-120"/>
+              </a:rPr>
+              <a:t>04</a:t>
+            </a:r>
+            <a:endParaRPr lang="en-US" sz="1100" dirty="0"/>
+          </a:p>
+        </p:txBody>
+      </p:sp>
+      <p:sp>
+        <p:nvSpPr>
+          <p:cNvPr id="50" name="Text 48"/>
+          <p:cNvSpPr/>
+          <p:nvPr/>
+        </p:nvSpPr>
+        <p:spPr>
+          <a:xfrm>
+            <a:off x="6470752" y="3593592"/>
+            <a:ext cx="1099261" cy="868680"/>
+          </a:xfrm>
+          <a:prstGeom prst="rect">
+            <a:avLst/>
+          </a:prstGeom>
+          <a:noFill/>
+          <a:ln/>
+        </p:spPr>
+        <p:txBody>
+          <a:bodyPr wrap="square" lIns="0" tIns="0" rIns="0" bIns="0" rtlCol="0" anchor="t"/>
+          <a:lstStyle/>
+          <a:p>
+            <a:pPr indent="0" marL="0">
+              <a:lnSpc>
+                <a:spcPct val="96000"/>
+              </a:lnSpc>
+              <a:buNone/>
+            </a:pPr>
+            <a:r>
+              <a:rPr lang="en-US" sz="1300" b="1" dirty="0">
+                <a:solidFill>
+                  <a:srgbClr val="E7F1F4"/>
                 </a:solidFill>
                 <a:latin typeface="Calibri" pitchFamily="34" charset="0"/>
                 <a:ea typeface="Calibri" pitchFamily="34" charset="-122"/>
@@ -1929,20 +3419,20 @@
               </a:rPr>
               <a:t>AWS Lambda</a:t>
             </a:r>
-            <a:endParaRPr lang="en-US" sz="1450" dirty="0"/>
+            <a:endParaRPr lang="en-US" sz="1300" dirty="0"/>
           </a:p>
         </p:txBody>
       </p:sp>
       <p:sp>
         <p:nvSpPr>
-          <p:cNvPr id="20" name="Text 18"/>
-          <p:cNvSpPr/>
-          <p:nvPr/>
-        </p:nvSpPr>
-        <p:spPr>
-          <a:xfrm>
-            <a:off x="9235440" y="4251960"/>
-            <a:ext cx="2286000" cy="411480"/>
+          <p:cNvPr id="51" name="Text 49"/>
+          <p:cNvSpPr/>
+          <p:nvPr/>
+        </p:nvSpPr>
+        <p:spPr>
+          <a:xfrm>
+            <a:off x="6470752" y="4453128"/>
+            <a:ext cx="1099261" cy="365760"/>
           </a:xfrm>
           <a:prstGeom prst="rect">
             <a:avLst/>
@@ -1951,16 +3441,16 @@
           <a:ln/>
         </p:spPr>
         <p:txBody>
-          <a:bodyPr wrap="square" lIns="0" tIns="0" rIns="0" bIns="0" rtlCol="0" anchor="t"/>
+          <a:bodyPr wrap="square" lIns="0" tIns="0" rIns="0" bIns="0" rtlCol="0" anchor="ctr"/>
           <a:lstStyle/>
           <a:p>
-            <a:pPr algn="ctr" indent="0" marL="0">
+            <a:pPr indent="0" marL="0">
               <a:buNone/>
             </a:pPr>
             <a:r>
-              <a:rPr lang="en-US" sz="1050" dirty="0">
+              <a:rPr lang="en-US" sz="900" dirty="0">
                 <a:solidFill>
-                  <a:srgbClr val="5F6B78"/>
+                  <a:srgbClr val="8B98A6"/>
                 </a:solidFill>
                 <a:latin typeface="Calibri" pitchFamily="34" charset="0"/>
                 <a:ea typeface="Calibri" pitchFamily="34" charset="-122"/>
@@ -1968,92 +3458,67 @@
               </a:rPr>
               <a:t>ingest function</a:t>
             </a:r>
-            <a:endParaRPr lang="en-US" sz="1050" dirty="0"/>
+            <a:endParaRPr lang="en-US" sz="900" dirty="0"/>
           </a:p>
         </p:txBody>
       </p:sp>
       <p:sp>
         <p:nvSpPr>
-          <p:cNvPr id="21" name="Shape 19"/>
-          <p:cNvSpPr/>
-          <p:nvPr/>
-        </p:nvSpPr>
-        <p:spPr>
-          <a:xfrm>
-            <a:off x="7242048" y="4160520"/>
-            <a:ext cx="1975104" cy="0"/>
-          </a:xfrm>
-          <a:prstGeom prst="line">
-            <a:avLst/>
-          </a:prstGeom>
-          <a:noFill/>
-          <a:ln w="25400">
-            <a:solidFill>
-              <a:srgbClr val="6A839C"/>
-            </a:solidFill>
-            <a:prstDash val="solid"/>
-            <a:headEnd type="triangle"/>
-            <a:tailEnd type="oval"/>
-          </a:ln>
-        </p:spPr>
-      </p:sp>
-      <p:sp>
-        <p:nvSpPr>
-          <p:cNvPr id="22" name="Shape 20"/>
-          <p:cNvSpPr/>
-          <p:nvPr/>
-        </p:nvSpPr>
-        <p:spPr>
-          <a:xfrm>
-            <a:off x="4937760" y="3520440"/>
-            <a:ext cx="2286000" cy="1280160"/>
+          <p:cNvPr id="52" name="Shape 50"/>
+          <p:cNvSpPr/>
+          <p:nvPr/>
+        </p:nvSpPr>
+        <p:spPr>
+          <a:xfrm>
+            <a:off x="7789469" y="3845052"/>
+            <a:ext cx="310896" cy="219456"/>
+          </a:xfrm>
+          <a:prstGeom prst="rightArrow">
+            <a:avLst/>
+          </a:prstGeom>
+          <a:solidFill>
+            <a:srgbClr val="8B98A6"/>
+          </a:solidFill>
+          <a:ln/>
+        </p:spPr>
+      </p:sp>
+      <p:sp>
+        <p:nvSpPr>
+          <p:cNvPr id="53" name="Shape 51"/>
+          <p:cNvSpPr/>
+          <p:nvPr/>
+        </p:nvSpPr>
+        <p:spPr>
+          <a:xfrm>
+            <a:off x="8173517" y="2971800"/>
+            <a:ext cx="1391869" cy="1965960"/>
           </a:xfrm>
           <a:prstGeom prst="roundRect">
             <a:avLst>
-              <a:gd name="adj" fmla="val 7143"/>
+              <a:gd name="adj" fmla="val 2628"/>
             </a:avLst>
           </a:prstGeom>
           <a:solidFill>
-            <a:srgbClr val="EEF2F6"/>
+            <a:srgbClr val="12242C"/>
           </a:solidFill>
-          <a:ln w="19050">
-            <a:solidFill>
-              <a:srgbClr val="2C3E55"/>
-            </a:solidFill>
-            <a:prstDash val="solid"/>
-          </a:ln>
-        </p:spPr>
-      </p:sp>
-      <p:sp>
-        <p:nvSpPr>
-          <p:cNvPr id="23" name="Shape 21"/>
-          <p:cNvSpPr/>
-          <p:nvPr/>
-        </p:nvSpPr>
-        <p:spPr>
-          <a:xfrm>
-            <a:off x="5989320" y="3685032"/>
-            <a:ext cx="182880" cy="182880"/>
-          </a:xfrm>
-          <a:prstGeom prst="ellipse">
-            <a:avLst/>
-          </a:prstGeom>
-          <a:solidFill>
-            <a:srgbClr val="2C3E55"/>
-          </a:solidFill>
-          <a:ln/>
-        </p:spPr>
-      </p:sp>
-      <p:sp>
-        <p:nvSpPr>
-          <p:cNvPr id="24" name="Text 22"/>
-          <p:cNvSpPr/>
-          <p:nvPr/>
-        </p:nvSpPr>
-        <p:spPr>
-          <a:xfrm>
-            <a:off x="4910328" y="3904488"/>
-            <a:ext cx="2340864" cy="365760"/>
+          <a:ln w="12700">
+            <a:solidFill>
+              <a:srgbClr val="263840"/>
+            </a:solidFill>
+            <a:prstDash val="solid"/>
+          </a:ln>
+        </p:spPr>
+      </p:sp>
+      <p:sp>
+        <p:nvSpPr>
+          <p:cNvPr id="54" name="Text 52"/>
+          <p:cNvSpPr/>
+          <p:nvPr/>
+        </p:nvSpPr>
+        <p:spPr>
+          <a:xfrm>
+            <a:off x="8319821" y="3154680"/>
+            <a:ext cx="1099261" cy="320040"/>
           </a:xfrm>
           <a:prstGeom prst="rect">
             <a:avLst/>
@@ -2065,13 +3530,55 @@
           <a:bodyPr wrap="square" lIns="0" tIns="0" rIns="0" bIns="0" rtlCol="0" anchor="ctr"/>
           <a:lstStyle/>
           <a:p>
-            <a:pPr algn="ctr" indent="0" marL="0">
+            <a:pPr indent="0" marL="0">
               <a:buNone/>
             </a:pPr>
             <a:r>
-              <a:rPr lang="en-US" sz="1450" b="1" dirty="0">
+              <a:rPr lang="en-US" sz="1100" dirty="0">
                 <a:solidFill>
-                  <a:srgbClr val="19212C"/>
+                  <a:srgbClr val="3FB8C4"/>
+                </a:solidFill>
+                <a:latin typeface="Consolas" pitchFamily="34" charset="0"/>
+                <a:ea typeface="Consolas" pitchFamily="34" charset="-122"/>
+                <a:cs typeface="Consolas" pitchFamily="34" charset="-120"/>
+              </a:rPr>
+              <a:t>05</a:t>
+            </a:r>
+            <a:endParaRPr lang="en-US" sz="1100" dirty="0"/>
+          </a:p>
+        </p:txBody>
+      </p:sp>
+      <p:sp>
+        <p:nvSpPr>
+          <p:cNvPr id="55" name="Text 53"/>
+          <p:cNvSpPr/>
+          <p:nvPr/>
+        </p:nvSpPr>
+        <p:spPr>
+          <a:xfrm>
+            <a:off x="8319821" y="3593592"/>
+            <a:ext cx="1099261" cy="868680"/>
+          </a:xfrm>
+          <a:prstGeom prst="rect">
+            <a:avLst/>
+          </a:prstGeom>
+          <a:noFill/>
+          <a:ln/>
+        </p:spPr>
+        <p:txBody>
+          <a:bodyPr wrap="square" lIns="0" tIns="0" rIns="0" bIns="0" rtlCol="0" anchor="t"/>
+          <a:lstStyle/>
+          <a:p>
+            <a:pPr indent="0" marL="0">
+              <a:lnSpc>
+                <a:spcPct val="96000"/>
+              </a:lnSpc>
+              <a:buNone/>
+            </a:pPr>
+            <a:r>
+              <a:rPr lang="en-US" sz="1300" b="1" dirty="0">
+                <a:solidFill>
+                  <a:srgbClr val="E7F1F4"/>
                 </a:solidFill>
                 <a:latin typeface="Calibri" pitchFamily="34" charset="0"/>
                 <a:ea typeface="Calibri" pitchFamily="34" charset="-122"/>
@@ -2079,20 +3586,20 @@
               </a:rPr>
               <a:t>DynamoDB</a:t>
             </a:r>
-            <a:endParaRPr lang="en-US" sz="1450" dirty="0"/>
+            <a:endParaRPr lang="en-US" sz="1300" dirty="0"/>
           </a:p>
         </p:txBody>
       </p:sp>
       <p:sp>
         <p:nvSpPr>
-          <p:cNvPr id="25" name="Text 23"/>
-          <p:cNvSpPr/>
-          <p:nvPr/>
-        </p:nvSpPr>
-        <p:spPr>
-          <a:xfrm>
-            <a:off x="4937760" y="4251960"/>
-            <a:ext cx="2286000" cy="411480"/>
+          <p:cNvPr id="56" name="Text 54"/>
+          <p:cNvSpPr/>
+          <p:nvPr/>
+        </p:nvSpPr>
+        <p:spPr>
+          <a:xfrm>
+            <a:off x="8319821" y="4453128"/>
+            <a:ext cx="1099261" cy="365760"/>
           </a:xfrm>
           <a:prstGeom prst="rect">
             <a:avLst/>
@@ -2101,16 +3608,16 @@
           <a:ln/>
         </p:spPr>
         <p:txBody>
-          <a:bodyPr wrap="square" lIns="0" tIns="0" rIns="0" bIns="0" rtlCol="0" anchor="t"/>
+          <a:bodyPr wrap="square" lIns="0" tIns="0" rIns="0" bIns="0" rtlCol="0" anchor="ctr"/>
           <a:lstStyle/>
           <a:p>
-            <a:pPr algn="ctr" indent="0" marL="0">
+            <a:pPr indent="0" marL="0">
               <a:buNone/>
             </a:pPr>
             <a:r>
-              <a:rPr lang="en-US" sz="1050" dirty="0">
+              <a:rPr lang="en-US" sz="900" dirty="0">
                 <a:solidFill>
-                  <a:srgbClr val="5F6B78"/>
+                  <a:srgbClr val="8B98A6"/>
                 </a:solidFill>
                 <a:latin typeface="Calibri" pitchFamily="34" charset="0"/>
                 <a:ea typeface="Calibri" pitchFamily="34" charset="-122"/>
@@ -2118,92 +3625,67 @@
               </a:rPr>
               <a:t>readings store</a:t>
             </a:r>
-            <a:endParaRPr lang="en-US" sz="1050" dirty="0"/>
+            <a:endParaRPr lang="en-US" sz="900" dirty="0"/>
           </a:p>
         </p:txBody>
       </p:sp>
       <p:sp>
         <p:nvSpPr>
-          <p:cNvPr id="26" name="Shape 24"/>
-          <p:cNvSpPr/>
-          <p:nvPr/>
-        </p:nvSpPr>
-        <p:spPr>
-          <a:xfrm>
-            <a:off x="2944368" y="4160520"/>
-            <a:ext cx="1975104" cy="0"/>
-          </a:xfrm>
-          <a:prstGeom prst="line">
-            <a:avLst/>
-          </a:prstGeom>
-          <a:noFill/>
-          <a:ln w="25400">
-            <a:solidFill>
-              <a:srgbClr val="6A839C"/>
-            </a:solidFill>
-            <a:prstDash val="solid"/>
-            <a:headEnd type="triangle"/>
-            <a:tailEnd type="oval"/>
-          </a:ln>
-        </p:spPr>
-      </p:sp>
-      <p:sp>
-        <p:nvSpPr>
-          <p:cNvPr id="27" name="Shape 25"/>
-          <p:cNvSpPr/>
-          <p:nvPr/>
-        </p:nvSpPr>
-        <p:spPr>
-          <a:xfrm>
-            <a:off x="640080" y="3520440"/>
-            <a:ext cx="2286000" cy="1280160"/>
+          <p:cNvPr id="57" name="Shape 55"/>
+          <p:cNvSpPr/>
+          <p:nvPr/>
+        </p:nvSpPr>
+        <p:spPr>
+          <a:xfrm>
+            <a:off x="9638538" y="3845052"/>
+            <a:ext cx="310896" cy="219456"/>
+          </a:xfrm>
+          <a:prstGeom prst="rightArrow">
+            <a:avLst/>
+          </a:prstGeom>
+          <a:solidFill>
+            <a:srgbClr val="8B98A6"/>
+          </a:solidFill>
+          <a:ln/>
+        </p:spPr>
+      </p:sp>
+      <p:sp>
+        <p:nvSpPr>
+          <p:cNvPr id="58" name="Shape 56"/>
+          <p:cNvSpPr/>
+          <p:nvPr/>
+        </p:nvSpPr>
+        <p:spPr>
+          <a:xfrm>
+            <a:off x="10022586" y="2971800"/>
+            <a:ext cx="1391869" cy="1965960"/>
           </a:xfrm>
           <a:prstGeom prst="roundRect">
             <a:avLst>
-              <a:gd name="adj" fmla="val 7143"/>
+              <a:gd name="adj" fmla="val 2628"/>
             </a:avLst>
           </a:prstGeom>
           <a:solidFill>
-            <a:srgbClr val="EEF2F6"/>
+            <a:srgbClr val="12242C"/>
           </a:solidFill>
-          <a:ln w="19050">
-            <a:solidFill>
-              <a:srgbClr val="3E5A7C"/>
-            </a:solidFill>
-            <a:prstDash val="solid"/>
-          </a:ln>
-        </p:spPr>
-      </p:sp>
-      <p:sp>
-        <p:nvSpPr>
-          <p:cNvPr id="28" name="Shape 26"/>
-          <p:cNvSpPr/>
-          <p:nvPr/>
-        </p:nvSpPr>
-        <p:spPr>
-          <a:xfrm>
-            <a:off x="1691640" y="3685032"/>
-            <a:ext cx="182880" cy="182880"/>
-          </a:xfrm>
-          <a:prstGeom prst="ellipse">
-            <a:avLst/>
-          </a:prstGeom>
-          <a:solidFill>
-            <a:srgbClr val="3E5A7C"/>
-          </a:solidFill>
-          <a:ln/>
-        </p:spPr>
-      </p:sp>
-      <p:sp>
-        <p:nvSpPr>
-          <p:cNvPr id="29" name="Text 27"/>
-          <p:cNvSpPr/>
-          <p:nvPr/>
-        </p:nvSpPr>
-        <p:spPr>
-          <a:xfrm>
-            <a:off x="612648" y="3904488"/>
-            <a:ext cx="2340864" cy="365760"/>
+          <a:ln w="12700">
+            <a:solidFill>
+              <a:srgbClr val="263840"/>
+            </a:solidFill>
+            <a:prstDash val="solid"/>
+          </a:ln>
+        </p:spPr>
+      </p:sp>
+      <p:sp>
+        <p:nvSpPr>
+          <p:cNvPr id="59" name="Text 57"/>
+          <p:cNvSpPr/>
+          <p:nvPr/>
+        </p:nvSpPr>
+        <p:spPr>
+          <a:xfrm>
+            <a:off x="10168890" y="3154680"/>
+            <a:ext cx="1099261" cy="320040"/>
           </a:xfrm>
           <a:prstGeom prst="rect">
             <a:avLst/>
@@ -2215,13 +3697,55 @@
           <a:bodyPr wrap="square" lIns="0" tIns="0" rIns="0" bIns="0" rtlCol="0" anchor="ctr"/>
           <a:lstStyle/>
           <a:p>
-            <a:pPr algn="ctr" indent="0" marL="0">
+            <a:pPr indent="0" marL="0">
               <a:buNone/>
             </a:pPr>
             <a:r>
-              <a:rPr lang="en-US" sz="1450" b="1" dirty="0">
+              <a:rPr lang="en-US" sz="1100" dirty="0">
                 <a:solidFill>
-                  <a:srgbClr val="19212C"/>
+                  <a:srgbClr val="3FB8C4"/>
+                </a:solidFill>
+                <a:latin typeface="Consolas" pitchFamily="34" charset="0"/>
+                <a:ea typeface="Consolas" pitchFamily="34" charset="-122"/>
+                <a:cs typeface="Consolas" pitchFamily="34" charset="-120"/>
+              </a:rPr>
+              <a:t>06</a:t>
+            </a:r>
+            <a:endParaRPr lang="en-US" sz="1100" dirty="0"/>
+          </a:p>
+        </p:txBody>
+      </p:sp>
+      <p:sp>
+        <p:nvSpPr>
+          <p:cNvPr id="60" name="Text 58"/>
+          <p:cNvSpPr/>
+          <p:nvPr/>
+        </p:nvSpPr>
+        <p:spPr>
+          <a:xfrm>
+            <a:off x="10168890" y="3593592"/>
+            <a:ext cx="1099261" cy="868680"/>
+          </a:xfrm>
+          <a:prstGeom prst="rect">
+            <a:avLst/>
+          </a:prstGeom>
+          <a:noFill/>
+          <a:ln/>
+        </p:spPr>
+        <p:txBody>
+          <a:bodyPr wrap="square" lIns="0" tIns="0" rIns="0" bIns="0" rtlCol="0" anchor="t"/>
+          <a:lstStyle/>
+          <a:p>
+            <a:pPr indent="0" marL="0">
+              <a:lnSpc>
+                <a:spcPct val="96000"/>
+              </a:lnSpc>
+              <a:buNone/>
+            </a:pPr>
+            <a:r>
+              <a:rPr lang="en-US" sz="1300" b="1" dirty="0">
+                <a:solidFill>
+                  <a:srgbClr val="E7F1F4"/>
                 </a:solidFill>
                 <a:latin typeface="Calibri" pitchFamily="34" charset="0"/>
                 <a:ea typeface="Calibri" pitchFamily="34" charset="-122"/>
@@ -2229,20 +3753,20 @@
               </a:rPr>
               <a:t>API GW + S3</a:t>
             </a:r>
-            <a:endParaRPr lang="en-US" sz="1450" dirty="0"/>
+            <a:endParaRPr lang="en-US" sz="1300" dirty="0"/>
           </a:p>
         </p:txBody>
       </p:sp>
       <p:sp>
         <p:nvSpPr>
-          <p:cNvPr id="30" name="Text 28"/>
-          <p:cNvSpPr/>
-          <p:nvPr/>
-        </p:nvSpPr>
-        <p:spPr>
-          <a:xfrm>
-            <a:off x="640080" y="4251960"/>
-            <a:ext cx="2286000" cy="411480"/>
+          <p:cNvPr id="61" name="Text 59"/>
+          <p:cNvSpPr/>
+          <p:nvPr/>
+        </p:nvSpPr>
+        <p:spPr>
+          <a:xfrm>
+            <a:off x="10168890" y="4453128"/>
+            <a:ext cx="1099261" cy="365760"/>
           </a:xfrm>
           <a:prstGeom prst="rect">
             <a:avLst/>
@@ -2251,16 +3775,16 @@
           <a:ln/>
         </p:spPr>
         <p:txBody>
-          <a:bodyPr wrap="square" lIns="0" tIns="0" rIns="0" bIns="0" rtlCol="0" anchor="t"/>
+          <a:bodyPr wrap="square" lIns="0" tIns="0" rIns="0" bIns="0" rtlCol="0" anchor="ctr"/>
           <a:lstStyle/>
           <a:p>
-            <a:pPr algn="ctr" indent="0" marL="0">
+            <a:pPr indent="0" marL="0">
               <a:buNone/>
             </a:pPr>
             <a:r>
-              <a:rPr lang="en-US" sz="1050" dirty="0">
+              <a:rPr lang="en-US" sz="900" dirty="0">
                 <a:solidFill>
-                  <a:srgbClr val="5F6B78"/>
+                  <a:srgbClr val="8B98A6"/>
                 </a:solidFill>
                 <a:latin typeface="Calibri" pitchFamily="34" charset="0"/>
                 <a:ea typeface="Calibri" pitchFamily="34" charset="-122"/>
@@ -2268,70 +3792,7 @@
               </a:rPr>
               <a:t>live dashboard</a:t>
             </a:r>
-            <a:endParaRPr lang="en-US" sz="1050" dirty="0"/>
-          </a:p>
-        </p:txBody>
-      </p:sp>
-      <p:sp>
-        <p:nvSpPr>
-          <p:cNvPr id="31" name="Shape 29"/>
-          <p:cNvSpPr/>
-          <p:nvPr/>
-        </p:nvSpPr>
-        <p:spPr>
-          <a:xfrm>
-            <a:off x="10378440" y="3154680"/>
-            <a:ext cx="0" cy="365760"/>
-          </a:xfrm>
-          <a:prstGeom prst="line">
-            <a:avLst/>
-          </a:prstGeom>
-          <a:noFill/>
-          <a:ln w="25400">
-            <a:solidFill>
-              <a:srgbClr val="6A839C"/>
-            </a:solidFill>
-            <a:prstDash val="solid"/>
-            <a:tailEnd type="triangle"/>
-          </a:ln>
-        </p:spPr>
-      </p:sp>
-      <p:sp>
-        <p:nvSpPr>
-          <p:cNvPr id="32" name="Text 30"/>
-          <p:cNvSpPr/>
-          <p:nvPr/>
-        </p:nvSpPr>
-        <p:spPr>
-          <a:xfrm>
-            <a:off x="640080" y="5257800"/>
-            <a:ext cx="10972800" cy="731520"/>
-          </a:xfrm>
-          <a:prstGeom prst="rect">
-            <a:avLst/>
-          </a:prstGeom>
-          <a:noFill/>
-          <a:ln/>
-        </p:spPr>
-        <p:txBody>
-          <a:bodyPr wrap="square" rtlCol="0" anchor="ctr"/>
-          <a:lstStyle/>
-          <a:p>
-            <a:pPr algn="ctr" indent="0" marL="0">
-              <a:buNone/>
-            </a:pPr>
-            <a:r>
-              <a:rPr lang="en-US" sz="1500" i="1" dirty="0">
-                <a:solidFill>
-                  <a:srgbClr val="2C3E55"/>
-                </a:solidFill>
-                <a:latin typeface="Calibri" pitchFamily="34" charset="0"/>
-                <a:ea typeface="Calibri" pitchFamily="34" charset="-122"/>
-                <a:cs typeface="Calibri" pitchFamily="34" charset="-120"/>
-              </a:rPr>
-              <a:t>Alerts fire at the edge, so only compact window summaries ever cross into the cloud; a second Lambda serves the dashboard API.</a:t>
-            </a:r>
-            <a:endParaRPr lang="en-US" sz="1500" dirty="0"/>
+            <a:endParaRPr lang="en-US" sz="900" dirty="0"/>
           </a:p>
         </p:txBody>
       </p:sp>
@@ -2349,7 +3810,7 @@
     <p:bg>
       <p:bgPr>
         <a:solidFill>
-          <a:srgbClr val="FFFFFF"/>
+          <a:srgbClr val="0D1B22"/>
         </a:solidFill>
       </p:bgPr>
     </p:bg>
@@ -2369,14 +3830,831 @@
       </p:grpSpPr>
       <p:sp>
         <p:nvSpPr>
-          <p:cNvPr id="2" name="Text 0"/>
-          <p:cNvSpPr/>
-          <p:nvPr/>
-        </p:nvSpPr>
-        <p:spPr>
-          <a:xfrm>
-            <a:off x="640080" y="457200"/>
-            <a:ext cx="7315200" cy="640080"/>
+          <p:cNvPr id="2" name="Shape 0"/>
+          <p:cNvSpPr/>
+          <p:nvPr/>
+        </p:nvSpPr>
+        <p:spPr>
+          <a:xfrm>
+            <a:off x="685800" y="0"/>
+            <a:ext cx="0" cy="6858000"/>
+          </a:xfrm>
+          <a:prstGeom prst="line">
+            <a:avLst/>
+          </a:prstGeom>
+          <a:noFill/>
+          <a:ln w="6350">
+            <a:solidFill>
+              <a:srgbClr val="3FB8C4">
+                <a:alpha val="18000"/>
+              </a:srgbClr>
+            </a:solidFill>
+            <a:prstDash val="solid"/>
+          </a:ln>
+        </p:spPr>
+      </p:sp>
+      <p:sp>
+        <p:nvSpPr>
+          <p:cNvPr id="3" name="Shape 1"/>
+          <p:cNvSpPr/>
+          <p:nvPr/>
+        </p:nvSpPr>
+        <p:spPr>
+          <a:xfrm>
+            <a:off x="1325880" y="0"/>
+            <a:ext cx="0" cy="6858000"/>
+          </a:xfrm>
+          <a:prstGeom prst="line">
+            <a:avLst/>
+          </a:prstGeom>
+          <a:noFill/>
+          <a:ln w="6350">
+            <a:solidFill>
+              <a:srgbClr val="3FB8C4">
+                <a:alpha val="18000"/>
+              </a:srgbClr>
+            </a:solidFill>
+            <a:prstDash val="solid"/>
+          </a:ln>
+        </p:spPr>
+      </p:sp>
+      <p:sp>
+        <p:nvSpPr>
+          <p:cNvPr id="4" name="Shape 2"/>
+          <p:cNvSpPr/>
+          <p:nvPr/>
+        </p:nvSpPr>
+        <p:spPr>
+          <a:xfrm>
+            <a:off x="1965960" y="0"/>
+            <a:ext cx="0" cy="6858000"/>
+          </a:xfrm>
+          <a:prstGeom prst="line">
+            <a:avLst/>
+          </a:prstGeom>
+          <a:noFill/>
+          <a:ln w="6350">
+            <a:solidFill>
+              <a:srgbClr val="3FB8C4">
+                <a:alpha val="18000"/>
+              </a:srgbClr>
+            </a:solidFill>
+            <a:prstDash val="solid"/>
+          </a:ln>
+        </p:spPr>
+      </p:sp>
+      <p:sp>
+        <p:nvSpPr>
+          <p:cNvPr id="5" name="Shape 3"/>
+          <p:cNvSpPr/>
+          <p:nvPr/>
+        </p:nvSpPr>
+        <p:spPr>
+          <a:xfrm>
+            <a:off x="2606040" y="0"/>
+            <a:ext cx="0" cy="6858000"/>
+          </a:xfrm>
+          <a:prstGeom prst="line">
+            <a:avLst/>
+          </a:prstGeom>
+          <a:noFill/>
+          <a:ln w="6350">
+            <a:solidFill>
+              <a:srgbClr val="3FB8C4">
+                <a:alpha val="18000"/>
+              </a:srgbClr>
+            </a:solidFill>
+            <a:prstDash val="solid"/>
+          </a:ln>
+        </p:spPr>
+      </p:sp>
+      <p:sp>
+        <p:nvSpPr>
+          <p:cNvPr id="6" name="Shape 4"/>
+          <p:cNvSpPr/>
+          <p:nvPr/>
+        </p:nvSpPr>
+        <p:spPr>
+          <a:xfrm>
+            <a:off x="3246120" y="0"/>
+            <a:ext cx="0" cy="6858000"/>
+          </a:xfrm>
+          <a:prstGeom prst="line">
+            <a:avLst/>
+          </a:prstGeom>
+          <a:noFill/>
+          <a:ln w="6350">
+            <a:solidFill>
+              <a:srgbClr val="3FB8C4">
+                <a:alpha val="18000"/>
+              </a:srgbClr>
+            </a:solidFill>
+            <a:prstDash val="solid"/>
+          </a:ln>
+        </p:spPr>
+      </p:sp>
+      <p:sp>
+        <p:nvSpPr>
+          <p:cNvPr id="7" name="Shape 5"/>
+          <p:cNvSpPr/>
+          <p:nvPr/>
+        </p:nvSpPr>
+        <p:spPr>
+          <a:xfrm>
+            <a:off x="3886200" y="0"/>
+            <a:ext cx="0" cy="6858000"/>
+          </a:xfrm>
+          <a:prstGeom prst="line">
+            <a:avLst/>
+          </a:prstGeom>
+          <a:noFill/>
+          <a:ln w="6350">
+            <a:solidFill>
+              <a:srgbClr val="3FB8C4">
+                <a:alpha val="18000"/>
+              </a:srgbClr>
+            </a:solidFill>
+            <a:prstDash val="solid"/>
+          </a:ln>
+        </p:spPr>
+      </p:sp>
+      <p:sp>
+        <p:nvSpPr>
+          <p:cNvPr id="8" name="Shape 6"/>
+          <p:cNvSpPr/>
+          <p:nvPr/>
+        </p:nvSpPr>
+        <p:spPr>
+          <a:xfrm>
+            <a:off x="4526280" y="0"/>
+            <a:ext cx="0" cy="6858000"/>
+          </a:xfrm>
+          <a:prstGeom prst="line">
+            <a:avLst/>
+          </a:prstGeom>
+          <a:noFill/>
+          <a:ln w="6350">
+            <a:solidFill>
+              <a:srgbClr val="3FB8C4">
+                <a:alpha val="18000"/>
+              </a:srgbClr>
+            </a:solidFill>
+            <a:prstDash val="solid"/>
+          </a:ln>
+        </p:spPr>
+      </p:sp>
+      <p:sp>
+        <p:nvSpPr>
+          <p:cNvPr id="9" name="Shape 7"/>
+          <p:cNvSpPr/>
+          <p:nvPr/>
+        </p:nvSpPr>
+        <p:spPr>
+          <a:xfrm>
+            <a:off x="5166360" y="0"/>
+            <a:ext cx="0" cy="6858000"/>
+          </a:xfrm>
+          <a:prstGeom prst="line">
+            <a:avLst/>
+          </a:prstGeom>
+          <a:noFill/>
+          <a:ln w="6350">
+            <a:solidFill>
+              <a:srgbClr val="3FB8C4">
+                <a:alpha val="18000"/>
+              </a:srgbClr>
+            </a:solidFill>
+            <a:prstDash val="solid"/>
+          </a:ln>
+        </p:spPr>
+      </p:sp>
+      <p:sp>
+        <p:nvSpPr>
+          <p:cNvPr id="10" name="Shape 8"/>
+          <p:cNvSpPr/>
+          <p:nvPr/>
+        </p:nvSpPr>
+        <p:spPr>
+          <a:xfrm>
+            <a:off x="5806440" y="0"/>
+            <a:ext cx="0" cy="6858000"/>
+          </a:xfrm>
+          <a:prstGeom prst="line">
+            <a:avLst/>
+          </a:prstGeom>
+          <a:noFill/>
+          <a:ln w="6350">
+            <a:solidFill>
+              <a:srgbClr val="3FB8C4">
+                <a:alpha val="18000"/>
+              </a:srgbClr>
+            </a:solidFill>
+            <a:prstDash val="solid"/>
+          </a:ln>
+        </p:spPr>
+      </p:sp>
+      <p:sp>
+        <p:nvSpPr>
+          <p:cNvPr id="11" name="Shape 9"/>
+          <p:cNvSpPr/>
+          <p:nvPr/>
+        </p:nvSpPr>
+        <p:spPr>
+          <a:xfrm>
+            <a:off x="6446520" y="0"/>
+            <a:ext cx="0" cy="6858000"/>
+          </a:xfrm>
+          <a:prstGeom prst="line">
+            <a:avLst/>
+          </a:prstGeom>
+          <a:noFill/>
+          <a:ln w="6350">
+            <a:solidFill>
+              <a:srgbClr val="3FB8C4">
+                <a:alpha val="18000"/>
+              </a:srgbClr>
+            </a:solidFill>
+            <a:prstDash val="solid"/>
+          </a:ln>
+        </p:spPr>
+      </p:sp>
+      <p:sp>
+        <p:nvSpPr>
+          <p:cNvPr id="12" name="Shape 10"/>
+          <p:cNvSpPr/>
+          <p:nvPr/>
+        </p:nvSpPr>
+        <p:spPr>
+          <a:xfrm>
+            <a:off x="7086600" y="0"/>
+            <a:ext cx="0" cy="6858000"/>
+          </a:xfrm>
+          <a:prstGeom prst="line">
+            <a:avLst/>
+          </a:prstGeom>
+          <a:noFill/>
+          <a:ln w="6350">
+            <a:solidFill>
+              <a:srgbClr val="3FB8C4">
+                <a:alpha val="18000"/>
+              </a:srgbClr>
+            </a:solidFill>
+            <a:prstDash val="solid"/>
+          </a:ln>
+        </p:spPr>
+      </p:sp>
+      <p:sp>
+        <p:nvSpPr>
+          <p:cNvPr id="13" name="Shape 11"/>
+          <p:cNvSpPr/>
+          <p:nvPr/>
+        </p:nvSpPr>
+        <p:spPr>
+          <a:xfrm>
+            <a:off x="7726680" y="0"/>
+            <a:ext cx="0" cy="6858000"/>
+          </a:xfrm>
+          <a:prstGeom prst="line">
+            <a:avLst/>
+          </a:prstGeom>
+          <a:noFill/>
+          <a:ln w="6350">
+            <a:solidFill>
+              <a:srgbClr val="3FB8C4">
+                <a:alpha val="18000"/>
+              </a:srgbClr>
+            </a:solidFill>
+            <a:prstDash val="solid"/>
+          </a:ln>
+        </p:spPr>
+      </p:sp>
+      <p:sp>
+        <p:nvSpPr>
+          <p:cNvPr id="14" name="Shape 12"/>
+          <p:cNvSpPr/>
+          <p:nvPr/>
+        </p:nvSpPr>
+        <p:spPr>
+          <a:xfrm>
+            <a:off x="8366760" y="0"/>
+            <a:ext cx="0" cy="6858000"/>
+          </a:xfrm>
+          <a:prstGeom prst="line">
+            <a:avLst/>
+          </a:prstGeom>
+          <a:noFill/>
+          <a:ln w="6350">
+            <a:solidFill>
+              <a:srgbClr val="3FB8C4">
+                <a:alpha val="18000"/>
+              </a:srgbClr>
+            </a:solidFill>
+            <a:prstDash val="solid"/>
+          </a:ln>
+        </p:spPr>
+      </p:sp>
+      <p:sp>
+        <p:nvSpPr>
+          <p:cNvPr id="15" name="Shape 13"/>
+          <p:cNvSpPr/>
+          <p:nvPr/>
+        </p:nvSpPr>
+        <p:spPr>
+          <a:xfrm>
+            <a:off x="9006840" y="0"/>
+            <a:ext cx="0" cy="6858000"/>
+          </a:xfrm>
+          <a:prstGeom prst="line">
+            <a:avLst/>
+          </a:prstGeom>
+          <a:noFill/>
+          <a:ln w="6350">
+            <a:solidFill>
+              <a:srgbClr val="3FB8C4">
+                <a:alpha val="18000"/>
+              </a:srgbClr>
+            </a:solidFill>
+            <a:prstDash val="solid"/>
+          </a:ln>
+        </p:spPr>
+      </p:sp>
+      <p:sp>
+        <p:nvSpPr>
+          <p:cNvPr id="16" name="Shape 14"/>
+          <p:cNvSpPr/>
+          <p:nvPr/>
+        </p:nvSpPr>
+        <p:spPr>
+          <a:xfrm>
+            <a:off x="9646920" y="0"/>
+            <a:ext cx="0" cy="6858000"/>
+          </a:xfrm>
+          <a:prstGeom prst="line">
+            <a:avLst/>
+          </a:prstGeom>
+          <a:noFill/>
+          <a:ln w="6350">
+            <a:solidFill>
+              <a:srgbClr val="3FB8C4">
+                <a:alpha val="18000"/>
+              </a:srgbClr>
+            </a:solidFill>
+            <a:prstDash val="solid"/>
+          </a:ln>
+        </p:spPr>
+      </p:sp>
+      <p:sp>
+        <p:nvSpPr>
+          <p:cNvPr id="17" name="Shape 15"/>
+          <p:cNvSpPr/>
+          <p:nvPr/>
+        </p:nvSpPr>
+        <p:spPr>
+          <a:xfrm>
+            <a:off x="10287000" y="0"/>
+            <a:ext cx="0" cy="6858000"/>
+          </a:xfrm>
+          <a:prstGeom prst="line">
+            <a:avLst/>
+          </a:prstGeom>
+          <a:noFill/>
+          <a:ln w="6350">
+            <a:solidFill>
+              <a:srgbClr val="3FB8C4">
+                <a:alpha val="18000"/>
+              </a:srgbClr>
+            </a:solidFill>
+            <a:prstDash val="solid"/>
+          </a:ln>
+        </p:spPr>
+      </p:sp>
+      <p:sp>
+        <p:nvSpPr>
+          <p:cNvPr id="18" name="Shape 16"/>
+          <p:cNvSpPr/>
+          <p:nvPr/>
+        </p:nvSpPr>
+        <p:spPr>
+          <a:xfrm>
+            <a:off x="10927080" y="0"/>
+            <a:ext cx="0" cy="6858000"/>
+          </a:xfrm>
+          <a:prstGeom prst="line">
+            <a:avLst/>
+          </a:prstGeom>
+          <a:noFill/>
+          <a:ln w="6350">
+            <a:solidFill>
+              <a:srgbClr val="3FB8C4">
+                <a:alpha val="18000"/>
+              </a:srgbClr>
+            </a:solidFill>
+            <a:prstDash val="solid"/>
+          </a:ln>
+        </p:spPr>
+      </p:sp>
+      <p:sp>
+        <p:nvSpPr>
+          <p:cNvPr id="19" name="Shape 17"/>
+          <p:cNvSpPr/>
+          <p:nvPr/>
+        </p:nvSpPr>
+        <p:spPr>
+          <a:xfrm>
+            <a:off x="11567160" y="0"/>
+            <a:ext cx="0" cy="6858000"/>
+          </a:xfrm>
+          <a:prstGeom prst="line">
+            <a:avLst/>
+          </a:prstGeom>
+          <a:noFill/>
+          <a:ln w="6350">
+            <a:solidFill>
+              <a:srgbClr val="3FB8C4">
+                <a:alpha val="18000"/>
+              </a:srgbClr>
+            </a:solidFill>
+            <a:prstDash val="solid"/>
+          </a:ln>
+        </p:spPr>
+      </p:sp>
+      <p:sp>
+        <p:nvSpPr>
+          <p:cNvPr id="20" name="Shape 18"/>
+          <p:cNvSpPr/>
+          <p:nvPr/>
+        </p:nvSpPr>
+        <p:spPr>
+          <a:xfrm>
+            <a:off x="0" y="640080"/>
+            <a:ext cx="12191695" cy="0"/>
+          </a:xfrm>
+          <a:prstGeom prst="line">
+            <a:avLst/>
+          </a:prstGeom>
+          <a:noFill/>
+          <a:ln w="6350">
+            <a:solidFill>
+              <a:srgbClr val="3FB8C4">
+                <a:alpha val="18000"/>
+              </a:srgbClr>
+            </a:solidFill>
+            <a:prstDash val="solid"/>
+          </a:ln>
+        </p:spPr>
+      </p:sp>
+      <p:sp>
+        <p:nvSpPr>
+          <p:cNvPr id="21" name="Shape 19"/>
+          <p:cNvSpPr/>
+          <p:nvPr/>
+        </p:nvSpPr>
+        <p:spPr>
+          <a:xfrm>
+            <a:off x="0" y="1280160"/>
+            <a:ext cx="12191695" cy="0"/>
+          </a:xfrm>
+          <a:prstGeom prst="line">
+            <a:avLst/>
+          </a:prstGeom>
+          <a:noFill/>
+          <a:ln w="6350">
+            <a:solidFill>
+              <a:srgbClr val="3FB8C4">
+                <a:alpha val="18000"/>
+              </a:srgbClr>
+            </a:solidFill>
+            <a:prstDash val="solid"/>
+          </a:ln>
+        </p:spPr>
+      </p:sp>
+      <p:sp>
+        <p:nvSpPr>
+          <p:cNvPr id="22" name="Shape 20"/>
+          <p:cNvSpPr/>
+          <p:nvPr/>
+        </p:nvSpPr>
+        <p:spPr>
+          <a:xfrm>
+            <a:off x="0" y="1920240"/>
+            <a:ext cx="12191695" cy="0"/>
+          </a:xfrm>
+          <a:prstGeom prst="line">
+            <a:avLst/>
+          </a:prstGeom>
+          <a:noFill/>
+          <a:ln w="6350">
+            <a:solidFill>
+              <a:srgbClr val="3FB8C4">
+                <a:alpha val="18000"/>
+              </a:srgbClr>
+            </a:solidFill>
+            <a:prstDash val="solid"/>
+          </a:ln>
+        </p:spPr>
+      </p:sp>
+      <p:sp>
+        <p:nvSpPr>
+          <p:cNvPr id="23" name="Shape 21"/>
+          <p:cNvSpPr/>
+          <p:nvPr/>
+        </p:nvSpPr>
+        <p:spPr>
+          <a:xfrm>
+            <a:off x="0" y="2560320"/>
+            <a:ext cx="12191695" cy="0"/>
+          </a:xfrm>
+          <a:prstGeom prst="line">
+            <a:avLst/>
+          </a:prstGeom>
+          <a:noFill/>
+          <a:ln w="6350">
+            <a:solidFill>
+              <a:srgbClr val="3FB8C4">
+                <a:alpha val="18000"/>
+              </a:srgbClr>
+            </a:solidFill>
+            <a:prstDash val="solid"/>
+          </a:ln>
+        </p:spPr>
+      </p:sp>
+      <p:sp>
+        <p:nvSpPr>
+          <p:cNvPr id="24" name="Shape 22"/>
+          <p:cNvSpPr/>
+          <p:nvPr/>
+        </p:nvSpPr>
+        <p:spPr>
+          <a:xfrm>
+            <a:off x="0" y="3200400"/>
+            <a:ext cx="12191695" cy="0"/>
+          </a:xfrm>
+          <a:prstGeom prst="line">
+            <a:avLst/>
+          </a:prstGeom>
+          <a:noFill/>
+          <a:ln w="6350">
+            <a:solidFill>
+              <a:srgbClr val="3FB8C4">
+                <a:alpha val="18000"/>
+              </a:srgbClr>
+            </a:solidFill>
+            <a:prstDash val="solid"/>
+          </a:ln>
+        </p:spPr>
+      </p:sp>
+      <p:sp>
+        <p:nvSpPr>
+          <p:cNvPr id="25" name="Shape 23"/>
+          <p:cNvSpPr/>
+          <p:nvPr/>
+        </p:nvSpPr>
+        <p:spPr>
+          <a:xfrm>
+            <a:off x="0" y="3840480"/>
+            <a:ext cx="12191695" cy="0"/>
+          </a:xfrm>
+          <a:prstGeom prst="line">
+            <a:avLst/>
+          </a:prstGeom>
+          <a:noFill/>
+          <a:ln w="6350">
+            <a:solidFill>
+              <a:srgbClr val="3FB8C4">
+                <a:alpha val="18000"/>
+              </a:srgbClr>
+            </a:solidFill>
+            <a:prstDash val="solid"/>
+          </a:ln>
+        </p:spPr>
+      </p:sp>
+      <p:sp>
+        <p:nvSpPr>
+          <p:cNvPr id="26" name="Shape 24"/>
+          <p:cNvSpPr/>
+          <p:nvPr/>
+        </p:nvSpPr>
+        <p:spPr>
+          <a:xfrm>
+            <a:off x="0" y="4480560"/>
+            <a:ext cx="12191695" cy="0"/>
+          </a:xfrm>
+          <a:prstGeom prst="line">
+            <a:avLst/>
+          </a:prstGeom>
+          <a:noFill/>
+          <a:ln w="6350">
+            <a:solidFill>
+              <a:srgbClr val="3FB8C4">
+                <a:alpha val="18000"/>
+              </a:srgbClr>
+            </a:solidFill>
+            <a:prstDash val="solid"/>
+          </a:ln>
+        </p:spPr>
+      </p:sp>
+      <p:sp>
+        <p:nvSpPr>
+          <p:cNvPr id="27" name="Shape 25"/>
+          <p:cNvSpPr/>
+          <p:nvPr/>
+        </p:nvSpPr>
+        <p:spPr>
+          <a:xfrm>
+            <a:off x="0" y="5120640"/>
+            <a:ext cx="12191695" cy="0"/>
+          </a:xfrm>
+          <a:prstGeom prst="line">
+            <a:avLst/>
+          </a:prstGeom>
+          <a:noFill/>
+          <a:ln w="6350">
+            <a:solidFill>
+              <a:srgbClr val="3FB8C4">
+                <a:alpha val="18000"/>
+              </a:srgbClr>
+            </a:solidFill>
+            <a:prstDash val="solid"/>
+          </a:ln>
+        </p:spPr>
+      </p:sp>
+      <p:sp>
+        <p:nvSpPr>
+          <p:cNvPr id="28" name="Shape 26"/>
+          <p:cNvSpPr/>
+          <p:nvPr/>
+        </p:nvSpPr>
+        <p:spPr>
+          <a:xfrm>
+            <a:off x="0" y="5760720"/>
+            <a:ext cx="12191695" cy="0"/>
+          </a:xfrm>
+          <a:prstGeom prst="line">
+            <a:avLst/>
+          </a:prstGeom>
+          <a:noFill/>
+          <a:ln w="6350">
+            <a:solidFill>
+              <a:srgbClr val="3FB8C4">
+                <a:alpha val="18000"/>
+              </a:srgbClr>
+            </a:solidFill>
+            <a:prstDash val="solid"/>
+          </a:ln>
+        </p:spPr>
+      </p:sp>
+      <p:sp>
+        <p:nvSpPr>
+          <p:cNvPr id="29" name="Shape 27"/>
+          <p:cNvSpPr/>
+          <p:nvPr/>
+        </p:nvSpPr>
+        <p:spPr>
+          <a:xfrm>
+            <a:off x="0" y="6400800"/>
+            <a:ext cx="12191695" cy="0"/>
+          </a:xfrm>
+          <a:prstGeom prst="line">
+            <a:avLst/>
+          </a:prstGeom>
+          <a:noFill/>
+          <a:ln w="6350">
+            <a:solidFill>
+              <a:srgbClr val="3FB8C4">
+                <a:alpha val="18000"/>
+              </a:srgbClr>
+            </a:solidFill>
+            <a:prstDash val="solid"/>
+          </a:ln>
+        </p:spPr>
+      </p:sp>
+      <p:sp>
+        <p:nvSpPr>
+          <p:cNvPr id="30" name="Text 28"/>
+          <p:cNvSpPr/>
+          <p:nvPr/>
+        </p:nvSpPr>
+        <p:spPr>
+          <a:xfrm>
+            <a:off x="777240" y="731520"/>
+            <a:ext cx="914400" cy="640080"/>
+          </a:xfrm>
+          <a:prstGeom prst="rect">
+            <a:avLst/>
+          </a:prstGeom>
+          <a:noFill/>
+          <a:ln/>
+        </p:spPr>
+        <p:txBody>
+          <a:bodyPr wrap="square" lIns="0" tIns="0" rIns="0" bIns="0" rtlCol="0" anchor="ctr"/>
+          <a:lstStyle/>
+          <a:p>
+            <a:pPr indent="0" marL="0">
+              <a:buNone/>
+            </a:pPr>
+            <a:r>
+              <a:rPr lang="en-US" sz="3000" b="1" dirty="0">
+                <a:solidFill>
+                  <a:srgbClr val="3FB8C4"/>
+                </a:solidFill>
+                <a:latin typeface="Calibri" pitchFamily="34" charset="0"/>
+                <a:ea typeface="Calibri" pitchFamily="34" charset="-122"/>
+                <a:cs typeface="Calibri" pitchFamily="34" charset="-120"/>
+              </a:rPr>
+              <a:t>02</a:t>
+            </a:r>
+            <a:endParaRPr lang="en-US" sz="3000" dirty="0"/>
+          </a:p>
+        </p:txBody>
+      </p:sp>
+      <p:sp>
+        <p:nvSpPr>
+          <p:cNvPr id="31" name="Text 29"/>
+          <p:cNvSpPr/>
+          <p:nvPr/>
+        </p:nvSpPr>
+        <p:spPr>
+          <a:xfrm>
+            <a:off x="1645920" y="905256"/>
+            <a:ext cx="9768535" cy="274320"/>
+          </a:xfrm>
+          <a:prstGeom prst="rect">
+            <a:avLst/>
+          </a:prstGeom>
+          <a:noFill/>
+          <a:ln/>
+        </p:spPr>
+        <p:txBody>
+          <a:bodyPr wrap="square" lIns="0" tIns="0" rIns="0" bIns="0" rtlCol="0" anchor="ctr"/>
+          <a:lstStyle/>
+          <a:p>
+            <a:pPr indent="0" marL="0">
+              <a:buNone/>
+            </a:pPr>
+            <a:r>
+              <a:rPr lang="en-US" sz="1100" b="1" spc="200" kern="0" dirty="0">
+                <a:solidFill>
+                  <a:srgbClr val="8B98A6"/>
+                </a:solidFill>
+                <a:latin typeface="Calibri" pitchFamily="34" charset="0"/>
+                <a:ea typeface="Calibri" pitchFamily="34" charset="-122"/>
+                <a:cs typeface="Calibri" pitchFamily="34" charset="-120"/>
+              </a:rPr>
+              <a:t>LIVE DEMO</a:t>
+            </a:r>
+            <a:endParaRPr lang="en-US" sz="1100" dirty="0"/>
+          </a:p>
+        </p:txBody>
+      </p:sp>
+      <p:sp>
+        <p:nvSpPr>
+          <p:cNvPr id="32" name="Text 30"/>
+          <p:cNvSpPr/>
+          <p:nvPr/>
+        </p:nvSpPr>
+        <p:spPr>
+          <a:xfrm>
+            <a:off x="777240" y="1380744"/>
+            <a:ext cx="10637215" cy="640080"/>
+          </a:xfrm>
+          <a:prstGeom prst="rect">
+            <a:avLst/>
+          </a:prstGeom>
+          <a:noFill/>
+          <a:ln/>
+        </p:spPr>
+        <p:txBody>
+          <a:bodyPr wrap="square" lIns="0" tIns="0" rIns="0" bIns="0" rtlCol="0" anchor="ctr"/>
+          <a:lstStyle/>
+          <a:p>
+            <a:pPr indent="0" marL="0">
+              <a:buNone/>
+            </a:pPr>
+            <a:r>
+              <a:rPr lang="en-US" sz="2300" b="1" dirty="0">
+                <a:solidFill>
+                  <a:srgbClr val="E7F1F4"/>
+                </a:solidFill>
+                <a:latin typeface="Calibri" pitchFamily="34" charset="0"/>
+                <a:ea typeface="Calibri" pitchFamily="34" charset="-122"/>
+                <a:cs typeface="Calibri" pitchFamily="34" charset="-120"/>
+              </a:rPr>
+              <a:t>See it running on AWS</a:t>
+            </a:r>
+            <a:endParaRPr lang="en-US" sz="2300" dirty="0"/>
+          </a:p>
+        </p:txBody>
+      </p:sp>
+      <p:sp>
+        <p:nvSpPr>
+          <p:cNvPr id="33" name="Text 31"/>
+          <p:cNvSpPr/>
+          <p:nvPr/>
+        </p:nvSpPr>
+        <p:spPr>
+          <a:xfrm>
+            <a:off x="777240" y="1901952"/>
+            <a:ext cx="10637215" cy="274320"/>
           </a:xfrm>
           <a:prstGeom prst="rect">
             <a:avLst/>
@@ -2392,48 +4670,9 @@
               <a:buNone/>
             </a:pPr>
             <a:r>
-              <a:rPr lang="en-US" sz="3000" b="1" dirty="0">
+              <a:rPr lang="en-US" sz="1100" dirty="0">
                 <a:solidFill>
-                  <a:srgbClr val="19212C"/>
-                </a:solidFill>
-                <a:latin typeface="Bookman Old Style" pitchFamily="34" charset="0"/>
-                <a:ea typeface="Bookman Old Style" pitchFamily="34" charset="-122"/>
-                <a:cs typeface="Bookman Old Style" pitchFamily="34" charset="-120"/>
-              </a:rPr>
-              <a:t>Live Demo</a:t>
-            </a:r>
-            <a:endParaRPr lang="en-US" sz="3000" dirty="0"/>
-          </a:p>
-        </p:txBody>
-      </p:sp>
-      <p:sp>
-        <p:nvSpPr>
-          <p:cNvPr id="3" name="Text 1"/>
-          <p:cNvSpPr/>
-          <p:nvPr/>
-        </p:nvSpPr>
-        <p:spPr>
-          <a:xfrm>
-            <a:off x="658368" y="1143000"/>
-            <a:ext cx="10972800" cy="365760"/>
-          </a:xfrm>
-          <a:prstGeom prst="rect">
-            <a:avLst/>
-          </a:prstGeom>
-          <a:noFill/>
-          <a:ln/>
-        </p:spPr>
-        <p:txBody>
-          <a:bodyPr wrap="square" rtlCol="0" anchor="ctr"/>
-          <a:lstStyle/>
-          <a:p>
-            <a:pPr indent="0" marL="0">
-              <a:buNone/>
-            </a:pPr>
-            <a:r>
-              <a:rPr lang="en-US" sz="1400" dirty="0">
-                <a:solidFill>
-                  <a:srgbClr val="3E5A7C"/>
+                  <a:srgbClr val="3FB8C4"/>
                 </a:solidFill>
                 <a:latin typeface="Consolas" pitchFamily="34" charset="0"/>
                 <a:ea typeface="Consolas" pitchFamily="34" charset="-122"/>
@@ -2441,106 +4680,47 @@
               </a:rPr>
               <a:t>dce-frontend-373241496019.s3.us-east-1.amazonaws.com</a:t>
             </a:r>
-            <a:endParaRPr lang="en-US" sz="1400" dirty="0"/>
+            <a:endParaRPr lang="en-US" sz="1100" dirty="0"/>
           </a:p>
         </p:txBody>
       </p:sp>
       <p:sp>
         <p:nvSpPr>
-          <p:cNvPr id="4" name="Shape 2"/>
-          <p:cNvSpPr/>
-          <p:nvPr/>
-        </p:nvSpPr>
-        <p:spPr>
-          <a:xfrm>
-            <a:off x="640080" y="1828800"/>
-            <a:ext cx="10881360" cy="1371600"/>
+          <p:cNvPr id="34" name="Shape 32"/>
+          <p:cNvSpPr/>
+          <p:nvPr/>
+        </p:nvSpPr>
+        <p:spPr>
+          <a:xfrm>
+            <a:off x="777240" y="2514600"/>
+            <a:ext cx="3301898" cy="3566160"/>
           </a:xfrm>
           <a:prstGeom prst="roundRect">
             <a:avLst>
-              <a:gd name="adj" fmla="val 6667"/>
+              <a:gd name="adj" fmla="val 1108"/>
             </a:avLst>
           </a:prstGeom>
           <a:solidFill>
-            <a:srgbClr val="EEF2F6"/>
+            <a:srgbClr val="12242C"/>
           </a:solidFill>
-          <a:ln w="15240">
-            <a:solidFill>
-              <a:srgbClr val="3E5A7C"/>
-            </a:solidFill>
-            <a:prstDash val="solid"/>
-          </a:ln>
-        </p:spPr>
-      </p:sp>
-      <p:sp>
-        <p:nvSpPr>
-          <p:cNvPr id="5" name="Shape 3"/>
-          <p:cNvSpPr/>
-          <p:nvPr/>
-        </p:nvSpPr>
-        <p:spPr>
-          <a:xfrm>
-            <a:off x="960120" y="2203704"/>
-            <a:ext cx="621792" cy="621792"/>
-          </a:xfrm>
-          <a:prstGeom prst="ellipse">
-            <a:avLst/>
-          </a:prstGeom>
-          <a:solidFill>
-            <a:srgbClr val="2C3E55"/>
-          </a:solidFill>
-          <a:ln/>
-        </p:spPr>
-      </p:sp>
-      <p:sp>
-        <p:nvSpPr>
-          <p:cNvPr id="6" name="Text 4"/>
-          <p:cNvSpPr/>
-          <p:nvPr/>
-        </p:nvSpPr>
-        <p:spPr>
-          <a:xfrm>
-            <a:off x="960120" y="2203704"/>
-            <a:ext cx="621792" cy="621792"/>
-          </a:xfrm>
-          <a:prstGeom prst="rect">
-            <a:avLst/>
-          </a:prstGeom>
-          <a:noFill/>
-          <a:ln/>
-        </p:spPr>
-        <p:txBody>
-          <a:bodyPr wrap="square" lIns="0" tIns="0" rIns="0" bIns="0" rtlCol="0" anchor="ctr"/>
-          <a:lstStyle/>
-          <a:p>
-            <a:pPr algn="ctr" indent="0" marL="0">
-              <a:buNone/>
-            </a:pPr>
-            <a:r>
-              <a:rPr lang="en-US" sz="2200" b="1" dirty="0">
-                <a:solidFill>
-                  <a:srgbClr val="FFFFFF"/>
-                </a:solidFill>
-                <a:latin typeface="Bookman Old Style" pitchFamily="34" charset="0"/>
-                <a:ea typeface="Bookman Old Style" pitchFamily="34" charset="-122"/>
-                <a:cs typeface="Bookman Old Style" pitchFamily="34" charset="-120"/>
-              </a:rPr>
-              <a:t>1</a:t>
-            </a:r>
-            <a:endParaRPr lang="en-US" sz="2200" dirty="0"/>
-          </a:p>
-        </p:txBody>
-      </p:sp>
-      <p:sp>
-        <p:nvSpPr>
-          <p:cNvPr id="7" name="Text 5"/>
-          <p:cNvSpPr/>
-          <p:nvPr/>
-        </p:nvSpPr>
-        <p:spPr>
-          <a:xfrm>
-            <a:off x="1828800" y="2029968"/>
-            <a:ext cx="9418320" cy="411480"/>
+          <a:ln w="12700">
+            <a:solidFill>
+              <a:srgbClr val="263840"/>
+            </a:solidFill>
+            <a:prstDash val="solid"/>
+          </a:ln>
+        </p:spPr>
+      </p:sp>
+      <p:sp>
+        <p:nvSpPr>
+          <p:cNvPr id="35" name="Text 33"/>
+          <p:cNvSpPr/>
+          <p:nvPr/>
+        </p:nvSpPr>
+        <p:spPr>
+          <a:xfrm>
+            <a:off x="1051560" y="2752344"/>
+            <a:ext cx="1828800" cy="777240"/>
           </a:xfrm>
           <a:prstGeom prst="rect">
             <a:avLst/>
@@ -2556,9 +4736,51 @@
               <a:buNone/>
             </a:pPr>
             <a:r>
-              <a:rPr lang="en-US" sz="1700" b="1" dirty="0">
+              <a:rPr lang="en-US" sz="3800" b="1" dirty="0">
                 <a:solidFill>
-                  <a:srgbClr val="19212C"/>
+                  <a:srgbClr val="3FB8C4"/>
+                </a:solidFill>
+                <a:latin typeface="Calibri" pitchFamily="34" charset="0"/>
+                <a:ea typeface="Calibri" pitchFamily="34" charset="-122"/>
+                <a:cs typeface="Calibri" pitchFamily="34" charset="-120"/>
+              </a:rPr>
+              <a:t>01</a:t>
+            </a:r>
+            <a:endParaRPr lang="en-US" sz="3800" dirty="0"/>
+          </a:p>
+        </p:txBody>
+      </p:sp>
+      <p:sp>
+        <p:nvSpPr>
+          <p:cNvPr id="36" name="Text 34"/>
+          <p:cNvSpPr/>
+          <p:nvPr/>
+        </p:nvSpPr>
+        <p:spPr>
+          <a:xfrm>
+            <a:off x="1069848" y="3566160"/>
+            <a:ext cx="2753258" cy="868680"/>
+          </a:xfrm>
+          <a:prstGeom prst="rect">
+            <a:avLst/>
+          </a:prstGeom>
+          <a:noFill/>
+          <a:ln/>
+        </p:spPr>
+        <p:txBody>
+          <a:bodyPr wrap="square" lIns="0" tIns="0" rIns="0" bIns="0" rtlCol="0" anchor="t"/>
+          <a:lstStyle/>
+          <a:p>
+            <a:pPr indent="0" marL="0">
+              <a:lnSpc>
+                <a:spcPct val="100000"/>
+              </a:lnSpc>
+              <a:buNone/>
+            </a:pPr>
+            <a:r>
+              <a:rPr lang="en-US" sz="1550" b="1" dirty="0">
+                <a:solidFill>
+                  <a:srgbClr val="E7F1F4"/>
                 </a:solidFill>
                 <a:latin typeface="Calibri" pitchFamily="34" charset="0"/>
                 <a:ea typeface="Calibri" pitchFamily="34" charset="-122"/>
@@ -2566,20 +4788,20 @@
               </a:rPr>
               <a:t>Two halls, five environment metrics</a:t>
             </a:r>
-            <a:endParaRPr lang="en-US" sz="1700" dirty="0"/>
+            <a:endParaRPr lang="en-US" sz="1550" dirty="0"/>
           </a:p>
         </p:txBody>
       </p:sp>
       <p:sp>
         <p:nvSpPr>
-          <p:cNvPr id="8" name="Text 6"/>
-          <p:cNvSpPr/>
-          <p:nvPr/>
-        </p:nvSpPr>
-        <p:spPr>
-          <a:xfrm>
-            <a:off x="1828800" y="2450592"/>
-            <a:ext cx="9418320" cy="594360"/>
+          <p:cNvPr id="37" name="Text 35"/>
+          <p:cNvSpPr/>
+          <p:nvPr/>
+        </p:nvSpPr>
+        <p:spPr>
+          <a:xfrm>
+            <a:off x="1069848" y="4434840"/>
+            <a:ext cx="2753258" cy="1463040"/>
           </a:xfrm>
           <a:prstGeom prst="rect">
             <a:avLst/>
@@ -2593,14 +4815,14 @@
           <a:p>
             <a:pPr indent="0" marL="0">
               <a:lnSpc>
-                <a:spcPct val="105000"/>
+                <a:spcPct val="120000"/>
               </a:lnSpc>
               <a:buNone/>
             </a:pPr>
             <a:r>
-              <a:rPr lang="en-US" sz="1300" dirty="0">
+              <a:rPr lang="en-US" sz="1200" dirty="0">
                 <a:solidFill>
-                  <a:srgbClr val="5F6B78"/>
+                  <a:srgbClr val="8B98A6"/>
                 </a:solidFill>
                 <a:latin typeface="Calibri" pitchFamily="34" charset="0"/>
                 <a:ea typeface="Calibri" pitchFamily="34" charset="-122"/>
@@ -2608,106 +4830,47 @@
               </a:rPr>
               <a:t>Temperature, humidity, airflow, and rack conditions live for both server halls, each window checked as it closes.</a:t>
             </a:r>
-            <a:endParaRPr lang="en-US" sz="1300" dirty="0"/>
+            <a:endParaRPr lang="en-US" sz="1200" dirty="0"/>
           </a:p>
         </p:txBody>
       </p:sp>
       <p:sp>
         <p:nvSpPr>
-          <p:cNvPr id="9" name="Shape 7"/>
-          <p:cNvSpPr/>
-          <p:nvPr/>
-        </p:nvSpPr>
-        <p:spPr>
-          <a:xfrm>
-            <a:off x="640080" y="3401568"/>
-            <a:ext cx="5303520" cy="2606040"/>
+          <p:cNvPr id="38" name="Shape 36"/>
+          <p:cNvSpPr/>
+          <p:nvPr/>
+        </p:nvSpPr>
+        <p:spPr>
+          <a:xfrm>
+            <a:off x="4444898" y="2514600"/>
+            <a:ext cx="3301898" cy="3566160"/>
           </a:xfrm>
           <a:prstGeom prst="roundRect">
             <a:avLst>
-              <a:gd name="adj" fmla="val 3509"/>
+              <a:gd name="adj" fmla="val 1108"/>
             </a:avLst>
           </a:prstGeom>
           <a:solidFill>
-            <a:srgbClr val="EEF2F6"/>
+            <a:srgbClr val="12242C"/>
           </a:solidFill>
-          <a:ln w="15240">
-            <a:solidFill>
-              <a:srgbClr val="3E5A7C"/>
-            </a:solidFill>
-            <a:prstDash val="solid"/>
-          </a:ln>
-        </p:spPr>
-      </p:sp>
-      <p:sp>
-        <p:nvSpPr>
-          <p:cNvPr id="10" name="Shape 8"/>
-          <p:cNvSpPr/>
-          <p:nvPr/>
-        </p:nvSpPr>
-        <p:spPr>
-          <a:xfrm>
-            <a:off x="914400" y="3675888"/>
-            <a:ext cx="603504" cy="603504"/>
-          </a:xfrm>
-          <a:prstGeom prst="ellipse">
-            <a:avLst/>
-          </a:prstGeom>
-          <a:solidFill>
-            <a:srgbClr val="2C3E55"/>
-          </a:solidFill>
-          <a:ln/>
-        </p:spPr>
-      </p:sp>
-      <p:sp>
-        <p:nvSpPr>
-          <p:cNvPr id="11" name="Text 9"/>
-          <p:cNvSpPr/>
-          <p:nvPr/>
-        </p:nvSpPr>
-        <p:spPr>
-          <a:xfrm>
-            <a:off x="914400" y="3675888"/>
-            <a:ext cx="603504" cy="603504"/>
-          </a:xfrm>
-          <a:prstGeom prst="rect">
-            <a:avLst/>
-          </a:prstGeom>
-          <a:noFill/>
-          <a:ln/>
-        </p:spPr>
-        <p:txBody>
-          <a:bodyPr wrap="square" lIns="0" tIns="0" rIns="0" bIns="0" rtlCol="0" anchor="ctr"/>
-          <a:lstStyle/>
-          <a:p>
-            <a:pPr algn="ctr" indent="0" marL="0">
-              <a:buNone/>
-            </a:pPr>
-            <a:r>
-              <a:rPr lang="en-US" sz="2200" b="1" dirty="0">
-                <a:solidFill>
-                  <a:srgbClr val="FFFFFF"/>
-                </a:solidFill>
-                <a:latin typeface="Bookman Old Style" pitchFamily="34" charset="0"/>
-                <a:ea typeface="Bookman Old Style" pitchFamily="34" charset="-122"/>
-                <a:cs typeface="Bookman Old Style" pitchFamily="34" charset="-120"/>
-              </a:rPr>
-              <a:t>2</a:t>
-            </a:r>
-            <a:endParaRPr lang="en-US" sz="2200" dirty="0"/>
-          </a:p>
-        </p:txBody>
-      </p:sp>
-      <p:sp>
-        <p:nvSpPr>
-          <p:cNvPr id="12" name="Text 10"/>
-          <p:cNvSpPr/>
-          <p:nvPr/>
-        </p:nvSpPr>
-        <p:spPr>
-          <a:xfrm>
-            <a:off x="914400" y="4425696"/>
-            <a:ext cx="4754880" cy="777240"/>
+          <a:ln w="12700">
+            <a:solidFill>
+              <a:srgbClr val="263840"/>
+            </a:solidFill>
+            <a:prstDash val="solid"/>
+          </a:ln>
+        </p:spPr>
+      </p:sp>
+      <p:sp>
+        <p:nvSpPr>
+          <p:cNvPr id="39" name="Text 37"/>
+          <p:cNvSpPr/>
+          <p:nvPr/>
+        </p:nvSpPr>
+        <p:spPr>
+          <a:xfrm>
+            <a:off x="4719218" y="2752344"/>
+            <a:ext cx="1828800" cy="777240"/>
           </a:xfrm>
           <a:prstGeom prst="rect">
             <a:avLst/>
@@ -2723,9 +4886,51 @@
               <a:buNone/>
             </a:pPr>
             <a:r>
-              <a:rPr lang="en-US" sz="1600" b="1" dirty="0">
+              <a:rPr lang="en-US" sz="3800" b="1" dirty="0">
                 <a:solidFill>
-                  <a:srgbClr val="19212C"/>
+                  <a:srgbClr val="3FB8C4"/>
+                </a:solidFill>
+                <a:latin typeface="Calibri" pitchFamily="34" charset="0"/>
+                <a:ea typeface="Calibri" pitchFamily="34" charset="-122"/>
+                <a:cs typeface="Calibri" pitchFamily="34" charset="-120"/>
+              </a:rPr>
+              <a:t>02</a:t>
+            </a:r>
+            <a:endParaRPr lang="en-US" sz="3800" dirty="0"/>
+          </a:p>
+        </p:txBody>
+      </p:sp>
+      <p:sp>
+        <p:nvSpPr>
+          <p:cNvPr id="40" name="Text 38"/>
+          <p:cNvSpPr/>
+          <p:nvPr/>
+        </p:nvSpPr>
+        <p:spPr>
+          <a:xfrm>
+            <a:off x="4737506" y="3566160"/>
+            <a:ext cx="2753258" cy="868680"/>
+          </a:xfrm>
+          <a:prstGeom prst="rect">
+            <a:avLst/>
+          </a:prstGeom>
+          <a:noFill/>
+          <a:ln/>
+        </p:spPr>
+        <p:txBody>
+          <a:bodyPr wrap="square" lIns="0" tIns="0" rIns="0" bIns="0" rtlCol="0" anchor="t"/>
+          <a:lstStyle/>
+          <a:p>
+            <a:pPr indent="0" marL="0">
+              <a:lnSpc>
+                <a:spcPct val="100000"/>
+              </a:lnSpc>
+              <a:buNone/>
+            </a:pPr>
+            <a:r>
+              <a:rPr lang="en-US" sz="1550" b="1" dirty="0">
+                <a:solidFill>
+                  <a:srgbClr val="E7F1F4"/>
                 </a:solidFill>
                 <a:latin typeface="Calibri" pitchFamily="34" charset="0"/>
                 <a:ea typeface="Calibri" pitchFamily="34" charset="-122"/>
@@ -2733,20 +4938,20 @@
               </a:rPr>
               <a:t>Threshold rules on every closed window</a:t>
             </a:r>
-            <a:endParaRPr lang="en-US" sz="1600" dirty="0"/>
+            <a:endParaRPr lang="en-US" sz="1550" dirty="0"/>
           </a:p>
         </p:txBody>
       </p:sp>
       <p:sp>
         <p:nvSpPr>
-          <p:cNvPr id="13" name="Text 11"/>
-          <p:cNvSpPr/>
-          <p:nvPr/>
-        </p:nvSpPr>
-        <p:spPr>
-          <a:xfrm>
-            <a:off x="914400" y="5184648"/>
-            <a:ext cx="4754880" cy="640080"/>
+          <p:cNvPr id="41" name="Text 39"/>
+          <p:cNvSpPr/>
+          <p:nvPr/>
+        </p:nvSpPr>
+        <p:spPr>
+          <a:xfrm>
+            <a:off x="4737506" y="4434840"/>
+            <a:ext cx="2753258" cy="1463040"/>
           </a:xfrm>
           <a:prstGeom prst="rect">
             <a:avLst/>
@@ -2760,14 +4965,14 @@
           <a:p>
             <a:pPr indent="0" marL="0">
               <a:lnSpc>
-                <a:spcPct val="106000"/>
+                <a:spcPct val="120000"/>
               </a:lnSpc>
               <a:buNone/>
             </a:pPr>
             <a:r>
-              <a:rPr lang="en-US" sz="1250" dirty="0">
+              <a:rPr lang="en-US" sz="1200" dirty="0">
                 <a:solidFill>
-                  <a:srgbClr val="5F6B78"/>
+                  <a:srgbClr val="8B98A6"/>
                 </a:solidFill>
                 <a:latin typeface="Calibri" pitchFamily="34" charset="0"/>
                 <a:ea typeface="Calibri" pitchFamily="34" charset="-122"/>
@@ -2775,106 +4980,47 @@
               </a:rPr>
               <a:t>An overheat above 27 C, condensation-risk humidity above 60%, or airflow below 400 CFM raises the instant that window closes.</a:t>
             </a:r>
-            <a:endParaRPr lang="en-US" sz="1250" dirty="0"/>
+            <a:endParaRPr lang="en-US" sz="1200" dirty="0"/>
           </a:p>
         </p:txBody>
       </p:sp>
       <p:sp>
         <p:nvSpPr>
-          <p:cNvPr id="14" name="Shape 12"/>
-          <p:cNvSpPr/>
-          <p:nvPr/>
-        </p:nvSpPr>
-        <p:spPr>
-          <a:xfrm>
-            <a:off x="6217920" y="3401568"/>
-            <a:ext cx="5303520" cy="2606040"/>
+          <p:cNvPr id="42" name="Shape 40"/>
+          <p:cNvSpPr/>
+          <p:nvPr/>
+        </p:nvSpPr>
+        <p:spPr>
+          <a:xfrm>
+            <a:off x="8112557" y="2514600"/>
+            <a:ext cx="3301898" cy="3566160"/>
           </a:xfrm>
           <a:prstGeom prst="roundRect">
             <a:avLst>
-              <a:gd name="adj" fmla="val 3509"/>
+              <a:gd name="adj" fmla="val 1108"/>
             </a:avLst>
           </a:prstGeom>
           <a:solidFill>
-            <a:srgbClr val="EEF2F6"/>
+            <a:srgbClr val="12242C"/>
           </a:solidFill>
-          <a:ln w="15240">
-            <a:solidFill>
-              <a:srgbClr val="3E5A7C"/>
-            </a:solidFill>
-            <a:prstDash val="solid"/>
-          </a:ln>
-        </p:spPr>
-      </p:sp>
-      <p:sp>
-        <p:nvSpPr>
-          <p:cNvPr id="15" name="Shape 13"/>
-          <p:cNvSpPr/>
-          <p:nvPr/>
-        </p:nvSpPr>
-        <p:spPr>
-          <a:xfrm>
-            <a:off x="6492240" y="3675888"/>
-            <a:ext cx="603504" cy="603504"/>
-          </a:xfrm>
-          <a:prstGeom prst="ellipse">
-            <a:avLst/>
-          </a:prstGeom>
-          <a:solidFill>
-            <a:srgbClr val="2C3E55"/>
-          </a:solidFill>
-          <a:ln/>
-        </p:spPr>
-      </p:sp>
-      <p:sp>
-        <p:nvSpPr>
-          <p:cNvPr id="16" name="Text 14"/>
-          <p:cNvSpPr/>
-          <p:nvPr/>
-        </p:nvSpPr>
-        <p:spPr>
-          <a:xfrm>
-            <a:off x="6492240" y="3675888"/>
-            <a:ext cx="603504" cy="603504"/>
-          </a:xfrm>
-          <a:prstGeom prst="rect">
-            <a:avLst/>
-          </a:prstGeom>
-          <a:noFill/>
-          <a:ln/>
-        </p:spPr>
-        <p:txBody>
-          <a:bodyPr wrap="square" lIns="0" tIns="0" rIns="0" bIns="0" rtlCol="0" anchor="ctr"/>
-          <a:lstStyle/>
-          <a:p>
-            <a:pPr algn="ctr" indent="0" marL="0">
-              <a:buNone/>
-            </a:pPr>
-            <a:r>
-              <a:rPr lang="en-US" sz="2200" b="1" dirty="0">
-                <a:solidFill>
-                  <a:srgbClr val="FFFFFF"/>
-                </a:solidFill>
-                <a:latin typeface="Bookman Old Style" pitchFamily="34" charset="0"/>
-                <a:ea typeface="Bookman Old Style" pitchFamily="34" charset="-122"/>
-                <a:cs typeface="Bookman Old Style" pitchFamily="34" charset="-120"/>
-              </a:rPr>
-              <a:t>3</a:t>
-            </a:r>
-            <a:endParaRPr lang="en-US" sz="2200" dirty="0"/>
-          </a:p>
-        </p:txBody>
-      </p:sp>
-      <p:sp>
-        <p:nvSpPr>
-          <p:cNvPr id="17" name="Text 15"/>
-          <p:cNvSpPr/>
-          <p:nvPr/>
-        </p:nvSpPr>
-        <p:spPr>
-          <a:xfrm>
-            <a:off x="6492240" y="4425696"/>
-            <a:ext cx="4754880" cy="777240"/>
+          <a:ln w="12700">
+            <a:solidFill>
+              <a:srgbClr val="263840"/>
+            </a:solidFill>
+            <a:prstDash val="solid"/>
+          </a:ln>
+        </p:spPr>
+      </p:sp>
+      <p:sp>
+        <p:nvSpPr>
+          <p:cNvPr id="43" name="Text 41"/>
+          <p:cNvSpPr/>
+          <p:nvPr/>
+        </p:nvSpPr>
+        <p:spPr>
+          <a:xfrm>
+            <a:off x="8386877" y="2752344"/>
+            <a:ext cx="1828800" cy="777240"/>
           </a:xfrm>
           <a:prstGeom prst="rect">
             <a:avLst/>
@@ -2890,9 +5036,51 @@
               <a:buNone/>
             </a:pPr>
             <a:r>
-              <a:rPr lang="en-US" sz="1600" b="1" dirty="0">
+              <a:rPr lang="en-US" sz="3800" b="1" dirty="0">
                 <a:solidFill>
-                  <a:srgbClr val="19212C"/>
+                  <a:srgbClr val="3FB8C4"/>
+                </a:solidFill>
+                <a:latin typeface="Calibri" pitchFamily="34" charset="0"/>
+                <a:ea typeface="Calibri" pitchFamily="34" charset="-122"/>
+                <a:cs typeface="Calibri" pitchFamily="34" charset="-120"/>
+              </a:rPr>
+              <a:t>03</a:t>
+            </a:r>
+            <a:endParaRPr lang="en-US" sz="3800" dirty="0"/>
+          </a:p>
+        </p:txBody>
+      </p:sp>
+      <p:sp>
+        <p:nvSpPr>
+          <p:cNvPr id="44" name="Text 42"/>
+          <p:cNvSpPr/>
+          <p:nvPr/>
+        </p:nvSpPr>
+        <p:spPr>
+          <a:xfrm>
+            <a:off x="8405165" y="3566160"/>
+            <a:ext cx="2753258" cy="868680"/>
+          </a:xfrm>
+          <a:prstGeom prst="rect">
+            <a:avLst/>
+          </a:prstGeom>
+          <a:noFill/>
+          <a:ln/>
+        </p:spPr>
+        <p:txBody>
+          <a:bodyPr wrap="square" lIns="0" tIns="0" rIns="0" bIns="0" rtlCol="0" anchor="t"/>
+          <a:lstStyle/>
+          <a:p>
+            <a:pPr indent="0" marL="0">
+              <a:lnSpc>
+                <a:spcPct val="100000"/>
+              </a:lnSpc>
+              <a:buNone/>
+            </a:pPr>
+            <a:r>
+              <a:rPr lang="en-US" sz="1550" b="1" dirty="0">
+                <a:solidFill>
+                  <a:srgbClr val="E7F1F4"/>
                 </a:solidFill>
                 <a:latin typeface="Calibri" pitchFamily="34" charset="0"/>
                 <a:ea typeface="Calibri" pitchFamily="34" charset="-122"/>
@@ -2900,20 +5088,20 @@
               </a:rPr>
               <a:t>Live per-hall readings</a:t>
             </a:r>
-            <a:endParaRPr lang="en-US" sz="1600" dirty="0"/>
+            <a:endParaRPr lang="en-US" sz="1550" dirty="0"/>
           </a:p>
         </p:txBody>
       </p:sp>
       <p:sp>
         <p:nvSpPr>
-          <p:cNvPr id="18" name="Text 16"/>
-          <p:cNvSpPr/>
-          <p:nvPr/>
-        </p:nvSpPr>
-        <p:spPr>
-          <a:xfrm>
-            <a:off x="6492240" y="5184648"/>
-            <a:ext cx="4754880" cy="640080"/>
+          <p:cNvPr id="45" name="Text 43"/>
+          <p:cNvSpPr/>
+          <p:nvPr/>
+        </p:nvSpPr>
+        <p:spPr>
+          <a:xfrm>
+            <a:off x="8405165" y="4434840"/>
+            <a:ext cx="2753258" cy="1463040"/>
           </a:xfrm>
           <a:prstGeom prst="rect">
             <a:avLst/>
@@ -2927,14 +5115,14 @@
           <a:p>
             <a:pPr indent="0" marL="0">
               <a:lnSpc>
-                <a:spcPct val="106000"/>
+                <a:spcPct val="120000"/>
               </a:lnSpc>
               <a:buNone/>
             </a:pPr>
             <a:r>
-              <a:rPr lang="en-US" sz="1250" dirty="0">
+              <a:rPr lang="en-US" sz="1200" dirty="0">
                 <a:solidFill>
-                  <a:srgbClr val="5F6B78"/>
+                  <a:srgbClr val="8B98A6"/>
                 </a:solidFill>
                 <a:latin typeface="Calibri" pitchFamily="34" charset="0"/>
                 <a:ea typeface="Calibri" pitchFamily="34" charset="-122"/>
@@ -2942,7 +5130,7 @@
               </a:rPr>
               <a:t>Both halls report side by side, so an overheating rack or a humidity swing is caught in seconds, not at the next round.</a:t>
             </a:r>
-            <a:endParaRPr lang="en-US" sz="1250" dirty="0"/>
+            <a:endParaRPr lang="en-US" sz="1200" dirty="0"/>
           </a:p>
         </p:txBody>
       </p:sp>
@@ -2960,7 +5148,7 @@
     <p:bg>
       <p:bgPr>
         <a:solidFill>
-          <a:srgbClr val="FFFFFF"/>
+          <a:srgbClr val="0D1B22"/>
         </a:solidFill>
       </p:bgPr>
     </p:bg>
@@ -2980,42 +5168,28 @@
       </p:grpSpPr>
       <p:sp>
         <p:nvSpPr>
-          <p:cNvPr id="2" name="Text 0"/>
-          <p:cNvSpPr/>
-          <p:nvPr/>
-        </p:nvSpPr>
-        <p:spPr>
-          <a:xfrm>
-            <a:off x="640080" y="502920"/>
-            <a:ext cx="10972800" cy="822960"/>
-          </a:xfrm>
-          <a:prstGeom prst="rect">
-            <a:avLst/>
-          </a:prstGeom>
-          <a:noFill/>
-          <a:ln/>
-        </p:spPr>
-        <p:txBody>
-          <a:bodyPr wrap="square" rtlCol="0" anchor="t"/>
-          <a:lstStyle/>
-          <a:p>
-            <a:pPr indent="0" marL="0">
-              <a:buNone/>
-            </a:pPr>
-            <a:r>
-              <a:rPr lang="en-US" sz="2800" b="1" dirty="0">
-                <a:solidFill>
-                  <a:srgbClr val="19212C"/>
-                </a:solidFill>
-                <a:latin typeface="Bookman Old Style" pitchFamily="34" charset="0"/>
-                <a:ea typeface="Bookman Old Style" pitchFamily="34" charset="-122"/>
-                <a:cs typeface="Bookman Old Style" pitchFamily="34" charset="-120"/>
-              </a:rPr>
-              <a:t>Hardest Part — a fault only real AWS revealed</a:t>
-            </a:r>
-            <a:endParaRPr lang="en-US" sz="2800" dirty="0"/>
-          </a:p>
-        </p:txBody>
+          <p:cNvPr id="2" name="Shape 0"/>
+          <p:cNvSpPr/>
+          <p:nvPr/>
+        </p:nvSpPr>
+        <p:spPr>
+          <a:xfrm>
+            <a:off x="685800" y="0"/>
+            <a:ext cx="0" cy="6858000"/>
+          </a:xfrm>
+          <a:prstGeom prst="line">
+            <a:avLst/>
+          </a:prstGeom>
+          <a:noFill/>
+          <a:ln w="6350">
+            <a:solidFill>
+              <a:srgbClr val="3FB8C4">
+                <a:alpha val="18000"/>
+              </a:srgbClr>
+            </a:solidFill>
+            <a:prstDash val="solid"/>
+          </a:ln>
+        </p:spPr>
       </p:sp>
       <p:sp>
         <p:nvSpPr>
@@ -3025,35 +5199,683 @@
         </p:nvSpPr>
         <p:spPr>
           <a:xfrm>
-            <a:off x="731520" y="1920240"/>
-            <a:ext cx="10698480" cy="1965960"/>
-          </a:xfrm>
-          <a:prstGeom prst="roundRect">
-            <a:avLst>
-              <a:gd name="adj" fmla="val 4651"/>
-            </a:avLst>
-          </a:prstGeom>
-          <a:solidFill>
-            <a:srgbClr val="EEF2F6"/>
-          </a:solidFill>
-          <a:ln w="19050">
-            <a:solidFill>
-              <a:srgbClr val="E0A63C"/>
-            </a:solidFill>
-            <a:prstDash val="solid"/>
-          </a:ln>
-        </p:spPr>
-      </p:sp>
-      <p:sp>
-        <p:nvSpPr>
-          <p:cNvPr id="4" name="Text 2"/>
-          <p:cNvSpPr/>
-          <p:nvPr/>
-        </p:nvSpPr>
-        <p:spPr>
-          <a:xfrm>
-            <a:off x="1005840" y="2103120"/>
-            <a:ext cx="3657600" cy="457200"/>
+            <a:off x="1325880" y="0"/>
+            <a:ext cx="0" cy="6858000"/>
+          </a:xfrm>
+          <a:prstGeom prst="line">
+            <a:avLst/>
+          </a:prstGeom>
+          <a:noFill/>
+          <a:ln w="6350">
+            <a:solidFill>
+              <a:srgbClr val="3FB8C4">
+                <a:alpha val="18000"/>
+              </a:srgbClr>
+            </a:solidFill>
+            <a:prstDash val="solid"/>
+          </a:ln>
+        </p:spPr>
+      </p:sp>
+      <p:sp>
+        <p:nvSpPr>
+          <p:cNvPr id="4" name="Shape 2"/>
+          <p:cNvSpPr/>
+          <p:nvPr/>
+        </p:nvSpPr>
+        <p:spPr>
+          <a:xfrm>
+            <a:off x="1965960" y="0"/>
+            <a:ext cx="0" cy="6858000"/>
+          </a:xfrm>
+          <a:prstGeom prst="line">
+            <a:avLst/>
+          </a:prstGeom>
+          <a:noFill/>
+          <a:ln w="6350">
+            <a:solidFill>
+              <a:srgbClr val="3FB8C4">
+                <a:alpha val="18000"/>
+              </a:srgbClr>
+            </a:solidFill>
+            <a:prstDash val="solid"/>
+          </a:ln>
+        </p:spPr>
+      </p:sp>
+      <p:sp>
+        <p:nvSpPr>
+          <p:cNvPr id="5" name="Shape 3"/>
+          <p:cNvSpPr/>
+          <p:nvPr/>
+        </p:nvSpPr>
+        <p:spPr>
+          <a:xfrm>
+            <a:off x="2606040" y="0"/>
+            <a:ext cx="0" cy="6858000"/>
+          </a:xfrm>
+          <a:prstGeom prst="line">
+            <a:avLst/>
+          </a:prstGeom>
+          <a:noFill/>
+          <a:ln w="6350">
+            <a:solidFill>
+              <a:srgbClr val="3FB8C4">
+                <a:alpha val="18000"/>
+              </a:srgbClr>
+            </a:solidFill>
+            <a:prstDash val="solid"/>
+          </a:ln>
+        </p:spPr>
+      </p:sp>
+      <p:sp>
+        <p:nvSpPr>
+          <p:cNvPr id="6" name="Shape 4"/>
+          <p:cNvSpPr/>
+          <p:nvPr/>
+        </p:nvSpPr>
+        <p:spPr>
+          <a:xfrm>
+            <a:off x="3246120" y="0"/>
+            <a:ext cx="0" cy="6858000"/>
+          </a:xfrm>
+          <a:prstGeom prst="line">
+            <a:avLst/>
+          </a:prstGeom>
+          <a:noFill/>
+          <a:ln w="6350">
+            <a:solidFill>
+              <a:srgbClr val="3FB8C4">
+                <a:alpha val="18000"/>
+              </a:srgbClr>
+            </a:solidFill>
+            <a:prstDash val="solid"/>
+          </a:ln>
+        </p:spPr>
+      </p:sp>
+      <p:sp>
+        <p:nvSpPr>
+          <p:cNvPr id="7" name="Shape 5"/>
+          <p:cNvSpPr/>
+          <p:nvPr/>
+        </p:nvSpPr>
+        <p:spPr>
+          <a:xfrm>
+            <a:off x="3886200" y="0"/>
+            <a:ext cx="0" cy="6858000"/>
+          </a:xfrm>
+          <a:prstGeom prst="line">
+            <a:avLst/>
+          </a:prstGeom>
+          <a:noFill/>
+          <a:ln w="6350">
+            <a:solidFill>
+              <a:srgbClr val="3FB8C4">
+                <a:alpha val="18000"/>
+              </a:srgbClr>
+            </a:solidFill>
+            <a:prstDash val="solid"/>
+          </a:ln>
+        </p:spPr>
+      </p:sp>
+      <p:sp>
+        <p:nvSpPr>
+          <p:cNvPr id="8" name="Shape 6"/>
+          <p:cNvSpPr/>
+          <p:nvPr/>
+        </p:nvSpPr>
+        <p:spPr>
+          <a:xfrm>
+            <a:off x="4526280" y="0"/>
+            <a:ext cx="0" cy="6858000"/>
+          </a:xfrm>
+          <a:prstGeom prst="line">
+            <a:avLst/>
+          </a:prstGeom>
+          <a:noFill/>
+          <a:ln w="6350">
+            <a:solidFill>
+              <a:srgbClr val="3FB8C4">
+                <a:alpha val="18000"/>
+              </a:srgbClr>
+            </a:solidFill>
+            <a:prstDash val="solid"/>
+          </a:ln>
+        </p:spPr>
+      </p:sp>
+      <p:sp>
+        <p:nvSpPr>
+          <p:cNvPr id="9" name="Shape 7"/>
+          <p:cNvSpPr/>
+          <p:nvPr/>
+        </p:nvSpPr>
+        <p:spPr>
+          <a:xfrm>
+            <a:off x="5166360" y="0"/>
+            <a:ext cx="0" cy="6858000"/>
+          </a:xfrm>
+          <a:prstGeom prst="line">
+            <a:avLst/>
+          </a:prstGeom>
+          <a:noFill/>
+          <a:ln w="6350">
+            <a:solidFill>
+              <a:srgbClr val="3FB8C4">
+                <a:alpha val="18000"/>
+              </a:srgbClr>
+            </a:solidFill>
+            <a:prstDash val="solid"/>
+          </a:ln>
+        </p:spPr>
+      </p:sp>
+      <p:sp>
+        <p:nvSpPr>
+          <p:cNvPr id="10" name="Shape 8"/>
+          <p:cNvSpPr/>
+          <p:nvPr/>
+        </p:nvSpPr>
+        <p:spPr>
+          <a:xfrm>
+            <a:off x="5806440" y="0"/>
+            <a:ext cx="0" cy="6858000"/>
+          </a:xfrm>
+          <a:prstGeom prst="line">
+            <a:avLst/>
+          </a:prstGeom>
+          <a:noFill/>
+          <a:ln w="6350">
+            <a:solidFill>
+              <a:srgbClr val="3FB8C4">
+                <a:alpha val="18000"/>
+              </a:srgbClr>
+            </a:solidFill>
+            <a:prstDash val="solid"/>
+          </a:ln>
+        </p:spPr>
+      </p:sp>
+      <p:sp>
+        <p:nvSpPr>
+          <p:cNvPr id="11" name="Shape 9"/>
+          <p:cNvSpPr/>
+          <p:nvPr/>
+        </p:nvSpPr>
+        <p:spPr>
+          <a:xfrm>
+            <a:off x="6446520" y="0"/>
+            <a:ext cx="0" cy="6858000"/>
+          </a:xfrm>
+          <a:prstGeom prst="line">
+            <a:avLst/>
+          </a:prstGeom>
+          <a:noFill/>
+          <a:ln w="6350">
+            <a:solidFill>
+              <a:srgbClr val="3FB8C4">
+                <a:alpha val="18000"/>
+              </a:srgbClr>
+            </a:solidFill>
+            <a:prstDash val="solid"/>
+          </a:ln>
+        </p:spPr>
+      </p:sp>
+      <p:sp>
+        <p:nvSpPr>
+          <p:cNvPr id="12" name="Shape 10"/>
+          <p:cNvSpPr/>
+          <p:nvPr/>
+        </p:nvSpPr>
+        <p:spPr>
+          <a:xfrm>
+            <a:off x="7086600" y="0"/>
+            <a:ext cx="0" cy="6858000"/>
+          </a:xfrm>
+          <a:prstGeom prst="line">
+            <a:avLst/>
+          </a:prstGeom>
+          <a:noFill/>
+          <a:ln w="6350">
+            <a:solidFill>
+              <a:srgbClr val="3FB8C4">
+                <a:alpha val="18000"/>
+              </a:srgbClr>
+            </a:solidFill>
+            <a:prstDash val="solid"/>
+          </a:ln>
+        </p:spPr>
+      </p:sp>
+      <p:sp>
+        <p:nvSpPr>
+          <p:cNvPr id="13" name="Shape 11"/>
+          <p:cNvSpPr/>
+          <p:nvPr/>
+        </p:nvSpPr>
+        <p:spPr>
+          <a:xfrm>
+            <a:off x="7726680" y="0"/>
+            <a:ext cx="0" cy="6858000"/>
+          </a:xfrm>
+          <a:prstGeom prst="line">
+            <a:avLst/>
+          </a:prstGeom>
+          <a:noFill/>
+          <a:ln w="6350">
+            <a:solidFill>
+              <a:srgbClr val="3FB8C4">
+                <a:alpha val="18000"/>
+              </a:srgbClr>
+            </a:solidFill>
+            <a:prstDash val="solid"/>
+          </a:ln>
+        </p:spPr>
+      </p:sp>
+      <p:sp>
+        <p:nvSpPr>
+          <p:cNvPr id="14" name="Shape 12"/>
+          <p:cNvSpPr/>
+          <p:nvPr/>
+        </p:nvSpPr>
+        <p:spPr>
+          <a:xfrm>
+            <a:off x="8366760" y="0"/>
+            <a:ext cx="0" cy="6858000"/>
+          </a:xfrm>
+          <a:prstGeom prst="line">
+            <a:avLst/>
+          </a:prstGeom>
+          <a:noFill/>
+          <a:ln w="6350">
+            <a:solidFill>
+              <a:srgbClr val="3FB8C4">
+                <a:alpha val="18000"/>
+              </a:srgbClr>
+            </a:solidFill>
+            <a:prstDash val="solid"/>
+          </a:ln>
+        </p:spPr>
+      </p:sp>
+      <p:sp>
+        <p:nvSpPr>
+          <p:cNvPr id="15" name="Shape 13"/>
+          <p:cNvSpPr/>
+          <p:nvPr/>
+        </p:nvSpPr>
+        <p:spPr>
+          <a:xfrm>
+            <a:off x="9006840" y="0"/>
+            <a:ext cx="0" cy="6858000"/>
+          </a:xfrm>
+          <a:prstGeom prst="line">
+            <a:avLst/>
+          </a:prstGeom>
+          <a:noFill/>
+          <a:ln w="6350">
+            <a:solidFill>
+              <a:srgbClr val="3FB8C4">
+                <a:alpha val="18000"/>
+              </a:srgbClr>
+            </a:solidFill>
+            <a:prstDash val="solid"/>
+          </a:ln>
+        </p:spPr>
+      </p:sp>
+      <p:sp>
+        <p:nvSpPr>
+          <p:cNvPr id="16" name="Shape 14"/>
+          <p:cNvSpPr/>
+          <p:nvPr/>
+        </p:nvSpPr>
+        <p:spPr>
+          <a:xfrm>
+            <a:off x="9646920" y="0"/>
+            <a:ext cx="0" cy="6858000"/>
+          </a:xfrm>
+          <a:prstGeom prst="line">
+            <a:avLst/>
+          </a:prstGeom>
+          <a:noFill/>
+          <a:ln w="6350">
+            <a:solidFill>
+              <a:srgbClr val="3FB8C4">
+                <a:alpha val="18000"/>
+              </a:srgbClr>
+            </a:solidFill>
+            <a:prstDash val="solid"/>
+          </a:ln>
+        </p:spPr>
+      </p:sp>
+      <p:sp>
+        <p:nvSpPr>
+          <p:cNvPr id="17" name="Shape 15"/>
+          <p:cNvSpPr/>
+          <p:nvPr/>
+        </p:nvSpPr>
+        <p:spPr>
+          <a:xfrm>
+            <a:off x="10287000" y="0"/>
+            <a:ext cx="0" cy="6858000"/>
+          </a:xfrm>
+          <a:prstGeom prst="line">
+            <a:avLst/>
+          </a:prstGeom>
+          <a:noFill/>
+          <a:ln w="6350">
+            <a:solidFill>
+              <a:srgbClr val="3FB8C4">
+                <a:alpha val="18000"/>
+              </a:srgbClr>
+            </a:solidFill>
+            <a:prstDash val="solid"/>
+          </a:ln>
+        </p:spPr>
+      </p:sp>
+      <p:sp>
+        <p:nvSpPr>
+          <p:cNvPr id="18" name="Shape 16"/>
+          <p:cNvSpPr/>
+          <p:nvPr/>
+        </p:nvSpPr>
+        <p:spPr>
+          <a:xfrm>
+            <a:off x="10927080" y="0"/>
+            <a:ext cx="0" cy="6858000"/>
+          </a:xfrm>
+          <a:prstGeom prst="line">
+            <a:avLst/>
+          </a:prstGeom>
+          <a:noFill/>
+          <a:ln w="6350">
+            <a:solidFill>
+              <a:srgbClr val="3FB8C4">
+                <a:alpha val="18000"/>
+              </a:srgbClr>
+            </a:solidFill>
+            <a:prstDash val="solid"/>
+          </a:ln>
+        </p:spPr>
+      </p:sp>
+      <p:sp>
+        <p:nvSpPr>
+          <p:cNvPr id="19" name="Shape 17"/>
+          <p:cNvSpPr/>
+          <p:nvPr/>
+        </p:nvSpPr>
+        <p:spPr>
+          <a:xfrm>
+            <a:off x="11567160" y="0"/>
+            <a:ext cx="0" cy="6858000"/>
+          </a:xfrm>
+          <a:prstGeom prst="line">
+            <a:avLst/>
+          </a:prstGeom>
+          <a:noFill/>
+          <a:ln w="6350">
+            <a:solidFill>
+              <a:srgbClr val="3FB8C4">
+                <a:alpha val="18000"/>
+              </a:srgbClr>
+            </a:solidFill>
+            <a:prstDash val="solid"/>
+          </a:ln>
+        </p:spPr>
+      </p:sp>
+      <p:sp>
+        <p:nvSpPr>
+          <p:cNvPr id="20" name="Shape 18"/>
+          <p:cNvSpPr/>
+          <p:nvPr/>
+        </p:nvSpPr>
+        <p:spPr>
+          <a:xfrm>
+            <a:off x="0" y="640080"/>
+            <a:ext cx="12191695" cy="0"/>
+          </a:xfrm>
+          <a:prstGeom prst="line">
+            <a:avLst/>
+          </a:prstGeom>
+          <a:noFill/>
+          <a:ln w="6350">
+            <a:solidFill>
+              <a:srgbClr val="3FB8C4">
+                <a:alpha val="18000"/>
+              </a:srgbClr>
+            </a:solidFill>
+            <a:prstDash val="solid"/>
+          </a:ln>
+        </p:spPr>
+      </p:sp>
+      <p:sp>
+        <p:nvSpPr>
+          <p:cNvPr id="21" name="Shape 19"/>
+          <p:cNvSpPr/>
+          <p:nvPr/>
+        </p:nvSpPr>
+        <p:spPr>
+          <a:xfrm>
+            <a:off x="0" y="1280160"/>
+            <a:ext cx="12191695" cy="0"/>
+          </a:xfrm>
+          <a:prstGeom prst="line">
+            <a:avLst/>
+          </a:prstGeom>
+          <a:noFill/>
+          <a:ln w="6350">
+            <a:solidFill>
+              <a:srgbClr val="3FB8C4">
+                <a:alpha val="18000"/>
+              </a:srgbClr>
+            </a:solidFill>
+            <a:prstDash val="solid"/>
+          </a:ln>
+        </p:spPr>
+      </p:sp>
+      <p:sp>
+        <p:nvSpPr>
+          <p:cNvPr id="22" name="Shape 20"/>
+          <p:cNvSpPr/>
+          <p:nvPr/>
+        </p:nvSpPr>
+        <p:spPr>
+          <a:xfrm>
+            <a:off x="0" y="1920240"/>
+            <a:ext cx="12191695" cy="0"/>
+          </a:xfrm>
+          <a:prstGeom prst="line">
+            <a:avLst/>
+          </a:prstGeom>
+          <a:noFill/>
+          <a:ln w="6350">
+            <a:solidFill>
+              <a:srgbClr val="3FB8C4">
+                <a:alpha val="18000"/>
+              </a:srgbClr>
+            </a:solidFill>
+            <a:prstDash val="solid"/>
+          </a:ln>
+        </p:spPr>
+      </p:sp>
+      <p:sp>
+        <p:nvSpPr>
+          <p:cNvPr id="23" name="Shape 21"/>
+          <p:cNvSpPr/>
+          <p:nvPr/>
+        </p:nvSpPr>
+        <p:spPr>
+          <a:xfrm>
+            <a:off x="0" y="2560320"/>
+            <a:ext cx="12191695" cy="0"/>
+          </a:xfrm>
+          <a:prstGeom prst="line">
+            <a:avLst/>
+          </a:prstGeom>
+          <a:noFill/>
+          <a:ln w="6350">
+            <a:solidFill>
+              <a:srgbClr val="3FB8C4">
+                <a:alpha val="18000"/>
+              </a:srgbClr>
+            </a:solidFill>
+            <a:prstDash val="solid"/>
+          </a:ln>
+        </p:spPr>
+      </p:sp>
+      <p:sp>
+        <p:nvSpPr>
+          <p:cNvPr id="24" name="Shape 22"/>
+          <p:cNvSpPr/>
+          <p:nvPr/>
+        </p:nvSpPr>
+        <p:spPr>
+          <a:xfrm>
+            <a:off x="0" y="3200400"/>
+            <a:ext cx="12191695" cy="0"/>
+          </a:xfrm>
+          <a:prstGeom prst="line">
+            <a:avLst/>
+          </a:prstGeom>
+          <a:noFill/>
+          <a:ln w="6350">
+            <a:solidFill>
+              <a:srgbClr val="3FB8C4">
+                <a:alpha val="18000"/>
+              </a:srgbClr>
+            </a:solidFill>
+            <a:prstDash val="solid"/>
+          </a:ln>
+        </p:spPr>
+      </p:sp>
+      <p:sp>
+        <p:nvSpPr>
+          <p:cNvPr id="25" name="Shape 23"/>
+          <p:cNvSpPr/>
+          <p:nvPr/>
+        </p:nvSpPr>
+        <p:spPr>
+          <a:xfrm>
+            <a:off x="0" y="3840480"/>
+            <a:ext cx="12191695" cy="0"/>
+          </a:xfrm>
+          <a:prstGeom prst="line">
+            <a:avLst/>
+          </a:prstGeom>
+          <a:noFill/>
+          <a:ln w="6350">
+            <a:solidFill>
+              <a:srgbClr val="3FB8C4">
+                <a:alpha val="18000"/>
+              </a:srgbClr>
+            </a:solidFill>
+            <a:prstDash val="solid"/>
+          </a:ln>
+        </p:spPr>
+      </p:sp>
+      <p:sp>
+        <p:nvSpPr>
+          <p:cNvPr id="26" name="Shape 24"/>
+          <p:cNvSpPr/>
+          <p:nvPr/>
+        </p:nvSpPr>
+        <p:spPr>
+          <a:xfrm>
+            <a:off x="0" y="4480560"/>
+            <a:ext cx="12191695" cy="0"/>
+          </a:xfrm>
+          <a:prstGeom prst="line">
+            <a:avLst/>
+          </a:prstGeom>
+          <a:noFill/>
+          <a:ln w="6350">
+            <a:solidFill>
+              <a:srgbClr val="3FB8C4">
+                <a:alpha val="18000"/>
+              </a:srgbClr>
+            </a:solidFill>
+            <a:prstDash val="solid"/>
+          </a:ln>
+        </p:spPr>
+      </p:sp>
+      <p:sp>
+        <p:nvSpPr>
+          <p:cNvPr id="27" name="Shape 25"/>
+          <p:cNvSpPr/>
+          <p:nvPr/>
+        </p:nvSpPr>
+        <p:spPr>
+          <a:xfrm>
+            <a:off x="0" y="5120640"/>
+            <a:ext cx="12191695" cy="0"/>
+          </a:xfrm>
+          <a:prstGeom prst="line">
+            <a:avLst/>
+          </a:prstGeom>
+          <a:noFill/>
+          <a:ln w="6350">
+            <a:solidFill>
+              <a:srgbClr val="3FB8C4">
+                <a:alpha val="18000"/>
+              </a:srgbClr>
+            </a:solidFill>
+            <a:prstDash val="solid"/>
+          </a:ln>
+        </p:spPr>
+      </p:sp>
+      <p:sp>
+        <p:nvSpPr>
+          <p:cNvPr id="28" name="Shape 26"/>
+          <p:cNvSpPr/>
+          <p:nvPr/>
+        </p:nvSpPr>
+        <p:spPr>
+          <a:xfrm>
+            <a:off x="0" y="5760720"/>
+            <a:ext cx="12191695" cy="0"/>
+          </a:xfrm>
+          <a:prstGeom prst="line">
+            <a:avLst/>
+          </a:prstGeom>
+          <a:noFill/>
+          <a:ln w="6350">
+            <a:solidFill>
+              <a:srgbClr val="3FB8C4">
+                <a:alpha val="18000"/>
+              </a:srgbClr>
+            </a:solidFill>
+            <a:prstDash val="solid"/>
+          </a:ln>
+        </p:spPr>
+      </p:sp>
+      <p:sp>
+        <p:nvSpPr>
+          <p:cNvPr id="29" name="Shape 27"/>
+          <p:cNvSpPr/>
+          <p:nvPr/>
+        </p:nvSpPr>
+        <p:spPr>
+          <a:xfrm>
+            <a:off x="0" y="6400800"/>
+            <a:ext cx="12191695" cy="0"/>
+          </a:xfrm>
+          <a:prstGeom prst="line">
+            <a:avLst/>
+          </a:prstGeom>
+          <a:noFill/>
+          <a:ln w="6350">
+            <a:solidFill>
+              <a:srgbClr val="3FB8C4">
+                <a:alpha val="18000"/>
+              </a:srgbClr>
+            </a:solidFill>
+            <a:prstDash val="solid"/>
+          </a:ln>
+        </p:spPr>
+      </p:sp>
+      <p:sp>
+        <p:nvSpPr>
+          <p:cNvPr id="30" name="Text 28"/>
+          <p:cNvSpPr/>
+          <p:nvPr/>
+        </p:nvSpPr>
+        <p:spPr>
+          <a:xfrm>
+            <a:off x="777240" y="731520"/>
+            <a:ext cx="914400" cy="640080"/>
           </a:xfrm>
           <a:prstGeom prst="rect">
             <a:avLst/>
@@ -3069,99 +5891,30 @@
               <a:buNone/>
             </a:pPr>
             <a:r>
-              <a:rPr lang="en-US" sz="1900" b="1" dirty="0">
+              <a:rPr lang="en-US" sz="3000" b="1" dirty="0">
                 <a:solidFill>
-                  <a:srgbClr val="E0A63C"/>
-                </a:solidFill>
-                <a:latin typeface="Bookman Old Style" pitchFamily="34" charset="0"/>
-                <a:ea typeface="Bookman Old Style" pitchFamily="34" charset="-122"/>
-                <a:cs typeface="Bookman Old Style" pitchFamily="34" charset="-120"/>
-              </a:rPr>
-              <a:t>Problem</a:t>
-            </a:r>
-            <a:endParaRPr lang="en-US" sz="1900" dirty="0"/>
-          </a:p>
-        </p:txBody>
-      </p:sp>
-      <p:sp>
-        <p:nvSpPr>
-          <p:cNvPr id="5" name="Text 3"/>
-          <p:cNvSpPr/>
-          <p:nvPr/>
-        </p:nvSpPr>
-        <p:spPr>
-          <a:xfrm>
-            <a:off x="1005840" y="2578608"/>
-            <a:ext cx="9966960" cy="1188720"/>
-          </a:xfrm>
-          <a:prstGeom prst="rect">
-            <a:avLst/>
-          </a:prstGeom>
-          <a:noFill/>
-          <a:ln/>
-        </p:spPr>
-        <p:txBody>
-          <a:bodyPr wrap="square" lIns="0" tIns="0" rIns="0" bIns="0" rtlCol="0" anchor="ctr"/>
-          <a:lstStyle/>
-          <a:p>
-            <a:pPr indent="0" marL="0">
-              <a:lnSpc>
-                <a:spcPct val="105000"/>
-              </a:lnSpc>
-              <a:buNone/>
-            </a:pPr>
-            <a:r>
-              <a:rPr lang="en-US" sz="1300" dirty="0">
-                <a:solidFill>
-                  <a:srgbClr val="19212C"/>
+                  <a:srgbClr val="3FB8C4"/>
                 </a:solidFill>
                 <a:latin typeface="Calibri" pitchFamily="34" charset="0"/>
                 <a:ea typeface="Calibri" pitchFamily="34" charset="-122"/>
                 <a:cs typeface="Calibri" pitchFamily="34" charset="-120"/>
               </a:rPr>
-              <a:t>Whenever the AWS access-key environment variable existed, three files swapped in hardcoded emulator credentials — and real Lambda and EC2 inject that exact variable automatically. So genuine session credentials were thrown away and every DynamoDB and SQS call would have failed authentication. Locally the condition happened to be correct, so all 114 tests and the LocalStack run passed; the emulator cannot reproduce the trigger at all.</a:t>
+              <a:t>03</a:t>
             </a:r>
-            <a:endParaRPr lang="en-US" sz="1300" dirty="0"/>
+            <a:endParaRPr lang="en-US" sz="3000" dirty="0"/>
           </a:p>
         </p:txBody>
       </p:sp>
       <p:sp>
         <p:nvSpPr>
-          <p:cNvPr id="6" name="Shape 4"/>
-          <p:cNvSpPr/>
-          <p:nvPr/>
-        </p:nvSpPr>
-        <p:spPr>
-          <a:xfrm>
-            <a:off x="731520" y="4041648"/>
-            <a:ext cx="10698480" cy="1965960"/>
-          </a:xfrm>
-          <a:prstGeom prst="roundRect">
-            <a:avLst>
-              <a:gd name="adj" fmla="val 4651"/>
-            </a:avLst>
-          </a:prstGeom>
-          <a:solidFill>
-            <a:srgbClr val="EEF2F6"/>
-          </a:solidFill>
-          <a:ln w="19050">
-            <a:solidFill>
-              <a:srgbClr val="3E5A7C"/>
-            </a:solidFill>
-            <a:prstDash val="solid"/>
-          </a:ln>
-        </p:spPr>
-      </p:sp>
-      <p:sp>
-        <p:nvSpPr>
-          <p:cNvPr id="7" name="Text 5"/>
-          <p:cNvSpPr/>
-          <p:nvPr/>
-        </p:nvSpPr>
-        <p:spPr>
-          <a:xfrm>
-            <a:off x="1005840" y="4224528"/>
-            <a:ext cx="3657600" cy="457200"/>
+          <p:cNvPr id="31" name="Text 29"/>
+          <p:cNvSpPr/>
+          <p:nvPr/>
+        </p:nvSpPr>
+        <p:spPr>
+          <a:xfrm>
+            <a:off x="1645920" y="905256"/>
+            <a:ext cx="9768535" cy="274320"/>
           </a:xfrm>
           <a:prstGeom prst="rect">
             <a:avLst/>
@@ -3177,30 +5930,30 @@
               <a:buNone/>
             </a:pPr>
             <a:r>
-              <a:rPr lang="en-US" sz="1900" b="1" dirty="0">
+              <a:rPr lang="en-US" sz="1100" b="1" spc="200" kern="0" dirty="0">
                 <a:solidFill>
-                  <a:srgbClr val="3E5A7C"/>
+                  <a:srgbClr val="8B98A6"/>
                 </a:solidFill>
-                <a:latin typeface="Bookman Old Style" pitchFamily="34" charset="0"/>
-                <a:ea typeface="Bookman Old Style" pitchFamily="34" charset="-122"/>
-                <a:cs typeface="Bookman Old Style" pitchFamily="34" charset="-120"/>
+                <a:latin typeface="Calibri" pitchFamily="34" charset="0"/>
+                <a:ea typeface="Calibri" pitchFamily="34" charset="-122"/>
+                <a:cs typeface="Calibri" pitchFamily="34" charset="-120"/>
               </a:rPr>
-              <a:t>Solution</a:t>
+              <a:t>CHALLENGE</a:t>
             </a:r>
-            <a:endParaRPr lang="en-US" sz="1900" dirty="0"/>
+            <a:endParaRPr lang="en-US" sz="1100" dirty="0"/>
           </a:p>
         </p:txBody>
       </p:sp>
       <p:sp>
         <p:nvSpPr>
-          <p:cNvPr id="8" name="Text 6"/>
-          <p:cNvSpPr/>
-          <p:nvPr/>
-        </p:nvSpPr>
-        <p:spPr>
-          <a:xfrm>
-            <a:off x="1005840" y="4700016"/>
-            <a:ext cx="9966960" cy="1188720"/>
+          <p:cNvPr id="32" name="Text 30"/>
+          <p:cNvSpPr/>
+          <p:nvPr/>
+        </p:nvSpPr>
+        <p:spPr>
+          <a:xfrm>
+            <a:off x="777240" y="1380744"/>
+            <a:ext cx="10637215" cy="640080"/>
           </a:xfrm>
           <a:prstGeom prst="rect">
             <a:avLst/>
@@ -3213,23 +5966,282 @@
           <a:lstStyle/>
           <a:p>
             <a:pPr indent="0" marL="0">
-              <a:lnSpc>
-                <a:spcPct val="105000"/>
-              </a:lnSpc>
               <a:buNone/>
             </a:pPr>
             <a:r>
-              <a:rPr lang="en-US" sz="1300" dirty="0">
+              <a:rPr lang="en-US" sz="2300" b="1" dirty="0">
                 <a:solidFill>
-                  <a:srgbClr val="19212C"/>
+                  <a:srgbClr val="E7F1F4"/>
                 </a:solidFill>
                 <a:latin typeface="Calibri" pitchFamily="34" charset="0"/>
                 <a:ea typeface="Calibri" pitchFamily="34" charset="-122"/>
                 <a:cs typeface="Calibri" pitchFamily="34" charset="-120"/>
               </a:rPr>
-              <a:t>Gate the emulator credentials on a signal unique to local development — the explicit LocalStack endpoint override — applied across all three files, each with its own code shape, then redeployed and verified live with an end-to-end DynamoDB write and SQS receive. The same real-cloud testing also caught a pagination undercount, fixed with two new tests.</a:t>
+              <a:t>a second backend the brief demanded</a:t>
             </a:r>
-            <a:endParaRPr lang="en-US" sz="1300" dirty="0"/>
+            <a:endParaRPr lang="en-US" sz="2300" dirty="0"/>
+          </a:p>
+        </p:txBody>
+      </p:sp>
+      <p:sp>
+        <p:nvSpPr>
+          <p:cNvPr id="33" name="Shape 31"/>
+          <p:cNvSpPr/>
+          <p:nvPr/>
+        </p:nvSpPr>
+        <p:spPr>
+          <a:xfrm>
+            <a:off x="777240" y="2423160"/>
+            <a:ext cx="5090008" cy="3657600"/>
+          </a:xfrm>
+          <a:prstGeom prst="roundRect">
+            <a:avLst>
+              <a:gd name="adj" fmla="val 1000"/>
+            </a:avLst>
+          </a:prstGeom>
+          <a:solidFill>
+            <a:srgbClr val="12242C"/>
+          </a:solidFill>
+          <a:ln w="12700">
+            <a:solidFill>
+              <a:srgbClr val="263840"/>
+            </a:solidFill>
+            <a:prstDash val="solid"/>
+          </a:ln>
+        </p:spPr>
+      </p:sp>
+      <p:sp>
+        <p:nvSpPr>
+          <p:cNvPr id="34" name="Text 32"/>
+          <p:cNvSpPr/>
+          <p:nvPr/>
+        </p:nvSpPr>
+        <p:spPr>
+          <a:xfrm>
+            <a:off x="1097280" y="2697480"/>
+            <a:ext cx="4449928" cy="320040"/>
+          </a:xfrm>
+          <a:prstGeom prst="rect">
+            <a:avLst/>
+          </a:prstGeom>
+          <a:noFill/>
+          <a:ln/>
+        </p:spPr>
+        <p:txBody>
+          <a:bodyPr wrap="square" lIns="0" tIns="0" rIns="0" bIns="0" rtlCol="0" anchor="ctr"/>
+          <a:lstStyle/>
+          <a:p>
+            <a:pPr indent="0" marL="0">
+              <a:buNone/>
+            </a:pPr>
+            <a:r>
+              <a:rPr lang="en-US" sz="1200" b="1" spc="200" kern="0" dirty="0">
+                <a:solidFill>
+                  <a:srgbClr val="D1584E"/>
+                </a:solidFill>
+                <a:latin typeface="Calibri" pitchFamily="34" charset="0"/>
+                <a:ea typeface="Calibri" pitchFamily="34" charset="-122"/>
+                <a:cs typeface="Calibri" pitchFamily="34" charset="-120"/>
+              </a:rPr>
+              <a:t>PROBLEM</a:t>
+            </a:r>
+            <a:endParaRPr lang="en-US" sz="1200" dirty="0"/>
+          </a:p>
+        </p:txBody>
+      </p:sp>
+      <p:sp>
+        <p:nvSpPr>
+          <p:cNvPr id="35" name="Shape 33"/>
+          <p:cNvSpPr/>
+          <p:nvPr/>
+        </p:nvSpPr>
+        <p:spPr>
+          <a:xfrm>
+            <a:off x="1097280" y="3081528"/>
+            <a:ext cx="4449928" cy="0"/>
+          </a:xfrm>
+          <a:prstGeom prst="line">
+            <a:avLst/>
+          </a:prstGeom>
+          <a:noFill/>
+          <a:ln w="19050">
+            <a:solidFill>
+              <a:srgbClr val="D1584E"/>
+            </a:solidFill>
+            <a:prstDash val="solid"/>
+          </a:ln>
+        </p:spPr>
+      </p:sp>
+      <p:sp>
+        <p:nvSpPr>
+          <p:cNvPr id="36" name="Text 34"/>
+          <p:cNvSpPr/>
+          <p:nvPr/>
+        </p:nvSpPr>
+        <p:spPr>
+          <a:xfrm>
+            <a:off x="1097280" y="3246120"/>
+            <a:ext cx="4449928" cy="2651760"/>
+          </a:xfrm>
+          <a:prstGeom prst="rect">
+            <a:avLst/>
+          </a:prstGeom>
+          <a:noFill/>
+          <a:ln/>
+        </p:spPr>
+        <p:txBody>
+          <a:bodyPr wrap="square" lIns="0" tIns="0" rIns="0" bIns="0" rtlCol="0" anchor="t"/>
+          <a:lstStyle/>
+          <a:p>
+            <a:pPr indent="0" marL="0">
+              <a:lnSpc>
+                <a:spcPct val="128000"/>
+              </a:lnSpc>
+              <a:buNone/>
+            </a:pPr>
+            <a:r>
+              <a:rPr lang="en-US" sz="1350" dirty="0">
+                <a:solidFill>
+                  <a:srgbClr val="E7F1F4"/>
+                </a:solidFill>
+                <a:latin typeface="Calibri" pitchFamily="34" charset="0"/>
+                <a:ea typeface="Calibri" pitchFamily="34" charset="-122"/>
+                <a:cs typeface="Calibri" pitchFamily="34" charset="-120"/>
+              </a:rPr>
+              <a:t>The coursework required an individually-deployed backend function behind a real API Gateway, separate from the ingestion function — not a single monolith. That meant the read path and the write path had to be split into two independently deployed functions that still agreed on one table schema and one set of thresholds.</a:t>
+            </a:r>
+            <a:endParaRPr lang="en-US" sz="1350" dirty="0"/>
+          </a:p>
+        </p:txBody>
+      </p:sp>
+      <p:sp>
+        <p:nvSpPr>
+          <p:cNvPr id="37" name="Shape 35"/>
+          <p:cNvSpPr/>
+          <p:nvPr/>
+        </p:nvSpPr>
+        <p:spPr>
+          <a:xfrm>
+            <a:off x="6324448" y="2423160"/>
+            <a:ext cx="5090008" cy="3657600"/>
+          </a:xfrm>
+          <a:prstGeom prst="roundRect">
+            <a:avLst>
+              <a:gd name="adj" fmla="val 1000"/>
+            </a:avLst>
+          </a:prstGeom>
+          <a:solidFill>
+            <a:srgbClr val="12242C"/>
+          </a:solidFill>
+          <a:ln w="12700">
+            <a:solidFill>
+              <a:srgbClr val="263840"/>
+            </a:solidFill>
+            <a:prstDash val="solid"/>
+          </a:ln>
+        </p:spPr>
+      </p:sp>
+      <p:sp>
+        <p:nvSpPr>
+          <p:cNvPr id="38" name="Text 36"/>
+          <p:cNvSpPr/>
+          <p:nvPr/>
+        </p:nvSpPr>
+        <p:spPr>
+          <a:xfrm>
+            <a:off x="6644488" y="2697480"/>
+            <a:ext cx="4449928" cy="320040"/>
+          </a:xfrm>
+          <a:prstGeom prst="rect">
+            <a:avLst/>
+          </a:prstGeom>
+          <a:noFill/>
+          <a:ln/>
+        </p:spPr>
+        <p:txBody>
+          <a:bodyPr wrap="square" lIns="0" tIns="0" rIns="0" bIns="0" rtlCol="0" anchor="ctr"/>
+          <a:lstStyle/>
+          <a:p>
+            <a:pPr indent="0" marL="0">
+              <a:buNone/>
+            </a:pPr>
+            <a:r>
+              <a:rPr lang="en-US" sz="1200" b="1" spc="200" kern="0" dirty="0">
+                <a:solidFill>
+                  <a:srgbClr val="4FBF8A"/>
+                </a:solidFill>
+                <a:latin typeface="Calibri" pitchFamily="34" charset="0"/>
+                <a:ea typeface="Calibri" pitchFamily="34" charset="-122"/>
+                <a:cs typeface="Calibri" pitchFamily="34" charset="-120"/>
+              </a:rPr>
+              <a:t>SOLUTION</a:t>
+            </a:r>
+            <a:endParaRPr lang="en-US" sz="1200" dirty="0"/>
+          </a:p>
+        </p:txBody>
+      </p:sp>
+      <p:sp>
+        <p:nvSpPr>
+          <p:cNvPr id="39" name="Shape 37"/>
+          <p:cNvSpPr/>
+          <p:nvPr/>
+        </p:nvSpPr>
+        <p:spPr>
+          <a:xfrm>
+            <a:off x="6644488" y="3081528"/>
+            <a:ext cx="4449928" cy="0"/>
+          </a:xfrm>
+          <a:prstGeom prst="line">
+            <a:avLst/>
+          </a:prstGeom>
+          <a:noFill/>
+          <a:ln w="19050">
+            <a:solidFill>
+              <a:srgbClr val="4FBF8A"/>
+            </a:solidFill>
+            <a:prstDash val="solid"/>
+          </a:ln>
+        </p:spPr>
+      </p:sp>
+      <p:sp>
+        <p:nvSpPr>
+          <p:cNvPr id="40" name="Text 38"/>
+          <p:cNvSpPr/>
+          <p:nvPr/>
+        </p:nvSpPr>
+        <p:spPr>
+          <a:xfrm>
+            <a:off x="6644488" y="3246120"/>
+            <a:ext cx="4449928" cy="2651760"/>
+          </a:xfrm>
+          <a:prstGeom prst="rect">
+            <a:avLst/>
+          </a:prstGeom>
+          <a:noFill/>
+          <a:ln/>
+        </p:spPr>
+        <p:txBody>
+          <a:bodyPr wrap="square" lIns="0" tIns="0" rIns="0" bIns="0" rtlCol="0" anchor="t"/>
+          <a:lstStyle/>
+          <a:p>
+            <a:pPr indent="0" marL="0">
+              <a:lnSpc>
+                <a:spcPct val="128000"/>
+              </a:lnSpc>
+              <a:buNone/>
+            </a:pPr>
+            <a:r>
+              <a:rPr lang="en-US" sz="1350" dirty="0">
+                <a:solidFill>
+                  <a:srgbClr val="E7F1F4"/>
+                </a:solidFill>
+                <a:latin typeface="Calibri" pitchFamily="34" charset="0"/>
+                <a:ea typeface="Calibri" pitchFamily="34" charset="-122"/>
+                <a:cs typeface="Calibri" pitchFamily="34" charset="-120"/>
+              </a:rPr>
+              <a:t>A dedicated dashboard-API function sits behind its own API Gateway stage, reading the store, the queue depth, the processor metadata and the fog health, while the queue-triggered processor owns the write path. The two share only the table and the threshold definitions, so each scales and deploys on its own without the dashboard ever touching the ingestion code.</a:t>
+            </a:r>
+            <a:endParaRPr lang="en-US" sz="1350" dirty="0"/>
           </a:p>
         </p:txBody>
       </p:sp>
